--- a/presentation/capstone_walkthrough.pptx
+++ b/presentation/capstone_walkthrough.pptx
@@ -3364,7 +3364,7 @@
           <a:p/>
           <a:p>
             <a:r>
-              <a:t>On the method side: mini matches my labels on about two-thirds of posts, and two humans only agree at kappa 0.57; the hybrid's 0.680 is optimistic; the 2,606 corpus reassignments aren't human-checked; and a multi-brand post gives its one sentiment to every brand it names.</a:t>
+              <a:t>On the method side: mini matches my labels on about two-thirds of posts, and two humans only agree at kappa 0.38; the hybrid's 0.680 is optimistic; the 2,606 corpus reassignments aren't human-checked; and a multi-brand post gives its one sentiment to every brand it names.</a:t>
             </a:r>
           </a:p>
         </p:txBody>
@@ -3751,12 +3751,12 @@
           </a:p>
           <a:p>
             <a:r>
-              <a:t>A: Headline metrics use one annotator. Two annotators agree at κ 0.57 on representative posts. Challenge agreement (0.76) is unusually high, so I’m confirming it was independent.</a:t>
-            </a:r>
-          </a:p>
-          <a:p>
-            <a:r>
-              <a:t>Per-label issue κ on the representative overlap is low for Devices (0.14) and Customer Service (0.18). On the challenge overlap 21 of 40 rows are identical on every field, and four notes match word for word.</a:t>
+              <a:t>A: Headline metrics use one annotator. Two annotators agree at κ 0.38 on typical posts, mostly on whether “Singtel is down” is a complaint or a fact. I’ve added that rule to the guide.</a:t>
+            </a:r>
+          </a:p>
+          <a:p>
+            <a:r>
+              <a:t>Per-label issue κ on the representative overlap is low for Devices (0.14) and Customer Service (0.18). On the challenge overlap 18 of 40 rows are identical on every field, and four notes match word for word. An earlier version of B's sheet was superseded: its labels contradicted B's own notes.</a:t>
             </a:r>
           </a:p>
         </p:txBody>
@@ -4025,7 +4025,13 @@
           <a:lstStyle/>
           <a:p>
             <a:r>
-              <a:t>These are preliminary numbers from the 100 overlap posts, computed per set as the project rules require. Representative sentiment kappa is 0.57, moderate; challenge is 0.76. The per-label issue kappas show that humans also disagree on Devices and Customer Service, which caps how well any model can score on them. The challenge set's near-perfect issue agreement is unusual for hard cases, so I'm confirming the second annotator worked independently before I report it.</a:t>
+              <a:t>Inter-annotator agreement on the 100 overlap posts, per set. Representative sentiment kappa is 0.38, fair at best; challenge is 0.63. Most disagreements are one pattern: posts I labelled not happy that the second annotator labelled neutral, like 'Ya Singtel is down', questions about compensation, or troubleshooting tips. My guide listed 'service failure' as not happy and 'factual statement' as neutral, but never said which wins when a post is both. So it's a guide gap, and it matters: GPT-4o-mini reads those posts the way I do, so part of its margin over VADER depends on that rule. I've now added it to the guide.</a:t>
+            </a:r>
+          </a:p>
+          <a:p/>
+          <a:p>
+            <a:r>
+              <a:t>Two cautions. An earlier version of the second annotator's sheet is superseded, because its labels contradicted their own notes and matched mine. And on the challenge rows 18 of 40 still match me on every field, so I don't rely on the 0.63 until I've confirmed they worked independently.</a:t>
             </a:r>
           </a:p>
         </p:txBody>
@@ -18805,7 +18811,7 @@
                 </a:solidFill>
                 <a:latin typeface="Calibri"/>
               </a:rPr>
-              <a:t>Mini matches humans on ~2/3 of posts; humans agree at κ 0.57</a:t>
+              <a:t>Mini matches humans on ~2/3 of posts; humans agree at κ 0.38</a:t>
             </a:r>
           </a:p>
           <a:p>
@@ -20900,7 +20906,7 @@
                 </a:solidFill>
                 <a:latin typeface="Calibri"/>
               </a:rPr>
-              <a:t>Headline metrics use one annotator. Two annotators agree at κ 0.57 on representative posts. Challenge agreement (0.76) is unusually high, so I’m confirming it was independent.</a:t>
+              <a:t>Headline metrics use one annotator. Two annotators agree at κ 0.38 on typical posts, mostly on whether “Singtel is down” is a complaint or a fact. I’ve added that rule to the guide.</a:t>
             </a:r>
           </a:p>
         </p:txBody>
@@ -21897,7 +21903,7 @@
                 </a:solidFill>
                 <a:latin typeface="Calibri"/>
               </a:rPr>
-              <a:t>Backup: inter-annotator agreement (preliminary)</a:t>
+              <a:t>Backup: two humans disagree on outage reports</a:t>
             </a:r>
           </a:p>
         </p:txBody>
@@ -22143,7 +22149,7 @@
                           </a:solidFill>
                           <a:latin typeface="Calibri"/>
                         </a:rPr>
-                        <a:t>74%</a:t>
+                        <a:t>60%</a:t>
                       </a:r>
                     </a:p>
                   </a:txBody>
@@ -22166,7 +22172,7 @@
                           </a:solidFill>
                           <a:latin typeface="Calibri"/>
                         </a:rPr>
-                        <a:t>0.57</a:t>
+                        <a:t>0.38</a:t>
                       </a:r>
                     </a:p>
                   </a:txBody>
@@ -22260,7 +22266,7 @@
                           </a:solidFill>
                           <a:latin typeface="Calibri"/>
                         </a:rPr>
-                        <a:t>85%</a:t>
+                        <a:t>75%</a:t>
                       </a:r>
                     </a:p>
                   </a:txBody>
@@ -22283,7 +22289,7 @@
                           </a:solidFill>
                           <a:latin typeface="Calibri"/>
                         </a:rPr>
-                        <a:t>0.76</a:t>
+                        <a:t>0.63</a:t>
                       </a:r>
                     </a:p>
                   </a:txBody>
@@ -22330,7 +22336,7 @@
         <p:spPr>
           <a:xfrm>
             <a:off x="548640" y="3703320"/>
-            <a:ext cx="5394960" cy="1737360"/>
+            <a:ext cx="5394960" cy="2011680"/>
           </a:xfrm>
           <a:prstGeom prst="roundRect">
             <a:avLst>
@@ -22401,7 +22407,7 @@
                 </a:solidFill>
                 <a:latin typeface="Calibri"/>
               </a:rPr>
-              <a:t>Low human ceiling</a:t>
+              <a:t>One rule explains most of it</a:t>
             </a:r>
           </a:p>
         </p:txBody>
@@ -22415,7 +22421,7 @@
         <p:spPr>
           <a:xfrm>
             <a:off x="777240" y="4270248"/>
-            <a:ext cx="4937760" cy="1005839"/>
+            <a:ext cx="4937760" cy="1280160"/>
           </a:xfrm>
           <a:prstGeom prst="rect">
             <a:avLst/>
@@ -22440,7 +22446,7 @@
                 </a:solidFill>
                 <a:latin typeface="Calibri"/>
               </a:rPr>
-              <a:t>Issue κ on the representative overlap: Devices 0.14, Customer Service 0.18. Humans disagree on these labels too.</a:t>
+              <a:t>12 of 23 representative disagreements (8 of 10 on challenge): I said not happy, B said neutral, on bare outage reports and questions.</a:t>
             </a:r>
           </a:p>
         </p:txBody>
@@ -22454,7 +22460,7 @@
         <p:spPr>
           <a:xfrm>
             <a:off x="6245352" y="3703320"/>
-            <a:ext cx="5394960" cy="1737360"/>
+            <a:ext cx="5394960" cy="2011680"/>
           </a:xfrm>
           <a:prstGeom prst="roundRect">
             <a:avLst>
@@ -22525,7 +22531,7 @@
                 </a:solidFill>
                 <a:latin typeface="Calibri"/>
               </a:rPr>
-              <a:t>Check before reporting</a:t>
+              <a:t>Fixed, then check</a:t>
             </a:r>
           </a:p>
         </p:txBody>
@@ -22539,7 +22545,7 @@
         <p:spPr>
           <a:xfrm>
             <a:off x="6473952" y="4270248"/>
-            <a:ext cx="4937760" cy="1005839"/>
+            <a:ext cx="4937760" cy="1280160"/>
           </a:xfrm>
           <a:prstGeom prst="rect">
             <a:avLst/>
@@ -22564,7 +22570,7 @@
                 </a:solidFill>
                 <a:latin typeface="Calibri"/>
               </a:rPr>
-              <a:t>Challenge agreement is higher than representative, unusual for hard cases. Confirm the second annotator labelled independently.</a:t>
+              <a:t>Guide now says a first-hand failure report is not happy. Next: relabel the overlap and confirm B's independence (18/40 identical).</a:t>
             </a:r>
           </a:p>
         </p:txBody>

--- a/presentation/capstone_walkthrough.pptx
+++ b/presentation/capstone_walkthrough.pptx
@@ -43,6 +43,7 @@
     <p:sldId id="288" r:id="rId39"/>
     <p:sldId id="289" r:id="rId40"/>
     <p:sldId id="290" r:id="rId41"/>
+    <p:sldId id="291" r:id="rId42"/>
   </p:sldIdLst>
   <p:sldSz cx="12192000" cy="6858000"/>
   <p:notesSz cx="6858000" cy="9144000"/>
@@ -829,6 +830,251 @@
     <c:autoTitleDeleted val="1"/>
     <c:plotArea>
       <c:barChart>
+        <c:barDir val="col"/>
+        <c:grouping val="clustered"/>
+        <c:ser>
+          <c:idx val="0"/>
+          <c:order val="0"/>
+          <c:tx>
+            <c:strRef>
+              <c:f>Sheet1!$B$1</c:f>
+              <c:strCache>
+                <c:ptCount val="1"/>
+                <c:pt idx="0">
+                  <c:v>Value</c:v>
+                </c:pt>
+              </c:strCache>
+            </c:strRef>
+          </c:tx>
+          <c:dPt>
+            <c:idx val="0"/>
+            <c:spPr>
+              <a:solidFill>
+                <a:srgbClr val="A3AAB8"/>
+              </a:solidFill>
+            </c:spPr>
+          </c:dPt>
+          <c:dPt>
+            <c:idx val="1"/>
+            <c:spPr>
+              <a:solidFill>
+                <a:srgbClr val="D29B08"/>
+              </a:solidFill>
+            </c:spPr>
+          </c:dPt>
+          <c:dPt>
+            <c:idx val="2"/>
+            <c:spPr>
+              <a:solidFill>
+                <a:srgbClr val="A3AAB8"/>
+              </a:solidFill>
+            </c:spPr>
+          </c:dPt>
+          <c:dPt>
+            <c:idx val="3"/>
+            <c:spPr>
+              <a:solidFill>
+                <a:srgbClr val="A3AAB8"/>
+              </a:solidFill>
+            </c:spPr>
+          </c:dPt>
+          <c:dPt>
+            <c:idx val="4"/>
+            <c:spPr>
+              <a:solidFill>
+                <a:srgbClr val="1C2E6E"/>
+              </a:solidFill>
+            </c:spPr>
+          </c:dPt>
+          <c:cat>
+            <c:strRef>
+              <c:f>Sheet1!$A$2:$A$6</c:f>
+              <c:strCache>
+                <c:ptCount val="5"/>
+                <c:pt idx="0">
+                  <c:v>Sentiment
+VADER</c:v>
+                </c:pt>
+                <c:pt idx="1">
+                  <c:v>Sentiment
+GPT-4o-mini</c:v>
+                </c:pt>
+                <c:pt idx="2">
+                  <c:v>Issues
+rules</c:v>
+                </c:pt>
+                <c:pt idx="3">
+                  <c:v>Issues
+GPT-4o-mini</c:v>
+                </c:pt>
+                <c:pt idx="4">
+                  <c:v>Issues
+hybrid</c:v>
+                </c:pt>
+              </c:strCache>
+            </c:strRef>
+          </c:cat>
+          <c:val>
+            <c:numRef>
+              <c:f>Sheet1!$B$2:$B$6</c:f>
+              <c:numCache>
+                <c:formatCode>General</c:formatCode>
+                <c:ptCount val="5"/>
+                <c:pt idx="0">
+                  <c:v>0.428</c:v>
+                </c:pt>
+                <c:pt idx="1">
+                  <c:v>0.637</c:v>
+                </c:pt>
+                <c:pt idx="2">
+                  <c:v>0.413</c:v>
+                </c:pt>
+                <c:pt idx="3">
+                  <c:v>0.44</c:v>
+                </c:pt>
+                <c:pt idx="4">
+                  <c:v>0.477</c:v>
+                </c:pt>
+              </c:numCache>
+            </c:numRef>
+          </c:val>
+        </c:ser>
+        <c:dLbls>
+          <c:numFmt formatCode="0.000" sourceLinked="0"/>
+          <c:txPr>
+            <a:bodyPr/>
+            <a:lstStyle/>
+            <a:p>
+              <a:pPr>
+                <a:defRPr sz="1400" b="1">
+                  <a:solidFill>
+                    <a:srgbClr val="1E293B"/>
+                  </a:solidFill>
+                  <a:latin typeface="Calibri"/>
+                </a:defRPr>
+              </a:pPr>
+            </a:p>
+          </c:txPr>
+          <c:dLblPos val="outEnd"/>
+          <c:showLegendKey val="0"/>
+          <c:showVal val="1"/>
+          <c:showCatName val="0"/>
+          <c:showSerName val="0"/>
+          <c:showPercent val="0"/>
+          <c:showBubbleSize val="0"/>
+          <c:showLeaderLines val="1"/>
+        </c:dLbls>
+        <c:gapWidth val="55"/>
+        <c:axId val="-2068027336"/>
+        <c:axId val="-2113994440"/>
+      </c:barChart>
+      <c:catAx>
+        <c:axId val="-2068027336"/>
+        <c:scaling>
+          <c:orientation val="minMax"/>
+        </c:scaling>
+        <c:delete val="0"/>
+        <c:axPos val="b"/>
+        <c:majorTickMark val="out"/>
+        <c:minorTickMark val="none"/>
+        <c:tickLblPos val="nextTo"/>
+        <c:spPr>
+          <a:ln>
+            <a:solidFill>
+              <a:srgbClr val="D5DAE5"/>
+            </a:solidFill>
+          </a:ln>
+        </c:spPr>
+        <c:txPr>
+          <a:bodyPr/>
+          <a:lstStyle/>
+          <a:p>
+            <a:pPr>
+              <a:defRPr sz="1200">
+                <a:solidFill>
+                  <a:srgbClr val="1E293B"/>
+                </a:solidFill>
+                <a:latin typeface="Calibri"/>
+              </a:defRPr>
+            </a:pPr>
+          </a:p>
+        </c:txPr>
+        <c:crossAx val="-2113994440"/>
+        <c:crosses val="autoZero"/>
+        <c:auto val="1"/>
+        <c:lblAlgn val="ctr"/>
+        <c:lblOffset val="100"/>
+        <c:noMultiLvlLbl val="0"/>
+      </c:catAx>
+      <c:valAx>
+        <c:axId val="-2113994440"/>
+        <c:scaling>
+          <c:max val="0.8"/>
+          <c:min val="0.0"/>
+        </c:scaling>
+        <c:delete val="0"/>
+        <c:axPos val="l"/>
+        <c:majorGridlines>
+          <c:spPr>
+            <a:ln>
+              <a:solidFill>
+                <a:srgbClr val="D5DAE5"/>
+              </a:solidFill>
+            </a:ln>
+          </c:spPr>
+        </c:majorGridlines>
+        <c:numFmt formatCode="0.0" sourceLinked="0"/>
+        <c:majorTickMark val="out"/>
+        <c:minorTickMark val="none"/>
+        <c:tickLblPos val="nextTo"/>
+        <c:spPr>
+          <a:ln>
+            <a:noFill/>
+          </a:ln>
+        </c:spPr>
+        <c:txPr>
+          <a:bodyPr/>
+          <a:lstStyle/>
+          <a:p>
+            <a:pPr>
+              <a:defRPr sz="1200">
+                <a:solidFill>
+                  <a:srgbClr val="5B6475"/>
+                </a:solidFill>
+                <a:latin typeface="Calibri"/>
+              </a:defRPr>
+            </a:pPr>
+          </a:p>
+        </c:txPr>
+        <c:crossAx val="-2068027336"/>
+        <c:crosses val="autoZero"/>
+      </c:valAx>
+    </c:plotArea>
+    <c:dispBlanksAs val="gap"/>
+  </c:chart>
+  <c:txPr>
+    <a:bodyPr/>
+    <a:lstStyle/>
+    <a:p>
+      <a:pPr>
+        <a:defRPr sz="1800"/>
+      </a:pPr>
+      <a:endParaRPr lang="en-US"/>
+    </a:p>
+  </c:txPr>
+  <c:externalData r:id="rId1">
+    <c:autoUpdate val="0"/>
+  </c:externalData>
+</c:chartSpace>
+</file>
+
+<file path=ppt/charts/chart5.xml><?xml version="1.0" encoding="utf-8"?>
+<c:chartSpace xmlns:c="http://schemas.openxmlformats.org/drawingml/2006/chart" xmlns:a="http://schemas.openxmlformats.org/drawingml/2006/main" xmlns:r="http://schemas.openxmlformats.org/officeDocument/2006/relationships">
+  <c:date1904 val="0"/>
+  <c:chart>
+    <c:autoTitleDeleted val="1"/>
+    <c:plotArea>
+      <c:barChart>
         <c:barDir val="bar"/>
         <c:grouping val="clustered"/>
         <c:ser>
@@ -1025,7 +1271,7 @@
 </c:chartSpace>
 </file>
 
-<file path=ppt/charts/chart5.xml><?xml version="1.0" encoding="utf-8"?>
+<file path=ppt/charts/chart6.xml><?xml version="1.0" encoding="utf-8"?>
 <c:chartSpace xmlns:c="http://schemas.openxmlformats.org/drawingml/2006/chart" xmlns:a="http://schemas.openxmlformats.org/drawingml/2006/main" xmlns:r="http://schemas.openxmlformats.org/officeDocument/2006/relationships">
   <c:date1904 val="0"/>
   <c:chart>
@@ -1309,7 +1555,7 @@
 </c:chartSpace>
 </file>
 
-<file path=ppt/charts/chart6.xml><?xml version="1.0" encoding="utf-8"?>
+<file path=ppt/charts/chart7.xml><?xml version="1.0" encoding="utf-8"?>
 <c:chartSpace xmlns:c="http://schemas.openxmlformats.org/drawingml/2006/chart" xmlns:a="http://schemas.openxmlformats.org/drawingml/2006/main" xmlns:r="http://schemas.openxmlformats.org/officeDocument/2006/relationships">
   <c:date1904 val="0"/>
   <c:chart>
@@ -2447,13 +2693,13 @@
           <a:lstStyle/>
           <a:p>
             <a:r>
-              <a:t>Why do all-row LLMs lose on issues? Devices is the clearest case. Rules recall 81% of device posts; GPT-4o recalls 25% and GPT-4o-mini 6%. Posts like 'Starhub, no ONR, no CGNAT' are pure equipment jargon: an optical network router and carrier-grade NAT. The rules have those terms; the LLM reads the post as general chat, and mini even flips its sentiment to happy.</a:t>
+              <a:t>My findings use the combined corpus, but my original gold labels were all wave-1 posts. So I labelled a blind sample of 100 wave-2 posts, 97 of them telco-relevant, and scored the labels already in the corpus against it. No new API calls.</a:t>
             </a:r>
           </a:p>
           <a:p/>
           <a:p>
             <a:r>
-              <a:t>This is why the hybrid keeps rule hits and only uses the LLM where rules have nothing. The gap holds on the challenge set too: rules 75%, GPT-4o 33%.</a:t>
+              <a:t>Sentiment carries over: GPT-4o-mini 0.637 against VADER 0.428, the same as on wave 1, on both Reddit and HWZ. But the error has a direction: of 39 posts I called not happy, mini called 15 neutral. So the corpus not-happy share is probably an underestimate. Issues are harder on wave 2 for every method; the hybrid still beats rules, but only reaches 0.477.</a:t>
             </a:r>
           </a:p>
         </p:txBody>
@@ -2523,7 +2769,13 @@
           <a:lstStyle/>
           <a:p>
             <a:r>
-              <a:t>Four real examples, paraphrased. A short status update like 'eSIM still down' has no sentiment words, so VADER says neutral. A switching story with 'better' and 'just $12' reads as happy to VADER, but it's a complaint about 5G drops. Elongated slang is outside the lexicon. And a user ready to port out after an outage is unhappy, whatever words they use. The LLM gets all four right.</a:t>
+              <a:t>Why do all-row LLMs lose on issues? Devices is the clearest case. Rules recall 81% of device posts; GPT-4o recalls 25% and GPT-4o-mini 6%. Posts like 'Starhub, no ONR, no CGNAT' are pure equipment jargon: an optical network router and carrier-grade NAT. The rules have those terms; the LLM reads the post as general chat, and mini even flips its sentiment to happy.</a:t>
+            </a:r>
+          </a:p>
+          <a:p/>
+          <a:p>
+            <a:r>
+              <a:t>This is why the hybrid keeps rule hits and only uses the LLM where rules have nothing. The gap holds on the challenge set too: rules 75%, GPT-4o 33%.</a:t>
             </a:r>
           </a:p>
         </p:txBody>
@@ -2593,7 +2845,7 @@
           <a:lstStyle/>
           <a:p>
             <a:r>
-              <a:t>Cost was a design constraint. Evaluating mini on 295 posts cost under one cent; GPT-4o on the same posts cost 15 cents. The biggest job sent 8,786 unresolved wave-1 posts to GPT-4o: about 30 minutes, zero failed batches, $3.45. The same pass on wave 2 cost $1.35, and sentiment on all 9,162 combined posts cost 28 cents. The finished jobs total about $5.30; a wave-2 first pass I discarded, because it sent Reddit posts without their thread titles, added about $1.15. VADER and the rules label the same posts in a fraction of a second for free.</a:t>
+              <a:t>Four real examples, paraphrased. A short status update like 'eSIM still down' has no sentiment words, so VADER says neutral. A switching story with 'better' and 'just $12' reads as happy to VADER, but it's a complaint about 5G drops. Elongated slang is outside the lexicon. And a user ready to port out after an outage is unhappy, whatever words they use. The LLM gets all four right.</a:t>
             </a:r>
           </a:p>
         </p:txBody>
@@ -2663,7 +2915,7 @@
           <a:lstStyle/>
           <a:p>
             <a:r>
-              <a:t>Part D: what GPT-4o-mini sentiment and the hybrid issue labels show on the 9,162-post combined corpus, the March outage as a case study, then a short dashboard demo.</a:t>
+              <a:t>Cost was a design constraint. Evaluating mini on 295 posts cost under one cent; GPT-4o on the same posts cost 15 cents. The biggest job sent 8,786 unresolved wave-1 posts to GPT-4o: about 30 minutes, zero failed batches, $3.45. The same pass on wave 2 cost $1.35, and sentiment on all 9,162 combined posts cost 28 cents. The finished jobs total about $5.30; a wave-2 first pass I discarded, because it sent Reddit posts without their thread titles, added about $1.15. VADER and the rules label the same posts in a fraction of a second for free.</a:t>
             </a:r>
           </a:p>
         </p:txBody>
@@ -2733,13 +2985,7 @@
           <a:lstStyle/>
           <a:p>
             <a:r>
-              <a:t>This slide is the first-wave corpus, where I ran the hybrid first. Rules alone left 8,786 posts, 57%, in General Discussion. After GPT-4o relabelled them, that dropped to 6,180. Most of the reassigned posts became Network Quality, which gained 2,080. Devices barely moved, which matches the gold result: rules already catch device posts.</a:t>
-            </a:r>
-          </a:p>
-          <a:p/>
-          <a:p>
-            <a:r>
-              <a:t>These corpus reassignments have no human check yet. Before they drive an alert, I'd sample them.</a:t>
+              <a:t>Part D: what GPT-4o-mini sentiment and the hybrid issue labels show on the 9,162-post combined corpus, the March outage as a case study, then a short dashboard demo.</a:t>
             </a:r>
           </a:p>
         </p:txBody>
@@ -2879,13 +3125,13 @@
           <a:lstStyle/>
           <a:p>
             <a:r>
-              <a:t>On the combined corpus, GPT-4o-mini labels 44% of posts not happy and 19% happy. With every thread weighted equally it's 42%, and outside outage threads 40%, so this holds across weightings. VADER on the same posts says the opposite: 46% happy. Of the 4,180 posts VADER calls happy, mini reads 1,480 as not happy.</a:t>
+              <a:t>This slide is the first-wave corpus, where I ran the hybrid first. Rules alone left 8,786 posts, 57%, in General Discussion. After GPT-4o relabelled them, that dropped to 6,180. Most of the reassigned posts became Network Quality, which gained 2,080. Devices barely moved, which matches the gold result: rules already catch device posts.</a:t>
             </a:r>
           </a:p>
           <a:p/>
           <a:p>
             <a:r>
-              <a:t>Neutral is higher than in my gold set, 37% against 32%, probably because wave 2 adds long HWZ plan-comparison threads. My gold labels come from wave 1 only, so I've drawn a 100-post wave-2 gold sample to check that.</a:t>
+              <a:t>These corpus reassignments have no human check yet. Before they drive an alert, I'd sample them.</a:t>
             </a:r>
           </a:p>
         </p:txBody>
@@ -2955,13 +3201,13 @@
           <a:lstStyle/>
           <a:p>
             <a:r>
-              <a:t>Network quality is still first, 37 to 41% of posts and 46% of the not-happy discussion. Mobile plans are second and pricing third. App and account is small per post but spread across 115 threads.</a:t>
+              <a:t>On the combined corpus, GPT-4o-mini labels 44% of posts not happy and 19% happy. With every thread weighted equally it's 42%, and outside outage threads 40%, so this holds across weightings. VADER on the same posts says the opposite: 46% happy. Of the 4,180 posts VADER calls happy, mini reads 1,480 as not happy.</a:t>
             </a:r>
           </a:p>
           <a:p/>
           <a:p>
             <a:r>
-              <a:t>Reddit is 48% not happy against HWZ 37% per post, 42 against 37 outside outages. The rest is topic: HWZ is mostly plan megathreads. Brands outside outages sit within three points, 40 to 43%, except Eight, the least negative at 35% under every weighting. So no league table.</a:t>
+              <a:t>Neutral is higher than in my gold set, 37% against 32%. The wave-2 gold check explains it: on newer posts mini reads some complaints as neutral, so if anything the true not-happy share is higher.</a:t>
             </a:r>
           </a:p>
         </p:txBody>
@@ -3031,13 +3277,13 @@
           <a:lstStyle/>
           <a:p>
             <a:r>
-              <a:t>Wave 1 is a natural experiment. 39% of it sat in threads about the 16 March Singtel outage. That single event pushed not happy to 55%, made Singtel look uniquely negative at 63%, and made Reddit look far more negative than HWZ, 60 against 40.</a:t>
+              <a:t>Network quality is still first, 37 to 41% of posts and 46% of the not-happy discussion. Mobile plans are second and pricing third. App and account is small per post but spread across 115 threads.</a:t>
             </a:r>
           </a:p>
           <a:p/>
           <a:p>
             <a:r>
-              <a:t>Remove the outage threads and all three collapse: 42% not happy, Singtel 44% level with StarHub 47%, Reddit 43 against HWZ 40. That's why every finding in this deck is checked with and without them, and why I didn't trust wave 1 alone.</a:t>
+              <a:t>Reddit is 48% not happy against HWZ 37% per post, 42 against 37 outside outages. The rest is topic: HWZ is mostly plan megathreads. Brands outside outages sit within three points, 40 to 43%, except Eight, the least negative at 35% under every weighting. So no league table.</a:t>
             </a:r>
           </a:p>
         </p:txBody>
@@ -3107,19 +3353,13 @@
           <a:lstStyle/>
           <a:p>
             <a:r>
-              <a:t>The dashboard is built around one meeting. Step one, the queue: not-happy posts in Network Quality, App &amp; Account or Porting, but only act when the week is unusual. Step two, open ten source posts and drop sarcasm and mislabels. Step three, match what's left to tickets or outages. Step four, one owner and a date. Step five, next week, check whether that issue's share fell.</a:t>
+              <a:t>Wave 1 is a natural experiment. 39% of it sat in threads about the 16 March Singtel outage. That single event pushed not happy to 55%, made Singtel look uniquely negative at 63%, and made Reddit look far more negative than HWZ, 60 against 40.</a:t>
             </a:r>
           </a:p>
           <a:p/>
           <a:p>
             <a:r>
-              <a:t>A fixed threshold of 20 posts fired almost every week once I had more data, so the threshold is now twice the median week, 115 posts. Only two weeks qualify: the March Singtel outage, 352 posts, and 14 September, 149 posts, a multi-brand week with StarHub broadband down and SIMBA app OTP failures. That's the alert working.</a:t>
-            </a:r>
-          </a:p>
-          <a:p/>
-          <a:p>
-            <a:r>
-              <a:t>[Demo] Open dashboard/index_v2.html. Walk through: executive summary, the weekly queue chart, the tone chart next to VADER and human labels, issue shares per post and per thread, and the recommendations.</a:t>
+              <a:t>Remove the outage threads and all three collapse: 42% not happy, Singtel 44% level with StarHub 47%, Reddit 43 against HWZ 40. That's why every finding in this deck is checked with and without them, and why I didn't trust wave 1 alone.</a:t>
             </a:r>
           </a:p>
         </p:txBody>
@@ -3189,7 +3429,19 @@
           <a:lstStyle/>
           <a:p>
             <a:r>
-              <a:t>Part E: recommendations for operators, the points I found most interesting, limitations and next steps.</a:t>
+              <a:t>The dashboard is built around one meeting. Step one, the queue: not-happy posts in Network Quality, App &amp; Account or Porting, but only act when the week is unusual. Step two, open ten source posts and drop sarcasm and mislabels. Step three, match what's left to tickets or outages. Step four, one owner and a date. Step five, next week, check whether that issue's share fell.</a:t>
+            </a:r>
+          </a:p>
+          <a:p/>
+          <a:p>
+            <a:r>
+              <a:t>A fixed threshold of 20 posts fired almost every week once I had more data, so the threshold is now twice the median week, 115 posts. Only two weeks qualify: the March Singtel outage, 352 posts, and 14 September, 149 posts, a multi-brand week with StarHub broadband down and SIMBA app OTP failures. That's the alert working.</a:t>
+            </a:r>
+          </a:p>
+          <a:p/>
+          <a:p>
+            <a:r>
+              <a:t>[Demo] Open dashboard/index_v2.html. Walk through: executive summary, the weekly queue chart, the tone chart next to VADER and human labels, issue shares per post and per thread, and the recommendations.</a:t>
             </a:r>
           </a:p>
         </p:txBody>
@@ -3259,13 +3511,7 @@
           <a:lstStyle/>
           <a:p>
             <a:r>
-              <a:t>The order comes from the data: each issue's share of not-happy discussion on the combined corpus. Network is first by far, and the huddle flagged two incident weeks, so the first action is incident communication, then proving local fixes. Plans and pricing come next: terms people discover late, like fair-use limits and Caller ID charges. Devices and the app are small but steady.</a:t>
-            </a:r>
-          </a:p>
-          <a:p/>
-          <a:p>
-            <a:r>
-              <a:t>Billing and customer service are the most negative by rate but small, and in the outage case study they were aftercare, so that's a plan for incidents rather than a standing priority. My earlier App &amp; Account priority, from the 158-post sample, is withdrawn.</a:t>
+              <a:t>Part E: recommendations for operators, the points I found most interesting, limitations and next steps.</a:t>
             </a:r>
           </a:p>
         </p:txBody>
@@ -3335,37 +3581,13 @@
           <a:lstStyle/>
           <a:p>
             <a:r>
-              <a:t>Five things surprised me.</a:t>
+              <a:t>The order comes from the data: each issue's share of not-happy discussion on the combined corpus. Network is first by far, and the huddle flagged two incident weeks, so the first action is incident communication, then proving local fixes. Plans and pricing come next: terms people discover late, like fair-use limits and Caller ID charges. Devices and the app are small but steady.</a:t>
             </a:r>
           </a:p>
           <a:p/>
           <a:p>
             <a:r>
-              <a:t>First, the perfect score. A 100% result was the warning sign, not the achievement, and catching it changed how I ran the whole evaluation.</a:t>
-            </a:r>
-          </a:p>
-          <a:p/>
-          <a:p>
-            <a:r>
-              <a:t>Second, the bigger model didn't win on sentiment. GPT-4o ties mini at 17 times the cost, on typical and hard posts.</a:t>
-            </a:r>
-          </a:p>
-          <a:p/>
-          <a:p>
-            <a:r>
-              <a:t>Third, my best issue method didn't survive a held-out test. That's exactly why you keep a test set you don't tune on.</a:t>
-            </a:r>
-          </a:p>
-          <a:p/>
-          <a:p>
-            <a:r>
-              <a:t>Fourth, two gaps that looked like insights, Reddit versus HWZ and Singtel versus everyone, were one outage.</a:t>
-            </a:r>
-          </a:p>
-          <a:p/>
-          <a:p>
-            <a:r>
-              <a:t>Fifth, the data itself had bugs: 15,504 rows were 2,693 unique posts, and the HWZ scraper had only ever read page one of each thread. Fixing that is what made wave 2 possible.</a:t>
+              <a:t>Billing and customer service are the most negative by rate but small, and in the outage case study they were aftercare, so that's a plan for incidents rather than a standing priority. My earlier App &amp; Account priority, from the 158-post sample, is withdrawn.</a:t>
             </a:r>
           </a:p>
         </p:txBody>
@@ -3435,13 +3657,37 @@
           <a:lstStyle/>
           <a:p>
             <a:r>
-              <a:t>On the data side: forum users choose to post, so they aren't Singapore subscribers at large; replies cluster by thread; 95% of posts are from 2026; wave-2 Reddit comes from a research archive, which can miss deleted posts; and I have no tickets or NPS to validate against.</a:t>
+              <a:t>Five things surprised me.</a:t>
             </a:r>
           </a:p>
           <a:p/>
           <a:p>
             <a:r>
-              <a:t>On the method side: mini matches my labels on about two-thirds of posts, and two humans only agree at kappa 0.38; all my gold labels are wave-1 posts, so accuracy on wave 2 is assumed until the new gold sample is labelled; the hybrid's 0.680 is optimistic; and a multi-brand post gives its one sentiment to every brand.</a:t>
+              <a:t>First, the perfect score. A 100% result was the warning sign, not the achievement, and catching it changed how I ran the whole evaluation.</a:t>
+            </a:r>
+          </a:p>
+          <a:p/>
+          <a:p>
+            <a:r>
+              <a:t>Second, the bigger model didn't win on sentiment. GPT-4o ties mini at 17 times the cost, on typical and hard posts.</a:t>
+            </a:r>
+          </a:p>
+          <a:p/>
+          <a:p>
+            <a:r>
+              <a:t>Third, my best issue method didn't survive a held-out test. That's exactly why you keep a test set you don't tune on.</a:t>
+            </a:r>
+          </a:p>
+          <a:p/>
+          <a:p>
+            <a:r>
+              <a:t>Fourth, two gaps that looked like insights, Reddit versus HWZ and Singtel versus everyone, were one outage.</a:t>
+            </a:r>
+          </a:p>
+          <a:p/>
+          <a:p>
+            <a:r>
+              <a:t>Fifth, the data itself had bugs: 15,504 rows were 2,693 unique posts, and the HWZ scraper had only ever read page one of each thread. Fixing that is what made wave 2 possible.</a:t>
             </a:r>
           </a:p>
         </p:txBody>
@@ -3511,7 +3757,13 @@
           <a:lstStyle/>
           <a:p>
             <a:r>
-              <a:t>Four next steps. One: label the 100-post wave-2 gold sample, which is already drawn, and score mini on it, so the combined findings rest on measured accuracy. Two: relabel the double-annotation overlap under the new guide rule and adjudicate. Three: settle hybrid versus GPT-4o on every post with a fresh held-out sample, since my two gold sets disagree. Four: brand-level sentiment, so a post praising StarHub and criticising Singtel gets two labels, and validation against real tickets.</a:t>
+              <a:t>On the data side: forum users choose to post, so they aren't Singapore subscribers at large; replies cluster by thread; 95% of posts are from 2026; wave-2 Reddit comes from a research archive, which can miss deleted posts; and I have no tickets or NPS to validate against.</a:t>
+            </a:r>
+          </a:p>
+          <a:p/>
+          <a:p>
+            <a:r>
+              <a:t>On the method side: mini matches my labels on about two-thirds of posts, and two humans only agree at kappa 0.39; on the wave-2 gold sample sentiment holds but mini under-calls complaints and issue tagging is weaker; the hybrid's 0.680 is optimistic; and a multi-brand post gives its one sentiment to every brand.</a:t>
             </a:r>
           </a:p>
         </p:txBody>
@@ -3581,7 +3833,7 @@
           <a:lstStyle/>
           <a:p>
             <a:r>
-              <a:t>To close: an LLM for sentiment, keyword rules plus a targeted GPT-4o pass for issues, and a weekly human huddle before anyone acts. Thank you, Professor. I'm happy to take questions, and I have backup slides with the detailed tables and agreement numbers.</a:t>
+              <a:t>Four next steps. One: improve wave-2 issue tagging, which scores well below wave 1, starting with customer service, and have a second annotator label part of the wave-2 sample. Two: adjudicate the remaining disagreements between the two annotators. Three: settle hybrid versus GPT-4o on every post with a fresh held-out sample, since my gold sets disagree. Four: brand-level sentiment, so a post praising StarHub and criticising Singtel gets two labels, and validation against real tickets.</a:t>
             </a:r>
           </a:p>
         </p:txBody>
@@ -3721,7 +3973,7 @@
           <a:lstStyle/>
           <a:p>
             <a:r>
-              <a:t>Backup slides. I'll only show these if the question comes up.</a:t>
+              <a:t>To close: an LLM for sentiment, keyword rules plus a targeted GPT-4o pass for issues, and a weekly human huddle before anyone acts. Thank you, Professor. I'm happy to take questions, and I have backup slides with the detailed tables and agreement numbers.</a:t>
             </a:r>
           </a:p>
         </p:txBody>
@@ -3791,49 +4043,7 @@
           <a:lstStyle/>
           <a:p>
             <a:r>
-              <a:t>Q: Why not use GPT-4o for everything?</a:t>
-            </a:r>
-          </a:p>
-          <a:p>
-            <a:r>
-              <a:t>A: On typical posts GPT-4o on every post ties rules (0.600 vs 0.639) and costs ~17× mini. On hard posts it wins (0.596 vs 0.499). At ~$0.0005 a post it’s affordable on a deduplicated feed; I’d settle it on fresh held-out data.</a:t>
-            </a:r>
-          </a:p>
-          <a:p>
-            <a:r>
-              <a:t>If pushed on cost: the whole clean corpus with GPT-4o on every post would be about $0.85.</a:t>
-            </a:r>
-          </a:p>
-          <a:p/>
-          <a:p>
-            <a:r>
-              <a:t>Q: Is the hybrid’s gain real?</a:t>
-            </a:r>
-          </a:p>
-          <a:p>
-            <a:r>
-              <a:t>A: On the set I tuned it on, yes: +0.041, 95% CI +0.011 to +0.072. On the held-out challenge set, no: +0.010, CI −0.04 to +0.07. So I report 0.680 as optimistic.</a:t>
-            </a:r>
-          </a:p>
-          <a:p>
-            <a:r>
-              <a:t>Paired bootstrap, 2,000 resamples of posts. Challenge-set gain of GPT-4o over the hybrid: +0.087, CI +0.017 to +0.151.</a:t>
-            </a:r>
-          </a:p>
-          <a:p/>
-          <a:p>
-            <a:r>
-              <a:t>Q: How reliable are your labels?</a:t>
-            </a:r>
-          </a:p>
-          <a:p>
-            <a:r>
-              <a:t>A: Headline metrics use one annotator. Two annotators agree at κ 0.38 on typical posts, mostly on whether “Singtel is down” is a complaint or a fact. I’ve added that rule to the guide.</a:t>
-            </a:r>
-          </a:p>
-          <a:p>
-            <a:r>
-              <a:t>Per-label issue κ on the representative overlap is low for Devices (0.14) and Customer Service (0.18). On the challenge overlap 18 of 40 rows are identical on every field, and four notes match word for word. An earlier version of B's sheet was superseded: its labels contradicted B's own notes.</a:t>
+              <a:t>Backup slides. I'll only show these if the question comes up.</a:t>
             </a:r>
           </a:p>
         </p:txBody>
@@ -3903,39 +4113,49 @@
           <a:lstStyle/>
           <a:p>
             <a:r>
-              <a:t>Q: How good is GPT-4o-mini on the corpus?</a:t>
-            </a:r>
-          </a:p>
-          <a:p>
-            <a:r>
-              <a:t>A: It matches humans on ~2/3 of gold posts (F1 0.631), its corpus shares (18/55/27) sit near the gold shares (18/50/32), and a rerun reproduced 292 of 295 labels.</a:t>
-            </a:r>
-          </a:p>
-          <a:p>
-            <a:r>
-              <a:t>Mini's weakest class is happy (F1 0.54). Corpus shares are estimates, not measurements.</a:t>
+              <a:t>Q: Why not use GPT-4o for everything?</a:t>
+            </a:r>
+          </a:p>
+          <a:p>
+            <a:r>
+              <a:t>A: On typical posts GPT-4o on every post ties rules (0.600 vs 0.639) and costs ~17× mini. On hard posts it wins (0.596 vs 0.499). At ~$0.0005 a post it’s affordable on a deduplicated feed; I’d settle it on fresh held-out data.</a:t>
+            </a:r>
+          </a:p>
+          <a:p>
+            <a:r>
+              <a:t>If pushed on cost: the whole clean corpus with GPT-4o on every post would be about $0.85.</a:t>
             </a:r>
           </a:p>
           <a:p/>
           <a:p>
             <a:r>
-              <a:t>Q: How do you handle sarcasm and Singlish?</a:t>
-            </a:r>
-          </a:p>
-          <a:p>
-            <a:r>
-              <a:t>A: VADER can’t; the challenge set targets these cases. There GPT-4o-mini reaches 0.773 macro F1 vs VADER 0.491 and GPT-4o 0.712.</a:t>
+              <a:t>Q: Is the hybrid’s gain real?</a:t>
+            </a:r>
+          </a:p>
+          <a:p>
+            <a:r>
+              <a:t>A: On the set I tuned it on, yes: +0.041, 95% CI +0.011 to +0.072. On the held-out challenge set, no: +0.010, CI −0.04 to +0.07. So I report 0.680 as optimistic.</a:t>
+            </a:r>
+          </a:p>
+          <a:p>
+            <a:r>
+              <a:t>Paired bootstrap, 2,000 resamples of posts. Challenge-set gain of GPT-4o over the hybrid: +0.087, CI +0.017 to +0.151.</a:t>
             </a:r>
           </a:p>
           <a:p/>
           <a:p>
             <a:r>
-              <a:t>Q: Why keep VADER at all?</a:t>
-            </a:r>
-          </a:p>
-          <a:p>
-            <a:r>
-              <a:t>A: It’s free, local and deterministic: a baseline to beat. I no longer use it for any headline share.</a:t>
+              <a:t>Q: How reliable are your labels?</a:t>
+            </a:r>
+          </a:p>
+          <a:p>
+            <a:r>
+              <a:t>A: Two annotators agree at κ 0.39 on typical posts and 0.59 on hard ones, mostly split on complaint vs neutral. The guide now has an explicit rule for failure reports.</a:t>
+            </a:r>
+          </a:p>
+          <a:p>
+            <a:r>
+              <a:t>Per-label issue κ on the representative overlap: Network Quality 0.79, but Devices 0.16, App &amp; Account 0.17 and Customer Service 0.28. Two earlier versions of B's sheet were superseded because they copied my labels; the one used was relabelled with B's own notes.</a:t>
             </a:r>
           </a:p>
         </p:txBody>
@@ -4005,34 +4225,39 @@
           <a:lstStyle/>
           <a:p>
             <a:r>
-              <a:t>Q: Is Reddit more negative than HWZ? Is Singtel worst?</a:t>
-            </a:r>
-          </a:p>
-          <a:p>
-            <a:r>
-              <a:t>A: Outside outage threads, Reddit 42% vs HWZ 37%, mostly topic mix; brands sit within 3 points (Singtel 42%, StarHub 40%), with Eight lowest at 35%.</a:t>
+              <a:t>Q: How good is GPT-4o-mini on the corpus?</a:t>
+            </a:r>
+          </a:p>
+          <a:p>
+            <a:r>
+              <a:t>A: F1 0.631 on wave-1 gold and 0.637 on a separate wave-2 gold sample; a rerun reproduced 292 of 295 labels. On wave 2 it under-calls complaints, so not-happy is likely understated.</a:t>
+            </a:r>
+          </a:p>
+          <a:p>
+            <a:r>
+              <a:t>Mini's weakest class is happy (F1 0.54). Corpus shares are estimates, not measurements.</a:t>
             </a:r>
           </a:p>
           <a:p/>
           <a:p>
             <a:r>
-              <a:t>Q: What about privacy and ethics?</a:t>
-            </a:r>
-          </a:p>
-          <a:p>
-            <a:r>
-              <a:t>A: Public posts only, no usernames in outputs, no identifiers sent to the API, and API keys kept in environment variables, never in code.</a:t>
+              <a:t>Q: How do you handle sarcasm and Singlish?</a:t>
+            </a:r>
+          </a:p>
+          <a:p>
+            <a:r>
+              <a:t>A: VADER can’t; the challenge set targets these cases. There GPT-4o-mini reaches 0.773 macro F1 vs VADER 0.491 and GPT-4o 0.712.</a:t>
             </a:r>
           </a:p>
           <a:p/>
           <a:p>
             <a:r>
-              <a:t>Q: Can this estimate NPS or market share?</a:t>
-            </a:r>
-          </a:p>
-          <a:p>
-            <a:r>
-              <a:t>A: No. Posters self-select, replies cluster by thread, and 95% of posts are from 2026. It’s a triage queue, not a population measure.</a:t>
+              <a:t>Q: Why keep VADER at all?</a:t>
+            </a:r>
+          </a:p>
+          <a:p>
+            <a:r>
+              <a:t>A: It’s free, local and deterministic: a baseline to beat. I no longer use it for any headline share.</a:t>
             </a:r>
           </a:p>
         </p:txBody>
@@ -4102,13 +4327,34 @@
           <a:lstStyle/>
           <a:p>
             <a:r>
-              <a:t>Inter-annotator agreement on the 100 overlap posts, per set. Representative sentiment kappa is 0.38, fair at best; challenge is 0.63. Most disagreements are one pattern: posts I labelled not happy that the second annotator labelled neutral, like 'Ya Singtel is down', questions about compensation, or troubleshooting tips. My guide listed 'service failure' as not happy and 'factual statement' as neutral, but never said which wins when a post is both. So it's a guide gap, and it matters: GPT-4o-mini reads those posts the way I do, so part of its margin over VADER depends on that rule. I've now added it to the guide.</a:t>
+              <a:t>Q: Is Reddit more negative than HWZ? Is Singtel worst?</a:t>
+            </a:r>
+          </a:p>
+          <a:p>
+            <a:r>
+              <a:t>A: Outside outage threads, Reddit 42% vs HWZ 37%, mostly topic mix; brands sit within 3 points (Singtel 42%, StarHub 40%), with Eight lowest at 35%.</a:t>
             </a:r>
           </a:p>
           <a:p/>
           <a:p>
             <a:r>
-              <a:t>Two cautions. An earlier version of the second annotator's sheet is superseded, because its labels contradicted their own notes and matched mine. And on the challenge rows 18 of 40 still match me on every field, so I don't rely on the 0.63 until I've confirmed they worked independently.</a:t>
+              <a:t>Q: What about privacy and ethics?</a:t>
+            </a:r>
+          </a:p>
+          <a:p>
+            <a:r>
+              <a:t>A: Public posts only, no usernames in outputs, no identifiers sent to the API, and API keys kept in environment variables, never in code.</a:t>
+            </a:r>
+          </a:p>
+          <a:p/>
+          <a:p>
+            <a:r>
+              <a:t>Q: Can this estimate NPS or market share?</a:t>
+            </a:r>
+          </a:p>
+          <a:p>
+            <a:r>
+              <a:t>A: No. Posters self-select, replies cluster by thread, and 95% of posts are from 2026. It’s a triage queue, not a population measure.</a:t>
             </a:r>
           </a:p>
         </p:txBody>
@@ -4134,6 +4380,82 @@
 </file>
 
 <file path=ppt/notesSlides/notesSlide35.xml><?xml version="1.0" encoding="utf-8"?>
+<p:notes xmlns:a="http://schemas.openxmlformats.org/drawingml/2006/main" xmlns:p="http://schemas.openxmlformats.org/presentationml/2006/main" xmlns:r="http://schemas.openxmlformats.org/officeDocument/2006/relationships">
+  <p:cSld>
+    <p:spTree>
+      <p:nvGrpSpPr>
+        <p:cNvPr id="1" name=""/>
+        <p:cNvGrpSpPr/>
+        <p:nvPr/>
+      </p:nvGrpSpPr>
+      <p:grpSpPr>
+        <a:xfrm>
+          <a:off x="0" y="0"/>
+          <a:ext cx="0" cy="0"/>
+          <a:chOff x="0" y="0"/>
+          <a:chExt cx="0" cy="0"/>
+        </a:xfrm>
+      </p:grpSpPr>
+      <p:sp>
+        <p:nvSpPr>
+          <p:cNvPr id="2" name="Slide Image Placeholder 1"/>
+          <p:cNvSpPr>
+            <a:spLocks noGrp="1"/>
+          </p:cNvSpPr>
+          <p:nvPr>
+            <p:ph type="sldImg" idx="2"/>
+          </p:nvPr>
+        </p:nvSpPr>
+        <p:spPr/>
+      </p:sp>
+      <p:sp>
+        <p:nvSpPr>
+          <p:cNvPr id="3" name="Notes Placeholder 2"/>
+          <p:cNvSpPr>
+            <a:spLocks noGrp="1"/>
+          </p:cNvSpPr>
+          <p:nvPr>
+            <p:ph type="body" idx="3" sz="quarter"/>
+          </p:nvPr>
+        </p:nvSpPr>
+        <p:spPr/>
+        <p:txBody>
+          <a:bodyPr/>
+          <a:lstStyle/>
+          <a:p>
+            <a:r>
+              <a:t>Inter-annotator agreement on the 100 overlap posts, per set. Representative sentiment kappa is 0.39, fair; challenge is 0.59. Most disagreements are one pattern: posts I labelled not happy that the second annotator labelled neutral, typically questions about compensation, troubleshooting tips or second-hand reports. My guide never said whether a failure report is a complaint or a fact; it now does, and the second annotator's final pass applied that rule.</a:t>
+            </a:r>
+          </a:p>
+          <a:p/>
+          <a:p>
+            <a:r>
+              <a:t>Two earlier versions of the second annotator's sheet are superseded: the first contradicted their own notes and matched mine, the second only revised sentiment. The version used was relabelled with their own notes throughout; no notes match mine and 9 of 40 challenge rows match on every field. Issue agreement is high for network quality, 0.79, but low for devices, app and customer service.</a:t>
+            </a:r>
+          </a:p>
+        </p:txBody>
+      </p:sp>
+      <p:sp>
+        <p:nvSpPr>
+          <p:cNvPr id="4" name="Slide Number Placeholder 3"/>
+          <p:cNvSpPr>
+            <a:spLocks noGrp="1"/>
+          </p:cNvSpPr>
+          <p:nvPr>
+            <p:ph type="sldNum" idx="5" sz="quarter"/>
+          </p:nvPr>
+        </p:nvSpPr>
+        <p:spPr/>
+      </p:sp>
+    </p:spTree>
+  </p:cSld>
+  <p:clrMapOvr>
+    <a:masterClrMapping/>
+  </p:clrMapOvr>
+</p:notes>
+</file>
+
+<file path=ppt/notesSlides/notesSlide36.xml><?xml version="1.0" encoding="utf-8"?>
 <p:notes xmlns:a="http://schemas.openxmlformats.org/drawingml/2006/main" xmlns:p="http://schemas.openxmlformats.org/presentationml/2006/main" xmlns:r="http://schemas.openxmlformats.org/officeDocument/2006/relationships">
   <p:cSld>
     <p:spTree>
@@ -10854,7 +11176,7 @@
                 </a:solidFill>
                 <a:latin typeface="Calibri"/>
               </a:rPr>
-              <a:t>LLMs miss the equipment jargon that rules catch</a:t>
+              <a:t>The sentiment result holds on the newer posts</a:t>
             </a:r>
           </a:p>
         </p:txBody>
@@ -10894,6 +11216,594 @@
                 <a:latin typeface="Calibri"/>
               </a:rPr>
               <a:t>15</a:t>
+            </a:r>
+          </a:p>
+        </p:txBody>
+      </p:sp>
+      <p:graphicFrame>
+        <p:nvGraphicFramePr>
+          <p:cNvPr id="4" name="Chart 3"/>
+          <p:cNvGraphicFramePr>
+            <a:graphicFrameLocks noGrp="1"/>
+          </p:cNvGraphicFramePr>
+          <p:nvPr/>
+        </p:nvGraphicFramePr>
+        <p:xfrm>
+          <a:off x="548640" y="1645920"/>
+          <a:ext cx="6766560" cy="4389120"/>
+        </p:xfrm>
+        <a:graphic>
+          <a:graphicData uri="http://schemas.openxmlformats.org/drawingml/2006/chart">
+            <c:chart xmlns:c="http://schemas.openxmlformats.org/drawingml/2006/chart" r:id="rId3"/>
+          </a:graphicData>
+        </a:graphic>
+      </p:graphicFrame>
+      <p:sp>
+        <p:nvSpPr>
+          <p:cNvPr id="5" name="TextBox 4"/>
+          <p:cNvSpPr txBox="1"/>
+          <p:nvPr/>
+        </p:nvSpPr>
+        <p:spPr>
+          <a:xfrm>
+            <a:off x="548640" y="6053328"/>
+            <a:ext cx="6766560" cy="320040"/>
+          </a:xfrm>
+          <a:prstGeom prst="rect">
+            <a:avLst/>
+          </a:prstGeom>
+          <a:noFill/>
+        </p:spPr>
+        <p:txBody>
+          <a:bodyPr wrap="square" lIns="0" rIns="0" tIns="0" bIns="0" anchor="t">
+            <a:spAutoFit/>
+          </a:bodyPr>
+          <a:lstStyle/>
+          <a:p>
+            <a:pPr algn="l">
+              <a:spcAft>
+                <a:spcPts val="600"/>
+              </a:spcAft>
+            </a:pPr>
+            <a:r>
+              <a:rPr sz="1200" b="0" i="0">
+                <a:solidFill>
+                  <a:srgbClr val="5B6475"/>
+                </a:solidFill>
+                <a:latin typeface="Calibri"/>
+              </a:rPr>
+              <a:t>Macro F1 on 97 wave-2 gold posts, production labels</a:t>
+            </a:r>
+          </a:p>
+        </p:txBody>
+      </p:sp>
+      <p:graphicFrame>
+        <p:nvGraphicFramePr>
+          <p:cNvPr id="6" name="Table 5"/>
+          <p:cNvGraphicFramePr>
+            <a:graphicFrameLocks noGrp="1"/>
+          </p:cNvGraphicFramePr>
+          <p:nvPr/>
+        </p:nvGraphicFramePr>
+        <p:xfrm>
+          <a:off x="7589520" y="1691640"/>
+          <a:ext cx="4050792" cy="1828800"/>
+        </p:xfrm>
+        <a:graphic>
+          <a:graphicData uri="http://schemas.openxmlformats.org/drawingml/2006/table">
+            <a:tbl>
+              <a:tblPr firstRow="1" bandRow="1">
+                <a:tableStyleId>{5C22544A-7EE6-4342-B048-85BDC9FD1C3A}</a:tableStyleId>
+              </a:tblPr>
+              <a:tblGrid>
+                <a:gridCol w="2404872"/>
+                <a:gridCol w="822960"/>
+                <a:gridCol w="822960"/>
+              </a:tblGrid>
+              <a:tr h="457200">
+                <a:tc>
+                  <a:txBody>
+                    <a:bodyPr wrap="square"/>
+                    <a:lstStyle/>
+                    <a:p>
+                      <a:pPr algn="l"/>
+                      <a:r>
+                        <a:rPr sz="1400" b="1">
+                          <a:solidFill>
+                            <a:srgbClr val="FFFFFF"/>
+                          </a:solidFill>
+                          <a:latin typeface="Calibri"/>
+                        </a:rPr>
+                        <a:t>Share of posts</a:t>
+                      </a:r>
+                    </a:p>
+                  </a:txBody>
+                  <a:tcPr marL="91440" marR="91440" marT="36576" marB="36576" anchor="ctr">
+                    <a:solidFill>
+                      <a:srgbClr val="1C2E6E"/>
+                    </a:solidFill>
+                  </a:tcPr>
+                </a:tc>
+                <a:tc>
+                  <a:txBody>
+                    <a:bodyPr wrap="square"/>
+                    <a:lstStyle/>
+                    <a:p>
+                      <a:pPr algn="l"/>
+                      <a:r>
+                        <a:rPr sz="1400" b="1">
+                          <a:solidFill>
+                            <a:srgbClr val="FFFFFF"/>
+                          </a:solidFill>
+                          <a:latin typeface="Calibri"/>
+                        </a:rPr>
+                        <a:t>Human</a:t>
+                      </a:r>
+                    </a:p>
+                  </a:txBody>
+                  <a:tcPr marL="91440" marR="91440" marT="36576" marB="36576" anchor="ctr">
+                    <a:solidFill>
+                      <a:srgbClr val="1C2E6E"/>
+                    </a:solidFill>
+                  </a:tcPr>
+                </a:tc>
+                <a:tc>
+                  <a:txBody>
+                    <a:bodyPr wrap="square"/>
+                    <a:lstStyle/>
+                    <a:p>
+                      <a:pPr algn="l"/>
+                      <a:r>
+                        <a:rPr sz="1400" b="1">
+                          <a:solidFill>
+                            <a:srgbClr val="FFFFFF"/>
+                          </a:solidFill>
+                          <a:latin typeface="Calibri"/>
+                        </a:rPr>
+                        <a:t>Mini</a:t>
+                      </a:r>
+                    </a:p>
+                  </a:txBody>
+                  <a:tcPr marL="91440" marR="91440" marT="36576" marB="36576" anchor="ctr">
+                    <a:solidFill>
+                      <a:srgbClr val="1C2E6E"/>
+                    </a:solidFill>
+                  </a:tcPr>
+                </a:tc>
+              </a:tr>
+              <a:tr h="457200">
+                <a:tc>
+                  <a:txBody>
+                    <a:bodyPr wrap="square"/>
+                    <a:lstStyle/>
+                    <a:p>
+                      <a:pPr algn="l"/>
+                      <a:r>
+                        <a:rPr sz="1400" b="0">
+                          <a:solidFill>
+                            <a:srgbClr val="1E293B"/>
+                          </a:solidFill>
+                          <a:latin typeface="Calibri"/>
+                        </a:rPr>
+                        <a:t>Happy</a:t>
+                      </a:r>
+                    </a:p>
+                  </a:txBody>
+                  <a:tcPr marL="91440" marR="91440" marT="36576" marB="36576" anchor="ctr">
+                    <a:solidFill>
+                      <a:srgbClr val="FFFFFF"/>
+                    </a:solidFill>
+                  </a:tcPr>
+                </a:tc>
+                <a:tc>
+                  <a:txBody>
+                    <a:bodyPr wrap="square"/>
+                    <a:lstStyle/>
+                    <a:p>
+                      <a:pPr algn="l"/>
+                      <a:r>
+                        <a:rPr sz="1400" b="0">
+                          <a:solidFill>
+                            <a:srgbClr val="1E293B"/>
+                          </a:solidFill>
+                          <a:latin typeface="Calibri"/>
+                        </a:rPr>
+                        <a:t>30%</a:t>
+                      </a:r>
+                    </a:p>
+                  </a:txBody>
+                  <a:tcPr marL="91440" marR="91440" marT="36576" marB="36576" anchor="ctr">
+                    <a:solidFill>
+                      <a:srgbClr val="FFFFFF"/>
+                    </a:solidFill>
+                  </a:tcPr>
+                </a:tc>
+                <a:tc>
+                  <a:txBody>
+                    <a:bodyPr wrap="square"/>
+                    <a:lstStyle/>
+                    <a:p>
+                      <a:pPr algn="l"/>
+                      <a:r>
+                        <a:rPr sz="1400" b="0">
+                          <a:solidFill>
+                            <a:srgbClr val="1E293B"/>
+                          </a:solidFill>
+                          <a:latin typeface="Calibri"/>
+                        </a:rPr>
+                        <a:t>26%</a:t>
+                      </a:r>
+                    </a:p>
+                  </a:txBody>
+                  <a:tcPr marL="91440" marR="91440" marT="36576" marB="36576" anchor="ctr">
+                    <a:solidFill>
+                      <a:srgbClr val="FFFFFF"/>
+                    </a:solidFill>
+                  </a:tcPr>
+                </a:tc>
+              </a:tr>
+              <a:tr h="457200">
+                <a:tc>
+                  <a:txBody>
+                    <a:bodyPr wrap="square"/>
+                    <a:lstStyle/>
+                    <a:p>
+                      <a:pPr algn="l"/>
+                      <a:r>
+                        <a:rPr sz="1400" b="1">
+                          <a:solidFill>
+                            <a:srgbClr val="1E293B"/>
+                          </a:solidFill>
+                          <a:latin typeface="Calibri"/>
+                        </a:rPr>
+                        <a:t>Not happy</a:t>
+                      </a:r>
+                    </a:p>
+                  </a:txBody>
+                  <a:tcPr marL="91440" marR="91440" marT="36576" marB="36576" anchor="ctr">
+                    <a:solidFill>
+                      <a:srgbClr val="FBF3DF"/>
+                    </a:solidFill>
+                  </a:tcPr>
+                </a:tc>
+                <a:tc>
+                  <a:txBody>
+                    <a:bodyPr wrap="square"/>
+                    <a:lstStyle/>
+                    <a:p>
+                      <a:pPr algn="l"/>
+                      <a:r>
+                        <a:rPr sz="1400" b="0">
+                          <a:solidFill>
+                            <a:srgbClr val="1E293B"/>
+                          </a:solidFill>
+                          <a:latin typeface="Calibri"/>
+                        </a:rPr>
+                        <a:t>40%</a:t>
+                      </a:r>
+                    </a:p>
+                  </a:txBody>
+                  <a:tcPr marL="91440" marR="91440" marT="36576" marB="36576" anchor="ctr">
+                    <a:solidFill>
+                      <a:srgbClr val="FBF3DF"/>
+                    </a:solidFill>
+                  </a:tcPr>
+                </a:tc>
+                <a:tc>
+                  <a:txBody>
+                    <a:bodyPr wrap="square"/>
+                    <a:lstStyle/>
+                    <a:p>
+                      <a:pPr algn="l"/>
+                      <a:r>
+                        <a:rPr sz="1400" b="0">
+                          <a:solidFill>
+                            <a:srgbClr val="1E293B"/>
+                          </a:solidFill>
+                          <a:latin typeface="Calibri"/>
+                        </a:rPr>
+                        <a:t>33%</a:t>
+                      </a:r>
+                    </a:p>
+                  </a:txBody>
+                  <a:tcPr marL="91440" marR="91440" marT="36576" marB="36576" anchor="ctr">
+                    <a:solidFill>
+                      <a:srgbClr val="FBF3DF"/>
+                    </a:solidFill>
+                  </a:tcPr>
+                </a:tc>
+              </a:tr>
+              <a:tr h="457200">
+                <a:tc>
+                  <a:txBody>
+                    <a:bodyPr wrap="square"/>
+                    <a:lstStyle/>
+                    <a:p>
+                      <a:pPr algn="l"/>
+                      <a:r>
+                        <a:rPr sz="1400" b="1">
+                          <a:solidFill>
+                            <a:srgbClr val="1E293B"/>
+                          </a:solidFill>
+                          <a:latin typeface="Calibri"/>
+                        </a:rPr>
+                        <a:t>Neutral</a:t>
+                      </a:r>
+                    </a:p>
+                  </a:txBody>
+                  <a:tcPr marL="91440" marR="91440" marT="36576" marB="36576" anchor="ctr">
+                    <a:solidFill>
+                      <a:srgbClr val="FBF3DF"/>
+                    </a:solidFill>
+                  </a:tcPr>
+                </a:tc>
+                <a:tc>
+                  <a:txBody>
+                    <a:bodyPr wrap="square"/>
+                    <a:lstStyle/>
+                    <a:p>
+                      <a:pPr algn="l"/>
+                      <a:r>
+                        <a:rPr sz="1400" b="0">
+                          <a:solidFill>
+                            <a:srgbClr val="1E293B"/>
+                          </a:solidFill>
+                          <a:latin typeface="Calibri"/>
+                        </a:rPr>
+                        <a:t>30%</a:t>
+                      </a:r>
+                    </a:p>
+                  </a:txBody>
+                  <a:tcPr marL="91440" marR="91440" marT="36576" marB="36576" anchor="ctr">
+                    <a:solidFill>
+                      <a:srgbClr val="FBF3DF"/>
+                    </a:solidFill>
+                  </a:tcPr>
+                </a:tc>
+                <a:tc>
+                  <a:txBody>
+                    <a:bodyPr wrap="square"/>
+                    <a:lstStyle/>
+                    <a:p>
+                      <a:pPr algn="l"/>
+                      <a:r>
+                        <a:rPr sz="1400" b="0">
+                          <a:solidFill>
+                            <a:srgbClr val="1E293B"/>
+                          </a:solidFill>
+                          <a:latin typeface="Calibri"/>
+                        </a:rPr>
+                        <a:t>41%</a:t>
+                      </a:r>
+                    </a:p>
+                  </a:txBody>
+                  <a:tcPr marL="91440" marR="91440" marT="36576" marB="36576" anchor="ctr">
+                    <a:solidFill>
+                      <a:srgbClr val="FBF3DF"/>
+                    </a:solidFill>
+                  </a:tcPr>
+                </a:tc>
+              </a:tr>
+            </a:tbl>
+          </a:graphicData>
+        </a:graphic>
+      </p:graphicFrame>
+      <p:sp>
+        <p:nvSpPr>
+          <p:cNvPr id="7" name="Rounded Rectangle 6"/>
+          <p:cNvSpPr/>
+          <p:nvPr/>
+        </p:nvSpPr>
+        <p:spPr>
+          <a:xfrm>
+            <a:off x="7589520" y="3840480"/>
+            <a:ext cx="4050791" cy="2148840"/>
+          </a:xfrm>
+          <a:prstGeom prst="roundRect">
+            <a:avLst>
+              <a:gd name="adj" fmla="val 6000"/>
+            </a:avLst>
+          </a:prstGeom>
+          <a:solidFill>
+            <a:srgbClr val="FBF3DF"/>
+          </a:solidFill>
+          <a:ln>
+            <a:noFill/>
+          </a:ln>
+          <a:effectLst/>
+        </p:spPr>
+        <p:style>
+          <a:lnRef idx="1">
+            <a:schemeClr val="accent1"/>
+          </a:lnRef>
+          <a:fillRef idx="3">
+            <a:schemeClr val="accent1"/>
+          </a:fillRef>
+          <a:effectRef idx="2">
+            <a:schemeClr val="accent1"/>
+          </a:effectRef>
+          <a:fontRef idx="minor">
+            <a:schemeClr val="lt1"/>
+          </a:fontRef>
+        </p:style>
+        <p:txBody>
+          <a:bodyPr rtlCol="0" anchor="ctr"/>
+          <a:lstStyle/>
+          <a:p>
+            <a:pPr algn="ctr"/>
+          </a:p>
+        </p:txBody>
+      </p:sp>
+      <p:sp>
+        <p:nvSpPr>
+          <p:cNvPr id="8" name="TextBox 7"/>
+          <p:cNvSpPr txBox="1"/>
+          <p:nvPr/>
+        </p:nvSpPr>
+        <p:spPr>
+          <a:xfrm>
+            <a:off x="7818120" y="4023360"/>
+            <a:ext cx="3593591" cy="365760"/>
+          </a:xfrm>
+          <a:prstGeom prst="rect">
+            <a:avLst/>
+          </a:prstGeom>
+          <a:noFill/>
+        </p:spPr>
+        <p:txBody>
+          <a:bodyPr wrap="square" lIns="0" rIns="0" tIns="0" bIns="0" anchor="t">
+            <a:spAutoFit/>
+          </a:bodyPr>
+          <a:lstStyle/>
+          <a:p>
+            <a:pPr algn="l">
+              <a:spcAft>
+                <a:spcPts val="600"/>
+              </a:spcAft>
+            </a:pPr>
+            <a:r>
+              <a:rPr sz="1600" b="1" i="0">
+                <a:solidFill>
+                  <a:srgbClr val="1C2E6E"/>
+                </a:solidFill>
+                <a:latin typeface="Calibri"/>
+              </a:rPr>
+              <a:t>What it means</a:t>
+            </a:r>
+          </a:p>
+        </p:txBody>
+      </p:sp>
+      <p:sp>
+        <p:nvSpPr>
+          <p:cNvPr id="9" name="TextBox 8"/>
+          <p:cNvSpPr txBox="1"/>
+          <p:nvPr/>
+        </p:nvSpPr>
+        <p:spPr>
+          <a:xfrm>
+            <a:off x="7818120" y="4407408"/>
+            <a:ext cx="3593591" cy="1417320"/>
+          </a:xfrm>
+          <a:prstGeom prst="rect">
+            <a:avLst/>
+          </a:prstGeom>
+          <a:noFill/>
+        </p:spPr>
+        <p:txBody>
+          <a:bodyPr wrap="square" lIns="0" rIns="0" tIns="0" bIns="0" anchor="t">
+            <a:spAutoFit/>
+          </a:bodyPr>
+          <a:lstStyle/>
+          <a:p>
+            <a:pPr algn="l">
+              <a:spcAft>
+                <a:spcPts val="600"/>
+              </a:spcAft>
+            </a:pPr>
+            <a:r>
+              <a:rPr sz="1400" b="0" i="0">
+                <a:solidFill>
+                  <a:srgbClr val="1E293B"/>
+                </a:solidFill>
+                <a:latin typeface="Calibri"/>
+              </a:rPr>
+              <a:t>Mini reads complaints as neutral, so the corpus not-happy share is likely understated, not inflated.</a:t>
+            </a:r>
+          </a:p>
+        </p:txBody>
+      </p:sp>
+    </p:spTree>
+  </p:cSld>
+  <p:clrMapOvr>
+    <a:masterClrMapping/>
+  </p:clrMapOvr>
+</p:sld>
+</file>
+
+<file path=ppt/slides/slide16.xml><?xml version="1.0" encoding="utf-8"?>
+<p:sld xmlns:a="http://schemas.openxmlformats.org/drawingml/2006/main" xmlns:p="http://schemas.openxmlformats.org/presentationml/2006/main" xmlns:r="http://schemas.openxmlformats.org/officeDocument/2006/relationships">
+  <p:cSld>
+    <p:spTree>
+      <p:nvGrpSpPr>
+        <p:cNvPr id="1" name=""/>
+        <p:cNvGrpSpPr/>
+        <p:nvPr/>
+      </p:nvGrpSpPr>
+      <p:grpSpPr/>
+      <p:sp>
+        <p:nvSpPr>
+          <p:cNvPr id="2" name="TextBox 1"/>
+          <p:cNvSpPr txBox="1"/>
+          <p:nvPr/>
+        </p:nvSpPr>
+        <p:spPr>
+          <a:xfrm>
+            <a:off x="2788920" y="128016"/>
+            <a:ext cx="9052560" cy="1097280"/>
+          </a:xfrm>
+          <a:prstGeom prst="rect">
+            <a:avLst/>
+          </a:prstGeom>
+          <a:noFill/>
+        </p:spPr>
+        <p:txBody>
+          <a:bodyPr wrap="square" lIns="0" rIns="0" tIns="0" bIns="0" anchor="ctr">
+            <a:spAutoFit/>
+          </a:bodyPr>
+          <a:lstStyle/>
+          <a:p>
+            <a:pPr algn="l">
+              <a:spcAft>
+                <a:spcPts val="600"/>
+              </a:spcAft>
+            </a:pPr>
+            <a:r>
+              <a:rPr sz="2600" b="1" i="0">
+                <a:solidFill>
+                  <a:srgbClr val="1C2E6E"/>
+                </a:solidFill>
+                <a:latin typeface="Calibri"/>
+              </a:rPr>
+              <a:t>LLMs miss the equipment jargon that rules catch</a:t>
+            </a:r>
+          </a:p>
+        </p:txBody>
+      </p:sp>
+      <p:sp>
+        <p:nvSpPr>
+          <p:cNvPr id="3" name="TextBox 2"/>
+          <p:cNvSpPr txBox="1"/>
+          <p:nvPr/>
+        </p:nvSpPr>
+        <p:spPr>
+          <a:xfrm>
+            <a:off x="11155680" y="6446520"/>
+            <a:ext cx="548640" cy="274320"/>
+          </a:xfrm>
+          <a:prstGeom prst="rect">
+            <a:avLst/>
+          </a:prstGeom>
+          <a:noFill/>
+        </p:spPr>
+        <p:txBody>
+          <a:bodyPr wrap="square" lIns="0" rIns="0" tIns="0" bIns="0" anchor="t">
+            <a:spAutoFit/>
+          </a:bodyPr>
+          <a:lstStyle/>
+          <a:p>
+            <a:pPr algn="r">
+              <a:spcAft>
+                <a:spcPts val="600"/>
+              </a:spcAft>
+            </a:pPr>
+            <a:r>
+              <a:rPr sz="1000" b="0" i="0">
+                <a:solidFill>
+                  <a:srgbClr val="5B6475"/>
+                </a:solidFill>
+                <a:latin typeface="Calibri"/>
+              </a:rPr>
+              <a:t>16</a:t>
             </a:r>
           </a:p>
         </p:txBody>
@@ -11344,7 +12254,7 @@
 </p:sld>
 </file>
 
-<file path=ppt/slides/slide16.xml><?xml version="1.0" encoding="utf-8"?>
+<file path=ppt/slides/slide17.xml><?xml version="1.0" encoding="utf-8"?>
 <p:sld xmlns:a="http://schemas.openxmlformats.org/drawingml/2006/main" xmlns:p="http://schemas.openxmlformats.org/presentationml/2006/main" xmlns:r="http://schemas.openxmlformats.org/officeDocument/2006/relationships">
   <p:cSld>
     <p:spTree>
@@ -11427,7 +12337,7 @@
                 </a:solidFill>
                 <a:latin typeface="Calibri"/>
               </a:rPr>
-              <a:t>16</a:t>
+              <a:t>17</a:t>
             </a:r>
           </a:p>
         </p:txBody>
@@ -12093,7 +13003,7 @@
 </p:sld>
 </file>
 
-<file path=ppt/slides/slide17.xml><?xml version="1.0" encoding="utf-8"?>
+<file path=ppt/slides/slide18.xml><?xml version="1.0" encoding="utf-8"?>
 <p:sld xmlns:a="http://schemas.openxmlformats.org/drawingml/2006/main" xmlns:p="http://schemas.openxmlformats.org/presentationml/2006/main" xmlns:r="http://schemas.openxmlformats.org/officeDocument/2006/relationships">
   <p:cSld>
     <p:spTree>
@@ -12176,7 +13086,7 @@
                 </a:solidFill>
                 <a:latin typeface="Calibri"/>
               </a:rPr>
-              <a:t>17</a:t>
+              <a:t>18</a:t>
             </a:r>
           </a:p>
         </p:txBody>
@@ -13271,7 +14181,7 @@
 </p:sld>
 </file>
 
-<file path=ppt/slides/slide18.xml><?xml version="1.0" encoding="utf-8"?>
+<file path=ppt/slides/slide19.xml><?xml version="1.0" encoding="utf-8"?>
 <p:sld xmlns:a="http://schemas.openxmlformats.org/drawingml/2006/main" xmlns:p="http://schemas.openxmlformats.org/presentationml/2006/main" xmlns:r="http://schemas.openxmlformats.org/officeDocument/2006/relationships">
   <p:cSld>
     <p:spTree>
@@ -13487,277 +14397,7 @@
                 </a:solidFill>
                 <a:latin typeface="Calibri"/>
               </a:rPr>
-              <a:t>18</a:t>
-            </a:r>
-          </a:p>
-        </p:txBody>
-      </p:sp>
-    </p:spTree>
-  </p:cSld>
-  <p:clrMapOvr>
-    <a:masterClrMapping/>
-  </p:clrMapOvr>
-</p:sld>
-</file>
-
-<file path=ppt/slides/slide19.xml><?xml version="1.0" encoding="utf-8"?>
-<p:sld xmlns:a="http://schemas.openxmlformats.org/drawingml/2006/main" xmlns:p="http://schemas.openxmlformats.org/presentationml/2006/main" xmlns:r="http://schemas.openxmlformats.org/officeDocument/2006/relationships">
-  <p:cSld>
-    <p:spTree>
-      <p:nvGrpSpPr>
-        <p:cNvPr id="1" name=""/>
-        <p:cNvGrpSpPr/>
-        <p:nvPr/>
-      </p:nvGrpSpPr>
-      <p:grpSpPr/>
-      <p:sp>
-        <p:nvSpPr>
-          <p:cNvPr id="2" name="TextBox 1"/>
-          <p:cNvSpPr txBox="1"/>
-          <p:nvPr/>
-        </p:nvSpPr>
-        <p:spPr>
-          <a:xfrm>
-            <a:off x="2788920" y="128016"/>
-            <a:ext cx="9052560" cy="1097280"/>
-          </a:xfrm>
-          <a:prstGeom prst="rect">
-            <a:avLst/>
-          </a:prstGeom>
-          <a:noFill/>
-        </p:spPr>
-        <p:txBody>
-          <a:bodyPr wrap="square" lIns="0" rIns="0" tIns="0" bIns="0" anchor="ctr">
-            <a:spAutoFit/>
-          </a:bodyPr>
-          <a:lstStyle/>
-          <a:p>
-            <a:pPr algn="l">
-              <a:spcAft>
-                <a:spcPts val="600"/>
-              </a:spcAft>
-            </a:pPr>
-            <a:r>
-              <a:rPr sz="2600" b="1" i="0">
-                <a:solidFill>
-                  <a:srgbClr val="1C2E6E"/>
-                </a:solidFill>
-                <a:latin typeface="Calibri"/>
-              </a:rPr>
-              <a:t>GPT-4o moved 2,606 posts out of General Discussion</a:t>
-            </a:r>
-          </a:p>
-        </p:txBody>
-      </p:sp>
-      <p:sp>
-        <p:nvSpPr>
-          <p:cNvPr id="3" name="TextBox 2"/>
-          <p:cNvSpPr txBox="1"/>
-          <p:nvPr/>
-        </p:nvSpPr>
-        <p:spPr>
-          <a:xfrm>
-            <a:off x="11155680" y="6446520"/>
-            <a:ext cx="548640" cy="274320"/>
-          </a:xfrm>
-          <a:prstGeom prst="rect">
-            <a:avLst/>
-          </a:prstGeom>
-          <a:noFill/>
-        </p:spPr>
-        <p:txBody>
-          <a:bodyPr wrap="square" lIns="0" rIns="0" tIns="0" bIns="0" anchor="t">
-            <a:spAutoFit/>
-          </a:bodyPr>
-          <a:lstStyle/>
-          <a:p>
-            <a:pPr algn="r">
-              <a:spcAft>
-                <a:spcPts val="600"/>
-              </a:spcAft>
-            </a:pPr>
-            <a:r>
-              <a:rPr sz="1000" b="0" i="0">
-                <a:solidFill>
-                  <a:srgbClr val="5B6475"/>
-                </a:solidFill>
-                <a:latin typeface="Calibri"/>
-              </a:rPr>
               <a:t>19</a:t>
-            </a:r>
-          </a:p>
-        </p:txBody>
-      </p:sp>
-      <p:graphicFrame>
-        <p:nvGraphicFramePr>
-          <p:cNvPr id="4" name="Chart 3"/>
-          <p:cNvGraphicFramePr>
-            <a:graphicFrameLocks noGrp="1"/>
-          </p:cNvGraphicFramePr>
-          <p:nvPr/>
-        </p:nvGraphicFramePr>
-        <p:xfrm>
-          <a:off x="548640" y="1600200"/>
-          <a:ext cx="7498079" cy="4617720"/>
-        </p:xfrm>
-        <a:graphic>
-          <a:graphicData uri="http://schemas.openxmlformats.org/drawingml/2006/chart">
-            <c:chart xmlns:c="http://schemas.openxmlformats.org/drawingml/2006/chart" r:id="rId3"/>
-          </a:graphicData>
-        </a:graphic>
-      </p:graphicFrame>
-      <p:sp>
-        <p:nvSpPr>
-          <p:cNvPr id="5" name="Rounded Rectangle 4"/>
-          <p:cNvSpPr/>
-          <p:nvPr/>
-        </p:nvSpPr>
-        <p:spPr>
-          <a:xfrm>
-            <a:off x="8321040" y="1828800"/>
-            <a:ext cx="3319272" cy="4206240"/>
-          </a:xfrm>
-          <a:prstGeom prst="roundRect">
-            <a:avLst>
-              <a:gd name="adj" fmla="val 6000"/>
-            </a:avLst>
-          </a:prstGeom>
-          <a:solidFill>
-            <a:srgbClr val="FBF3DF"/>
-          </a:solidFill>
-          <a:ln>
-            <a:noFill/>
-          </a:ln>
-          <a:effectLst/>
-        </p:spPr>
-        <p:style>
-          <a:lnRef idx="1">
-            <a:schemeClr val="accent1"/>
-          </a:lnRef>
-          <a:fillRef idx="3">
-            <a:schemeClr val="accent1"/>
-          </a:fillRef>
-          <a:effectRef idx="2">
-            <a:schemeClr val="accent1"/>
-          </a:effectRef>
-          <a:fontRef idx="minor">
-            <a:schemeClr val="lt1"/>
-          </a:fontRef>
-        </p:style>
-        <p:txBody>
-          <a:bodyPr rtlCol="0" anchor="ctr"/>
-          <a:lstStyle/>
-          <a:p>
-            <a:pPr algn="ctr"/>
-          </a:p>
-        </p:txBody>
-      </p:sp>
-      <p:sp>
-        <p:nvSpPr>
-          <p:cNvPr id="6" name="TextBox 5"/>
-          <p:cNvSpPr txBox="1"/>
-          <p:nvPr/>
-        </p:nvSpPr>
-        <p:spPr>
-          <a:xfrm>
-            <a:off x="8549640" y="2011680"/>
-            <a:ext cx="2862072" cy="365760"/>
-          </a:xfrm>
-          <a:prstGeom prst="rect">
-            <a:avLst/>
-          </a:prstGeom>
-          <a:noFill/>
-        </p:spPr>
-        <p:txBody>
-          <a:bodyPr wrap="square" lIns="0" rIns="0" tIns="0" bIns="0" anchor="t">
-            <a:spAutoFit/>
-          </a:bodyPr>
-          <a:lstStyle/>
-          <a:p>
-            <a:pPr algn="l">
-              <a:spcAft>
-                <a:spcPts val="600"/>
-              </a:spcAft>
-            </a:pPr>
-            <a:r>
-              <a:rPr sz="1700" b="1" i="0">
-                <a:solidFill>
-                  <a:srgbClr val="1C2E6E"/>
-                </a:solidFill>
-                <a:latin typeface="Calibri"/>
-              </a:rPr>
-              <a:t>Read with care</a:t>
-            </a:r>
-          </a:p>
-        </p:txBody>
-      </p:sp>
-      <p:sp>
-        <p:nvSpPr>
-          <p:cNvPr id="7" name="TextBox 6"/>
-          <p:cNvSpPr txBox="1"/>
-          <p:nvPr/>
-        </p:nvSpPr>
-        <p:spPr>
-          <a:xfrm>
-            <a:off x="8549640" y="2395728"/>
-            <a:ext cx="2862072" cy="3474720"/>
-          </a:xfrm>
-          <a:prstGeom prst="rect">
-            <a:avLst/>
-          </a:prstGeom>
-          <a:noFill/>
-        </p:spPr>
-        <p:txBody>
-          <a:bodyPr wrap="square" lIns="0" rIns="0" tIns="0" bIns="0" anchor="t">
-            <a:spAutoFit/>
-          </a:bodyPr>
-          <a:lstStyle/>
-          <a:p>
-            <a:pPr algn="l">
-              <a:spcAft>
-                <a:spcPts val="600"/>
-              </a:spcAft>
-            </a:pPr>
-            <a:r>
-              <a:rPr sz="1500" b="0" i="0">
-                <a:solidFill>
-                  <a:srgbClr val="1E293B"/>
-                </a:solidFill>
-                <a:latin typeface="Calibri"/>
-              </a:rPr>
-              <a:t>57% of corpus rows had no rule match.</a:t>
-            </a:r>
-          </a:p>
-          <a:p>
-            <a:pPr algn="l">
-              <a:spcAft>
-                <a:spcPts val="600"/>
-              </a:spcAft>
-            </a:pPr>
-            <a:r>
-              <a:rPr sz="1500" b="0" i="0">
-                <a:solidFill>
-                  <a:srgbClr val="1E293B"/>
-                </a:solidFill>
-                <a:latin typeface="Calibri"/>
-              </a:rPr>
-              <a:t>Most reassigned posts became Network Quality (+2,080).</a:t>
-            </a:r>
-          </a:p>
-          <a:p>
-            <a:pPr algn="l">
-              <a:spcAft>
-                <a:spcPts val="600"/>
-              </a:spcAft>
-            </a:pPr>
-            <a:r>
-              <a:rPr sz="1500" b="0" i="0">
-                <a:solidFill>
-                  <a:srgbClr val="1E293B"/>
-                </a:solidFill>
-                <a:latin typeface="Calibri"/>
-              </a:rPr>
-              <a:t>No human has checked these 2,606 moves yet.</a:t>
             </a:r>
           </a:p>
         </p:txBody>
@@ -14396,7 +15036,7 @@
                 </a:solidFill>
                 <a:latin typeface="Calibri"/>
               </a:rPr>
-              <a:t>Two in five posts are not happy, and VADER hides it</a:t>
+              <a:t>GPT-4o moved 2,606 posts out of General Discussion</a:t>
             </a:r>
           </a:p>
         </p:txBody>
@@ -14450,7 +15090,7 @@
         </p:nvGraphicFramePr>
         <p:xfrm>
           <a:off x="548640" y="1600200"/>
-          <a:ext cx="6949440" cy="4389120"/>
+          <a:ext cx="7498079" cy="4617720"/>
         </p:xfrm>
         <a:graphic>
           <a:graphicData uri="http://schemas.openxmlformats.org/drawingml/2006/chart">
@@ -14460,131 +15100,14 @@
       </p:graphicFrame>
       <p:sp>
         <p:nvSpPr>
-          <p:cNvPr id="5" name="TextBox 4"/>
-          <p:cNvSpPr txBox="1"/>
-          <p:nvPr/>
-        </p:nvSpPr>
-        <p:spPr>
-          <a:xfrm>
-            <a:off x="548640" y="6053328"/>
-            <a:ext cx="6949440" cy="320040"/>
-          </a:xfrm>
-          <a:prstGeom prst="rect">
-            <a:avLst/>
-          </a:prstGeom>
-          <a:noFill/>
-        </p:spPr>
-        <p:txBody>
-          <a:bodyPr wrap="square" lIns="0" rIns="0" tIns="0" bIns="0" anchor="t">
-            <a:spAutoFit/>
-          </a:bodyPr>
-          <a:lstStyle/>
-          <a:p>
-            <a:pPr algn="l">
-              <a:spcAft>
-                <a:spcPts val="600"/>
-              </a:spcAft>
-            </a:pPr>
-            <a:r>
-              <a:rPr sz="1200" b="0" i="0">
-                <a:solidFill>
-                  <a:srgbClr val="5B6475"/>
-                </a:solidFill>
-                <a:latin typeface="Calibri"/>
-              </a:rPr>
-              <a:t>Shares in %; corpus n = 9,162, gold n = 295 (wave 1)</a:t>
-            </a:r>
-          </a:p>
-        </p:txBody>
-      </p:sp>
-      <p:sp>
-        <p:nvSpPr>
-          <p:cNvPr id="6" name="TextBox 5"/>
-          <p:cNvSpPr txBox="1"/>
-          <p:nvPr/>
-        </p:nvSpPr>
-        <p:spPr>
-          <a:xfrm>
-            <a:off x="7863840" y="1737360"/>
-            <a:ext cx="3749039" cy="457200"/>
-          </a:xfrm>
-          <a:prstGeom prst="rect">
-            <a:avLst/>
-          </a:prstGeom>
-          <a:noFill/>
-        </p:spPr>
-        <p:txBody>
-          <a:bodyPr wrap="square" lIns="0" rIns="0" tIns="0" bIns="0" anchor="t">
-            <a:spAutoFit/>
-          </a:bodyPr>
-          <a:lstStyle/>
-          <a:p>
-            <a:pPr algn="l">
-              <a:spcAft>
-                <a:spcPts val="600"/>
-              </a:spcAft>
-            </a:pPr>
-            <a:r>
-              <a:rPr sz="3000" b="1" i="0">
-                <a:solidFill>
-                  <a:srgbClr val="1C2E6E"/>
-                </a:solidFill>
-                <a:latin typeface="Calibri"/>
-              </a:rPr>
-              <a:t>44% → 42% → 40%</a:t>
-            </a:r>
-          </a:p>
-        </p:txBody>
-      </p:sp>
-      <p:sp>
-        <p:nvSpPr>
-          <p:cNvPr id="7" name="TextBox 6"/>
-          <p:cNvSpPr txBox="1"/>
-          <p:nvPr/>
-        </p:nvSpPr>
-        <p:spPr>
-          <a:xfrm>
-            <a:off x="7863840" y="2240280"/>
-            <a:ext cx="3749039" cy="822960"/>
-          </a:xfrm>
-          <a:prstGeom prst="rect">
-            <a:avLst/>
-          </a:prstGeom>
-          <a:noFill/>
-        </p:spPr>
-        <p:txBody>
-          <a:bodyPr wrap="square" lIns="0" rIns="0" tIns="0" bIns="0" anchor="t">
-            <a:spAutoFit/>
-          </a:bodyPr>
-          <a:lstStyle/>
-          <a:p>
-            <a:pPr algn="l">
-              <a:spcAft>
-                <a:spcPts val="600"/>
-              </a:spcAft>
-            </a:pPr>
-            <a:r>
-              <a:rPr sz="1500" b="0" i="0">
-                <a:solidFill>
-                  <a:srgbClr val="5B6475"/>
-                </a:solidFill>
-                <a:latin typeface="Calibri"/>
-              </a:rPr>
-              <a:t>not happy: per post, per thread, outside outages</a:t>
-            </a:r>
-          </a:p>
-        </p:txBody>
-      </p:sp>
-      <p:sp>
-        <p:nvSpPr>
-          <p:cNvPr id="8" name="Rounded Rectangle 7"/>
+          <p:cNvPr id="5" name="Rounded Rectangle 4"/>
           <p:cNvSpPr/>
           <p:nvPr/>
         </p:nvSpPr>
         <p:spPr>
           <a:xfrm>
-            <a:off x="7863840" y="3657600"/>
-            <a:ext cx="3776472" cy="2331720"/>
+            <a:off x="8321040" y="1828800"/>
+            <a:ext cx="3319272" cy="4206240"/>
           </a:xfrm>
           <a:prstGeom prst="roundRect">
             <a:avLst>
@@ -14623,14 +15146,14 @@
       </p:sp>
       <p:sp>
         <p:nvSpPr>
-          <p:cNvPr id="9" name="TextBox 8"/>
+          <p:cNvPr id="6" name="TextBox 5"/>
           <p:cNvSpPr txBox="1"/>
           <p:nvPr/>
         </p:nvSpPr>
         <p:spPr>
           <a:xfrm>
-            <a:off x="8092440" y="3840480"/>
-            <a:ext cx="3319272" cy="365760"/>
+            <a:off x="8549640" y="2011680"/>
+            <a:ext cx="2862072" cy="365760"/>
           </a:xfrm>
           <a:prstGeom prst="rect">
             <a:avLst/>
@@ -14655,21 +15178,21 @@
                 </a:solidFill>
                 <a:latin typeface="Calibri"/>
               </a:rPr>
-              <a:t>VADER reverses it</a:t>
-            </a:r>
-          </a:p>
-        </p:txBody>
-      </p:sp>
-      <p:sp>
-        <p:nvSpPr>
-          <p:cNvPr id="10" name="TextBox 9"/>
+              <a:t>Read with care</a:t>
+            </a:r>
+          </a:p>
+        </p:txBody>
+      </p:sp>
+      <p:sp>
+        <p:nvSpPr>
+          <p:cNvPr id="7" name="TextBox 6"/>
           <p:cNvSpPr txBox="1"/>
           <p:nvPr/>
         </p:nvSpPr>
         <p:spPr>
           <a:xfrm>
-            <a:off x="8092440" y="4224528"/>
-            <a:ext cx="3319272" cy="1600199"/>
+            <a:off x="8549640" y="2395728"/>
+            <a:ext cx="2862072" cy="3474720"/>
           </a:xfrm>
           <a:prstGeom prst="rect">
             <a:avLst/>
@@ -14694,7 +15217,39 @@
                 </a:solidFill>
                 <a:latin typeface="Calibri"/>
               </a:rPr>
-              <a:t>Of 4,180 posts VADER calls happy, GPT-4o-mini reads 1,480 as not happy and 1,538 as neutral.</a:t>
+              <a:t>57% of corpus rows had no rule match.</a:t>
+            </a:r>
+          </a:p>
+          <a:p>
+            <a:pPr algn="l">
+              <a:spcAft>
+                <a:spcPts val="600"/>
+              </a:spcAft>
+            </a:pPr>
+            <a:r>
+              <a:rPr sz="1500" b="0" i="0">
+                <a:solidFill>
+                  <a:srgbClr val="1E293B"/>
+                </a:solidFill>
+                <a:latin typeface="Calibri"/>
+              </a:rPr>
+              <a:t>Most reassigned posts became Network Quality (+2,080).</a:t>
+            </a:r>
+          </a:p>
+          <a:p>
+            <a:pPr algn="l">
+              <a:spcAft>
+                <a:spcPts val="600"/>
+              </a:spcAft>
+            </a:pPr>
+            <a:r>
+              <a:rPr sz="1500" b="0" i="0">
+                <a:solidFill>
+                  <a:srgbClr val="1E293B"/>
+                </a:solidFill>
+                <a:latin typeface="Calibri"/>
+              </a:rPr>
+              <a:t>No human has checked these 2,606 moves yet.</a:t>
             </a:r>
           </a:p>
         </p:txBody>
@@ -14751,7 +15306,7 @@
                 </a:solidFill>
                 <a:latin typeface="Calibri"/>
               </a:rPr>
-              <a:t>Network leads; platforms and brands differ less than they seem</a:t>
+              <a:t>Two in five posts are not happy, and VADER hides it</a:t>
             </a:r>
           </a:p>
         </p:txBody>
@@ -14791,6 +15346,361 @@
                 <a:latin typeface="Calibri"/>
               </a:rPr>
               <a:t>21</a:t>
+            </a:r>
+          </a:p>
+        </p:txBody>
+      </p:sp>
+      <p:graphicFrame>
+        <p:nvGraphicFramePr>
+          <p:cNvPr id="4" name="Chart 3"/>
+          <p:cNvGraphicFramePr>
+            <a:graphicFrameLocks noGrp="1"/>
+          </p:cNvGraphicFramePr>
+          <p:nvPr/>
+        </p:nvGraphicFramePr>
+        <p:xfrm>
+          <a:off x="548640" y="1600200"/>
+          <a:ext cx="6949440" cy="4389120"/>
+        </p:xfrm>
+        <a:graphic>
+          <a:graphicData uri="http://schemas.openxmlformats.org/drawingml/2006/chart">
+            <c:chart xmlns:c="http://schemas.openxmlformats.org/drawingml/2006/chart" r:id="rId3"/>
+          </a:graphicData>
+        </a:graphic>
+      </p:graphicFrame>
+      <p:sp>
+        <p:nvSpPr>
+          <p:cNvPr id="5" name="TextBox 4"/>
+          <p:cNvSpPr txBox="1"/>
+          <p:nvPr/>
+        </p:nvSpPr>
+        <p:spPr>
+          <a:xfrm>
+            <a:off x="548640" y="6053328"/>
+            <a:ext cx="6949440" cy="320040"/>
+          </a:xfrm>
+          <a:prstGeom prst="rect">
+            <a:avLst/>
+          </a:prstGeom>
+          <a:noFill/>
+        </p:spPr>
+        <p:txBody>
+          <a:bodyPr wrap="square" lIns="0" rIns="0" tIns="0" bIns="0" anchor="t">
+            <a:spAutoFit/>
+          </a:bodyPr>
+          <a:lstStyle/>
+          <a:p>
+            <a:pPr algn="l">
+              <a:spcAft>
+                <a:spcPts val="600"/>
+              </a:spcAft>
+            </a:pPr>
+            <a:r>
+              <a:rPr sz="1200" b="0" i="0">
+                <a:solidFill>
+                  <a:srgbClr val="5B6475"/>
+                </a:solidFill>
+                <a:latin typeface="Calibri"/>
+              </a:rPr>
+              <a:t>Shares in %; corpus n = 9,162, gold n = 295 (wave 1)</a:t>
+            </a:r>
+          </a:p>
+        </p:txBody>
+      </p:sp>
+      <p:sp>
+        <p:nvSpPr>
+          <p:cNvPr id="6" name="TextBox 5"/>
+          <p:cNvSpPr txBox="1"/>
+          <p:nvPr/>
+        </p:nvSpPr>
+        <p:spPr>
+          <a:xfrm>
+            <a:off x="7863840" y="1737360"/>
+            <a:ext cx="3749039" cy="457200"/>
+          </a:xfrm>
+          <a:prstGeom prst="rect">
+            <a:avLst/>
+          </a:prstGeom>
+          <a:noFill/>
+        </p:spPr>
+        <p:txBody>
+          <a:bodyPr wrap="square" lIns="0" rIns="0" tIns="0" bIns="0" anchor="t">
+            <a:spAutoFit/>
+          </a:bodyPr>
+          <a:lstStyle/>
+          <a:p>
+            <a:pPr algn="l">
+              <a:spcAft>
+                <a:spcPts val="600"/>
+              </a:spcAft>
+            </a:pPr>
+            <a:r>
+              <a:rPr sz="3000" b="1" i="0">
+                <a:solidFill>
+                  <a:srgbClr val="1C2E6E"/>
+                </a:solidFill>
+                <a:latin typeface="Calibri"/>
+              </a:rPr>
+              <a:t>44% → 42% → 40%</a:t>
+            </a:r>
+          </a:p>
+        </p:txBody>
+      </p:sp>
+      <p:sp>
+        <p:nvSpPr>
+          <p:cNvPr id="7" name="TextBox 6"/>
+          <p:cNvSpPr txBox="1"/>
+          <p:nvPr/>
+        </p:nvSpPr>
+        <p:spPr>
+          <a:xfrm>
+            <a:off x="7863840" y="2240280"/>
+            <a:ext cx="3749039" cy="822960"/>
+          </a:xfrm>
+          <a:prstGeom prst="rect">
+            <a:avLst/>
+          </a:prstGeom>
+          <a:noFill/>
+        </p:spPr>
+        <p:txBody>
+          <a:bodyPr wrap="square" lIns="0" rIns="0" tIns="0" bIns="0" anchor="t">
+            <a:spAutoFit/>
+          </a:bodyPr>
+          <a:lstStyle/>
+          <a:p>
+            <a:pPr algn="l">
+              <a:spcAft>
+                <a:spcPts val="600"/>
+              </a:spcAft>
+            </a:pPr>
+            <a:r>
+              <a:rPr sz="1500" b="0" i="0">
+                <a:solidFill>
+                  <a:srgbClr val="5B6475"/>
+                </a:solidFill>
+                <a:latin typeface="Calibri"/>
+              </a:rPr>
+              <a:t>not happy: per post, per thread, outside outages</a:t>
+            </a:r>
+          </a:p>
+        </p:txBody>
+      </p:sp>
+      <p:sp>
+        <p:nvSpPr>
+          <p:cNvPr id="8" name="Rounded Rectangle 7"/>
+          <p:cNvSpPr/>
+          <p:nvPr/>
+        </p:nvSpPr>
+        <p:spPr>
+          <a:xfrm>
+            <a:off x="7863840" y="3657600"/>
+            <a:ext cx="3776472" cy="2331720"/>
+          </a:xfrm>
+          <a:prstGeom prst="roundRect">
+            <a:avLst>
+              <a:gd name="adj" fmla="val 6000"/>
+            </a:avLst>
+          </a:prstGeom>
+          <a:solidFill>
+            <a:srgbClr val="FBF3DF"/>
+          </a:solidFill>
+          <a:ln>
+            <a:noFill/>
+          </a:ln>
+          <a:effectLst/>
+        </p:spPr>
+        <p:style>
+          <a:lnRef idx="1">
+            <a:schemeClr val="accent1"/>
+          </a:lnRef>
+          <a:fillRef idx="3">
+            <a:schemeClr val="accent1"/>
+          </a:fillRef>
+          <a:effectRef idx="2">
+            <a:schemeClr val="accent1"/>
+          </a:effectRef>
+          <a:fontRef idx="minor">
+            <a:schemeClr val="lt1"/>
+          </a:fontRef>
+        </p:style>
+        <p:txBody>
+          <a:bodyPr rtlCol="0" anchor="ctr"/>
+          <a:lstStyle/>
+          <a:p>
+            <a:pPr algn="ctr"/>
+          </a:p>
+        </p:txBody>
+      </p:sp>
+      <p:sp>
+        <p:nvSpPr>
+          <p:cNvPr id="9" name="TextBox 8"/>
+          <p:cNvSpPr txBox="1"/>
+          <p:nvPr/>
+        </p:nvSpPr>
+        <p:spPr>
+          <a:xfrm>
+            <a:off x="8092440" y="3840480"/>
+            <a:ext cx="3319272" cy="365760"/>
+          </a:xfrm>
+          <a:prstGeom prst="rect">
+            <a:avLst/>
+          </a:prstGeom>
+          <a:noFill/>
+        </p:spPr>
+        <p:txBody>
+          <a:bodyPr wrap="square" lIns="0" rIns="0" tIns="0" bIns="0" anchor="t">
+            <a:spAutoFit/>
+          </a:bodyPr>
+          <a:lstStyle/>
+          <a:p>
+            <a:pPr algn="l">
+              <a:spcAft>
+                <a:spcPts val="600"/>
+              </a:spcAft>
+            </a:pPr>
+            <a:r>
+              <a:rPr sz="1700" b="1" i="0">
+                <a:solidFill>
+                  <a:srgbClr val="1C2E6E"/>
+                </a:solidFill>
+                <a:latin typeface="Calibri"/>
+              </a:rPr>
+              <a:t>VADER reverses it</a:t>
+            </a:r>
+          </a:p>
+        </p:txBody>
+      </p:sp>
+      <p:sp>
+        <p:nvSpPr>
+          <p:cNvPr id="10" name="TextBox 9"/>
+          <p:cNvSpPr txBox="1"/>
+          <p:nvPr/>
+        </p:nvSpPr>
+        <p:spPr>
+          <a:xfrm>
+            <a:off x="8092440" y="4224528"/>
+            <a:ext cx="3319272" cy="1600199"/>
+          </a:xfrm>
+          <a:prstGeom prst="rect">
+            <a:avLst/>
+          </a:prstGeom>
+          <a:noFill/>
+        </p:spPr>
+        <p:txBody>
+          <a:bodyPr wrap="square" lIns="0" rIns="0" tIns="0" bIns="0" anchor="t">
+            <a:spAutoFit/>
+          </a:bodyPr>
+          <a:lstStyle/>
+          <a:p>
+            <a:pPr algn="l">
+              <a:spcAft>
+                <a:spcPts val="600"/>
+              </a:spcAft>
+            </a:pPr>
+            <a:r>
+              <a:rPr sz="1500" b="0" i="0">
+                <a:solidFill>
+                  <a:srgbClr val="1E293B"/>
+                </a:solidFill>
+                <a:latin typeface="Calibri"/>
+              </a:rPr>
+              <a:t>Of 4,180 posts VADER calls happy, GPT-4o-mini reads 1,480 as not happy and 1,538 as neutral.</a:t>
+            </a:r>
+          </a:p>
+        </p:txBody>
+      </p:sp>
+    </p:spTree>
+  </p:cSld>
+  <p:clrMapOvr>
+    <a:masterClrMapping/>
+  </p:clrMapOvr>
+</p:sld>
+</file>
+
+<file path=ppt/slides/slide22.xml><?xml version="1.0" encoding="utf-8"?>
+<p:sld xmlns:a="http://schemas.openxmlformats.org/drawingml/2006/main" xmlns:p="http://schemas.openxmlformats.org/presentationml/2006/main" xmlns:r="http://schemas.openxmlformats.org/officeDocument/2006/relationships">
+  <p:cSld>
+    <p:spTree>
+      <p:nvGrpSpPr>
+        <p:cNvPr id="1" name=""/>
+        <p:cNvGrpSpPr/>
+        <p:nvPr/>
+      </p:nvGrpSpPr>
+      <p:grpSpPr/>
+      <p:sp>
+        <p:nvSpPr>
+          <p:cNvPr id="2" name="TextBox 1"/>
+          <p:cNvSpPr txBox="1"/>
+          <p:nvPr/>
+        </p:nvSpPr>
+        <p:spPr>
+          <a:xfrm>
+            <a:off x="2788920" y="128016"/>
+            <a:ext cx="9052560" cy="1097280"/>
+          </a:xfrm>
+          <a:prstGeom prst="rect">
+            <a:avLst/>
+          </a:prstGeom>
+          <a:noFill/>
+        </p:spPr>
+        <p:txBody>
+          <a:bodyPr wrap="square" lIns="0" rIns="0" tIns="0" bIns="0" anchor="ctr">
+            <a:spAutoFit/>
+          </a:bodyPr>
+          <a:lstStyle/>
+          <a:p>
+            <a:pPr algn="l">
+              <a:spcAft>
+                <a:spcPts val="600"/>
+              </a:spcAft>
+            </a:pPr>
+            <a:r>
+              <a:rPr sz="2600" b="1" i="0">
+                <a:solidFill>
+                  <a:srgbClr val="1C2E6E"/>
+                </a:solidFill>
+                <a:latin typeface="Calibri"/>
+              </a:rPr>
+              <a:t>Network leads; platforms and brands differ less than they seem</a:t>
+            </a:r>
+          </a:p>
+        </p:txBody>
+      </p:sp>
+      <p:sp>
+        <p:nvSpPr>
+          <p:cNvPr id="3" name="TextBox 2"/>
+          <p:cNvSpPr txBox="1"/>
+          <p:nvPr/>
+        </p:nvSpPr>
+        <p:spPr>
+          <a:xfrm>
+            <a:off x="11155680" y="6446520"/>
+            <a:ext cx="548640" cy="274320"/>
+          </a:xfrm>
+          <a:prstGeom prst="rect">
+            <a:avLst/>
+          </a:prstGeom>
+          <a:noFill/>
+        </p:spPr>
+        <p:txBody>
+          <a:bodyPr wrap="square" lIns="0" rIns="0" tIns="0" bIns="0" anchor="t">
+            <a:spAutoFit/>
+          </a:bodyPr>
+          <a:lstStyle/>
+          <a:p>
+            <a:pPr algn="r">
+              <a:spcAft>
+                <a:spcPts val="600"/>
+              </a:spcAft>
+            </a:pPr>
+            <a:r>
+              <a:rPr sz="1000" b="0" i="0">
+                <a:solidFill>
+                  <a:srgbClr val="5B6475"/>
+                </a:solidFill>
+                <a:latin typeface="Calibri"/>
+              </a:rPr>
+              <a:t>22</a:t>
             </a:r>
           </a:p>
         </p:txBody>
@@ -15794,7 +16704,7 @@
 </p:sld>
 </file>
 
-<file path=ppt/slides/slide22.xml><?xml version="1.0" encoding="utf-8"?>
+<file path=ppt/slides/slide23.xml><?xml version="1.0" encoding="utf-8"?>
 <p:sld xmlns:a="http://schemas.openxmlformats.org/drawingml/2006/main" xmlns:p="http://schemas.openxmlformats.org/presentationml/2006/main" xmlns:r="http://schemas.openxmlformats.org/officeDocument/2006/relationships">
   <p:cSld>
     <p:spTree>
@@ -15877,7 +16787,7 @@
                 </a:solidFill>
                 <a:latin typeface="Calibri"/>
               </a:rPr>
-              <a:t>22</a:t>
+              <a:t>23</a:t>
             </a:r>
           </a:p>
         </p:txBody>
@@ -16428,7 +17338,7 @@
 </p:sld>
 </file>
 
-<file path=ppt/slides/slide23.xml><?xml version="1.0" encoding="utf-8"?>
+<file path=ppt/slides/slide24.xml><?xml version="1.0" encoding="utf-8"?>
 <p:sld xmlns:a="http://schemas.openxmlformats.org/drawingml/2006/main" xmlns:p="http://schemas.openxmlformats.org/presentationml/2006/main" xmlns:r="http://schemas.openxmlformats.org/officeDocument/2006/relationships">
   <p:cSld>
     <p:spTree>
@@ -16511,7 +17421,7 @@
                 </a:solidFill>
                 <a:latin typeface="Calibri"/>
               </a:rPr>
-              <a:t>23</a:t>
+              <a:t>24</a:t>
             </a:r>
           </a:p>
         </p:txBody>
@@ -17131,235 +18041,6 @@
                 <a:latin typeface="Calibri"/>
               </a:rPr>
               <a:t>Demo: open dashboard/index_v2.html</a:t>
-            </a:r>
-          </a:p>
-        </p:txBody>
-      </p:sp>
-    </p:spTree>
-  </p:cSld>
-  <p:clrMapOvr>
-    <a:masterClrMapping/>
-  </p:clrMapOvr>
-</p:sld>
-</file>
-
-<file path=ppt/slides/slide24.xml><?xml version="1.0" encoding="utf-8"?>
-<p:sld xmlns:a="http://schemas.openxmlformats.org/drawingml/2006/main" xmlns:p="http://schemas.openxmlformats.org/presentationml/2006/main" xmlns:r="http://schemas.openxmlformats.org/officeDocument/2006/relationships">
-  <p:cSld>
-    <p:spTree>
-      <p:nvGrpSpPr>
-        <p:cNvPr id="1" name=""/>
-        <p:cNvGrpSpPr/>
-        <p:nvPr/>
-      </p:nvGrpSpPr>
-      <p:grpSpPr/>
-      <p:sp>
-        <p:nvSpPr>
-          <p:cNvPr id="2" name="Rounded Rectangle 1"/>
-          <p:cNvSpPr/>
-          <p:nvPr/>
-        </p:nvSpPr>
-        <p:spPr>
-          <a:xfrm>
-            <a:off x="822959" y="2148840"/>
-            <a:ext cx="1234440" cy="1234440"/>
-          </a:xfrm>
-          <a:prstGeom prst="roundRect">
-            <a:avLst>
-              <a:gd name="adj" fmla="val 12000"/>
-            </a:avLst>
-          </a:prstGeom>
-          <a:solidFill>
-            <a:srgbClr val="D29B08"/>
-          </a:solidFill>
-          <a:ln>
-            <a:noFill/>
-          </a:ln>
-          <a:effectLst/>
-        </p:spPr>
-        <p:style>
-          <a:lnRef idx="1">
-            <a:schemeClr val="accent1"/>
-          </a:lnRef>
-          <a:fillRef idx="3">
-            <a:schemeClr val="accent1"/>
-          </a:fillRef>
-          <a:effectRef idx="2">
-            <a:schemeClr val="accent1"/>
-          </a:effectRef>
-          <a:fontRef idx="minor">
-            <a:schemeClr val="lt1"/>
-          </a:fontRef>
-        </p:style>
-        <p:txBody>
-          <a:bodyPr rtlCol="0" anchor="ctr" wrap="square" lIns="73152" rIns="73152" tIns="36576" bIns="36576"/>
-          <a:lstStyle/>
-          <a:p>
-            <a:pPr algn="ctr"/>
-            <a:r>
-              <a:rPr sz="4800" b="1">
-                <a:solidFill>
-                  <a:srgbClr val="FFFFFF"/>
-                </a:solidFill>
-                <a:latin typeface="Calibri"/>
-              </a:rPr>
-              <a:t>E</a:t>
-            </a:r>
-          </a:p>
-        </p:txBody>
-      </p:sp>
-      <p:sp>
-        <p:nvSpPr>
-          <p:cNvPr id="3" name="TextBox 2"/>
-          <p:cNvSpPr txBox="1"/>
-          <p:nvPr/>
-        </p:nvSpPr>
-        <p:spPr>
-          <a:xfrm>
-            <a:off x="2423160" y="2011680"/>
-            <a:ext cx="8686800" cy="822960"/>
-          </a:xfrm>
-          <a:prstGeom prst="rect">
-            <a:avLst/>
-          </a:prstGeom>
-          <a:noFill/>
-        </p:spPr>
-        <p:txBody>
-          <a:bodyPr wrap="square" lIns="0" rIns="0" tIns="0" bIns="0" anchor="t">
-            <a:spAutoFit/>
-          </a:bodyPr>
-          <a:lstStyle/>
-          <a:p>
-            <a:pPr algn="l">
-              <a:spcAft>
-                <a:spcPts val="600"/>
-              </a:spcAft>
-            </a:pPr>
-            <a:r>
-              <a:rPr sz="4000" b="1" i="0">
-                <a:solidFill>
-                  <a:srgbClr val="1C2E6E"/>
-                </a:solidFill>
-                <a:latin typeface="Calibri"/>
-              </a:rPr>
-              <a:t>Actions and reflection</a:t>
-            </a:r>
-          </a:p>
-        </p:txBody>
-      </p:sp>
-      <p:sp>
-        <p:nvSpPr>
-          <p:cNvPr id="4" name="TextBox 3"/>
-          <p:cNvSpPr txBox="1"/>
-          <p:nvPr/>
-        </p:nvSpPr>
-        <p:spPr>
-          <a:xfrm>
-            <a:off x="2423160" y="2834640"/>
-            <a:ext cx="8686800" cy="548640"/>
-          </a:xfrm>
-          <a:prstGeom prst="rect">
-            <a:avLst/>
-          </a:prstGeom>
-          <a:noFill/>
-        </p:spPr>
-        <p:txBody>
-          <a:bodyPr wrap="square" lIns="0" rIns="0" tIns="0" bIns="0" anchor="t">
-            <a:spAutoFit/>
-          </a:bodyPr>
-          <a:lstStyle/>
-          <a:p>
-            <a:pPr algn="l">
-              <a:spcAft>
-                <a:spcPts val="600"/>
-              </a:spcAft>
-            </a:pPr>
-            <a:r>
-              <a:rPr sz="2000" b="0" i="0">
-                <a:solidFill>
-                  <a:srgbClr val="5B6475"/>
-                </a:solidFill>
-                <a:latin typeface="Calibri"/>
-              </a:rPr>
-              <a:t>What operators should do, and what I learned</a:t>
-            </a:r>
-          </a:p>
-        </p:txBody>
-      </p:sp>
-      <p:sp>
-        <p:nvSpPr>
-          <p:cNvPr id="5" name="TextBox 4"/>
-          <p:cNvSpPr txBox="1"/>
-          <p:nvPr/>
-        </p:nvSpPr>
-        <p:spPr>
-          <a:xfrm>
-            <a:off x="2423160" y="3520440"/>
-            <a:ext cx="8686800" cy="365760"/>
-          </a:xfrm>
-          <a:prstGeom prst="rect">
-            <a:avLst/>
-          </a:prstGeom>
-          <a:noFill/>
-        </p:spPr>
-        <p:txBody>
-          <a:bodyPr wrap="square" lIns="0" rIns="0" tIns="0" bIns="0" anchor="t">
-            <a:spAutoFit/>
-          </a:bodyPr>
-          <a:lstStyle/>
-          <a:p>
-            <a:pPr algn="l">
-              <a:spcAft>
-                <a:spcPts val="600"/>
-              </a:spcAft>
-            </a:pPr>
-            <a:r>
-              <a:rPr sz="1600" b="1" i="0">
-                <a:solidFill>
-                  <a:srgbClr val="D29B08"/>
-                </a:solidFill>
-                <a:latin typeface="Calibri"/>
-              </a:rPr>
-              <a:t>About 4 minutes</a:t>
-            </a:r>
-          </a:p>
-        </p:txBody>
-      </p:sp>
-      <p:sp>
-        <p:nvSpPr>
-          <p:cNvPr id="6" name="TextBox 5"/>
-          <p:cNvSpPr txBox="1"/>
-          <p:nvPr/>
-        </p:nvSpPr>
-        <p:spPr>
-          <a:xfrm>
-            <a:off x="11155680" y="6446520"/>
-            <a:ext cx="548640" cy="274320"/>
-          </a:xfrm>
-          <a:prstGeom prst="rect">
-            <a:avLst/>
-          </a:prstGeom>
-          <a:noFill/>
-        </p:spPr>
-        <p:txBody>
-          <a:bodyPr wrap="square" lIns="0" rIns="0" tIns="0" bIns="0" anchor="t">
-            <a:spAutoFit/>
-          </a:bodyPr>
-          <a:lstStyle/>
-          <a:p>
-            <a:pPr algn="r">
-              <a:spcAft>
-                <a:spcPts val="600"/>
-              </a:spcAft>
-            </a:pPr>
-            <a:r>
-              <a:rPr sz="1000" b="0" i="0">
-                <a:solidFill>
-                  <a:srgbClr val="5B6475"/>
-                </a:solidFill>
-                <a:latin typeface="Calibri"/>
-              </a:rPr>
-              <a:t>24</a:t>
             </a:r>
           </a:p>
         </p:txBody>
@@ -17384,100 +18065,22 @@
       <p:grpSpPr/>
       <p:sp>
         <p:nvSpPr>
-          <p:cNvPr id="2" name="TextBox 1"/>
-          <p:cNvSpPr txBox="1"/>
-          <p:nvPr/>
-        </p:nvSpPr>
-        <p:spPr>
-          <a:xfrm>
-            <a:off x="2788920" y="128016"/>
-            <a:ext cx="9052560" cy="1097280"/>
-          </a:xfrm>
-          <a:prstGeom prst="rect">
-            <a:avLst/>
-          </a:prstGeom>
-          <a:noFill/>
-        </p:spPr>
-        <p:txBody>
-          <a:bodyPr wrap="square" lIns="0" rIns="0" tIns="0" bIns="0" anchor="ctr">
-            <a:spAutoFit/>
-          </a:bodyPr>
-          <a:lstStyle/>
-          <a:p>
-            <a:pPr algn="l">
-              <a:spcAft>
-                <a:spcPts val="600"/>
-              </a:spcAft>
-            </a:pPr>
-            <a:r>
-              <a:rPr sz="2600" b="1" i="0">
-                <a:solidFill>
-                  <a:srgbClr val="1C2E6E"/>
-                </a:solidFill>
-                <a:latin typeface="Calibri"/>
-              </a:rPr>
-              <a:t>Recommendations, ordered by not-happy share</a:t>
-            </a:r>
-          </a:p>
-        </p:txBody>
-      </p:sp>
-      <p:sp>
-        <p:nvSpPr>
-          <p:cNvPr id="3" name="TextBox 2"/>
-          <p:cNvSpPr txBox="1"/>
-          <p:nvPr/>
-        </p:nvSpPr>
-        <p:spPr>
-          <a:xfrm>
-            <a:off x="11155680" y="6446520"/>
-            <a:ext cx="548640" cy="274320"/>
-          </a:xfrm>
-          <a:prstGeom prst="rect">
-            <a:avLst/>
-          </a:prstGeom>
-          <a:noFill/>
-        </p:spPr>
-        <p:txBody>
-          <a:bodyPr wrap="square" lIns="0" rIns="0" tIns="0" bIns="0" anchor="t">
-            <a:spAutoFit/>
-          </a:bodyPr>
-          <a:lstStyle/>
-          <a:p>
-            <a:pPr algn="r">
-              <a:spcAft>
-                <a:spcPts val="600"/>
-              </a:spcAft>
-            </a:pPr>
-            <a:r>
-              <a:rPr sz="1000" b="0" i="0">
-                <a:solidFill>
-                  <a:srgbClr val="5B6475"/>
-                </a:solidFill>
-                <a:latin typeface="Calibri"/>
-              </a:rPr>
-              <a:t>25</a:t>
-            </a:r>
-          </a:p>
-        </p:txBody>
-      </p:sp>
-      <p:sp>
-        <p:nvSpPr>
-          <p:cNvPr id="4" name="Rounded Rectangle 3"/>
+          <p:cNvPr id="2" name="Rounded Rectangle 1"/>
           <p:cNvSpPr/>
           <p:nvPr/>
         </p:nvSpPr>
         <p:spPr>
           <a:xfrm>
-            <a:off x="548640" y="1691640"/>
-            <a:ext cx="3544824" cy="2103120"/>
+            <a:off x="822959" y="2148840"/>
+            <a:ext cx="1234440" cy="1234440"/>
           </a:xfrm>
           <a:prstGeom prst="roundRect">
             <a:avLst>
-              <a:gd name="adj" fmla="val 6000"/>
+              <a:gd name="adj" fmla="val 12000"/>
             </a:avLst>
           </a:prstGeom>
           <a:solidFill>
-            <a:srgbClr val="FBF3DF"/>
+            <a:srgbClr val="D29B08"/>
           </a:solidFill>
           <a:ln>
             <a:noFill/>
@@ -17499,23 +18102,32 @@
           </a:fontRef>
         </p:style>
         <p:txBody>
-          <a:bodyPr rtlCol="0" anchor="ctr"/>
+          <a:bodyPr rtlCol="0" anchor="ctr" wrap="square" lIns="73152" rIns="73152" tIns="36576" bIns="36576"/>
           <a:lstStyle/>
           <a:p>
             <a:pPr algn="ctr"/>
-          </a:p>
-        </p:txBody>
-      </p:sp>
-      <p:sp>
-        <p:nvSpPr>
-          <p:cNvPr id="5" name="TextBox 4"/>
+            <a:r>
+              <a:rPr sz="4800" b="1">
+                <a:solidFill>
+                  <a:srgbClr val="FFFFFF"/>
+                </a:solidFill>
+                <a:latin typeface="Calibri"/>
+              </a:rPr>
+              <a:t>E</a:t>
+            </a:r>
+          </a:p>
+        </p:txBody>
+      </p:sp>
+      <p:sp>
+        <p:nvSpPr>
+          <p:cNvPr id="3" name="TextBox 2"/>
           <p:cNvSpPr txBox="1"/>
           <p:nvPr/>
         </p:nvSpPr>
         <p:spPr>
           <a:xfrm>
-            <a:off x="777240" y="1874520"/>
-            <a:ext cx="3087624" cy="411480"/>
+            <a:off x="2423160" y="2011680"/>
+            <a:ext cx="8686800" cy="822960"/>
           </a:xfrm>
           <a:prstGeom prst="rect">
             <a:avLst/>
@@ -17534,27 +18146,27 @@
               </a:spcAft>
             </a:pPr>
             <a:r>
-              <a:rPr sz="1800" b="1" i="0">
+              <a:rPr sz="4000" b="1" i="0">
                 <a:solidFill>
                   <a:srgbClr val="1C2E6E"/>
                 </a:solidFill>
                 <a:latin typeface="Calibri"/>
               </a:rPr>
-              <a:t>1  Network</a:t>
-            </a:r>
-          </a:p>
-        </p:txBody>
-      </p:sp>
-      <p:sp>
-        <p:nvSpPr>
-          <p:cNvPr id="6" name="TextBox 5"/>
+              <a:t>Actions and reflection</a:t>
+            </a:r>
+          </a:p>
+        </p:txBody>
+      </p:sp>
+      <p:sp>
+        <p:nvSpPr>
+          <p:cNvPr id="4" name="TextBox 3"/>
           <p:cNvSpPr txBox="1"/>
           <p:nvPr/>
         </p:nvSpPr>
         <p:spPr>
           <a:xfrm>
-            <a:off x="777240" y="2331720"/>
-            <a:ext cx="3087624" cy="868680"/>
+            <a:off x="2423160" y="2834640"/>
+            <a:ext cx="8686800" cy="548640"/>
           </a:xfrm>
           <a:prstGeom prst="rect">
             <a:avLst/>
@@ -17573,27 +18185,27 @@
               </a:spcAft>
             </a:pPr>
             <a:r>
-              <a:rPr sz="1400" b="0" i="0">
-                <a:solidFill>
-                  <a:srgbClr val="1E293B"/>
-                </a:solidFill>
-                <a:latin typeface="Calibri"/>
-              </a:rPr>
-              <a:t>Status page and restoration ETA during incidents; join named-location posts to tickets</a:t>
-            </a:r>
-          </a:p>
-        </p:txBody>
-      </p:sp>
-      <p:sp>
-        <p:nvSpPr>
-          <p:cNvPr id="7" name="TextBox 6"/>
+              <a:rPr sz="2000" b="0" i="0">
+                <a:solidFill>
+                  <a:srgbClr val="5B6475"/>
+                </a:solidFill>
+                <a:latin typeface="Calibri"/>
+              </a:rPr>
+              <a:t>What operators should do, and what I learned</a:t>
+            </a:r>
+          </a:p>
+        </p:txBody>
+      </p:sp>
+      <p:sp>
+        <p:nvSpPr>
+          <p:cNvPr id="5" name="TextBox 4"/>
           <p:cNvSpPr txBox="1"/>
           <p:nvPr/>
         </p:nvSpPr>
         <p:spPr>
           <a:xfrm>
-            <a:off x="777240" y="3154680"/>
-            <a:ext cx="3087624" cy="548640"/>
+            <a:off x="2423160" y="3520440"/>
+            <a:ext cx="8686800" cy="365760"/>
           </a:xfrm>
           <a:prstGeom prst="rect">
             <a:avLst/>
@@ -17612,82 +18224,27 @@
               </a:spcAft>
             </a:pPr>
             <a:r>
-              <a:rPr sz="1300" b="1" i="0">
+              <a:rPr sz="1600" b="1" i="0">
                 <a:solidFill>
                   <a:srgbClr val="D29B08"/>
                 </a:solidFill>
                 <a:latin typeface="Calibri"/>
               </a:rPr>
-              <a:t>Check: </a:t>
-            </a:r>
-            <a:r>
-              <a:rPr sz="1300" b="0" i="0">
-                <a:solidFill>
-                  <a:srgbClr val="1E293B"/>
-                </a:solidFill>
-                <a:latin typeface="Calibri"/>
-              </a:rPr>
-              <a:t>Faster first update; fewer tickets at that location</a:t>
-            </a:r>
-          </a:p>
-        </p:txBody>
-      </p:sp>
-      <p:sp>
-        <p:nvSpPr>
-          <p:cNvPr id="8" name="Rounded Rectangle 7"/>
-          <p:cNvSpPr/>
-          <p:nvPr/>
-        </p:nvSpPr>
-        <p:spPr>
-          <a:xfrm>
-            <a:off x="4322064" y="1691640"/>
-            <a:ext cx="3544824" cy="2103120"/>
-          </a:xfrm>
-          <a:prstGeom prst="roundRect">
-            <a:avLst>
-              <a:gd name="adj" fmla="val 6000"/>
-            </a:avLst>
-          </a:prstGeom>
-          <a:solidFill>
-            <a:srgbClr val="FBF3DF"/>
-          </a:solidFill>
-          <a:ln>
-            <a:noFill/>
-          </a:ln>
-          <a:effectLst/>
-        </p:spPr>
-        <p:style>
-          <a:lnRef idx="1">
-            <a:schemeClr val="accent1"/>
-          </a:lnRef>
-          <a:fillRef idx="3">
-            <a:schemeClr val="accent1"/>
-          </a:fillRef>
-          <a:effectRef idx="2">
-            <a:schemeClr val="accent1"/>
-          </a:effectRef>
-          <a:fontRef idx="minor">
-            <a:schemeClr val="lt1"/>
-          </a:fontRef>
-        </p:style>
-        <p:txBody>
-          <a:bodyPr rtlCol="0" anchor="ctr"/>
-          <a:lstStyle/>
-          <a:p>
-            <a:pPr algn="ctr"/>
-          </a:p>
-        </p:txBody>
-      </p:sp>
-      <p:sp>
-        <p:nvSpPr>
-          <p:cNvPr id="9" name="TextBox 8"/>
+              <a:t>About 4 minutes</a:t>
+            </a:r>
+          </a:p>
+        </p:txBody>
+      </p:sp>
+      <p:sp>
+        <p:nvSpPr>
+          <p:cNvPr id="6" name="TextBox 5"/>
           <p:cNvSpPr txBox="1"/>
           <p:nvPr/>
         </p:nvSpPr>
         <p:spPr>
           <a:xfrm>
-            <a:off x="4550664" y="1874520"/>
-            <a:ext cx="3087624" cy="411480"/>
+            <a:off x="11155680" y="6446520"/>
+            <a:ext cx="548640" cy="274320"/>
           </a:xfrm>
           <a:prstGeom prst="rect">
             <a:avLst/>
@@ -17700,794 +18257,19 @@
           </a:bodyPr>
           <a:lstStyle/>
           <a:p>
-            <a:pPr algn="l">
+            <a:pPr algn="r">
               <a:spcAft>
                 <a:spcPts val="600"/>
               </a:spcAft>
             </a:pPr>
             <a:r>
-              <a:rPr sz="1800" b="1" i="0">
-                <a:solidFill>
-                  <a:srgbClr val="1C2E6E"/>
-                </a:solidFill>
-                <a:latin typeface="Calibri"/>
-              </a:rPr>
-              <a:t>2  Plans &amp; pricing</a:t>
-            </a:r>
-          </a:p>
-        </p:txBody>
-      </p:sp>
-      <p:sp>
-        <p:nvSpPr>
-          <p:cNvPr id="10" name="TextBox 9"/>
-          <p:cNvSpPr txBox="1"/>
-          <p:nvPr/>
-        </p:nvSpPr>
-        <p:spPr>
-          <a:xfrm>
-            <a:off x="4550664" y="2331720"/>
-            <a:ext cx="3087624" cy="868680"/>
-          </a:xfrm>
-          <a:prstGeom prst="rect">
-            <a:avLst/>
-          </a:prstGeom>
-          <a:noFill/>
-        </p:spPr>
-        <p:txBody>
-          <a:bodyPr wrap="square" lIns="0" rIns="0" tIns="0" bIns="0" anchor="t">
-            <a:spAutoFit/>
-          </a:bodyPr>
-          <a:lstStyle/>
-          <a:p>
-            <a:pPr algn="l">
-              <a:spcAft>
-                <a:spcPts val="600"/>
-              </a:spcAft>
-            </a:pPr>
-            <a:r>
-              <a:rPr sz="1400" b="0" i="0">
-                <a:solidFill>
-                  <a:srgbClr val="1E293B"/>
-                </a:solidFill>
-                <a:latin typeface="Calibri"/>
-              </a:rPr>
-              <a:t>Show fair-use limits, add-on charges and recurring price at checkout</a:t>
-            </a:r>
-          </a:p>
-        </p:txBody>
-      </p:sp>
-      <p:sp>
-        <p:nvSpPr>
-          <p:cNvPr id="11" name="TextBox 10"/>
-          <p:cNvSpPr txBox="1"/>
-          <p:nvPr/>
-        </p:nvSpPr>
-        <p:spPr>
-          <a:xfrm>
-            <a:off x="4550664" y="3154680"/>
-            <a:ext cx="3087624" cy="548640"/>
-          </a:xfrm>
-          <a:prstGeom prst="rect">
-            <a:avLst/>
-          </a:prstGeom>
-          <a:noFill/>
-        </p:spPr>
-        <p:txBody>
-          <a:bodyPr wrap="square" lIns="0" rIns="0" tIns="0" bIns="0" anchor="t">
-            <a:spAutoFit/>
-          </a:bodyPr>
-          <a:lstStyle/>
-          <a:p>
-            <a:pPr algn="l">
-              <a:spcAft>
-                <a:spcPts val="600"/>
-              </a:spcAft>
-            </a:pPr>
-            <a:r>
-              <a:rPr sz="1300" b="1" i="0">
-                <a:solidFill>
-                  <a:srgbClr val="D29B08"/>
-                </a:solidFill>
-                <a:latin typeface="Calibri"/>
-              </a:rPr>
-              <a:t>Check: </a:t>
-            </a:r>
-            <a:r>
-              <a:rPr sz="1300" b="0" i="0">
-                <a:solidFill>
-                  <a:srgbClr val="1E293B"/>
-                </a:solidFill>
-                <a:latin typeface="Calibri"/>
-              </a:rPr>
-              <a:t>Fewer hidden-charge threads</a:t>
-            </a:r>
-          </a:p>
-        </p:txBody>
-      </p:sp>
-      <p:sp>
-        <p:nvSpPr>
-          <p:cNvPr id="12" name="Rounded Rectangle 11"/>
-          <p:cNvSpPr/>
-          <p:nvPr/>
-        </p:nvSpPr>
-        <p:spPr>
-          <a:xfrm>
-            <a:off x="8095488" y="1691640"/>
-            <a:ext cx="3544824" cy="2103120"/>
-          </a:xfrm>
-          <a:prstGeom prst="roundRect">
-            <a:avLst>
-              <a:gd name="adj" fmla="val 6000"/>
-            </a:avLst>
-          </a:prstGeom>
-          <a:solidFill>
-            <a:srgbClr val="F2F4F9"/>
-          </a:solidFill>
-          <a:ln>
-            <a:noFill/>
-          </a:ln>
-          <a:effectLst/>
-        </p:spPr>
-        <p:style>
-          <a:lnRef idx="1">
-            <a:schemeClr val="accent1"/>
-          </a:lnRef>
-          <a:fillRef idx="3">
-            <a:schemeClr val="accent1"/>
-          </a:fillRef>
-          <a:effectRef idx="2">
-            <a:schemeClr val="accent1"/>
-          </a:effectRef>
-          <a:fontRef idx="minor">
-            <a:schemeClr val="lt1"/>
-          </a:fontRef>
-        </p:style>
-        <p:txBody>
-          <a:bodyPr rtlCol="0" anchor="ctr"/>
-          <a:lstStyle/>
-          <a:p>
-            <a:pPr algn="ctr"/>
-          </a:p>
-        </p:txBody>
-      </p:sp>
-      <p:sp>
-        <p:nvSpPr>
-          <p:cNvPr id="13" name="TextBox 12"/>
-          <p:cNvSpPr txBox="1"/>
-          <p:nvPr/>
-        </p:nvSpPr>
-        <p:spPr>
-          <a:xfrm>
-            <a:off x="8324088" y="1874520"/>
-            <a:ext cx="3087624" cy="411480"/>
-          </a:xfrm>
-          <a:prstGeom prst="rect">
-            <a:avLst/>
-          </a:prstGeom>
-          <a:noFill/>
-        </p:spPr>
-        <p:txBody>
-          <a:bodyPr wrap="square" lIns="0" rIns="0" tIns="0" bIns="0" anchor="t">
-            <a:spAutoFit/>
-          </a:bodyPr>
-          <a:lstStyle/>
-          <a:p>
-            <a:pPr algn="l">
-              <a:spcAft>
-                <a:spcPts val="600"/>
-              </a:spcAft>
-            </a:pPr>
-            <a:r>
-              <a:rPr sz="1800" b="1" i="0">
-                <a:solidFill>
-                  <a:srgbClr val="1C2E6E"/>
-                </a:solidFill>
-                <a:latin typeface="Calibri"/>
-              </a:rPr>
-              <a:t>3  Devices &amp; app</a:t>
-            </a:r>
-          </a:p>
-        </p:txBody>
-      </p:sp>
-      <p:sp>
-        <p:nvSpPr>
-          <p:cNvPr id="14" name="TextBox 13"/>
-          <p:cNvSpPr txBox="1"/>
-          <p:nvPr/>
-        </p:nvSpPr>
-        <p:spPr>
-          <a:xfrm>
-            <a:off x="8324088" y="2331720"/>
-            <a:ext cx="3087624" cy="868680"/>
-          </a:xfrm>
-          <a:prstGeom prst="rect">
-            <a:avLst/>
-          </a:prstGeom>
-          <a:noFill/>
-        </p:spPr>
-        <p:txBody>
-          <a:bodyPr wrap="square" lIns="0" rIns="0" tIns="0" bIns="0" anchor="t">
-            <a:spAutoFit/>
-          </a:bodyPr>
-          <a:lstStyle/>
-          <a:p>
-            <a:pPr algn="l">
-              <a:spcAft>
-                <a:spcPts val="600"/>
-              </a:spcAft>
-            </a:pPr>
-            <a:r>
-              <a:rPr sz="1400" b="0" i="0">
-                <a:solidFill>
-                  <a:srgbClr val="1E293B"/>
-                </a:solidFill>
-                <a:latin typeface="Calibri"/>
-              </a:rPr>
-              <a:t>Publish router and eSIM requirements; watch posts after each app release</a:t>
-            </a:r>
-          </a:p>
-        </p:txBody>
-      </p:sp>
-      <p:sp>
-        <p:nvSpPr>
-          <p:cNvPr id="15" name="TextBox 14"/>
-          <p:cNvSpPr txBox="1"/>
-          <p:nvPr/>
-        </p:nvSpPr>
-        <p:spPr>
-          <a:xfrm>
-            <a:off x="8324088" y="3154680"/>
-            <a:ext cx="3087624" cy="548640"/>
-          </a:xfrm>
-          <a:prstGeom prst="rect">
-            <a:avLst/>
-          </a:prstGeom>
-          <a:noFill/>
-        </p:spPr>
-        <p:txBody>
-          <a:bodyPr wrap="square" lIns="0" rIns="0" tIns="0" bIns="0" anchor="t">
-            <a:spAutoFit/>
-          </a:bodyPr>
-          <a:lstStyle/>
-          <a:p>
-            <a:pPr algn="l">
-              <a:spcAft>
-                <a:spcPts val="600"/>
-              </a:spcAft>
-            </a:pPr>
-            <a:r>
-              <a:rPr sz="1300" b="1" i="0">
-                <a:solidFill>
-                  <a:srgbClr val="D29B08"/>
-                </a:solidFill>
-                <a:latin typeface="Calibri"/>
-              </a:rPr>
-              <a:t>Check: </a:t>
-            </a:r>
-            <a:r>
-              <a:rPr sz="1300" b="0" i="0">
-                <a:solidFill>
-                  <a:srgbClr val="1E293B"/>
-                </a:solidFill>
-                <a:latin typeface="Calibri"/>
-              </a:rPr>
-              <a:t>Fewer equipment and “can’t log in” threads</a:t>
-            </a:r>
-          </a:p>
-        </p:txBody>
-      </p:sp>
-      <p:sp>
-        <p:nvSpPr>
-          <p:cNvPr id="16" name="Rounded Rectangle 15"/>
-          <p:cNvSpPr/>
-          <p:nvPr/>
-        </p:nvSpPr>
-        <p:spPr>
-          <a:xfrm>
-            <a:off x="548640" y="4023360"/>
-            <a:ext cx="3544824" cy="2103120"/>
-          </a:xfrm>
-          <a:prstGeom prst="roundRect">
-            <a:avLst>
-              <a:gd name="adj" fmla="val 6000"/>
-            </a:avLst>
-          </a:prstGeom>
-          <a:solidFill>
-            <a:srgbClr val="F2F4F9"/>
-          </a:solidFill>
-          <a:ln>
-            <a:noFill/>
-          </a:ln>
-          <a:effectLst/>
-        </p:spPr>
-        <p:style>
-          <a:lnRef idx="1">
-            <a:schemeClr val="accent1"/>
-          </a:lnRef>
-          <a:fillRef idx="3">
-            <a:schemeClr val="accent1"/>
-          </a:fillRef>
-          <a:effectRef idx="2">
-            <a:schemeClr val="accent1"/>
-          </a:effectRef>
-          <a:fontRef idx="minor">
-            <a:schemeClr val="lt1"/>
-          </a:fontRef>
-        </p:style>
-        <p:txBody>
-          <a:bodyPr rtlCol="0" anchor="ctr"/>
-          <a:lstStyle/>
-          <a:p>
-            <a:pPr algn="ctr"/>
-          </a:p>
-        </p:txBody>
-      </p:sp>
-      <p:sp>
-        <p:nvSpPr>
-          <p:cNvPr id="17" name="TextBox 16"/>
-          <p:cNvSpPr txBox="1"/>
-          <p:nvPr/>
-        </p:nvSpPr>
-        <p:spPr>
-          <a:xfrm>
-            <a:off x="777240" y="4206240"/>
-            <a:ext cx="3087624" cy="411480"/>
-          </a:xfrm>
-          <a:prstGeom prst="rect">
-            <a:avLst/>
-          </a:prstGeom>
-          <a:noFill/>
-        </p:spPr>
-        <p:txBody>
-          <a:bodyPr wrap="square" lIns="0" rIns="0" tIns="0" bIns="0" anchor="t">
-            <a:spAutoFit/>
-          </a:bodyPr>
-          <a:lstStyle/>
-          <a:p>
-            <a:pPr algn="l">
-              <a:spcAft>
-                <a:spcPts val="600"/>
-              </a:spcAft>
-            </a:pPr>
-            <a:r>
-              <a:rPr sz="1800" b="1" i="0">
-                <a:solidFill>
-                  <a:srgbClr val="1C2E6E"/>
-                </a:solidFill>
-                <a:latin typeface="Calibri"/>
-              </a:rPr>
-              <a:t>4  Incident aftercare</a:t>
-            </a:r>
-          </a:p>
-        </p:txBody>
-      </p:sp>
-      <p:sp>
-        <p:nvSpPr>
-          <p:cNvPr id="18" name="TextBox 17"/>
-          <p:cNvSpPr txBox="1"/>
-          <p:nvPr/>
-        </p:nvSpPr>
-        <p:spPr>
-          <a:xfrm>
-            <a:off x="777240" y="4663440"/>
-            <a:ext cx="3087624" cy="868680"/>
-          </a:xfrm>
-          <a:prstGeom prst="rect">
-            <a:avLst/>
-          </a:prstGeom>
-          <a:noFill/>
-        </p:spPr>
-        <p:txBody>
-          <a:bodyPr wrap="square" lIns="0" rIns="0" tIns="0" bIns="0" anchor="t">
-            <a:spAutoFit/>
-          </a:bodyPr>
-          <a:lstStyle/>
-          <a:p>
-            <a:pPr algn="l">
-              <a:spcAft>
-                <a:spcPts val="600"/>
-              </a:spcAft>
-            </a:pPr>
-            <a:r>
-              <a:rPr sz="1400" b="0" i="0">
-                <a:solidFill>
-                  <a:srgbClr val="1E293B"/>
-                </a:solidFill>
-                <a:latin typeface="Calibri"/>
-              </a:rPr>
-              <a:t>Publish the compensation rule with the outage notice; keep self-service open</a:t>
-            </a:r>
-          </a:p>
-        </p:txBody>
-      </p:sp>
-      <p:sp>
-        <p:nvSpPr>
-          <p:cNvPr id="19" name="TextBox 18"/>
-          <p:cNvSpPr txBox="1"/>
-          <p:nvPr/>
-        </p:nvSpPr>
-        <p:spPr>
-          <a:xfrm>
-            <a:off x="777240" y="5486400"/>
-            <a:ext cx="3087624" cy="548640"/>
-          </a:xfrm>
-          <a:prstGeom prst="rect">
-            <a:avLst/>
-          </a:prstGeom>
-          <a:noFill/>
-        </p:spPr>
-        <p:txBody>
-          <a:bodyPr wrap="square" lIns="0" rIns="0" tIns="0" bIns="0" anchor="t">
-            <a:spAutoFit/>
-          </a:bodyPr>
-          <a:lstStyle/>
-          <a:p>
-            <a:pPr algn="l">
-              <a:spcAft>
-                <a:spcPts val="600"/>
-              </a:spcAft>
-            </a:pPr>
-            <a:r>
-              <a:rPr sz="1300" b="1" i="0">
-                <a:solidFill>
-                  <a:srgbClr val="D29B08"/>
-                </a:solidFill>
-                <a:latin typeface="Calibri"/>
-              </a:rPr>
-              <a:t>Check: </a:t>
-            </a:r>
-            <a:r>
-              <a:rPr sz="1300" b="0" i="0">
-                <a:solidFill>
-                  <a:srgbClr val="1E293B"/>
-                </a:solidFill>
-                <a:latin typeface="Calibri"/>
-              </a:rPr>
-              <a:t>Fewer compensation and “can’t reach support” posts</a:t>
-            </a:r>
-          </a:p>
-        </p:txBody>
-      </p:sp>
-      <p:sp>
-        <p:nvSpPr>
-          <p:cNvPr id="20" name="Rounded Rectangle 19"/>
-          <p:cNvSpPr/>
-          <p:nvPr/>
-        </p:nvSpPr>
-        <p:spPr>
-          <a:xfrm>
-            <a:off x="4322064" y="4023360"/>
-            <a:ext cx="3544824" cy="2103120"/>
-          </a:xfrm>
-          <a:prstGeom prst="roundRect">
-            <a:avLst>
-              <a:gd name="adj" fmla="val 6000"/>
-            </a:avLst>
-          </a:prstGeom>
-          <a:solidFill>
-            <a:srgbClr val="F2F4F9"/>
-          </a:solidFill>
-          <a:ln>
-            <a:noFill/>
-          </a:ln>
-          <a:effectLst/>
-        </p:spPr>
-        <p:style>
-          <a:lnRef idx="1">
-            <a:schemeClr val="accent1"/>
-          </a:lnRef>
-          <a:fillRef idx="3">
-            <a:schemeClr val="accent1"/>
-          </a:fillRef>
-          <a:effectRef idx="2">
-            <a:schemeClr val="accent1"/>
-          </a:effectRef>
-          <a:fontRef idx="minor">
-            <a:schemeClr val="lt1"/>
-          </a:fontRef>
-        </p:style>
-        <p:txBody>
-          <a:bodyPr rtlCol="0" anchor="ctr"/>
-          <a:lstStyle/>
-          <a:p>
-            <a:pPr algn="ctr"/>
-          </a:p>
-        </p:txBody>
-      </p:sp>
-      <p:sp>
-        <p:nvSpPr>
-          <p:cNvPr id="21" name="TextBox 20"/>
-          <p:cNvSpPr txBox="1"/>
-          <p:nvPr/>
-        </p:nvSpPr>
-        <p:spPr>
-          <a:xfrm>
-            <a:off x="4550664" y="4206240"/>
-            <a:ext cx="3087624" cy="411480"/>
-          </a:xfrm>
-          <a:prstGeom prst="rect">
-            <a:avLst/>
-          </a:prstGeom>
-          <a:noFill/>
-        </p:spPr>
-        <p:txBody>
-          <a:bodyPr wrap="square" lIns="0" rIns="0" tIns="0" bIns="0" anchor="t">
-            <a:spAutoFit/>
-          </a:bodyPr>
-          <a:lstStyle/>
-          <a:p>
-            <a:pPr algn="l">
-              <a:spcAft>
-                <a:spcPts val="600"/>
-              </a:spcAft>
-            </a:pPr>
-            <a:r>
-              <a:rPr sz="1800" b="1" i="0">
-                <a:solidFill>
-                  <a:srgbClr val="1C2E6E"/>
-                </a:solidFill>
-                <a:latin typeface="Calibri"/>
-              </a:rPr>
-              <a:t>5  Roaming, porting</a:t>
-            </a:r>
-          </a:p>
-        </p:txBody>
-      </p:sp>
-      <p:sp>
-        <p:nvSpPr>
-          <p:cNvPr id="22" name="TextBox 21"/>
-          <p:cNvSpPr txBox="1"/>
-          <p:nvPr/>
-        </p:nvSpPr>
-        <p:spPr>
-          <a:xfrm>
-            <a:off x="4550664" y="4663440"/>
-            <a:ext cx="3087624" cy="868680"/>
-          </a:xfrm>
-          <a:prstGeom prst="rect">
-            <a:avLst/>
-          </a:prstGeom>
-          <a:noFill/>
-        </p:spPr>
-        <p:txBody>
-          <a:bodyPr wrap="square" lIns="0" rIns="0" tIns="0" bIns="0" anchor="t">
-            <a:spAutoFit/>
-          </a:bodyPr>
-          <a:lstStyle/>
-          <a:p>
-            <a:pPr algn="l">
-              <a:spcAft>
-                <a:spcPts val="600"/>
-              </a:spcAft>
-            </a:pPr>
-            <a:r>
-              <a:rPr sz="1400" b="0" i="0">
-                <a:solidFill>
-                  <a:srgbClr val="1E293B"/>
-                </a:solidFill>
-                <a:latin typeface="Calibri"/>
-              </a:rPr>
-              <a:t>Small, mostly questions: a travel checklist and clearer port timelines</a:t>
-            </a:r>
-          </a:p>
-        </p:txBody>
-      </p:sp>
-      <p:sp>
-        <p:nvSpPr>
-          <p:cNvPr id="23" name="TextBox 22"/>
-          <p:cNvSpPr txBox="1"/>
-          <p:nvPr/>
-        </p:nvSpPr>
-        <p:spPr>
-          <a:xfrm>
-            <a:off x="4550664" y="5486400"/>
-            <a:ext cx="3087624" cy="548640"/>
-          </a:xfrm>
-          <a:prstGeom prst="rect">
-            <a:avLst/>
-          </a:prstGeom>
-          <a:noFill/>
-        </p:spPr>
-        <p:txBody>
-          <a:bodyPr wrap="square" lIns="0" rIns="0" tIns="0" bIns="0" anchor="t">
-            <a:spAutoFit/>
-          </a:bodyPr>
-          <a:lstStyle/>
-          <a:p>
-            <a:pPr algn="l">
-              <a:spcAft>
-                <a:spcPts val="600"/>
-              </a:spcAft>
-            </a:pPr>
-            <a:r>
-              <a:rPr sz="1300" b="1" i="0">
-                <a:solidFill>
-                  <a:srgbClr val="D29B08"/>
-                </a:solidFill>
-                <a:latin typeface="Calibri"/>
-              </a:rPr>
-              <a:t>Check: </a:t>
-            </a:r>
-            <a:r>
-              <a:rPr sz="1300" b="0" i="0">
-                <a:solidFill>
-                  <a:srgbClr val="1E293B"/>
-                </a:solidFill>
-                <a:latin typeface="Calibri"/>
-              </a:rPr>
-              <a:t>No priority unless volume rises</a:t>
-            </a:r>
-          </a:p>
-        </p:txBody>
-      </p:sp>
-      <p:sp>
-        <p:nvSpPr>
-          <p:cNvPr id="24" name="Rounded Rectangle 23"/>
-          <p:cNvSpPr/>
-          <p:nvPr/>
-        </p:nvSpPr>
-        <p:spPr>
-          <a:xfrm>
-            <a:off x="8095488" y="4023360"/>
-            <a:ext cx="3544824" cy="2103120"/>
-          </a:xfrm>
-          <a:prstGeom prst="roundRect">
-            <a:avLst>
-              <a:gd name="adj" fmla="val 6000"/>
-            </a:avLst>
-          </a:prstGeom>
-          <a:solidFill>
-            <a:srgbClr val="F2F4F9"/>
-          </a:solidFill>
-          <a:ln>
-            <a:noFill/>
-          </a:ln>
-          <a:effectLst/>
-        </p:spPr>
-        <p:style>
-          <a:lnRef idx="1">
-            <a:schemeClr val="accent1"/>
-          </a:lnRef>
-          <a:fillRef idx="3">
-            <a:schemeClr val="accent1"/>
-          </a:fillRef>
-          <a:effectRef idx="2">
-            <a:schemeClr val="accent1"/>
-          </a:effectRef>
-          <a:fontRef idx="minor">
-            <a:schemeClr val="lt1"/>
-          </a:fontRef>
-        </p:style>
-        <p:txBody>
-          <a:bodyPr rtlCol="0" anchor="ctr"/>
-          <a:lstStyle/>
-          <a:p>
-            <a:pPr algn="ctr"/>
-          </a:p>
-        </p:txBody>
-      </p:sp>
-      <p:sp>
-        <p:nvSpPr>
-          <p:cNvPr id="25" name="TextBox 24"/>
-          <p:cNvSpPr txBox="1"/>
-          <p:nvPr/>
-        </p:nvSpPr>
-        <p:spPr>
-          <a:xfrm>
-            <a:off x="8324088" y="4206240"/>
-            <a:ext cx="3087624" cy="411480"/>
-          </a:xfrm>
-          <a:prstGeom prst="rect">
-            <a:avLst/>
-          </a:prstGeom>
-          <a:noFill/>
-        </p:spPr>
-        <p:txBody>
-          <a:bodyPr wrap="square" lIns="0" rIns="0" tIns="0" bIns="0" anchor="t">
-            <a:spAutoFit/>
-          </a:bodyPr>
-          <a:lstStyle/>
-          <a:p>
-            <a:pPr algn="l">
-              <a:spcAft>
-                <a:spcPts val="600"/>
-              </a:spcAft>
-            </a:pPr>
-            <a:r>
-              <a:rPr sz="1800" b="1" i="0">
-                <a:solidFill>
-                  <a:srgbClr val="1C2E6E"/>
-                </a:solidFill>
-                <a:latin typeface="Calibri"/>
-              </a:rPr>
-              <a:t>6  Weekly huddle</a:t>
-            </a:r>
-          </a:p>
-        </p:txBody>
-      </p:sp>
-      <p:sp>
-        <p:nvSpPr>
-          <p:cNvPr id="26" name="TextBox 25"/>
-          <p:cNvSpPr txBox="1"/>
-          <p:nvPr/>
-        </p:nvSpPr>
-        <p:spPr>
-          <a:xfrm>
-            <a:off x="8324088" y="4663440"/>
-            <a:ext cx="3087624" cy="868680"/>
-          </a:xfrm>
-          <a:prstGeom prst="rect">
-            <a:avLst/>
-          </a:prstGeom>
-          <a:noFill/>
-        </p:spPr>
-        <p:txBody>
-          <a:bodyPr wrap="square" lIns="0" rIns="0" tIns="0" bIns="0" anchor="t">
-            <a:spAutoFit/>
-          </a:bodyPr>
-          <a:lstStyle/>
-          <a:p>
-            <a:pPr algn="l">
-              <a:spcAft>
-                <a:spcPts val="600"/>
-              </a:spcAft>
-            </a:pPr>
-            <a:r>
-              <a:rPr sz="1400" b="0" i="0">
-                <a:solidFill>
-                  <a:srgbClr val="1E293B"/>
-                </a:solidFill>
-                <a:latin typeface="Calibri"/>
-              </a:rPr>
-              <a:t>Act only when a week reaches twice a normal week; one owner, one date</a:t>
-            </a:r>
-          </a:p>
-        </p:txBody>
-      </p:sp>
-      <p:sp>
-        <p:nvSpPr>
-          <p:cNvPr id="27" name="TextBox 26"/>
-          <p:cNvSpPr txBox="1"/>
-          <p:nvPr/>
-        </p:nvSpPr>
-        <p:spPr>
-          <a:xfrm>
-            <a:off x="8324088" y="5486400"/>
-            <a:ext cx="3087624" cy="548640"/>
-          </a:xfrm>
-          <a:prstGeom prst="rect">
-            <a:avLst/>
-          </a:prstGeom>
-          <a:noFill/>
-        </p:spPr>
-        <p:txBody>
-          <a:bodyPr wrap="square" lIns="0" rIns="0" tIns="0" bIns="0" anchor="t">
-            <a:spAutoFit/>
-          </a:bodyPr>
-          <a:lstStyle/>
-          <a:p>
-            <a:pPr algn="l">
-              <a:spcAft>
-                <a:spcPts val="600"/>
-              </a:spcAft>
-            </a:pPr>
-            <a:r>
-              <a:rPr sz="1300" b="1" i="0">
-                <a:solidFill>
-                  <a:srgbClr val="D29B08"/>
-                </a:solidFill>
-                <a:latin typeface="Calibri"/>
-              </a:rPr>
-              <a:t>Check: </a:t>
-            </a:r>
-            <a:r>
-              <a:rPr sz="1300" b="0" i="0">
-                <a:solidFill>
-                  <a:srgbClr val="1E293B"/>
-                </a:solidFill>
-                <a:latin typeface="Calibri"/>
-              </a:rPr>
-              <a:t>That issue’s share falls next week</a:t>
+              <a:rPr sz="1000" b="0" i="0">
+                <a:solidFill>
+                  <a:srgbClr val="5B6475"/>
+                </a:solidFill>
+                <a:latin typeface="Calibri"/>
+              </a:rPr>
+              <a:t>25</a:t>
             </a:r>
           </a:p>
         </p:txBody>
@@ -18544,7 +18326,7 @@
                 </a:solidFill>
                 <a:latin typeface="Calibri"/>
               </a:rPr>
-              <a:t>What I found most interesting</a:t>
+              <a:t>Recommendations, ordered by not-happy share</a:t>
             </a:r>
           </a:p>
         </p:txBody>
@@ -18590,20 +18372,22 @@
       </p:sp>
       <p:sp>
         <p:nvSpPr>
-          <p:cNvPr id="4" name="Oval 3"/>
+          <p:cNvPr id="4" name="Rounded Rectangle 3"/>
           <p:cNvSpPr/>
           <p:nvPr/>
         </p:nvSpPr>
         <p:spPr>
           <a:xfrm>
-            <a:off x="548640" y="1755648"/>
-            <a:ext cx="566928" cy="566928"/>
-          </a:xfrm>
-          <a:prstGeom prst="ellipse">
-            <a:avLst/>
+            <a:off x="548640" y="1691640"/>
+            <a:ext cx="3544824" cy="2103120"/>
+          </a:xfrm>
+          <a:prstGeom prst="roundRect">
+            <a:avLst>
+              <a:gd name="adj" fmla="val 6000"/>
+            </a:avLst>
           </a:prstGeom>
           <a:solidFill>
-            <a:srgbClr val="D29B08"/>
+            <a:srgbClr val="FBF3DF"/>
           </a:solidFill>
           <a:ln>
             <a:noFill/>
@@ -18625,19 +18409,10 @@
           </a:fontRef>
         </p:style>
         <p:txBody>
-          <a:bodyPr rtlCol="0" anchor="ctr" wrap="square" lIns="73152" rIns="73152" tIns="36576" bIns="36576"/>
+          <a:bodyPr rtlCol="0" anchor="ctr"/>
           <a:lstStyle/>
           <a:p>
             <a:pPr algn="ctr"/>
-            <a:r>
-              <a:rPr sz="1800" b="1">
-                <a:solidFill>
-                  <a:srgbClr val="FFFFFF"/>
-                </a:solidFill>
-                <a:latin typeface="Calibri"/>
-              </a:rPr>
-              <a:t>1</a:t>
-            </a:r>
           </a:p>
         </p:txBody>
       </p:sp>
@@ -18649,8 +18424,8 @@
         </p:nvSpPr>
         <p:spPr>
           <a:xfrm>
-            <a:off x="1371600" y="1691640"/>
-            <a:ext cx="3977639" cy="731520"/>
+            <a:off x="777240" y="1874520"/>
+            <a:ext cx="3087624" cy="411480"/>
           </a:xfrm>
           <a:prstGeom prst="rect">
             <a:avLst/>
@@ -18658,7 +18433,7 @@
           <a:noFill/>
         </p:spPr>
         <p:txBody>
-          <a:bodyPr wrap="square" lIns="0" rIns="0" tIns="0" bIns="0" anchor="ctr">
+          <a:bodyPr wrap="square" lIns="0" rIns="0" tIns="0" bIns="0" anchor="t">
             <a:spAutoFit/>
           </a:bodyPr>
           <a:lstStyle/>
@@ -18675,7 +18450,7 @@
                 </a:solidFill>
                 <a:latin typeface="Calibri"/>
               </a:rPr>
-              <a:t>A perfect score was the warning sign</a:t>
+              <a:t>1  Network</a:t>
             </a:r>
           </a:p>
         </p:txBody>
@@ -18688,8 +18463,8 @@
         </p:nvSpPr>
         <p:spPr>
           <a:xfrm>
-            <a:off x="5486400" y="1691640"/>
-            <a:ext cx="6153912" cy="731520"/>
+            <a:off x="777240" y="2331720"/>
+            <a:ext cx="3087624" cy="868680"/>
           </a:xfrm>
           <a:prstGeom prst="rect">
             <a:avLst/>
@@ -18697,7 +18472,7 @@
           <a:noFill/>
         </p:spPr>
         <p:txBody>
-          <a:bodyPr wrap="square" lIns="0" rIns="0" tIns="0" bIns="0" anchor="ctr">
+          <a:bodyPr wrap="square" lIns="0" rIns="0" tIns="0" bIns="0" anchor="t">
             <a:spAutoFit/>
           </a:bodyPr>
           <a:lstStyle/>
@@ -18708,33 +18483,83 @@
               </a:spcAft>
             </a:pPr>
             <a:r>
-              <a:rPr sz="1600" b="0" i="0">
+              <a:rPr sz="1400" b="0" i="0">
                 <a:solidFill>
                   <a:srgbClr val="1E293B"/>
                 </a:solidFill>
                 <a:latin typeface="Calibri"/>
               </a:rPr>
-              <a:t>100% VADER accuracy came from model-prefilled labels.</a:t>
-            </a:r>
-          </a:p>
-        </p:txBody>
-      </p:sp>
-      <p:sp>
-        <p:nvSpPr>
-          <p:cNvPr id="7" name="Oval 6"/>
+              <a:t>Status page and restoration ETA during incidents; join named-location posts to tickets</a:t>
+            </a:r>
+          </a:p>
+        </p:txBody>
+      </p:sp>
+      <p:sp>
+        <p:nvSpPr>
+          <p:cNvPr id="7" name="TextBox 6"/>
+          <p:cNvSpPr txBox="1"/>
+          <p:nvPr/>
+        </p:nvSpPr>
+        <p:spPr>
+          <a:xfrm>
+            <a:off x="777240" y="3154680"/>
+            <a:ext cx="3087624" cy="548640"/>
+          </a:xfrm>
+          <a:prstGeom prst="rect">
+            <a:avLst/>
+          </a:prstGeom>
+          <a:noFill/>
+        </p:spPr>
+        <p:txBody>
+          <a:bodyPr wrap="square" lIns="0" rIns="0" tIns="0" bIns="0" anchor="t">
+            <a:spAutoFit/>
+          </a:bodyPr>
+          <a:lstStyle/>
+          <a:p>
+            <a:pPr algn="l">
+              <a:spcAft>
+                <a:spcPts val="600"/>
+              </a:spcAft>
+            </a:pPr>
+            <a:r>
+              <a:rPr sz="1300" b="1" i="0">
+                <a:solidFill>
+                  <a:srgbClr val="D29B08"/>
+                </a:solidFill>
+                <a:latin typeface="Calibri"/>
+              </a:rPr>
+              <a:t>Check: </a:t>
+            </a:r>
+            <a:r>
+              <a:rPr sz="1300" b="0" i="0">
+                <a:solidFill>
+                  <a:srgbClr val="1E293B"/>
+                </a:solidFill>
+                <a:latin typeface="Calibri"/>
+              </a:rPr>
+              <a:t>Faster first update; fewer tickets at that location</a:t>
+            </a:r>
+          </a:p>
+        </p:txBody>
+      </p:sp>
+      <p:sp>
+        <p:nvSpPr>
+          <p:cNvPr id="8" name="Rounded Rectangle 7"/>
           <p:cNvSpPr/>
           <p:nvPr/>
         </p:nvSpPr>
         <p:spPr>
           <a:xfrm>
-            <a:off x="548640" y="2670048"/>
-            <a:ext cx="566928" cy="566928"/>
-          </a:xfrm>
-          <a:prstGeom prst="ellipse">
-            <a:avLst/>
+            <a:off x="4322064" y="1691640"/>
+            <a:ext cx="3544824" cy="2103120"/>
+          </a:xfrm>
+          <a:prstGeom prst="roundRect">
+            <a:avLst>
+              <a:gd name="adj" fmla="val 6000"/>
+            </a:avLst>
           </a:prstGeom>
           <a:solidFill>
-            <a:srgbClr val="D29B08"/>
+            <a:srgbClr val="FBF3DF"/>
           </a:solidFill>
           <a:ln>
             <a:noFill/>
@@ -18756,32 +18581,23 @@
           </a:fontRef>
         </p:style>
         <p:txBody>
-          <a:bodyPr rtlCol="0" anchor="ctr" wrap="square" lIns="73152" rIns="73152" tIns="36576" bIns="36576"/>
+          <a:bodyPr rtlCol="0" anchor="ctr"/>
           <a:lstStyle/>
           <a:p>
             <a:pPr algn="ctr"/>
-            <a:r>
-              <a:rPr sz="1800" b="1">
-                <a:solidFill>
-                  <a:srgbClr val="FFFFFF"/>
-                </a:solidFill>
-                <a:latin typeface="Calibri"/>
-              </a:rPr>
-              <a:t>2</a:t>
-            </a:r>
-          </a:p>
-        </p:txBody>
-      </p:sp>
-      <p:sp>
-        <p:nvSpPr>
-          <p:cNvPr id="8" name="TextBox 7"/>
+          </a:p>
+        </p:txBody>
+      </p:sp>
+      <p:sp>
+        <p:nvSpPr>
+          <p:cNvPr id="9" name="TextBox 8"/>
           <p:cNvSpPr txBox="1"/>
           <p:nvPr/>
         </p:nvSpPr>
         <p:spPr>
           <a:xfrm>
-            <a:off x="1371600" y="2606039"/>
-            <a:ext cx="3977639" cy="731520"/>
+            <a:off x="4550664" y="1874520"/>
+            <a:ext cx="3087624" cy="411480"/>
           </a:xfrm>
           <a:prstGeom prst="rect">
             <a:avLst/>
@@ -18789,7 +18605,7 @@
           <a:noFill/>
         </p:spPr>
         <p:txBody>
-          <a:bodyPr wrap="square" lIns="0" rIns="0" tIns="0" bIns="0" anchor="ctr">
+          <a:bodyPr wrap="square" lIns="0" rIns="0" tIns="0" bIns="0" anchor="t">
             <a:spAutoFit/>
           </a:bodyPr>
           <a:lstStyle/>
@@ -18806,21 +18622,21 @@
                 </a:solidFill>
                 <a:latin typeface="Calibri"/>
               </a:rPr>
-              <a:t>The bigger model didn’t win</a:t>
-            </a:r>
-          </a:p>
-        </p:txBody>
-      </p:sp>
-      <p:sp>
-        <p:nvSpPr>
-          <p:cNvPr id="9" name="TextBox 8"/>
+              <a:t>2  Plans &amp; pricing</a:t>
+            </a:r>
+          </a:p>
+        </p:txBody>
+      </p:sp>
+      <p:sp>
+        <p:nvSpPr>
+          <p:cNvPr id="10" name="TextBox 9"/>
           <p:cNvSpPr txBox="1"/>
           <p:nvPr/>
         </p:nvSpPr>
         <p:spPr>
           <a:xfrm>
-            <a:off x="5486400" y="2606039"/>
-            <a:ext cx="6153912" cy="731520"/>
+            <a:off x="4550664" y="2331720"/>
+            <a:ext cx="3087624" cy="868680"/>
           </a:xfrm>
           <a:prstGeom prst="rect">
             <a:avLst/>
@@ -18828,7 +18644,7 @@
           <a:noFill/>
         </p:spPr>
         <p:txBody>
-          <a:bodyPr wrap="square" lIns="0" rIns="0" tIns="0" bIns="0" anchor="ctr">
+          <a:bodyPr wrap="square" lIns="0" rIns="0" tIns="0" bIns="0" anchor="t">
             <a:spAutoFit/>
           </a:bodyPr>
           <a:lstStyle/>
@@ -18839,33 +18655,83 @@
               </a:spcAft>
             </a:pPr>
             <a:r>
-              <a:rPr sz="1600" b="0" i="0">
+              <a:rPr sz="1400" b="0" i="0">
                 <a:solidFill>
                   <a:srgbClr val="1E293B"/>
                 </a:solidFill>
                 <a:latin typeface="Calibri"/>
               </a:rPr>
-              <a:t>GPT-4o ties mini on sentiment at ~17× the cost, on both gold sets.</a:t>
-            </a:r>
-          </a:p>
-        </p:txBody>
-      </p:sp>
-      <p:sp>
-        <p:nvSpPr>
-          <p:cNvPr id="10" name="Oval 9"/>
+              <a:t>Show fair-use limits, add-on charges and recurring price at checkout</a:t>
+            </a:r>
+          </a:p>
+        </p:txBody>
+      </p:sp>
+      <p:sp>
+        <p:nvSpPr>
+          <p:cNvPr id="11" name="TextBox 10"/>
+          <p:cNvSpPr txBox="1"/>
+          <p:nvPr/>
+        </p:nvSpPr>
+        <p:spPr>
+          <a:xfrm>
+            <a:off x="4550664" y="3154680"/>
+            <a:ext cx="3087624" cy="548640"/>
+          </a:xfrm>
+          <a:prstGeom prst="rect">
+            <a:avLst/>
+          </a:prstGeom>
+          <a:noFill/>
+        </p:spPr>
+        <p:txBody>
+          <a:bodyPr wrap="square" lIns="0" rIns="0" tIns="0" bIns="0" anchor="t">
+            <a:spAutoFit/>
+          </a:bodyPr>
+          <a:lstStyle/>
+          <a:p>
+            <a:pPr algn="l">
+              <a:spcAft>
+                <a:spcPts val="600"/>
+              </a:spcAft>
+            </a:pPr>
+            <a:r>
+              <a:rPr sz="1300" b="1" i="0">
+                <a:solidFill>
+                  <a:srgbClr val="D29B08"/>
+                </a:solidFill>
+                <a:latin typeface="Calibri"/>
+              </a:rPr>
+              <a:t>Check: </a:t>
+            </a:r>
+            <a:r>
+              <a:rPr sz="1300" b="0" i="0">
+                <a:solidFill>
+                  <a:srgbClr val="1E293B"/>
+                </a:solidFill>
+                <a:latin typeface="Calibri"/>
+              </a:rPr>
+              <a:t>Fewer hidden-charge threads</a:t>
+            </a:r>
+          </a:p>
+        </p:txBody>
+      </p:sp>
+      <p:sp>
+        <p:nvSpPr>
+          <p:cNvPr id="12" name="Rounded Rectangle 11"/>
           <p:cNvSpPr/>
           <p:nvPr/>
         </p:nvSpPr>
         <p:spPr>
           <a:xfrm>
-            <a:off x="548640" y="3584448"/>
-            <a:ext cx="566928" cy="566928"/>
-          </a:xfrm>
-          <a:prstGeom prst="ellipse">
-            <a:avLst/>
+            <a:off x="8095488" y="1691640"/>
+            <a:ext cx="3544824" cy="2103120"/>
+          </a:xfrm>
+          <a:prstGeom prst="roundRect">
+            <a:avLst>
+              <a:gd name="adj" fmla="val 6000"/>
+            </a:avLst>
           </a:prstGeom>
           <a:solidFill>
-            <a:srgbClr val="D29B08"/>
+            <a:srgbClr val="F2F4F9"/>
           </a:solidFill>
           <a:ln>
             <a:noFill/>
@@ -18887,32 +18753,23 @@
           </a:fontRef>
         </p:style>
         <p:txBody>
-          <a:bodyPr rtlCol="0" anchor="ctr" wrap="square" lIns="73152" rIns="73152" tIns="36576" bIns="36576"/>
+          <a:bodyPr rtlCol="0" anchor="ctr"/>
           <a:lstStyle/>
           <a:p>
             <a:pPr algn="ctr"/>
-            <a:r>
-              <a:rPr sz="1800" b="1">
-                <a:solidFill>
-                  <a:srgbClr val="FFFFFF"/>
-                </a:solidFill>
-                <a:latin typeface="Calibri"/>
-              </a:rPr>
-              <a:t>3</a:t>
-            </a:r>
-          </a:p>
-        </p:txBody>
-      </p:sp>
-      <p:sp>
-        <p:nvSpPr>
-          <p:cNvPr id="11" name="TextBox 10"/>
+          </a:p>
+        </p:txBody>
+      </p:sp>
+      <p:sp>
+        <p:nvSpPr>
+          <p:cNvPr id="13" name="TextBox 12"/>
           <p:cNvSpPr txBox="1"/>
           <p:nvPr/>
         </p:nvSpPr>
         <p:spPr>
           <a:xfrm>
-            <a:off x="1371600" y="3520439"/>
-            <a:ext cx="3977639" cy="731520"/>
+            <a:off x="8324088" y="1874520"/>
+            <a:ext cx="3087624" cy="411480"/>
           </a:xfrm>
           <a:prstGeom prst="rect">
             <a:avLst/>
@@ -18920,7 +18777,7 @@
           <a:noFill/>
         </p:spPr>
         <p:txBody>
-          <a:bodyPr wrap="square" lIns="0" rIns="0" tIns="0" bIns="0" anchor="ctr">
+          <a:bodyPr wrap="square" lIns="0" rIns="0" tIns="0" bIns="0" anchor="t">
             <a:spAutoFit/>
           </a:bodyPr>
           <a:lstStyle/>
@@ -18937,21 +18794,21 @@
                 </a:solidFill>
                 <a:latin typeface="Calibri"/>
               </a:rPr>
-              <a:t>My best method failed the held-out test</a:t>
-            </a:r>
-          </a:p>
-        </p:txBody>
-      </p:sp>
-      <p:sp>
-        <p:nvSpPr>
-          <p:cNvPr id="12" name="TextBox 11"/>
+              <a:t>3  Devices &amp; app</a:t>
+            </a:r>
+          </a:p>
+        </p:txBody>
+      </p:sp>
+      <p:sp>
+        <p:nvSpPr>
+          <p:cNvPr id="14" name="TextBox 13"/>
           <p:cNvSpPr txBox="1"/>
           <p:nvPr/>
         </p:nvSpPr>
         <p:spPr>
           <a:xfrm>
-            <a:off x="5486400" y="3520439"/>
-            <a:ext cx="6153912" cy="731520"/>
+            <a:off x="8324088" y="2331720"/>
+            <a:ext cx="3087624" cy="868680"/>
           </a:xfrm>
           <a:prstGeom prst="rect">
             <a:avLst/>
@@ -18959,7 +18816,7 @@
           <a:noFill/>
         </p:spPr>
         <p:txBody>
-          <a:bodyPr wrap="square" lIns="0" rIns="0" tIns="0" bIns="0" anchor="ctr">
+          <a:bodyPr wrap="square" lIns="0" rIns="0" tIns="0" bIns="0" anchor="t">
             <a:spAutoFit/>
           </a:bodyPr>
           <a:lstStyle/>
@@ -18970,33 +18827,83 @@
               </a:spcAft>
             </a:pPr>
             <a:r>
-              <a:rPr sz="1600" b="0" i="0">
+              <a:rPr sz="1400" b="0" i="0">
                 <a:solidFill>
                   <a:srgbClr val="1E293B"/>
                 </a:solidFill>
                 <a:latin typeface="Calibri"/>
               </a:rPr>
-              <a:t>Hybrid: 0.680 on the set I tuned on, 0.509 on held-out posts, where GPT-4o on every post won.</a:t>
-            </a:r>
-          </a:p>
-        </p:txBody>
-      </p:sp>
-      <p:sp>
-        <p:nvSpPr>
-          <p:cNvPr id="13" name="Oval 12"/>
+              <a:t>Publish router and eSIM requirements; watch posts after each app release</a:t>
+            </a:r>
+          </a:p>
+        </p:txBody>
+      </p:sp>
+      <p:sp>
+        <p:nvSpPr>
+          <p:cNvPr id="15" name="TextBox 14"/>
+          <p:cNvSpPr txBox="1"/>
+          <p:nvPr/>
+        </p:nvSpPr>
+        <p:spPr>
+          <a:xfrm>
+            <a:off x="8324088" y="3154680"/>
+            <a:ext cx="3087624" cy="548640"/>
+          </a:xfrm>
+          <a:prstGeom prst="rect">
+            <a:avLst/>
+          </a:prstGeom>
+          <a:noFill/>
+        </p:spPr>
+        <p:txBody>
+          <a:bodyPr wrap="square" lIns="0" rIns="0" tIns="0" bIns="0" anchor="t">
+            <a:spAutoFit/>
+          </a:bodyPr>
+          <a:lstStyle/>
+          <a:p>
+            <a:pPr algn="l">
+              <a:spcAft>
+                <a:spcPts val="600"/>
+              </a:spcAft>
+            </a:pPr>
+            <a:r>
+              <a:rPr sz="1300" b="1" i="0">
+                <a:solidFill>
+                  <a:srgbClr val="D29B08"/>
+                </a:solidFill>
+                <a:latin typeface="Calibri"/>
+              </a:rPr>
+              <a:t>Check: </a:t>
+            </a:r>
+            <a:r>
+              <a:rPr sz="1300" b="0" i="0">
+                <a:solidFill>
+                  <a:srgbClr val="1E293B"/>
+                </a:solidFill>
+                <a:latin typeface="Calibri"/>
+              </a:rPr>
+              <a:t>Fewer equipment and “can’t log in” threads</a:t>
+            </a:r>
+          </a:p>
+        </p:txBody>
+      </p:sp>
+      <p:sp>
+        <p:nvSpPr>
+          <p:cNvPr id="16" name="Rounded Rectangle 15"/>
           <p:cNvSpPr/>
           <p:nvPr/>
         </p:nvSpPr>
         <p:spPr>
           <a:xfrm>
-            <a:off x="548640" y="4498848"/>
-            <a:ext cx="566928" cy="566928"/>
-          </a:xfrm>
-          <a:prstGeom prst="ellipse">
-            <a:avLst/>
+            <a:off x="548640" y="4023360"/>
+            <a:ext cx="3544824" cy="2103120"/>
+          </a:xfrm>
+          <a:prstGeom prst="roundRect">
+            <a:avLst>
+              <a:gd name="adj" fmla="val 6000"/>
+            </a:avLst>
           </a:prstGeom>
           <a:solidFill>
-            <a:srgbClr val="D29B08"/>
+            <a:srgbClr val="F2F4F9"/>
           </a:solidFill>
           <a:ln>
             <a:noFill/>
@@ -19018,32 +18925,23 @@
           </a:fontRef>
         </p:style>
         <p:txBody>
-          <a:bodyPr rtlCol="0" anchor="ctr" wrap="square" lIns="73152" rIns="73152" tIns="36576" bIns="36576"/>
+          <a:bodyPr rtlCol="0" anchor="ctr"/>
           <a:lstStyle/>
           <a:p>
             <a:pPr algn="ctr"/>
-            <a:r>
-              <a:rPr sz="1800" b="1">
-                <a:solidFill>
-                  <a:srgbClr val="FFFFFF"/>
-                </a:solidFill>
-                <a:latin typeface="Calibri"/>
-              </a:rPr>
-              <a:t>4</a:t>
-            </a:r>
-          </a:p>
-        </p:txBody>
-      </p:sp>
-      <p:sp>
-        <p:nvSpPr>
-          <p:cNvPr id="14" name="TextBox 13"/>
+          </a:p>
+        </p:txBody>
+      </p:sp>
+      <p:sp>
+        <p:nvSpPr>
+          <p:cNvPr id="17" name="TextBox 16"/>
           <p:cNvSpPr txBox="1"/>
           <p:nvPr/>
         </p:nvSpPr>
         <p:spPr>
           <a:xfrm>
-            <a:off x="1371600" y="4434840"/>
-            <a:ext cx="3977639" cy="731520"/>
+            <a:off x="777240" y="4206240"/>
+            <a:ext cx="3087624" cy="411480"/>
           </a:xfrm>
           <a:prstGeom prst="rect">
             <a:avLst/>
@@ -19051,7 +18949,7 @@
           <a:noFill/>
         </p:spPr>
         <p:txBody>
-          <a:bodyPr wrap="square" lIns="0" rIns="0" tIns="0" bIns="0" anchor="ctr">
+          <a:bodyPr wrap="square" lIns="0" rIns="0" tIns="0" bIns="0" anchor="t">
             <a:spAutoFit/>
           </a:bodyPr>
           <a:lstStyle/>
@@ -19068,21 +18966,21 @@
                 </a:solidFill>
                 <a:latin typeface="Calibri"/>
               </a:rPr>
-              <a:t>Two ‘insights’ were one outage</a:t>
-            </a:r>
-          </a:p>
-        </p:txBody>
-      </p:sp>
-      <p:sp>
-        <p:nvSpPr>
-          <p:cNvPr id="15" name="TextBox 14"/>
+              <a:t>4  Incident aftercare</a:t>
+            </a:r>
+          </a:p>
+        </p:txBody>
+      </p:sp>
+      <p:sp>
+        <p:nvSpPr>
+          <p:cNvPr id="18" name="TextBox 17"/>
           <p:cNvSpPr txBox="1"/>
           <p:nvPr/>
         </p:nvSpPr>
         <p:spPr>
           <a:xfrm>
-            <a:off x="5486400" y="4434840"/>
-            <a:ext cx="6153912" cy="731520"/>
+            <a:off x="777240" y="4663440"/>
+            <a:ext cx="3087624" cy="868680"/>
           </a:xfrm>
           <a:prstGeom prst="rect">
             <a:avLst/>
@@ -19090,7 +18988,7 @@
           <a:noFill/>
         </p:spPr>
         <p:txBody>
-          <a:bodyPr wrap="square" lIns="0" rIns="0" tIns="0" bIns="0" anchor="ctr">
+          <a:bodyPr wrap="square" lIns="0" rIns="0" tIns="0" bIns="0" anchor="t">
             <a:spAutoFit/>
           </a:bodyPr>
           <a:lstStyle/>
@@ -19101,33 +18999,83 @@
               </a:spcAft>
             </a:pPr>
             <a:r>
-              <a:rPr sz="1600" b="0" i="0">
+              <a:rPr sz="1400" b="0" i="0">
                 <a:solidFill>
                   <a:srgbClr val="1E293B"/>
                 </a:solidFill>
                 <a:latin typeface="Calibri"/>
               </a:rPr>
-              <a:t>Reddit vs HWZ and Singtel vs StarHub both close once the 22 outage threads are removed.</a:t>
-            </a:r>
-          </a:p>
-        </p:txBody>
-      </p:sp>
-      <p:sp>
-        <p:nvSpPr>
-          <p:cNvPr id="16" name="Oval 15"/>
+              <a:t>Publish the compensation rule with the outage notice; keep self-service open</a:t>
+            </a:r>
+          </a:p>
+        </p:txBody>
+      </p:sp>
+      <p:sp>
+        <p:nvSpPr>
+          <p:cNvPr id="19" name="TextBox 18"/>
+          <p:cNvSpPr txBox="1"/>
+          <p:nvPr/>
+        </p:nvSpPr>
+        <p:spPr>
+          <a:xfrm>
+            <a:off x="777240" y="5486400"/>
+            <a:ext cx="3087624" cy="548640"/>
+          </a:xfrm>
+          <a:prstGeom prst="rect">
+            <a:avLst/>
+          </a:prstGeom>
+          <a:noFill/>
+        </p:spPr>
+        <p:txBody>
+          <a:bodyPr wrap="square" lIns="0" rIns="0" tIns="0" bIns="0" anchor="t">
+            <a:spAutoFit/>
+          </a:bodyPr>
+          <a:lstStyle/>
+          <a:p>
+            <a:pPr algn="l">
+              <a:spcAft>
+                <a:spcPts val="600"/>
+              </a:spcAft>
+            </a:pPr>
+            <a:r>
+              <a:rPr sz="1300" b="1" i="0">
+                <a:solidFill>
+                  <a:srgbClr val="D29B08"/>
+                </a:solidFill>
+                <a:latin typeface="Calibri"/>
+              </a:rPr>
+              <a:t>Check: </a:t>
+            </a:r>
+            <a:r>
+              <a:rPr sz="1300" b="0" i="0">
+                <a:solidFill>
+                  <a:srgbClr val="1E293B"/>
+                </a:solidFill>
+                <a:latin typeface="Calibri"/>
+              </a:rPr>
+              <a:t>Fewer compensation and “can’t reach support” posts</a:t>
+            </a:r>
+          </a:p>
+        </p:txBody>
+      </p:sp>
+      <p:sp>
+        <p:nvSpPr>
+          <p:cNvPr id="20" name="Rounded Rectangle 19"/>
           <p:cNvSpPr/>
           <p:nvPr/>
         </p:nvSpPr>
         <p:spPr>
           <a:xfrm>
-            <a:off x="548640" y="5413248"/>
-            <a:ext cx="566928" cy="566928"/>
-          </a:xfrm>
-          <a:prstGeom prst="ellipse">
-            <a:avLst/>
+            <a:off x="4322064" y="4023360"/>
+            <a:ext cx="3544824" cy="2103120"/>
+          </a:xfrm>
+          <a:prstGeom prst="roundRect">
+            <a:avLst>
+              <a:gd name="adj" fmla="val 6000"/>
+            </a:avLst>
           </a:prstGeom>
           <a:solidFill>
-            <a:srgbClr val="D29B08"/>
+            <a:srgbClr val="F2F4F9"/>
           </a:solidFill>
           <a:ln>
             <a:noFill/>
@@ -19149,32 +19097,23 @@
           </a:fontRef>
         </p:style>
         <p:txBody>
-          <a:bodyPr rtlCol="0" anchor="ctr" wrap="square" lIns="73152" rIns="73152" tIns="36576" bIns="36576"/>
+          <a:bodyPr rtlCol="0" anchor="ctr"/>
           <a:lstStyle/>
           <a:p>
             <a:pPr algn="ctr"/>
-            <a:r>
-              <a:rPr sz="1800" b="1">
-                <a:solidFill>
-                  <a:srgbClr val="FFFFFF"/>
-                </a:solidFill>
-                <a:latin typeface="Calibri"/>
-              </a:rPr>
-              <a:t>5</a:t>
-            </a:r>
-          </a:p>
-        </p:txBody>
-      </p:sp>
-      <p:sp>
-        <p:nvSpPr>
-          <p:cNvPr id="17" name="TextBox 16"/>
+          </a:p>
+        </p:txBody>
+      </p:sp>
+      <p:sp>
+        <p:nvSpPr>
+          <p:cNvPr id="21" name="TextBox 20"/>
           <p:cNvSpPr txBox="1"/>
           <p:nvPr/>
         </p:nvSpPr>
         <p:spPr>
           <a:xfrm>
-            <a:off x="1371600" y="5349240"/>
-            <a:ext cx="3977639" cy="731520"/>
+            <a:off x="4550664" y="4206240"/>
+            <a:ext cx="3087624" cy="411480"/>
           </a:xfrm>
           <a:prstGeom prst="rect">
             <a:avLst/>
@@ -19182,7 +19121,7 @@
           <a:noFill/>
         </p:spPr>
         <p:txBody>
-          <a:bodyPr wrap="square" lIns="0" rIns="0" tIns="0" bIns="0" anchor="ctr">
+          <a:bodyPr wrap="square" lIns="0" rIns="0" tIns="0" bIns="0" anchor="t">
             <a:spAutoFit/>
           </a:bodyPr>
           <a:lstStyle/>
@@ -19199,21 +19138,21 @@
                 </a:solidFill>
                 <a:latin typeface="Calibri"/>
               </a:rPr>
-              <a:t>The data had bugs too</a:t>
-            </a:r>
-          </a:p>
-        </p:txBody>
-      </p:sp>
-      <p:sp>
-        <p:nvSpPr>
-          <p:cNvPr id="18" name="TextBox 17"/>
+              <a:t>5  Roaming, porting</a:t>
+            </a:r>
+          </a:p>
+        </p:txBody>
+      </p:sp>
+      <p:sp>
+        <p:nvSpPr>
+          <p:cNvPr id="22" name="TextBox 21"/>
           <p:cNvSpPr txBox="1"/>
           <p:nvPr/>
         </p:nvSpPr>
         <p:spPr>
           <a:xfrm>
-            <a:off x="5486400" y="5349240"/>
-            <a:ext cx="6153912" cy="731520"/>
+            <a:off x="4550664" y="4663440"/>
+            <a:ext cx="3087624" cy="868680"/>
           </a:xfrm>
           <a:prstGeom prst="rect">
             <a:avLst/>
@@ -19221,7 +19160,7 @@
           <a:noFill/>
         </p:spPr>
         <p:txBody>
-          <a:bodyPr wrap="square" lIns="0" rIns="0" tIns="0" bIns="0" anchor="ctr">
+          <a:bodyPr wrap="square" lIns="0" rIns="0" tIns="0" bIns="0" anchor="t">
             <a:spAutoFit/>
           </a:bodyPr>
           <a:lstStyle/>
@@ -19232,13 +19171,233 @@
               </a:spcAft>
             </a:pPr>
             <a:r>
-              <a:rPr sz="1600" b="0" i="0">
+              <a:rPr sz="1400" b="0" i="0">
                 <a:solidFill>
                   <a:srgbClr val="1E293B"/>
                 </a:solidFill>
                 <a:latin typeface="Calibri"/>
               </a:rPr>
-              <a:t>15,504 rows → 2,693 unique posts; HWZ scraper only read page 1 of threads.</a:t>
+              <a:t>Small, mostly questions: a travel checklist and clearer port timelines</a:t>
+            </a:r>
+          </a:p>
+        </p:txBody>
+      </p:sp>
+      <p:sp>
+        <p:nvSpPr>
+          <p:cNvPr id="23" name="TextBox 22"/>
+          <p:cNvSpPr txBox="1"/>
+          <p:nvPr/>
+        </p:nvSpPr>
+        <p:spPr>
+          <a:xfrm>
+            <a:off x="4550664" y="5486400"/>
+            <a:ext cx="3087624" cy="548640"/>
+          </a:xfrm>
+          <a:prstGeom prst="rect">
+            <a:avLst/>
+          </a:prstGeom>
+          <a:noFill/>
+        </p:spPr>
+        <p:txBody>
+          <a:bodyPr wrap="square" lIns="0" rIns="0" tIns="0" bIns="0" anchor="t">
+            <a:spAutoFit/>
+          </a:bodyPr>
+          <a:lstStyle/>
+          <a:p>
+            <a:pPr algn="l">
+              <a:spcAft>
+                <a:spcPts val="600"/>
+              </a:spcAft>
+            </a:pPr>
+            <a:r>
+              <a:rPr sz="1300" b="1" i="0">
+                <a:solidFill>
+                  <a:srgbClr val="D29B08"/>
+                </a:solidFill>
+                <a:latin typeface="Calibri"/>
+              </a:rPr>
+              <a:t>Check: </a:t>
+            </a:r>
+            <a:r>
+              <a:rPr sz="1300" b="0" i="0">
+                <a:solidFill>
+                  <a:srgbClr val="1E293B"/>
+                </a:solidFill>
+                <a:latin typeface="Calibri"/>
+              </a:rPr>
+              <a:t>No priority unless volume rises</a:t>
+            </a:r>
+          </a:p>
+        </p:txBody>
+      </p:sp>
+      <p:sp>
+        <p:nvSpPr>
+          <p:cNvPr id="24" name="Rounded Rectangle 23"/>
+          <p:cNvSpPr/>
+          <p:nvPr/>
+        </p:nvSpPr>
+        <p:spPr>
+          <a:xfrm>
+            <a:off x="8095488" y="4023360"/>
+            <a:ext cx="3544824" cy="2103120"/>
+          </a:xfrm>
+          <a:prstGeom prst="roundRect">
+            <a:avLst>
+              <a:gd name="adj" fmla="val 6000"/>
+            </a:avLst>
+          </a:prstGeom>
+          <a:solidFill>
+            <a:srgbClr val="F2F4F9"/>
+          </a:solidFill>
+          <a:ln>
+            <a:noFill/>
+          </a:ln>
+          <a:effectLst/>
+        </p:spPr>
+        <p:style>
+          <a:lnRef idx="1">
+            <a:schemeClr val="accent1"/>
+          </a:lnRef>
+          <a:fillRef idx="3">
+            <a:schemeClr val="accent1"/>
+          </a:fillRef>
+          <a:effectRef idx="2">
+            <a:schemeClr val="accent1"/>
+          </a:effectRef>
+          <a:fontRef idx="minor">
+            <a:schemeClr val="lt1"/>
+          </a:fontRef>
+        </p:style>
+        <p:txBody>
+          <a:bodyPr rtlCol="0" anchor="ctr"/>
+          <a:lstStyle/>
+          <a:p>
+            <a:pPr algn="ctr"/>
+          </a:p>
+        </p:txBody>
+      </p:sp>
+      <p:sp>
+        <p:nvSpPr>
+          <p:cNvPr id="25" name="TextBox 24"/>
+          <p:cNvSpPr txBox="1"/>
+          <p:nvPr/>
+        </p:nvSpPr>
+        <p:spPr>
+          <a:xfrm>
+            <a:off x="8324088" y="4206240"/>
+            <a:ext cx="3087624" cy="411480"/>
+          </a:xfrm>
+          <a:prstGeom prst="rect">
+            <a:avLst/>
+          </a:prstGeom>
+          <a:noFill/>
+        </p:spPr>
+        <p:txBody>
+          <a:bodyPr wrap="square" lIns="0" rIns="0" tIns="0" bIns="0" anchor="t">
+            <a:spAutoFit/>
+          </a:bodyPr>
+          <a:lstStyle/>
+          <a:p>
+            <a:pPr algn="l">
+              <a:spcAft>
+                <a:spcPts val="600"/>
+              </a:spcAft>
+            </a:pPr>
+            <a:r>
+              <a:rPr sz="1800" b="1" i="0">
+                <a:solidFill>
+                  <a:srgbClr val="1C2E6E"/>
+                </a:solidFill>
+                <a:latin typeface="Calibri"/>
+              </a:rPr>
+              <a:t>6  Weekly huddle</a:t>
+            </a:r>
+          </a:p>
+        </p:txBody>
+      </p:sp>
+      <p:sp>
+        <p:nvSpPr>
+          <p:cNvPr id="26" name="TextBox 25"/>
+          <p:cNvSpPr txBox="1"/>
+          <p:nvPr/>
+        </p:nvSpPr>
+        <p:spPr>
+          <a:xfrm>
+            <a:off x="8324088" y="4663440"/>
+            <a:ext cx="3087624" cy="868680"/>
+          </a:xfrm>
+          <a:prstGeom prst="rect">
+            <a:avLst/>
+          </a:prstGeom>
+          <a:noFill/>
+        </p:spPr>
+        <p:txBody>
+          <a:bodyPr wrap="square" lIns="0" rIns="0" tIns="0" bIns="0" anchor="t">
+            <a:spAutoFit/>
+          </a:bodyPr>
+          <a:lstStyle/>
+          <a:p>
+            <a:pPr algn="l">
+              <a:spcAft>
+                <a:spcPts val="600"/>
+              </a:spcAft>
+            </a:pPr>
+            <a:r>
+              <a:rPr sz="1400" b="0" i="0">
+                <a:solidFill>
+                  <a:srgbClr val="1E293B"/>
+                </a:solidFill>
+                <a:latin typeface="Calibri"/>
+              </a:rPr>
+              <a:t>Act only when a week reaches twice a normal week; one owner, one date</a:t>
+            </a:r>
+          </a:p>
+        </p:txBody>
+      </p:sp>
+      <p:sp>
+        <p:nvSpPr>
+          <p:cNvPr id="27" name="TextBox 26"/>
+          <p:cNvSpPr txBox="1"/>
+          <p:nvPr/>
+        </p:nvSpPr>
+        <p:spPr>
+          <a:xfrm>
+            <a:off x="8324088" y="5486400"/>
+            <a:ext cx="3087624" cy="548640"/>
+          </a:xfrm>
+          <a:prstGeom prst="rect">
+            <a:avLst/>
+          </a:prstGeom>
+          <a:noFill/>
+        </p:spPr>
+        <p:txBody>
+          <a:bodyPr wrap="square" lIns="0" rIns="0" tIns="0" bIns="0" anchor="t">
+            <a:spAutoFit/>
+          </a:bodyPr>
+          <a:lstStyle/>
+          <a:p>
+            <a:pPr algn="l">
+              <a:spcAft>
+                <a:spcPts val="600"/>
+              </a:spcAft>
+            </a:pPr>
+            <a:r>
+              <a:rPr sz="1300" b="1" i="0">
+                <a:solidFill>
+                  <a:srgbClr val="D29B08"/>
+                </a:solidFill>
+                <a:latin typeface="Calibri"/>
+              </a:rPr>
+              <a:t>Check: </a:t>
+            </a:r>
+            <a:r>
+              <a:rPr sz="1300" b="0" i="0">
+                <a:solidFill>
+                  <a:srgbClr val="1E293B"/>
+                </a:solidFill>
+                <a:latin typeface="Calibri"/>
+              </a:rPr>
+              <a:t>That issue’s share falls next week</a:t>
             </a:r>
           </a:p>
         </p:txBody>
@@ -19295,7 +19454,7 @@
                 </a:solidFill>
                 <a:latin typeface="Calibri"/>
               </a:rPr>
-              <a:t>Limitations I’d flag to any reader</a:t>
+              <a:t>What I found most interesting</a:t>
             </a:r>
           </a:p>
         </p:txBody>
@@ -19341,22 +19500,20 @@
       </p:sp>
       <p:sp>
         <p:nvSpPr>
-          <p:cNvPr id="4" name="Rounded Rectangle 3"/>
+          <p:cNvPr id="4" name="Oval 3"/>
           <p:cNvSpPr/>
           <p:nvPr/>
         </p:nvSpPr>
         <p:spPr>
           <a:xfrm>
-            <a:off x="548640" y="1691640"/>
-            <a:ext cx="5422392" cy="3931920"/>
-          </a:xfrm>
-          <a:prstGeom prst="roundRect">
-            <a:avLst>
-              <a:gd name="adj" fmla="val 6000"/>
-            </a:avLst>
+            <a:off x="548640" y="1755648"/>
+            <a:ext cx="566928" cy="566928"/>
+          </a:xfrm>
+          <a:prstGeom prst="ellipse">
+            <a:avLst/>
           </a:prstGeom>
           <a:solidFill>
-            <a:srgbClr val="F2F4F9"/>
+            <a:srgbClr val="D29B08"/>
           </a:solidFill>
           <a:ln>
             <a:noFill/>
@@ -19378,10 +19535,19 @@
           </a:fontRef>
         </p:style>
         <p:txBody>
-          <a:bodyPr rtlCol="0" anchor="ctr"/>
+          <a:bodyPr rtlCol="0" anchor="ctr" wrap="square" lIns="73152" rIns="73152" tIns="36576" bIns="36576"/>
           <a:lstStyle/>
           <a:p>
             <a:pPr algn="ctr"/>
+            <a:r>
+              <a:rPr sz="1800" b="1">
+                <a:solidFill>
+                  <a:srgbClr val="FFFFFF"/>
+                </a:solidFill>
+                <a:latin typeface="Calibri"/>
+              </a:rPr>
+              <a:t>1</a:t>
+            </a:r>
           </a:p>
         </p:txBody>
       </p:sp>
@@ -19393,8 +19559,8 @@
         </p:nvSpPr>
         <p:spPr>
           <a:xfrm>
-            <a:off x="822959" y="1920240"/>
-            <a:ext cx="4846320" cy="457200"/>
+            <a:off x="1371600" y="1691640"/>
+            <a:ext cx="3977639" cy="731520"/>
           </a:xfrm>
           <a:prstGeom prst="rect">
             <a:avLst/>
@@ -19402,7 +19568,7 @@
           <a:noFill/>
         </p:spPr>
         <p:txBody>
-          <a:bodyPr wrap="square" lIns="0" rIns="0" tIns="0" bIns="0" anchor="t">
+          <a:bodyPr wrap="square" lIns="0" rIns="0" tIns="0" bIns="0" anchor="ctr">
             <a:spAutoFit/>
           </a:bodyPr>
           <a:lstStyle/>
@@ -19413,13 +19579,13 @@
               </a:spcAft>
             </a:pPr>
             <a:r>
-              <a:rPr sz="2200" b="1" i="0">
+              <a:rPr sz="1800" b="1" i="0">
                 <a:solidFill>
                   <a:srgbClr val="1C2E6E"/>
                 </a:solidFill>
                 <a:latin typeface="Calibri"/>
               </a:rPr>
-              <a:t>Data</a:t>
+              <a:t>A perfect score was the warning sign</a:t>
             </a:r>
           </a:p>
         </p:txBody>
@@ -19432,8 +19598,8 @@
         </p:nvSpPr>
         <p:spPr>
           <a:xfrm>
-            <a:off x="822959" y="2560320"/>
-            <a:ext cx="4892040" cy="2926080"/>
+            <a:off x="5486400" y="1691640"/>
+            <a:ext cx="6153912" cy="731520"/>
           </a:xfrm>
           <a:prstGeom prst="rect">
             <a:avLst/>
@@ -19441,114 +19607,44 @@
           <a:noFill/>
         </p:spPr>
         <p:txBody>
-          <a:bodyPr wrap="square" lIns="0" rIns="0" tIns="0" bIns="0" anchor="t">
+          <a:bodyPr wrap="square" lIns="0" rIns="0" tIns="0" bIns="0" anchor="ctr">
             <a:spAutoFit/>
           </a:bodyPr>
           <a:lstStyle/>
           <a:p>
-            <a:pPr algn="l" marL="256032" indent="-256032">
+            <a:pPr algn="l">
               <a:spcAft>
-                <a:spcPts val="1400"/>
+                <a:spcPts val="600"/>
               </a:spcAft>
-              <a:buClr>
-                <a:srgbClr val="D29B08"/>
-              </a:buClr>
-              <a:buFont typeface="Arial"/>
-              <a:buChar char="•"/>
             </a:pPr>
             <a:r>
-              <a:rPr sz="1700" b="0" i="0">
+              <a:rPr sz="1600" b="0" i="0">
                 <a:solidFill>
                   <a:srgbClr val="1E293B"/>
                 </a:solidFill>
                 <a:latin typeface="Calibri"/>
               </a:rPr>
-              <a:t>Forum posters self-select; they are not all subscribers</a:t>
-            </a:r>
-          </a:p>
-          <a:p>
-            <a:pPr algn="l" marL="256032" indent="-256032">
-              <a:spcAft>
-                <a:spcPts val="1400"/>
-              </a:spcAft>
-              <a:buClr>
-                <a:srgbClr val="D29B08"/>
-              </a:buClr>
-              <a:buFont typeface="Arial"/>
-              <a:buChar char="•"/>
-            </a:pPr>
-            <a:r>
-              <a:rPr sz="1700" b="0" i="0">
-                <a:solidFill>
-                  <a:srgbClr val="1E293B"/>
-                </a:solidFill>
-                <a:latin typeface="Calibri"/>
-              </a:rPr>
-              <a:t>95% of posts from 2026; replies cluster by thread</a:t>
-            </a:r>
-          </a:p>
-          <a:p>
-            <a:pPr algn="l" marL="256032" indent="-256032">
-              <a:spcAft>
-                <a:spcPts val="1400"/>
-              </a:spcAft>
-              <a:buClr>
-                <a:srgbClr val="D29B08"/>
-              </a:buClr>
-              <a:buFont typeface="Arial"/>
-              <a:buChar char="•"/>
-            </a:pPr>
-            <a:r>
-              <a:rPr sz="1700" b="0" i="0">
-                <a:solidFill>
-                  <a:srgbClr val="1E293B"/>
-                </a:solidFill>
-                <a:latin typeface="Calibri"/>
-              </a:rPr>
-              <a:t>Wave-2 Reddit via a research archive</a:t>
-            </a:r>
-          </a:p>
-          <a:p>
-            <a:pPr algn="l" marL="256032" indent="-256032">
-              <a:spcAft>
-                <a:spcPts val="1400"/>
-              </a:spcAft>
-              <a:buClr>
-                <a:srgbClr val="D29B08"/>
-              </a:buClr>
-              <a:buFont typeface="Arial"/>
-              <a:buChar char="•"/>
-            </a:pPr>
-            <a:r>
-              <a:rPr sz="1700" b="0" i="0">
-                <a:solidFill>
-                  <a:srgbClr val="1E293B"/>
-                </a:solidFill>
-                <a:latin typeface="Calibri"/>
-              </a:rPr>
-              <a:t>No tickets, outages or NPS to validate against</a:t>
-            </a:r>
-          </a:p>
-        </p:txBody>
-      </p:sp>
-      <p:sp>
-        <p:nvSpPr>
-          <p:cNvPr id="7" name="Rounded Rectangle 6"/>
+              <a:t>100% VADER accuracy came from model-prefilled labels.</a:t>
+            </a:r>
+          </a:p>
+        </p:txBody>
+      </p:sp>
+      <p:sp>
+        <p:nvSpPr>
+          <p:cNvPr id="7" name="Oval 6"/>
           <p:cNvSpPr/>
           <p:nvPr/>
         </p:nvSpPr>
         <p:spPr>
           <a:xfrm>
-            <a:off x="6217920" y="1691640"/>
-            <a:ext cx="5422392" cy="3931920"/>
-          </a:xfrm>
-          <a:prstGeom prst="roundRect">
-            <a:avLst>
-              <a:gd name="adj" fmla="val 6000"/>
-            </a:avLst>
+            <a:off x="548640" y="2670048"/>
+            <a:ext cx="566928" cy="566928"/>
+          </a:xfrm>
+          <a:prstGeom prst="ellipse">
+            <a:avLst/>
           </a:prstGeom>
           <a:solidFill>
-            <a:srgbClr val="F2F4F9"/>
+            <a:srgbClr val="D29B08"/>
           </a:solidFill>
           <a:ln>
             <a:noFill/>
@@ -19570,10 +19666,19 @@
           </a:fontRef>
         </p:style>
         <p:txBody>
-          <a:bodyPr rtlCol="0" anchor="ctr"/>
+          <a:bodyPr rtlCol="0" anchor="ctr" wrap="square" lIns="73152" rIns="73152" tIns="36576" bIns="36576"/>
           <a:lstStyle/>
           <a:p>
             <a:pPr algn="ctr"/>
+            <a:r>
+              <a:rPr sz="1800" b="1">
+                <a:solidFill>
+                  <a:srgbClr val="FFFFFF"/>
+                </a:solidFill>
+                <a:latin typeface="Calibri"/>
+              </a:rPr>
+              <a:t>2</a:t>
+            </a:r>
           </a:p>
         </p:txBody>
       </p:sp>
@@ -19585,8 +19690,8 @@
         </p:nvSpPr>
         <p:spPr>
           <a:xfrm>
-            <a:off x="6492240" y="1920240"/>
-            <a:ext cx="4846320" cy="457200"/>
+            <a:off x="1371600" y="2606039"/>
+            <a:ext cx="3977639" cy="731520"/>
           </a:xfrm>
           <a:prstGeom prst="rect">
             <a:avLst/>
@@ -19594,7 +19699,7 @@
           <a:noFill/>
         </p:spPr>
         <p:txBody>
-          <a:bodyPr wrap="square" lIns="0" rIns="0" tIns="0" bIns="0" anchor="t">
+          <a:bodyPr wrap="square" lIns="0" rIns="0" tIns="0" bIns="0" anchor="ctr">
             <a:spAutoFit/>
           </a:bodyPr>
           <a:lstStyle/>
@@ -19605,13 +19710,13 @@
               </a:spcAft>
             </a:pPr>
             <a:r>
-              <a:rPr sz="2200" b="1" i="0">
+              <a:rPr sz="1800" b="1" i="0">
                 <a:solidFill>
                   <a:srgbClr val="1C2E6E"/>
                 </a:solidFill>
                 <a:latin typeface="Calibri"/>
               </a:rPr>
-              <a:t>Method</a:t>
+              <a:t>The bigger model didn’t win</a:t>
             </a:r>
           </a:p>
         </p:txBody>
@@ -19624,8 +19729,8 @@
         </p:nvSpPr>
         <p:spPr>
           <a:xfrm>
-            <a:off x="6492240" y="2560320"/>
-            <a:ext cx="4892040" cy="2926080"/>
+            <a:off x="5486400" y="2606039"/>
+            <a:ext cx="6153912" cy="731520"/>
           </a:xfrm>
           <a:prstGeom prst="rect">
             <a:avLst/>
@@ -19633,92 +19738,417 @@
           <a:noFill/>
         </p:spPr>
         <p:txBody>
-          <a:bodyPr wrap="square" lIns="0" rIns="0" tIns="0" bIns="0" anchor="t">
+          <a:bodyPr wrap="square" lIns="0" rIns="0" tIns="0" bIns="0" anchor="ctr">
             <a:spAutoFit/>
           </a:bodyPr>
           <a:lstStyle/>
           <a:p>
-            <a:pPr algn="l" marL="256032" indent="-256032">
+            <a:pPr algn="l">
               <a:spcAft>
-                <a:spcPts val="1400"/>
+                <a:spcPts val="600"/>
               </a:spcAft>
-              <a:buClr>
-                <a:srgbClr val="D29B08"/>
-              </a:buClr>
-              <a:buFont typeface="Arial"/>
-              <a:buChar char="•"/>
             </a:pPr>
             <a:r>
-              <a:rPr sz="1700" b="0" i="0">
+              <a:rPr sz="1600" b="0" i="0">
                 <a:solidFill>
                   <a:srgbClr val="1E293B"/>
                 </a:solidFill>
                 <a:latin typeface="Calibri"/>
               </a:rPr>
-              <a:t>Mini matches humans on ~2/3 of posts; humans agree at κ 0.38</a:t>
-            </a:r>
-          </a:p>
-          <a:p>
-            <a:pPr algn="l" marL="256032" indent="-256032">
+              <a:t>GPT-4o ties mini on sentiment at ~17× the cost, on both gold sets.</a:t>
+            </a:r>
+          </a:p>
+        </p:txBody>
+      </p:sp>
+      <p:sp>
+        <p:nvSpPr>
+          <p:cNvPr id="10" name="Oval 9"/>
+          <p:cNvSpPr/>
+          <p:nvPr/>
+        </p:nvSpPr>
+        <p:spPr>
+          <a:xfrm>
+            <a:off x="548640" y="3584448"/>
+            <a:ext cx="566928" cy="566928"/>
+          </a:xfrm>
+          <a:prstGeom prst="ellipse">
+            <a:avLst/>
+          </a:prstGeom>
+          <a:solidFill>
+            <a:srgbClr val="D29B08"/>
+          </a:solidFill>
+          <a:ln>
+            <a:noFill/>
+          </a:ln>
+          <a:effectLst/>
+        </p:spPr>
+        <p:style>
+          <a:lnRef idx="1">
+            <a:schemeClr val="accent1"/>
+          </a:lnRef>
+          <a:fillRef idx="3">
+            <a:schemeClr val="accent1"/>
+          </a:fillRef>
+          <a:effectRef idx="2">
+            <a:schemeClr val="accent1"/>
+          </a:effectRef>
+          <a:fontRef idx="minor">
+            <a:schemeClr val="lt1"/>
+          </a:fontRef>
+        </p:style>
+        <p:txBody>
+          <a:bodyPr rtlCol="0" anchor="ctr" wrap="square" lIns="73152" rIns="73152" tIns="36576" bIns="36576"/>
+          <a:lstStyle/>
+          <a:p>
+            <a:pPr algn="ctr"/>
+            <a:r>
+              <a:rPr sz="1800" b="1">
+                <a:solidFill>
+                  <a:srgbClr val="FFFFFF"/>
+                </a:solidFill>
+                <a:latin typeface="Calibri"/>
+              </a:rPr>
+              <a:t>3</a:t>
+            </a:r>
+          </a:p>
+        </p:txBody>
+      </p:sp>
+      <p:sp>
+        <p:nvSpPr>
+          <p:cNvPr id="11" name="TextBox 10"/>
+          <p:cNvSpPr txBox="1"/>
+          <p:nvPr/>
+        </p:nvSpPr>
+        <p:spPr>
+          <a:xfrm>
+            <a:off x="1371600" y="3520439"/>
+            <a:ext cx="3977639" cy="731520"/>
+          </a:xfrm>
+          <a:prstGeom prst="rect">
+            <a:avLst/>
+          </a:prstGeom>
+          <a:noFill/>
+        </p:spPr>
+        <p:txBody>
+          <a:bodyPr wrap="square" lIns="0" rIns="0" tIns="0" bIns="0" anchor="ctr">
+            <a:spAutoFit/>
+          </a:bodyPr>
+          <a:lstStyle/>
+          <a:p>
+            <a:pPr algn="l">
               <a:spcAft>
-                <a:spcPts val="1400"/>
+                <a:spcPts val="600"/>
               </a:spcAft>
-              <a:buClr>
-                <a:srgbClr val="D29B08"/>
-              </a:buClr>
-              <a:buFont typeface="Arial"/>
-              <a:buChar char="•"/>
             </a:pPr>
             <a:r>
-              <a:rPr sz="1700" b="0" i="0">
+              <a:rPr sz="1800" b="1" i="0">
+                <a:solidFill>
+                  <a:srgbClr val="1C2E6E"/>
+                </a:solidFill>
+                <a:latin typeface="Calibri"/>
+              </a:rPr>
+              <a:t>My best method failed the held-out test</a:t>
+            </a:r>
+          </a:p>
+        </p:txBody>
+      </p:sp>
+      <p:sp>
+        <p:nvSpPr>
+          <p:cNvPr id="12" name="TextBox 11"/>
+          <p:cNvSpPr txBox="1"/>
+          <p:nvPr/>
+        </p:nvSpPr>
+        <p:spPr>
+          <a:xfrm>
+            <a:off x="5486400" y="3520439"/>
+            <a:ext cx="6153912" cy="731520"/>
+          </a:xfrm>
+          <a:prstGeom prst="rect">
+            <a:avLst/>
+          </a:prstGeom>
+          <a:noFill/>
+        </p:spPr>
+        <p:txBody>
+          <a:bodyPr wrap="square" lIns="0" rIns="0" tIns="0" bIns="0" anchor="ctr">
+            <a:spAutoFit/>
+          </a:bodyPr>
+          <a:lstStyle/>
+          <a:p>
+            <a:pPr algn="l">
+              <a:spcAft>
+                <a:spcPts val="600"/>
+              </a:spcAft>
+            </a:pPr>
+            <a:r>
+              <a:rPr sz="1600" b="0" i="0">
                 <a:solidFill>
                   <a:srgbClr val="1E293B"/>
                 </a:solidFill>
                 <a:latin typeface="Calibri"/>
               </a:rPr>
-              <a:t>Gold labels are wave 1 only; wave-2 check pending</a:t>
-            </a:r>
-          </a:p>
-          <a:p>
-            <a:pPr algn="l" marL="256032" indent="-256032">
+              <a:t>Hybrid: 0.680 on the set I tuned on, 0.509 on held-out posts, where GPT-4o on every post won.</a:t>
+            </a:r>
+          </a:p>
+        </p:txBody>
+      </p:sp>
+      <p:sp>
+        <p:nvSpPr>
+          <p:cNvPr id="13" name="Oval 12"/>
+          <p:cNvSpPr/>
+          <p:nvPr/>
+        </p:nvSpPr>
+        <p:spPr>
+          <a:xfrm>
+            <a:off x="548640" y="4498848"/>
+            <a:ext cx="566928" cy="566928"/>
+          </a:xfrm>
+          <a:prstGeom prst="ellipse">
+            <a:avLst/>
+          </a:prstGeom>
+          <a:solidFill>
+            <a:srgbClr val="D29B08"/>
+          </a:solidFill>
+          <a:ln>
+            <a:noFill/>
+          </a:ln>
+          <a:effectLst/>
+        </p:spPr>
+        <p:style>
+          <a:lnRef idx="1">
+            <a:schemeClr val="accent1"/>
+          </a:lnRef>
+          <a:fillRef idx="3">
+            <a:schemeClr val="accent1"/>
+          </a:fillRef>
+          <a:effectRef idx="2">
+            <a:schemeClr val="accent1"/>
+          </a:effectRef>
+          <a:fontRef idx="minor">
+            <a:schemeClr val="lt1"/>
+          </a:fontRef>
+        </p:style>
+        <p:txBody>
+          <a:bodyPr rtlCol="0" anchor="ctr" wrap="square" lIns="73152" rIns="73152" tIns="36576" bIns="36576"/>
+          <a:lstStyle/>
+          <a:p>
+            <a:pPr algn="ctr"/>
+            <a:r>
+              <a:rPr sz="1800" b="1">
+                <a:solidFill>
+                  <a:srgbClr val="FFFFFF"/>
+                </a:solidFill>
+                <a:latin typeface="Calibri"/>
+              </a:rPr>
+              <a:t>4</a:t>
+            </a:r>
+          </a:p>
+        </p:txBody>
+      </p:sp>
+      <p:sp>
+        <p:nvSpPr>
+          <p:cNvPr id="14" name="TextBox 13"/>
+          <p:cNvSpPr txBox="1"/>
+          <p:nvPr/>
+        </p:nvSpPr>
+        <p:spPr>
+          <a:xfrm>
+            <a:off x="1371600" y="4434840"/>
+            <a:ext cx="3977639" cy="731520"/>
+          </a:xfrm>
+          <a:prstGeom prst="rect">
+            <a:avLst/>
+          </a:prstGeom>
+          <a:noFill/>
+        </p:spPr>
+        <p:txBody>
+          <a:bodyPr wrap="square" lIns="0" rIns="0" tIns="0" bIns="0" anchor="ctr">
+            <a:spAutoFit/>
+          </a:bodyPr>
+          <a:lstStyle/>
+          <a:p>
+            <a:pPr algn="l">
               <a:spcAft>
-                <a:spcPts val="1400"/>
+                <a:spcPts val="600"/>
               </a:spcAft>
-              <a:buClr>
-                <a:srgbClr val="D29B08"/>
-              </a:buClr>
-              <a:buFont typeface="Arial"/>
-              <a:buChar char="•"/>
             </a:pPr>
             <a:r>
-              <a:rPr sz="1700" b="0" i="0">
+              <a:rPr sz="1800" b="1" i="0">
+                <a:solidFill>
+                  <a:srgbClr val="1C2E6E"/>
+                </a:solidFill>
+                <a:latin typeface="Calibri"/>
+              </a:rPr>
+              <a:t>Two ‘insights’ were one outage</a:t>
+            </a:r>
+          </a:p>
+        </p:txBody>
+      </p:sp>
+      <p:sp>
+        <p:nvSpPr>
+          <p:cNvPr id="15" name="TextBox 14"/>
+          <p:cNvSpPr txBox="1"/>
+          <p:nvPr/>
+        </p:nvSpPr>
+        <p:spPr>
+          <a:xfrm>
+            <a:off x="5486400" y="4434840"/>
+            <a:ext cx="6153912" cy="731520"/>
+          </a:xfrm>
+          <a:prstGeom prst="rect">
+            <a:avLst/>
+          </a:prstGeom>
+          <a:noFill/>
+        </p:spPr>
+        <p:txBody>
+          <a:bodyPr wrap="square" lIns="0" rIns="0" tIns="0" bIns="0" anchor="ctr">
+            <a:spAutoFit/>
+          </a:bodyPr>
+          <a:lstStyle/>
+          <a:p>
+            <a:pPr algn="l">
+              <a:spcAft>
+                <a:spcPts val="600"/>
+              </a:spcAft>
+            </a:pPr>
+            <a:r>
+              <a:rPr sz="1600" b="0" i="0">
                 <a:solidFill>
                   <a:srgbClr val="1E293B"/>
                 </a:solidFill>
                 <a:latin typeface="Calibri"/>
               </a:rPr>
-              <a:t>Hybrid’s 0.680 is optimistic (0.509 held out)</a:t>
-            </a:r>
-          </a:p>
-          <a:p>
-            <a:pPr algn="l" marL="256032" indent="-256032">
+              <a:t>Reddit vs HWZ and Singtel vs StarHub both close once the 22 outage threads are removed.</a:t>
+            </a:r>
+          </a:p>
+        </p:txBody>
+      </p:sp>
+      <p:sp>
+        <p:nvSpPr>
+          <p:cNvPr id="16" name="Oval 15"/>
+          <p:cNvSpPr/>
+          <p:nvPr/>
+        </p:nvSpPr>
+        <p:spPr>
+          <a:xfrm>
+            <a:off x="548640" y="5413248"/>
+            <a:ext cx="566928" cy="566928"/>
+          </a:xfrm>
+          <a:prstGeom prst="ellipse">
+            <a:avLst/>
+          </a:prstGeom>
+          <a:solidFill>
+            <a:srgbClr val="D29B08"/>
+          </a:solidFill>
+          <a:ln>
+            <a:noFill/>
+          </a:ln>
+          <a:effectLst/>
+        </p:spPr>
+        <p:style>
+          <a:lnRef idx="1">
+            <a:schemeClr val="accent1"/>
+          </a:lnRef>
+          <a:fillRef idx="3">
+            <a:schemeClr val="accent1"/>
+          </a:fillRef>
+          <a:effectRef idx="2">
+            <a:schemeClr val="accent1"/>
+          </a:effectRef>
+          <a:fontRef idx="minor">
+            <a:schemeClr val="lt1"/>
+          </a:fontRef>
+        </p:style>
+        <p:txBody>
+          <a:bodyPr rtlCol="0" anchor="ctr" wrap="square" lIns="73152" rIns="73152" tIns="36576" bIns="36576"/>
+          <a:lstStyle/>
+          <a:p>
+            <a:pPr algn="ctr"/>
+            <a:r>
+              <a:rPr sz="1800" b="1">
+                <a:solidFill>
+                  <a:srgbClr val="FFFFFF"/>
+                </a:solidFill>
+                <a:latin typeface="Calibri"/>
+              </a:rPr>
+              <a:t>5</a:t>
+            </a:r>
+          </a:p>
+        </p:txBody>
+      </p:sp>
+      <p:sp>
+        <p:nvSpPr>
+          <p:cNvPr id="17" name="TextBox 16"/>
+          <p:cNvSpPr txBox="1"/>
+          <p:nvPr/>
+        </p:nvSpPr>
+        <p:spPr>
+          <a:xfrm>
+            <a:off x="1371600" y="5349240"/>
+            <a:ext cx="3977639" cy="731520"/>
+          </a:xfrm>
+          <a:prstGeom prst="rect">
+            <a:avLst/>
+          </a:prstGeom>
+          <a:noFill/>
+        </p:spPr>
+        <p:txBody>
+          <a:bodyPr wrap="square" lIns="0" rIns="0" tIns="0" bIns="0" anchor="ctr">
+            <a:spAutoFit/>
+          </a:bodyPr>
+          <a:lstStyle/>
+          <a:p>
+            <a:pPr algn="l">
               <a:spcAft>
-                <a:spcPts val="1400"/>
+                <a:spcPts val="600"/>
               </a:spcAft>
-              <a:buClr>
-                <a:srgbClr val="D29B08"/>
-              </a:buClr>
-              <a:buFont typeface="Arial"/>
-              <a:buChar char="•"/>
             </a:pPr>
             <a:r>
-              <a:rPr sz="1700" b="0" i="0">
+              <a:rPr sz="1800" b="1" i="0">
+                <a:solidFill>
+                  <a:srgbClr val="1C2E6E"/>
+                </a:solidFill>
+                <a:latin typeface="Calibri"/>
+              </a:rPr>
+              <a:t>The data had bugs too</a:t>
+            </a:r>
+          </a:p>
+        </p:txBody>
+      </p:sp>
+      <p:sp>
+        <p:nvSpPr>
+          <p:cNvPr id="18" name="TextBox 17"/>
+          <p:cNvSpPr txBox="1"/>
+          <p:nvPr/>
+        </p:nvSpPr>
+        <p:spPr>
+          <a:xfrm>
+            <a:off x="5486400" y="5349240"/>
+            <a:ext cx="6153912" cy="731520"/>
+          </a:xfrm>
+          <a:prstGeom prst="rect">
+            <a:avLst/>
+          </a:prstGeom>
+          <a:noFill/>
+        </p:spPr>
+        <p:txBody>
+          <a:bodyPr wrap="square" lIns="0" rIns="0" tIns="0" bIns="0" anchor="ctr">
+            <a:spAutoFit/>
+          </a:bodyPr>
+          <a:lstStyle/>
+          <a:p>
+            <a:pPr algn="l">
+              <a:spcAft>
+                <a:spcPts val="600"/>
+              </a:spcAft>
+            </a:pPr>
+            <a:r>
+              <a:rPr sz="1600" b="0" i="0">
                 <a:solidFill>
                   <a:srgbClr val="1E293B"/>
                 </a:solidFill>
                 <a:latin typeface="Calibri"/>
               </a:rPr>
-              <a:t>One sentiment is copied to every brand in a post</a:t>
+              <a:t>15,504 rows → 2,693 unique posts; HWZ scraper only read page 1 of threads.</a:t>
             </a:r>
           </a:p>
         </p:txBody>
@@ -19775,7 +20205,7 @@
                 </a:solidFill>
                 <a:latin typeface="Calibri"/>
               </a:rPr>
-              <a:t>Next steps, in order</a:t>
+              <a:t>Limitations I’d flag to any reader</a:t>
             </a:r>
           </a:p>
         </p:txBody>
@@ -19827,8 +20257,8 @@
         </p:nvSpPr>
         <p:spPr>
           <a:xfrm>
-            <a:off x="548640" y="1920240"/>
-            <a:ext cx="2601468" cy="3291840"/>
+            <a:off x="548640" y="1691640"/>
+            <a:ext cx="5422392" cy="3931920"/>
           </a:xfrm>
           <a:prstGeom prst="roundRect">
             <a:avLst>
@@ -19867,20 +20297,168 @@
       </p:sp>
       <p:sp>
         <p:nvSpPr>
-          <p:cNvPr id="5" name="Oval 4"/>
+          <p:cNvPr id="5" name="TextBox 4"/>
+          <p:cNvSpPr txBox="1"/>
+          <p:nvPr/>
+        </p:nvSpPr>
+        <p:spPr>
+          <a:xfrm>
+            <a:off x="822959" y="1920240"/>
+            <a:ext cx="4846320" cy="457200"/>
+          </a:xfrm>
+          <a:prstGeom prst="rect">
+            <a:avLst/>
+          </a:prstGeom>
+          <a:noFill/>
+        </p:spPr>
+        <p:txBody>
+          <a:bodyPr wrap="square" lIns="0" rIns="0" tIns="0" bIns="0" anchor="t">
+            <a:spAutoFit/>
+          </a:bodyPr>
+          <a:lstStyle/>
+          <a:p>
+            <a:pPr algn="l">
+              <a:spcAft>
+                <a:spcPts val="600"/>
+              </a:spcAft>
+            </a:pPr>
+            <a:r>
+              <a:rPr sz="2200" b="1" i="0">
+                <a:solidFill>
+                  <a:srgbClr val="1C2E6E"/>
+                </a:solidFill>
+                <a:latin typeface="Calibri"/>
+              </a:rPr>
+              <a:t>Data</a:t>
+            </a:r>
+          </a:p>
+        </p:txBody>
+      </p:sp>
+      <p:sp>
+        <p:nvSpPr>
+          <p:cNvPr id="6" name="TextBox 5"/>
+          <p:cNvSpPr txBox="1"/>
+          <p:nvPr/>
+        </p:nvSpPr>
+        <p:spPr>
+          <a:xfrm>
+            <a:off x="822959" y="2560320"/>
+            <a:ext cx="4892040" cy="2926080"/>
+          </a:xfrm>
+          <a:prstGeom prst="rect">
+            <a:avLst/>
+          </a:prstGeom>
+          <a:noFill/>
+        </p:spPr>
+        <p:txBody>
+          <a:bodyPr wrap="square" lIns="0" rIns="0" tIns="0" bIns="0" anchor="t">
+            <a:spAutoFit/>
+          </a:bodyPr>
+          <a:lstStyle/>
+          <a:p>
+            <a:pPr algn="l" marL="256032" indent="-256032">
+              <a:spcAft>
+                <a:spcPts val="1400"/>
+              </a:spcAft>
+              <a:buClr>
+                <a:srgbClr val="D29B08"/>
+              </a:buClr>
+              <a:buFont typeface="Arial"/>
+              <a:buChar char="•"/>
+            </a:pPr>
+            <a:r>
+              <a:rPr sz="1700" b="0" i="0">
+                <a:solidFill>
+                  <a:srgbClr val="1E293B"/>
+                </a:solidFill>
+                <a:latin typeface="Calibri"/>
+              </a:rPr>
+              <a:t>Forum posters self-select; they are not all subscribers</a:t>
+            </a:r>
+          </a:p>
+          <a:p>
+            <a:pPr algn="l" marL="256032" indent="-256032">
+              <a:spcAft>
+                <a:spcPts val="1400"/>
+              </a:spcAft>
+              <a:buClr>
+                <a:srgbClr val="D29B08"/>
+              </a:buClr>
+              <a:buFont typeface="Arial"/>
+              <a:buChar char="•"/>
+            </a:pPr>
+            <a:r>
+              <a:rPr sz="1700" b="0" i="0">
+                <a:solidFill>
+                  <a:srgbClr val="1E293B"/>
+                </a:solidFill>
+                <a:latin typeface="Calibri"/>
+              </a:rPr>
+              <a:t>95% of posts from 2026; replies cluster by thread</a:t>
+            </a:r>
+          </a:p>
+          <a:p>
+            <a:pPr algn="l" marL="256032" indent="-256032">
+              <a:spcAft>
+                <a:spcPts val="1400"/>
+              </a:spcAft>
+              <a:buClr>
+                <a:srgbClr val="D29B08"/>
+              </a:buClr>
+              <a:buFont typeface="Arial"/>
+              <a:buChar char="•"/>
+            </a:pPr>
+            <a:r>
+              <a:rPr sz="1700" b="0" i="0">
+                <a:solidFill>
+                  <a:srgbClr val="1E293B"/>
+                </a:solidFill>
+                <a:latin typeface="Calibri"/>
+              </a:rPr>
+              <a:t>Wave-2 Reddit via a research archive</a:t>
+            </a:r>
+          </a:p>
+          <a:p>
+            <a:pPr algn="l" marL="256032" indent="-256032">
+              <a:spcAft>
+                <a:spcPts val="1400"/>
+              </a:spcAft>
+              <a:buClr>
+                <a:srgbClr val="D29B08"/>
+              </a:buClr>
+              <a:buFont typeface="Arial"/>
+              <a:buChar char="•"/>
+            </a:pPr>
+            <a:r>
+              <a:rPr sz="1700" b="0" i="0">
+                <a:solidFill>
+                  <a:srgbClr val="1E293B"/>
+                </a:solidFill>
+                <a:latin typeface="Calibri"/>
+              </a:rPr>
+              <a:t>No tickets, outages or NPS to validate against</a:t>
+            </a:r>
+          </a:p>
+        </p:txBody>
+      </p:sp>
+      <p:sp>
+        <p:nvSpPr>
+          <p:cNvPr id="7" name="Rounded Rectangle 6"/>
           <p:cNvSpPr/>
           <p:nvPr/>
         </p:nvSpPr>
         <p:spPr>
           <a:xfrm>
-            <a:off x="822959" y="2194560"/>
-            <a:ext cx="731520" cy="731520"/>
-          </a:xfrm>
-          <a:prstGeom prst="ellipse">
-            <a:avLst/>
+            <a:off x="6217920" y="1691640"/>
+            <a:ext cx="5422392" cy="3931920"/>
+          </a:xfrm>
+          <a:prstGeom prst="roundRect">
+            <a:avLst>
+              <a:gd name="adj" fmla="val 6000"/>
+            </a:avLst>
           </a:prstGeom>
           <a:solidFill>
-            <a:srgbClr val="1C2E6E"/>
+            <a:srgbClr val="F2F4F9"/>
           </a:solidFill>
           <a:ln>
             <a:noFill/>
@@ -19902,32 +20480,23 @@
           </a:fontRef>
         </p:style>
         <p:txBody>
-          <a:bodyPr rtlCol="0" anchor="ctr" wrap="square" lIns="73152" rIns="73152" tIns="36576" bIns="36576"/>
+          <a:bodyPr rtlCol="0" anchor="ctr"/>
           <a:lstStyle/>
           <a:p>
             <a:pPr algn="ctr"/>
-            <a:r>
-              <a:rPr sz="2200" b="1">
-                <a:solidFill>
-                  <a:srgbClr val="FFFFFF"/>
-                </a:solidFill>
-                <a:latin typeface="Calibri"/>
-              </a:rPr>
-              <a:t>1</a:t>
-            </a:r>
-          </a:p>
-        </p:txBody>
-      </p:sp>
-      <p:sp>
-        <p:nvSpPr>
-          <p:cNvPr id="6" name="TextBox 5"/>
+          </a:p>
+        </p:txBody>
+      </p:sp>
+      <p:sp>
+        <p:nvSpPr>
+          <p:cNvPr id="8" name="TextBox 7"/>
           <p:cNvSpPr txBox="1"/>
           <p:nvPr/>
         </p:nvSpPr>
         <p:spPr>
           <a:xfrm>
-            <a:off x="822959" y="3200400"/>
-            <a:ext cx="2052828" cy="822960"/>
+            <a:off x="6492240" y="1920240"/>
+            <a:ext cx="4846320" cy="457200"/>
           </a:xfrm>
           <a:prstGeom prst="rect">
             <a:avLst/>
@@ -19946,27 +20515,27 @@
               </a:spcAft>
             </a:pPr>
             <a:r>
-              <a:rPr sz="1900" b="1" i="0">
+              <a:rPr sz="2200" b="1" i="0">
                 <a:solidFill>
                   <a:srgbClr val="1C2E6E"/>
                 </a:solidFill>
                 <a:latin typeface="Calibri"/>
               </a:rPr>
-              <a:t>Wave-2 gold check</a:t>
-            </a:r>
-          </a:p>
-        </p:txBody>
-      </p:sp>
-      <p:sp>
-        <p:nvSpPr>
-          <p:cNvPr id="7" name="TextBox 6"/>
+              <a:t>Method</a:t>
+            </a:r>
+          </a:p>
+        </p:txBody>
+      </p:sp>
+      <p:sp>
+        <p:nvSpPr>
+          <p:cNvPr id="9" name="TextBox 8"/>
           <p:cNvSpPr txBox="1"/>
           <p:nvPr/>
         </p:nvSpPr>
         <p:spPr>
           <a:xfrm>
-            <a:off x="822959" y="4023360"/>
-            <a:ext cx="2052828" cy="1097280"/>
+            <a:off x="6492240" y="2560320"/>
+            <a:ext cx="4892040" cy="2926080"/>
           </a:xfrm>
           <a:prstGeom prst="rect">
             <a:avLst/>
@@ -19979,550 +20548,87 @@
           </a:bodyPr>
           <a:lstStyle/>
           <a:p>
-            <a:pPr algn="l">
+            <a:pPr algn="l" marL="256032" indent="-256032">
               <a:spcAft>
-                <a:spcPts val="600"/>
+                <a:spcPts val="1400"/>
               </a:spcAft>
+              <a:buClr>
+                <a:srgbClr val="D29B08"/>
+              </a:buClr>
+              <a:buFont typeface="Arial"/>
+              <a:buChar char="•"/>
             </a:pPr>
             <a:r>
-              <a:rPr sz="1600" b="0" i="0">
+              <a:rPr sz="1700" b="0" i="0">
                 <a:solidFill>
                   <a:srgbClr val="1E293B"/>
                 </a:solidFill>
                 <a:latin typeface="Calibri"/>
               </a:rPr>
-              <a:t>Label the 100-post sample; score GPT-4o-mini on it</a:t>
-            </a:r>
-          </a:p>
-        </p:txBody>
-      </p:sp>
-      <p:sp>
-        <p:nvSpPr>
-          <p:cNvPr id="8" name="Rounded Rectangle 7"/>
-          <p:cNvSpPr/>
-          <p:nvPr/>
-        </p:nvSpPr>
-        <p:spPr>
-          <a:xfrm>
-            <a:off x="3378708" y="1920240"/>
-            <a:ext cx="2601468" cy="3291840"/>
-          </a:xfrm>
-          <a:prstGeom prst="roundRect">
-            <a:avLst>
-              <a:gd name="adj" fmla="val 6000"/>
-            </a:avLst>
-          </a:prstGeom>
-          <a:solidFill>
-            <a:srgbClr val="F2F4F9"/>
-          </a:solidFill>
-          <a:ln>
-            <a:noFill/>
-          </a:ln>
-          <a:effectLst/>
-        </p:spPr>
-        <p:style>
-          <a:lnRef idx="1">
-            <a:schemeClr val="accent1"/>
-          </a:lnRef>
-          <a:fillRef idx="3">
-            <a:schemeClr val="accent1"/>
-          </a:fillRef>
-          <a:effectRef idx="2">
-            <a:schemeClr val="accent1"/>
-          </a:effectRef>
-          <a:fontRef idx="minor">
-            <a:schemeClr val="lt1"/>
-          </a:fontRef>
-        </p:style>
-        <p:txBody>
-          <a:bodyPr rtlCol="0" anchor="ctr"/>
-          <a:lstStyle/>
-          <a:p>
-            <a:pPr algn="ctr"/>
-          </a:p>
-        </p:txBody>
-      </p:sp>
-      <p:sp>
-        <p:nvSpPr>
-          <p:cNvPr id="9" name="Oval 8"/>
-          <p:cNvSpPr/>
-          <p:nvPr/>
-        </p:nvSpPr>
-        <p:spPr>
-          <a:xfrm>
-            <a:off x="3653028" y="2194560"/>
-            <a:ext cx="731520" cy="731520"/>
-          </a:xfrm>
-          <a:prstGeom prst="ellipse">
-            <a:avLst/>
-          </a:prstGeom>
-          <a:solidFill>
-            <a:srgbClr val="1C2E6E"/>
-          </a:solidFill>
-          <a:ln>
-            <a:noFill/>
-          </a:ln>
-          <a:effectLst/>
-        </p:spPr>
-        <p:style>
-          <a:lnRef idx="1">
-            <a:schemeClr val="accent1"/>
-          </a:lnRef>
-          <a:fillRef idx="3">
-            <a:schemeClr val="accent1"/>
-          </a:fillRef>
-          <a:effectRef idx="2">
-            <a:schemeClr val="accent1"/>
-          </a:effectRef>
-          <a:fontRef idx="minor">
-            <a:schemeClr val="lt1"/>
-          </a:fontRef>
-        </p:style>
-        <p:txBody>
-          <a:bodyPr rtlCol="0" anchor="ctr" wrap="square" lIns="73152" rIns="73152" tIns="36576" bIns="36576"/>
-          <a:lstStyle/>
-          <a:p>
-            <a:pPr algn="ctr"/>
-            <a:r>
-              <a:rPr sz="2200" b="1">
-                <a:solidFill>
-                  <a:srgbClr val="FFFFFF"/>
-                </a:solidFill>
-                <a:latin typeface="Calibri"/>
-              </a:rPr>
-              <a:t>2</a:t>
-            </a:r>
-          </a:p>
-        </p:txBody>
-      </p:sp>
-      <p:sp>
-        <p:nvSpPr>
-          <p:cNvPr id="10" name="TextBox 9"/>
-          <p:cNvSpPr txBox="1"/>
-          <p:nvPr/>
-        </p:nvSpPr>
-        <p:spPr>
-          <a:xfrm>
-            <a:off x="3653028" y="3200400"/>
-            <a:ext cx="2052828" cy="822960"/>
-          </a:xfrm>
-          <a:prstGeom prst="rect">
-            <a:avLst/>
-          </a:prstGeom>
-          <a:noFill/>
-        </p:spPr>
-        <p:txBody>
-          <a:bodyPr wrap="square" lIns="0" rIns="0" tIns="0" bIns="0" anchor="t">
-            <a:spAutoFit/>
-          </a:bodyPr>
-          <a:lstStyle/>
-          <a:p>
-            <a:pPr algn="l">
+              <a:t>Mini matches humans on ~2/3 of posts; humans agree at κ 0.39</a:t>
+            </a:r>
+          </a:p>
+          <a:p>
+            <a:pPr algn="l" marL="256032" indent="-256032">
               <a:spcAft>
-                <a:spcPts val="600"/>
+                <a:spcPts val="1400"/>
               </a:spcAft>
+              <a:buClr>
+                <a:srgbClr val="D29B08"/>
+              </a:buClr>
+              <a:buFont typeface="Arial"/>
+              <a:buChar char="•"/>
             </a:pPr>
             <a:r>
-              <a:rPr sz="1900" b="1" i="0">
-                <a:solidFill>
-                  <a:srgbClr val="1C2E6E"/>
-                </a:solidFill>
-                <a:latin typeface="Calibri"/>
-              </a:rPr>
-              <a:t>Agreement</a:t>
-            </a:r>
-          </a:p>
-        </p:txBody>
-      </p:sp>
-      <p:sp>
-        <p:nvSpPr>
-          <p:cNvPr id="11" name="TextBox 10"/>
-          <p:cNvSpPr txBox="1"/>
-          <p:nvPr/>
-        </p:nvSpPr>
-        <p:spPr>
-          <a:xfrm>
-            <a:off x="3653028" y="4023360"/>
-            <a:ext cx="2052828" cy="1097280"/>
-          </a:xfrm>
-          <a:prstGeom prst="rect">
-            <a:avLst/>
-          </a:prstGeom>
-          <a:noFill/>
-        </p:spPr>
-        <p:txBody>
-          <a:bodyPr wrap="square" lIns="0" rIns="0" tIns="0" bIns="0" anchor="t">
-            <a:spAutoFit/>
-          </a:bodyPr>
-          <a:lstStyle/>
-          <a:p>
-            <a:pPr algn="l">
+              <a:rPr sz="1700" b="0" i="0">
+                <a:solidFill>
+                  <a:srgbClr val="1E293B"/>
+                </a:solidFill>
+                <a:latin typeface="Calibri"/>
+              </a:rPr>
+              <a:t>Wave 2: sentiment holds; issues weaker (0.477)</a:t>
+            </a:r>
+          </a:p>
+          <a:p>
+            <a:pPr algn="l" marL="256032" indent="-256032">
               <a:spcAft>
-                <a:spcPts val="600"/>
+                <a:spcPts val="1400"/>
               </a:spcAft>
+              <a:buClr>
+                <a:srgbClr val="D29B08"/>
+              </a:buClr>
+              <a:buFont typeface="Arial"/>
+              <a:buChar char="•"/>
             </a:pPr>
             <a:r>
-              <a:rPr sz="1600" b="0" i="0">
+              <a:rPr sz="1700" b="0" i="0">
                 <a:solidFill>
                   <a:srgbClr val="1E293B"/>
                 </a:solidFill>
                 <a:latin typeface="Calibri"/>
               </a:rPr>
-              <a:t>Relabel the overlap under the new rule; adjudicate</a:t>
-            </a:r>
-          </a:p>
-        </p:txBody>
-      </p:sp>
-      <p:sp>
-        <p:nvSpPr>
-          <p:cNvPr id="12" name="Rounded Rectangle 11"/>
-          <p:cNvSpPr/>
-          <p:nvPr/>
-        </p:nvSpPr>
-        <p:spPr>
-          <a:xfrm>
-            <a:off x="6208776" y="1920240"/>
-            <a:ext cx="2601468" cy="3291840"/>
-          </a:xfrm>
-          <a:prstGeom prst="roundRect">
-            <a:avLst>
-              <a:gd name="adj" fmla="val 6000"/>
-            </a:avLst>
-          </a:prstGeom>
-          <a:solidFill>
-            <a:srgbClr val="F2F4F9"/>
-          </a:solidFill>
-          <a:ln>
-            <a:noFill/>
-          </a:ln>
-          <a:effectLst/>
-        </p:spPr>
-        <p:style>
-          <a:lnRef idx="1">
-            <a:schemeClr val="accent1"/>
-          </a:lnRef>
-          <a:fillRef idx="3">
-            <a:schemeClr val="accent1"/>
-          </a:fillRef>
-          <a:effectRef idx="2">
-            <a:schemeClr val="accent1"/>
-          </a:effectRef>
-          <a:fontRef idx="minor">
-            <a:schemeClr val="lt1"/>
-          </a:fontRef>
-        </p:style>
-        <p:txBody>
-          <a:bodyPr rtlCol="0" anchor="ctr"/>
-          <a:lstStyle/>
-          <a:p>
-            <a:pPr algn="ctr"/>
-          </a:p>
-        </p:txBody>
-      </p:sp>
-      <p:sp>
-        <p:nvSpPr>
-          <p:cNvPr id="13" name="Oval 12"/>
-          <p:cNvSpPr/>
-          <p:nvPr/>
-        </p:nvSpPr>
-        <p:spPr>
-          <a:xfrm>
-            <a:off x="6483096" y="2194560"/>
-            <a:ext cx="731520" cy="731520"/>
-          </a:xfrm>
-          <a:prstGeom prst="ellipse">
-            <a:avLst/>
-          </a:prstGeom>
-          <a:solidFill>
-            <a:srgbClr val="1C2E6E"/>
-          </a:solidFill>
-          <a:ln>
-            <a:noFill/>
-          </a:ln>
-          <a:effectLst/>
-        </p:spPr>
-        <p:style>
-          <a:lnRef idx="1">
-            <a:schemeClr val="accent1"/>
-          </a:lnRef>
-          <a:fillRef idx="3">
-            <a:schemeClr val="accent1"/>
-          </a:fillRef>
-          <a:effectRef idx="2">
-            <a:schemeClr val="accent1"/>
-          </a:effectRef>
-          <a:fontRef idx="minor">
-            <a:schemeClr val="lt1"/>
-          </a:fontRef>
-        </p:style>
-        <p:txBody>
-          <a:bodyPr rtlCol="0" anchor="ctr" wrap="square" lIns="73152" rIns="73152" tIns="36576" bIns="36576"/>
-          <a:lstStyle/>
-          <a:p>
-            <a:pPr algn="ctr"/>
-            <a:r>
-              <a:rPr sz="2200" b="1">
-                <a:solidFill>
-                  <a:srgbClr val="FFFFFF"/>
-                </a:solidFill>
-                <a:latin typeface="Calibri"/>
-              </a:rPr>
-              <a:t>3</a:t>
-            </a:r>
-          </a:p>
-        </p:txBody>
-      </p:sp>
-      <p:sp>
-        <p:nvSpPr>
-          <p:cNvPr id="14" name="TextBox 13"/>
-          <p:cNvSpPr txBox="1"/>
-          <p:nvPr/>
-        </p:nvSpPr>
-        <p:spPr>
-          <a:xfrm>
-            <a:off x="6483096" y="3200400"/>
-            <a:ext cx="2052828" cy="822960"/>
-          </a:xfrm>
-          <a:prstGeom prst="rect">
-            <a:avLst/>
-          </a:prstGeom>
-          <a:noFill/>
-        </p:spPr>
-        <p:txBody>
-          <a:bodyPr wrap="square" lIns="0" rIns="0" tIns="0" bIns="0" anchor="t">
-            <a:spAutoFit/>
-          </a:bodyPr>
-          <a:lstStyle/>
-          <a:p>
-            <a:pPr algn="l">
+              <a:t>Hybrid’s 0.680 is optimistic (0.509 held out)</a:t>
+            </a:r>
+          </a:p>
+          <a:p>
+            <a:pPr algn="l" marL="256032" indent="-256032">
               <a:spcAft>
-                <a:spcPts val="600"/>
+                <a:spcPts val="1400"/>
               </a:spcAft>
+              <a:buClr>
+                <a:srgbClr val="D29B08"/>
+              </a:buClr>
+              <a:buFont typeface="Arial"/>
+              <a:buChar char="•"/>
             </a:pPr>
             <a:r>
-              <a:rPr sz="1900" b="1" i="0">
-                <a:solidFill>
-                  <a:srgbClr val="1C2E6E"/>
-                </a:solidFill>
-                <a:latin typeface="Calibri"/>
-              </a:rPr>
-              <a:t>Fresh held-out test</a:t>
-            </a:r>
-          </a:p>
-        </p:txBody>
-      </p:sp>
-      <p:sp>
-        <p:nvSpPr>
-          <p:cNvPr id="15" name="TextBox 14"/>
-          <p:cNvSpPr txBox="1"/>
-          <p:nvPr/>
-        </p:nvSpPr>
-        <p:spPr>
-          <a:xfrm>
-            <a:off x="6483096" y="4023360"/>
-            <a:ext cx="2052828" cy="1097280"/>
-          </a:xfrm>
-          <a:prstGeom prst="rect">
-            <a:avLst/>
-          </a:prstGeom>
-          <a:noFill/>
-        </p:spPr>
-        <p:txBody>
-          <a:bodyPr wrap="square" lIns="0" rIns="0" tIns="0" bIns="0" anchor="t">
-            <a:spAutoFit/>
-          </a:bodyPr>
-          <a:lstStyle/>
-          <a:p>
-            <a:pPr algn="l">
-              <a:spcAft>
-                <a:spcPts val="600"/>
-              </a:spcAft>
-            </a:pPr>
-            <a:r>
-              <a:rPr sz="1600" b="0" i="0">
+              <a:rPr sz="1700" b="0" i="0">
                 <a:solidFill>
                   <a:srgbClr val="1E293B"/>
                 </a:solidFill>
                 <a:latin typeface="Calibri"/>
               </a:rPr>
-              <a:t>Hybrid vs GPT-4o on every post, on new posts</a:t>
-            </a:r>
-          </a:p>
-        </p:txBody>
-      </p:sp>
-      <p:sp>
-        <p:nvSpPr>
-          <p:cNvPr id="16" name="Rounded Rectangle 15"/>
-          <p:cNvSpPr/>
-          <p:nvPr/>
-        </p:nvSpPr>
-        <p:spPr>
-          <a:xfrm>
-            <a:off x="9038844" y="1920240"/>
-            <a:ext cx="2601468" cy="3291840"/>
-          </a:xfrm>
-          <a:prstGeom prst="roundRect">
-            <a:avLst>
-              <a:gd name="adj" fmla="val 6000"/>
-            </a:avLst>
-          </a:prstGeom>
-          <a:solidFill>
-            <a:srgbClr val="F2F4F9"/>
-          </a:solidFill>
-          <a:ln>
-            <a:noFill/>
-          </a:ln>
-          <a:effectLst/>
-        </p:spPr>
-        <p:style>
-          <a:lnRef idx="1">
-            <a:schemeClr val="accent1"/>
-          </a:lnRef>
-          <a:fillRef idx="3">
-            <a:schemeClr val="accent1"/>
-          </a:fillRef>
-          <a:effectRef idx="2">
-            <a:schemeClr val="accent1"/>
-          </a:effectRef>
-          <a:fontRef idx="minor">
-            <a:schemeClr val="lt1"/>
-          </a:fontRef>
-        </p:style>
-        <p:txBody>
-          <a:bodyPr rtlCol="0" anchor="ctr"/>
-          <a:lstStyle/>
-          <a:p>
-            <a:pPr algn="ctr"/>
-          </a:p>
-        </p:txBody>
-      </p:sp>
-      <p:sp>
-        <p:nvSpPr>
-          <p:cNvPr id="17" name="Oval 16"/>
-          <p:cNvSpPr/>
-          <p:nvPr/>
-        </p:nvSpPr>
-        <p:spPr>
-          <a:xfrm>
-            <a:off x="9313164" y="2194560"/>
-            <a:ext cx="731520" cy="731520"/>
-          </a:xfrm>
-          <a:prstGeom prst="ellipse">
-            <a:avLst/>
-          </a:prstGeom>
-          <a:solidFill>
-            <a:srgbClr val="1C2E6E"/>
-          </a:solidFill>
-          <a:ln>
-            <a:noFill/>
-          </a:ln>
-          <a:effectLst/>
-        </p:spPr>
-        <p:style>
-          <a:lnRef idx="1">
-            <a:schemeClr val="accent1"/>
-          </a:lnRef>
-          <a:fillRef idx="3">
-            <a:schemeClr val="accent1"/>
-          </a:fillRef>
-          <a:effectRef idx="2">
-            <a:schemeClr val="accent1"/>
-          </a:effectRef>
-          <a:fontRef idx="minor">
-            <a:schemeClr val="lt1"/>
-          </a:fontRef>
-        </p:style>
-        <p:txBody>
-          <a:bodyPr rtlCol="0" anchor="ctr" wrap="square" lIns="73152" rIns="73152" tIns="36576" bIns="36576"/>
-          <a:lstStyle/>
-          <a:p>
-            <a:pPr algn="ctr"/>
-            <a:r>
-              <a:rPr sz="2200" b="1">
-                <a:solidFill>
-                  <a:srgbClr val="FFFFFF"/>
-                </a:solidFill>
-                <a:latin typeface="Calibri"/>
-              </a:rPr>
-              <a:t>4</a:t>
-            </a:r>
-          </a:p>
-        </p:txBody>
-      </p:sp>
-      <p:sp>
-        <p:nvSpPr>
-          <p:cNvPr id="18" name="TextBox 17"/>
-          <p:cNvSpPr txBox="1"/>
-          <p:nvPr/>
-        </p:nvSpPr>
-        <p:spPr>
-          <a:xfrm>
-            <a:off x="9313164" y="3200400"/>
-            <a:ext cx="2052828" cy="822960"/>
-          </a:xfrm>
-          <a:prstGeom prst="rect">
-            <a:avLst/>
-          </a:prstGeom>
-          <a:noFill/>
-        </p:spPr>
-        <p:txBody>
-          <a:bodyPr wrap="square" lIns="0" rIns="0" tIns="0" bIns="0" anchor="t">
-            <a:spAutoFit/>
-          </a:bodyPr>
-          <a:lstStyle/>
-          <a:p>
-            <a:pPr algn="l">
-              <a:spcAft>
-                <a:spcPts val="600"/>
-              </a:spcAft>
-            </a:pPr>
-            <a:r>
-              <a:rPr sz="1900" b="1" i="0">
-                <a:solidFill>
-                  <a:srgbClr val="1C2E6E"/>
-                </a:solidFill>
-                <a:latin typeface="Calibri"/>
-              </a:rPr>
-              <a:t>Brand-level sentiment</a:t>
-            </a:r>
-          </a:p>
-        </p:txBody>
-      </p:sp>
-      <p:sp>
-        <p:nvSpPr>
-          <p:cNvPr id="19" name="TextBox 18"/>
-          <p:cNvSpPr txBox="1"/>
-          <p:nvPr/>
-        </p:nvSpPr>
-        <p:spPr>
-          <a:xfrm>
-            <a:off x="9313164" y="4023360"/>
-            <a:ext cx="2052828" cy="1097280"/>
-          </a:xfrm>
-          <a:prstGeom prst="rect">
-            <a:avLst/>
-          </a:prstGeom>
-          <a:noFill/>
-        </p:spPr>
-        <p:txBody>
-          <a:bodyPr wrap="square" lIns="0" rIns="0" tIns="0" bIns="0" anchor="t">
-            <a:spAutoFit/>
-          </a:bodyPr>
-          <a:lstStyle/>
-          <a:p>
-            <a:pPr algn="l">
-              <a:spcAft>
-                <a:spcPts val="600"/>
-              </a:spcAft>
-            </a:pPr>
-            <a:r>
-              <a:rPr sz="1600" b="0" i="0">
-                <a:solidFill>
-                  <a:srgbClr val="1E293B"/>
-                </a:solidFill>
-                <a:latin typeface="Calibri"/>
-              </a:rPr>
-              <a:t>One label per brand per post; validate against tickets</a:t>
+              <a:t>One sentiment is copied to every brand in a post</a:t>
             </a:r>
           </a:p>
         </p:txBody>
@@ -20553,6 +20659,45 @@
         </p:nvSpPr>
         <p:spPr>
           <a:xfrm>
+            <a:off x="2788920" y="128016"/>
+            <a:ext cx="9052560" cy="1097280"/>
+          </a:xfrm>
+          <a:prstGeom prst="rect">
+            <a:avLst/>
+          </a:prstGeom>
+          <a:noFill/>
+        </p:spPr>
+        <p:txBody>
+          <a:bodyPr wrap="square" lIns="0" rIns="0" tIns="0" bIns="0" anchor="ctr">
+            <a:spAutoFit/>
+          </a:bodyPr>
+          <a:lstStyle/>
+          <a:p>
+            <a:pPr algn="l">
+              <a:spcAft>
+                <a:spcPts val="600"/>
+              </a:spcAft>
+            </a:pPr>
+            <a:r>
+              <a:rPr sz="2600" b="1" i="0">
+                <a:solidFill>
+                  <a:srgbClr val="1C2E6E"/>
+                </a:solidFill>
+                <a:latin typeface="Calibri"/>
+              </a:rPr>
+              <a:t>Next steps, in order</a:t>
+            </a:r>
+          </a:p>
+        </p:txBody>
+      </p:sp>
+      <p:sp>
+        <p:nvSpPr>
+          <p:cNvPr id="3" name="TextBox 2"/>
+          <p:cNvSpPr txBox="1"/>
+          <p:nvPr/>
+        </p:nvSpPr>
+        <p:spPr>
+          <a:xfrm>
             <a:off x="11155680" y="6446520"/>
             <a:ext cx="548640" cy="274320"/>
           </a:xfrm>
@@ -20586,100 +20731,22 @@
       </p:sp>
       <p:sp>
         <p:nvSpPr>
-          <p:cNvPr id="3" name="TextBox 2"/>
-          <p:cNvSpPr txBox="1"/>
-          <p:nvPr/>
-        </p:nvSpPr>
-        <p:spPr>
-          <a:xfrm>
-            <a:off x="822959" y="1828800"/>
-            <a:ext cx="10515600" cy="1097280"/>
-          </a:xfrm>
-          <a:prstGeom prst="rect">
-            <a:avLst/>
-          </a:prstGeom>
-          <a:noFill/>
-        </p:spPr>
-        <p:txBody>
-          <a:bodyPr wrap="square" lIns="0" rIns="0" tIns="0" bIns="0" anchor="t">
-            <a:spAutoFit/>
-          </a:bodyPr>
-          <a:lstStyle/>
-          <a:p>
-            <a:pPr algn="l">
-              <a:spcAft>
-                <a:spcPts val="600"/>
-              </a:spcAft>
-            </a:pPr>
-            <a:r>
-              <a:rPr sz="4800" b="1" i="0">
-                <a:solidFill>
-                  <a:srgbClr val="1C2E6E"/>
-                </a:solidFill>
-                <a:latin typeface="Calibri"/>
-              </a:rPr>
-              <a:t>Thank you</a:t>
-            </a:r>
-          </a:p>
-        </p:txBody>
-      </p:sp>
-      <p:sp>
-        <p:nvSpPr>
-          <p:cNvPr id="4" name="TextBox 3"/>
-          <p:cNvSpPr txBox="1"/>
-          <p:nvPr/>
-        </p:nvSpPr>
-        <p:spPr>
-          <a:xfrm>
-            <a:off x="822959" y="2926080"/>
-            <a:ext cx="10515600" cy="640080"/>
-          </a:xfrm>
-          <a:prstGeom prst="rect">
-            <a:avLst/>
-          </a:prstGeom>
-          <a:noFill/>
-        </p:spPr>
-        <p:txBody>
-          <a:bodyPr wrap="square" lIns="0" rIns="0" tIns="0" bIns="0" anchor="t">
-            <a:spAutoFit/>
-          </a:bodyPr>
-          <a:lstStyle/>
-          <a:p>
-            <a:pPr algn="l">
-              <a:spcAft>
-                <a:spcPts val="600"/>
-              </a:spcAft>
-            </a:pPr>
-            <a:r>
-              <a:rPr sz="2400" b="0" i="0">
-                <a:solidFill>
-                  <a:srgbClr val="5B6475"/>
-                </a:solidFill>
-                <a:latin typeface="Calibri"/>
-              </a:rPr>
-              <a:t>Questions and discussion</a:t>
-            </a:r>
-          </a:p>
-        </p:txBody>
-      </p:sp>
-      <p:sp>
-        <p:nvSpPr>
-          <p:cNvPr id="5" name="Pentagon 4"/>
+          <p:cNvPr id="4" name="Rounded Rectangle 3"/>
           <p:cNvSpPr/>
           <p:nvPr/>
         </p:nvSpPr>
         <p:spPr>
           <a:xfrm>
-            <a:off x="822959" y="4023360"/>
-            <a:ext cx="3547872" cy="1005840"/>
-          </a:xfrm>
-          <a:prstGeom prst="homePlate">
+            <a:off x="548640" y="1920240"/>
+            <a:ext cx="2601468" cy="3291840"/>
+          </a:xfrm>
+          <a:prstGeom prst="roundRect">
             <a:avLst>
-              <a:gd name="adj" fmla="val 28000"/>
+              <a:gd name="adj" fmla="val 6000"/>
             </a:avLst>
           </a:prstGeom>
           <a:solidFill>
-            <a:srgbClr val="1C2E6E"/>
+            <a:srgbClr val="F2F4F9"/>
           </a:solidFill>
           <a:ln>
             <a:noFill/>
@@ -20701,37 +20768,26 @@
           </a:fontRef>
         </p:style>
         <p:txBody>
-          <a:bodyPr rtlCol="0" anchor="ctr" wrap="square" lIns="73152" rIns="73152" tIns="36576" bIns="36576"/>
+          <a:bodyPr rtlCol="0" anchor="ctr"/>
           <a:lstStyle/>
           <a:p>
             <a:pPr algn="ctr"/>
-            <a:r>
-              <a:rPr sz="1800" b="1">
-                <a:solidFill>
-                  <a:srgbClr val="FFFFFF"/>
-                </a:solidFill>
-                <a:latin typeface="Calibri"/>
-              </a:rPr>
-              <a:t>LLM for sentiment</a:t>
-            </a:r>
-          </a:p>
-        </p:txBody>
-      </p:sp>
-      <p:sp>
-        <p:nvSpPr>
-          <p:cNvPr id="6" name="Chevron 5"/>
+          </a:p>
+        </p:txBody>
+      </p:sp>
+      <p:sp>
+        <p:nvSpPr>
+          <p:cNvPr id="5" name="Oval 4"/>
           <p:cNvSpPr/>
           <p:nvPr/>
         </p:nvSpPr>
         <p:spPr>
           <a:xfrm>
-            <a:off x="4443984" y="4023360"/>
-            <a:ext cx="3547872" cy="1005840"/>
-          </a:xfrm>
-          <a:prstGeom prst="chevron">
-            <a:avLst>
-              <a:gd name="adj" fmla="val 28000"/>
-            </a:avLst>
+            <a:off x="822959" y="2194560"/>
+            <a:ext cx="731520" cy="731520"/>
+          </a:xfrm>
+          <a:prstGeom prst="ellipse">
+            <a:avLst/>
           </a:prstGeom>
           <a:solidFill>
             <a:srgbClr val="1C2E6E"/>
@@ -20761,35 +20817,113 @@
           <a:p>
             <a:pPr algn="ctr"/>
             <a:r>
-              <a:rPr sz="1800" b="1">
+              <a:rPr sz="2200" b="1">
                 <a:solidFill>
                   <a:srgbClr val="FFFFFF"/>
                 </a:solidFill>
                 <a:latin typeface="Calibri"/>
               </a:rPr>
-              <a:t>Rules + targeted GPT-4o for issues</a:t>
-            </a:r>
-          </a:p>
-        </p:txBody>
-      </p:sp>
-      <p:sp>
-        <p:nvSpPr>
-          <p:cNvPr id="7" name="Chevron 6"/>
+              <a:t>1</a:t>
+            </a:r>
+          </a:p>
+        </p:txBody>
+      </p:sp>
+      <p:sp>
+        <p:nvSpPr>
+          <p:cNvPr id="6" name="TextBox 5"/>
+          <p:cNvSpPr txBox="1"/>
+          <p:nvPr/>
+        </p:nvSpPr>
+        <p:spPr>
+          <a:xfrm>
+            <a:off x="822959" y="3200400"/>
+            <a:ext cx="2052828" cy="822960"/>
+          </a:xfrm>
+          <a:prstGeom prst="rect">
+            <a:avLst/>
+          </a:prstGeom>
+          <a:noFill/>
+        </p:spPr>
+        <p:txBody>
+          <a:bodyPr wrap="square" lIns="0" rIns="0" tIns="0" bIns="0" anchor="t">
+            <a:spAutoFit/>
+          </a:bodyPr>
+          <a:lstStyle/>
+          <a:p>
+            <a:pPr algn="l">
+              <a:spcAft>
+                <a:spcPts val="600"/>
+              </a:spcAft>
+            </a:pPr>
+            <a:r>
+              <a:rPr sz="1900" b="1" i="0">
+                <a:solidFill>
+                  <a:srgbClr val="1C2E6E"/>
+                </a:solidFill>
+                <a:latin typeface="Calibri"/>
+              </a:rPr>
+              <a:t>Wave-2 issues</a:t>
+            </a:r>
+          </a:p>
+        </p:txBody>
+      </p:sp>
+      <p:sp>
+        <p:nvSpPr>
+          <p:cNvPr id="7" name="TextBox 6"/>
+          <p:cNvSpPr txBox="1"/>
+          <p:nvPr/>
+        </p:nvSpPr>
+        <p:spPr>
+          <a:xfrm>
+            <a:off x="822959" y="4023360"/>
+            <a:ext cx="2052828" cy="1097280"/>
+          </a:xfrm>
+          <a:prstGeom prst="rect">
+            <a:avLst/>
+          </a:prstGeom>
+          <a:noFill/>
+        </p:spPr>
+        <p:txBody>
+          <a:bodyPr wrap="square" lIns="0" rIns="0" tIns="0" bIns="0" anchor="t">
+            <a:spAutoFit/>
+          </a:bodyPr>
+          <a:lstStyle/>
+          <a:p>
+            <a:pPr algn="l">
+              <a:spcAft>
+                <a:spcPts val="600"/>
+              </a:spcAft>
+            </a:pPr>
+            <a:r>
+              <a:rPr sz="1600" b="0" i="0">
+                <a:solidFill>
+                  <a:srgbClr val="1E293B"/>
+                </a:solidFill>
+                <a:latin typeface="Calibri"/>
+              </a:rPr>
+              <a:t>Lift issue F1 (0.477), starting with Customer Service</a:t>
+            </a:r>
+          </a:p>
+        </p:txBody>
+      </p:sp>
+      <p:sp>
+        <p:nvSpPr>
+          <p:cNvPr id="8" name="Rounded Rectangle 7"/>
           <p:cNvSpPr/>
           <p:nvPr/>
         </p:nvSpPr>
         <p:spPr>
           <a:xfrm>
-            <a:off x="8065008" y="4023360"/>
-            <a:ext cx="3547872" cy="1005840"/>
-          </a:xfrm>
-          <a:prstGeom prst="chevron">
+            <a:off x="3378708" y="1920240"/>
+            <a:ext cx="2601468" cy="3291840"/>
+          </a:xfrm>
+          <a:prstGeom prst="roundRect">
             <a:avLst>
-              <a:gd name="adj" fmla="val 28000"/>
+              <a:gd name="adj" fmla="val 6000"/>
             </a:avLst>
           </a:prstGeom>
           <a:solidFill>
-            <a:srgbClr val="1C2E6E"/>
+            <a:srgbClr val="F2F4F9"/>
           </a:solidFill>
           <a:ln>
             <a:noFill/>
@@ -20811,18 +20945,494 @@
           </a:fontRef>
         </p:style>
         <p:txBody>
+          <a:bodyPr rtlCol="0" anchor="ctr"/>
+          <a:lstStyle/>
+          <a:p>
+            <a:pPr algn="ctr"/>
+          </a:p>
+        </p:txBody>
+      </p:sp>
+      <p:sp>
+        <p:nvSpPr>
+          <p:cNvPr id="9" name="Oval 8"/>
+          <p:cNvSpPr/>
+          <p:nvPr/>
+        </p:nvSpPr>
+        <p:spPr>
+          <a:xfrm>
+            <a:off x="3653028" y="2194560"/>
+            <a:ext cx="731520" cy="731520"/>
+          </a:xfrm>
+          <a:prstGeom prst="ellipse">
+            <a:avLst/>
+          </a:prstGeom>
+          <a:solidFill>
+            <a:srgbClr val="1C2E6E"/>
+          </a:solidFill>
+          <a:ln>
+            <a:noFill/>
+          </a:ln>
+          <a:effectLst/>
+        </p:spPr>
+        <p:style>
+          <a:lnRef idx="1">
+            <a:schemeClr val="accent1"/>
+          </a:lnRef>
+          <a:fillRef idx="3">
+            <a:schemeClr val="accent1"/>
+          </a:fillRef>
+          <a:effectRef idx="2">
+            <a:schemeClr val="accent1"/>
+          </a:effectRef>
+          <a:fontRef idx="minor">
+            <a:schemeClr val="lt1"/>
+          </a:fontRef>
+        </p:style>
+        <p:txBody>
           <a:bodyPr rtlCol="0" anchor="ctr" wrap="square" lIns="73152" rIns="73152" tIns="36576" bIns="36576"/>
           <a:lstStyle/>
           <a:p>
             <a:pPr algn="ctr"/>
             <a:r>
-              <a:rPr sz="1800" b="1">
+              <a:rPr sz="2200" b="1">
                 <a:solidFill>
                   <a:srgbClr val="FFFFFF"/>
                 </a:solidFill>
                 <a:latin typeface="Calibri"/>
               </a:rPr>
-              <a:t>People decide</a:t>
+              <a:t>2</a:t>
+            </a:r>
+          </a:p>
+        </p:txBody>
+      </p:sp>
+      <p:sp>
+        <p:nvSpPr>
+          <p:cNvPr id="10" name="TextBox 9"/>
+          <p:cNvSpPr txBox="1"/>
+          <p:nvPr/>
+        </p:nvSpPr>
+        <p:spPr>
+          <a:xfrm>
+            <a:off x="3653028" y="3200400"/>
+            <a:ext cx="2052828" cy="822960"/>
+          </a:xfrm>
+          <a:prstGeom prst="rect">
+            <a:avLst/>
+          </a:prstGeom>
+          <a:noFill/>
+        </p:spPr>
+        <p:txBody>
+          <a:bodyPr wrap="square" lIns="0" rIns="0" tIns="0" bIns="0" anchor="t">
+            <a:spAutoFit/>
+          </a:bodyPr>
+          <a:lstStyle/>
+          <a:p>
+            <a:pPr algn="l">
+              <a:spcAft>
+                <a:spcPts val="600"/>
+              </a:spcAft>
+            </a:pPr>
+            <a:r>
+              <a:rPr sz="1900" b="1" i="0">
+                <a:solidFill>
+                  <a:srgbClr val="1C2E6E"/>
+                </a:solidFill>
+                <a:latin typeface="Calibri"/>
+              </a:rPr>
+              <a:t>Adjudicate</a:t>
+            </a:r>
+          </a:p>
+        </p:txBody>
+      </p:sp>
+      <p:sp>
+        <p:nvSpPr>
+          <p:cNvPr id="11" name="TextBox 10"/>
+          <p:cNvSpPr txBox="1"/>
+          <p:nvPr/>
+        </p:nvSpPr>
+        <p:spPr>
+          <a:xfrm>
+            <a:off x="3653028" y="4023360"/>
+            <a:ext cx="2052828" cy="1097280"/>
+          </a:xfrm>
+          <a:prstGeom prst="rect">
+            <a:avLst/>
+          </a:prstGeom>
+          <a:noFill/>
+        </p:spPr>
+        <p:txBody>
+          <a:bodyPr wrap="square" lIns="0" rIns="0" tIns="0" bIns="0" anchor="t">
+            <a:spAutoFit/>
+          </a:bodyPr>
+          <a:lstStyle/>
+          <a:p>
+            <a:pPr algn="l">
+              <a:spcAft>
+                <a:spcPts val="600"/>
+              </a:spcAft>
+            </a:pPr>
+            <a:r>
+              <a:rPr sz="1600" b="0" i="0">
+                <a:solidFill>
+                  <a:srgbClr val="1E293B"/>
+                </a:solidFill>
+                <a:latin typeface="Calibri"/>
+              </a:rPr>
+              <a:t>Resolve A–B disagreements in a separate file</a:t>
+            </a:r>
+          </a:p>
+        </p:txBody>
+      </p:sp>
+      <p:sp>
+        <p:nvSpPr>
+          <p:cNvPr id="12" name="Rounded Rectangle 11"/>
+          <p:cNvSpPr/>
+          <p:nvPr/>
+        </p:nvSpPr>
+        <p:spPr>
+          <a:xfrm>
+            <a:off x="6208776" y="1920240"/>
+            <a:ext cx="2601468" cy="3291840"/>
+          </a:xfrm>
+          <a:prstGeom prst="roundRect">
+            <a:avLst>
+              <a:gd name="adj" fmla="val 6000"/>
+            </a:avLst>
+          </a:prstGeom>
+          <a:solidFill>
+            <a:srgbClr val="F2F4F9"/>
+          </a:solidFill>
+          <a:ln>
+            <a:noFill/>
+          </a:ln>
+          <a:effectLst/>
+        </p:spPr>
+        <p:style>
+          <a:lnRef idx="1">
+            <a:schemeClr val="accent1"/>
+          </a:lnRef>
+          <a:fillRef idx="3">
+            <a:schemeClr val="accent1"/>
+          </a:fillRef>
+          <a:effectRef idx="2">
+            <a:schemeClr val="accent1"/>
+          </a:effectRef>
+          <a:fontRef idx="minor">
+            <a:schemeClr val="lt1"/>
+          </a:fontRef>
+        </p:style>
+        <p:txBody>
+          <a:bodyPr rtlCol="0" anchor="ctr"/>
+          <a:lstStyle/>
+          <a:p>
+            <a:pPr algn="ctr"/>
+          </a:p>
+        </p:txBody>
+      </p:sp>
+      <p:sp>
+        <p:nvSpPr>
+          <p:cNvPr id="13" name="Oval 12"/>
+          <p:cNvSpPr/>
+          <p:nvPr/>
+        </p:nvSpPr>
+        <p:spPr>
+          <a:xfrm>
+            <a:off x="6483096" y="2194560"/>
+            <a:ext cx="731520" cy="731520"/>
+          </a:xfrm>
+          <a:prstGeom prst="ellipse">
+            <a:avLst/>
+          </a:prstGeom>
+          <a:solidFill>
+            <a:srgbClr val="1C2E6E"/>
+          </a:solidFill>
+          <a:ln>
+            <a:noFill/>
+          </a:ln>
+          <a:effectLst/>
+        </p:spPr>
+        <p:style>
+          <a:lnRef idx="1">
+            <a:schemeClr val="accent1"/>
+          </a:lnRef>
+          <a:fillRef idx="3">
+            <a:schemeClr val="accent1"/>
+          </a:fillRef>
+          <a:effectRef idx="2">
+            <a:schemeClr val="accent1"/>
+          </a:effectRef>
+          <a:fontRef idx="minor">
+            <a:schemeClr val="lt1"/>
+          </a:fontRef>
+        </p:style>
+        <p:txBody>
+          <a:bodyPr rtlCol="0" anchor="ctr" wrap="square" lIns="73152" rIns="73152" tIns="36576" bIns="36576"/>
+          <a:lstStyle/>
+          <a:p>
+            <a:pPr algn="ctr"/>
+            <a:r>
+              <a:rPr sz="2200" b="1">
+                <a:solidFill>
+                  <a:srgbClr val="FFFFFF"/>
+                </a:solidFill>
+                <a:latin typeface="Calibri"/>
+              </a:rPr>
+              <a:t>3</a:t>
+            </a:r>
+          </a:p>
+        </p:txBody>
+      </p:sp>
+      <p:sp>
+        <p:nvSpPr>
+          <p:cNvPr id="14" name="TextBox 13"/>
+          <p:cNvSpPr txBox="1"/>
+          <p:nvPr/>
+        </p:nvSpPr>
+        <p:spPr>
+          <a:xfrm>
+            <a:off x="6483096" y="3200400"/>
+            <a:ext cx="2052828" cy="822960"/>
+          </a:xfrm>
+          <a:prstGeom prst="rect">
+            <a:avLst/>
+          </a:prstGeom>
+          <a:noFill/>
+        </p:spPr>
+        <p:txBody>
+          <a:bodyPr wrap="square" lIns="0" rIns="0" tIns="0" bIns="0" anchor="t">
+            <a:spAutoFit/>
+          </a:bodyPr>
+          <a:lstStyle/>
+          <a:p>
+            <a:pPr algn="l">
+              <a:spcAft>
+                <a:spcPts val="600"/>
+              </a:spcAft>
+            </a:pPr>
+            <a:r>
+              <a:rPr sz="1900" b="1" i="0">
+                <a:solidFill>
+                  <a:srgbClr val="1C2E6E"/>
+                </a:solidFill>
+                <a:latin typeface="Calibri"/>
+              </a:rPr>
+              <a:t>Fresh held-out test</a:t>
+            </a:r>
+          </a:p>
+        </p:txBody>
+      </p:sp>
+      <p:sp>
+        <p:nvSpPr>
+          <p:cNvPr id="15" name="TextBox 14"/>
+          <p:cNvSpPr txBox="1"/>
+          <p:nvPr/>
+        </p:nvSpPr>
+        <p:spPr>
+          <a:xfrm>
+            <a:off x="6483096" y="4023360"/>
+            <a:ext cx="2052828" cy="1097280"/>
+          </a:xfrm>
+          <a:prstGeom prst="rect">
+            <a:avLst/>
+          </a:prstGeom>
+          <a:noFill/>
+        </p:spPr>
+        <p:txBody>
+          <a:bodyPr wrap="square" lIns="0" rIns="0" tIns="0" bIns="0" anchor="t">
+            <a:spAutoFit/>
+          </a:bodyPr>
+          <a:lstStyle/>
+          <a:p>
+            <a:pPr algn="l">
+              <a:spcAft>
+                <a:spcPts val="600"/>
+              </a:spcAft>
+            </a:pPr>
+            <a:r>
+              <a:rPr sz="1600" b="0" i="0">
+                <a:solidFill>
+                  <a:srgbClr val="1E293B"/>
+                </a:solidFill>
+                <a:latin typeface="Calibri"/>
+              </a:rPr>
+              <a:t>Hybrid vs GPT-4o on every post, on new posts</a:t>
+            </a:r>
+          </a:p>
+        </p:txBody>
+      </p:sp>
+      <p:sp>
+        <p:nvSpPr>
+          <p:cNvPr id="16" name="Rounded Rectangle 15"/>
+          <p:cNvSpPr/>
+          <p:nvPr/>
+        </p:nvSpPr>
+        <p:spPr>
+          <a:xfrm>
+            <a:off x="9038844" y="1920240"/>
+            <a:ext cx="2601468" cy="3291840"/>
+          </a:xfrm>
+          <a:prstGeom prst="roundRect">
+            <a:avLst>
+              <a:gd name="adj" fmla="val 6000"/>
+            </a:avLst>
+          </a:prstGeom>
+          <a:solidFill>
+            <a:srgbClr val="F2F4F9"/>
+          </a:solidFill>
+          <a:ln>
+            <a:noFill/>
+          </a:ln>
+          <a:effectLst/>
+        </p:spPr>
+        <p:style>
+          <a:lnRef idx="1">
+            <a:schemeClr val="accent1"/>
+          </a:lnRef>
+          <a:fillRef idx="3">
+            <a:schemeClr val="accent1"/>
+          </a:fillRef>
+          <a:effectRef idx="2">
+            <a:schemeClr val="accent1"/>
+          </a:effectRef>
+          <a:fontRef idx="minor">
+            <a:schemeClr val="lt1"/>
+          </a:fontRef>
+        </p:style>
+        <p:txBody>
+          <a:bodyPr rtlCol="0" anchor="ctr"/>
+          <a:lstStyle/>
+          <a:p>
+            <a:pPr algn="ctr"/>
+          </a:p>
+        </p:txBody>
+      </p:sp>
+      <p:sp>
+        <p:nvSpPr>
+          <p:cNvPr id="17" name="Oval 16"/>
+          <p:cNvSpPr/>
+          <p:nvPr/>
+        </p:nvSpPr>
+        <p:spPr>
+          <a:xfrm>
+            <a:off x="9313164" y="2194560"/>
+            <a:ext cx="731520" cy="731520"/>
+          </a:xfrm>
+          <a:prstGeom prst="ellipse">
+            <a:avLst/>
+          </a:prstGeom>
+          <a:solidFill>
+            <a:srgbClr val="1C2E6E"/>
+          </a:solidFill>
+          <a:ln>
+            <a:noFill/>
+          </a:ln>
+          <a:effectLst/>
+        </p:spPr>
+        <p:style>
+          <a:lnRef idx="1">
+            <a:schemeClr val="accent1"/>
+          </a:lnRef>
+          <a:fillRef idx="3">
+            <a:schemeClr val="accent1"/>
+          </a:fillRef>
+          <a:effectRef idx="2">
+            <a:schemeClr val="accent1"/>
+          </a:effectRef>
+          <a:fontRef idx="minor">
+            <a:schemeClr val="lt1"/>
+          </a:fontRef>
+        </p:style>
+        <p:txBody>
+          <a:bodyPr rtlCol="0" anchor="ctr" wrap="square" lIns="73152" rIns="73152" tIns="36576" bIns="36576"/>
+          <a:lstStyle/>
+          <a:p>
+            <a:pPr algn="ctr"/>
+            <a:r>
+              <a:rPr sz="2200" b="1">
+                <a:solidFill>
+                  <a:srgbClr val="FFFFFF"/>
+                </a:solidFill>
+                <a:latin typeface="Calibri"/>
+              </a:rPr>
+              <a:t>4</a:t>
+            </a:r>
+          </a:p>
+        </p:txBody>
+      </p:sp>
+      <p:sp>
+        <p:nvSpPr>
+          <p:cNvPr id="18" name="TextBox 17"/>
+          <p:cNvSpPr txBox="1"/>
+          <p:nvPr/>
+        </p:nvSpPr>
+        <p:spPr>
+          <a:xfrm>
+            <a:off x="9313164" y="3200400"/>
+            <a:ext cx="2052828" cy="822960"/>
+          </a:xfrm>
+          <a:prstGeom prst="rect">
+            <a:avLst/>
+          </a:prstGeom>
+          <a:noFill/>
+        </p:spPr>
+        <p:txBody>
+          <a:bodyPr wrap="square" lIns="0" rIns="0" tIns="0" bIns="0" anchor="t">
+            <a:spAutoFit/>
+          </a:bodyPr>
+          <a:lstStyle/>
+          <a:p>
+            <a:pPr algn="l">
+              <a:spcAft>
+                <a:spcPts val="600"/>
+              </a:spcAft>
+            </a:pPr>
+            <a:r>
+              <a:rPr sz="1900" b="1" i="0">
+                <a:solidFill>
+                  <a:srgbClr val="1C2E6E"/>
+                </a:solidFill>
+                <a:latin typeface="Calibri"/>
+              </a:rPr>
+              <a:t>Brand-level sentiment</a:t>
+            </a:r>
+          </a:p>
+        </p:txBody>
+      </p:sp>
+      <p:sp>
+        <p:nvSpPr>
+          <p:cNvPr id="19" name="TextBox 18"/>
+          <p:cNvSpPr txBox="1"/>
+          <p:nvPr/>
+        </p:nvSpPr>
+        <p:spPr>
+          <a:xfrm>
+            <a:off x="9313164" y="4023360"/>
+            <a:ext cx="2052828" cy="1097280"/>
+          </a:xfrm>
+          <a:prstGeom prst="rect">
+            <a:avLst/>
+          </a:prstGeom>
+          <a:noFill/>
+        </p:spPr>
+        <p:txBody>
+          <a:bodyPr wrap="square" lIns="0" rIns="0" tIns="0" bIns="0" anchor="t">
+            <a:spAutoFit/>
+          </a:bodyPr>
+          <a:lstStyle/>
+          <a:p>
+            <a:pPr algn="l">
+              <a:spcAft>
+                <a:spcPts val="600"/>
+              </a:spcAft>
+            </a:pPr>
+            <a:r>
+              <a:rPr sz="1600" b="0" i="0">
+                <a:solidFill>
+                  <a:srgbClr val="1E293B"/>
+                </a:solidFill>
+                <a:latin typeface="Calibri"/>
+              </a:rPr>
+              <a:t>One label per brand per post; validate against tickets</a:t>
             </a:r>
           </a:p>
         </p:txBody>
@@ -21076,22 +21686,139 @@
       <p:grpSpPr/>
       <p:sp>
         <p:nvSpPr>
-          <p:cNvPr id="2" name="Rounded Rectangle 1"/>
+          <p:cNvPr id="2" name="TextBox 1"/>
+          <p:cNvSpPr txBox="1"/>
+          <p:nvPr/>
+        </p:nvSpPr>
+        <p:spPr>
+          <a:xfrm>
+            <a:off x="11155680" y="6446520"/>
+            <a:ext cx="548640" cy="274320"/>
+          </a:xfrm>
+          <a:prstGeom prst="rect">
+            <a:avLst/>
+          </a:prstGeom>
+          <a:noFill/>
+        </p:spPr>
+        <p:txBody>
+          <a:bodyPr wrap="square" lIns="0" rIns="0" tIns="0" bIns="0" anchor="t">
+            <a:spAutoFit/>
+          </a:bodyPr>
+          <a:lstStyle/>
+          <a:p>
+            <a:pPr algn="r">
+              <a:spcAft>
+                <a:spcPts val="600"/>
+              </a:spcAft>
+            </a:pPr>
+            <a:r>
+              <a:rPr sz="1000" b="0" i="0">
+                <a:solidFill>
+                  <a:srgbClr val="5B6475"/>
+                </a:solidFill>
+                <a:latin typeface="Calibri"/>
+              </a:rPr>
+              <a:t>30</a:t>
+            </a:r>
+          </a:p>
+        </p:txBody>
+      </p:sp>
+      <p:sp>
+        <p:nvSpPr>
+          <p:cNvPr id="3" name="TextBox 2"/>
+          <p:cNvSpPr txBox="1"/>
+          <p:nvPr/>
+        </p:nvSpPr>
+        <p:spPr>
+          <a:xfrm>
+            <a:off x="822959" y="1828800"/>
+            <a:ext cx="10515600" cy="1097280"/>
+          </a:xfrm>
+          <a:prstGeom prst="rect">
+            <a:avLst/>
+          </a:prstGeom>
+          <a:noFill/>
+        </p:spPr>
+        <p:txBody>
+          <a:bodyPr wrap="square" lIns="0" rIns="0" tIns="0" bIns="0" anchor="t">
+            <a:spAutoFit/>
+          </a:bodyPr>
+          <a:lstStyle/>
+          <a:p>
+            <a:pPr algn="l">
+              <a:spcAft>
+                <a:spcPts val="600"/>
+              </a:spcAft>
+            </a:pPr>
+            <a:r>
+              <a:rPr sz="4800" b="1" i="0">
+                <a:solidFill>
+                  <a:srgbClr val="1C2E6E"/>
+                </a:solidFill>
+                <a:latin typeface="Calibri"/>
+              </a:rPr>
+              <a:t>Thank you</a:t>
+            </a:r>
+          </a:p>
+        </p:txBody>
+      </p:sp>
+      <p:sp>
+        <p:nvSpPr>
+          <p:cNvPr id="4" name="TextBox 3"/>
+          <p:cNvSpPr txBox="1"/>
+          <p:nvPr/>
+        </p:nvSpPr>
+        <p:spPr>
+          <a:xfrm>
+            <a:off x="822959" y="2926080"/>
+            <a:ext cx="10515600" cy="640080"/>
+          </a:xfrm>
+          <a:prstGeom prst="rect">
+            <a:avLst/>
+          </a:prstGeom>
+          <a:noFill/>
+        </p:spPr>
+        <p:txBody>
+          <a:bodyPr wrap="square" lIns="0" rIns="0" tIns="0" bIns="0" anchor="t">
+            <a:spAutoFit/>
+          </a:bodyPr>
+          <a:lstStyle/>
+          <a:p>
+            <a:pPr algn="l">
+              <a:spcAft>
+                <a:spcPts val="600"/>
+              </a:spcAft>
+            </a:pPr>
+            <a:r>
+              <a:rPr sz="2400" b="0" i="0">
+                <a:solidFill>
+                  <a:srgbClr val="5B6475"/>
+                </a:solidFill>
+                <a:latin typeface="Calibri"/>
+              </a:rPr>
+              <a:t>Questions and discussion</a:t>
+            </a:r>
+          </a:p>
+        </p:txBody>
+      </p:sp>
+      <p:sp>
+        <p:nvSpPr>
+          <p:cNvPr id="5" name="Pentagon 4"/>
           <p:cNvSpPr/>
           <p:nvPr/>
         </p:nvSpPr>
         <p:spPr>
           <a:xfrm>
-            <a:off x="822959" y="2148840"/>
-            <a:ext cx="1234440" cy="1234440"/>
-          </a:xfrm>
-          <a:prstGeom prst="roundRect">
+            <a:off x="822959" y="4023360"/>
+            <a:ext cx="3547872" cy="1005840"/>
+          </a:xfrm>
+          <a:prstGeom prst="homePlate">
             <a:avLst>
-              <a:gd name="adj" fmla="val 12000"/>
+              <a:gd name="adj" fmla="val 28000"/>
             </a:avLst>
           </a:prstGeom>
           <a:solidFill>
-            <a:srgbClr val="D29B08"/>
+            <a:srgbClr val="1C2E6E"/>
           </a:solidFill>
           <a:ln>
             <a:noFill/>
@@ -21118,169 +21845,123 @@
           <a:p>
             <a:pPr algn="ctr"/>
             <a:r>
-              <a:rPr sz="4800" b="1">
+              <a:rPr sz="1800" b="1">
                 <a:solidFill>
                   <a:srgbClr val="FFFFFF"/>
                 </a:solidFill>
                 <a:latin typeface="Calibri"/>
               </a:rPr>
-              <a:t>Q</a:t>
-            </a:r>
-          </a:p>
-        </p:txBody>
-      </p:sp>
-      <p:sp>
-        <p:nvSpPr>
-          <p:cNvPr id="3" name="TextBox 2"/>
-          <p:cNvSpPr txBox="1"/>
-          <p:nvPr/>
-        </p:nvSpPr>
-        <p:spPr>
-          <a:xfrm>
-            <a:off x="2423160" y="2011680"/>
-            <a:ext cx="8686800" cy="822960"/>
-          </a:xfrm>
-          <a:prstGeom prst="rect">
-            <a:avLst/>
-          </a:prstGeom>
-          <a:noFill/>
-        </p:spPr>
-        <p:txBody>
-          <a:bodyPr wrap="square" lIns="0" rIns="0" tIns="0" bIns="0" anchor="t">
-            <a:spAutoFit/>
-          </a:bodyPr>
-          <a:lstStyle/>
-          <a:p>
-            <a:pPr algn="l">
-              <a:spcAft>
-                <a:spcPts val="600"/>
-              </a:spcAft>
-            </a:pPr>
-            <a:r>
-              <a:rPr sz="4000" b="1" i="0">
-                <a:solidFill>
-                  <a:srgbClr val="1C2E6E"/>
-                </a:solidFill>
-                <a:latin typeface="Calibri"/>
-              </a:rPr>
-              <a:t>Backup: anticipated questions</a:t>
-            </a:r>
-          </a:p>
-        </p:txBody>
-      </p:sp>
-      <p:sp>
-        <p:nvSpPr>
-          <p:cNvPr id="4" name="TextBox 3"/>
-          <p:cNvSpPr txBox="1"/>
-          <p:nvPr/>
-        </p:nvSpPr>
-        <p:spPr>
-          <a:xfrm>
-            <a:off x="2423160" y="2834640"/>
-            <a:ext cx="8686800" cy="548640"/>
-          </a:xfrm>
-          <a:prstGeom prst="rect">
-            <a:avLst/>
-          </a:prstGeom>
-          <a:noFill/>
-        </p:spPr>
-        <p:txBody>
-          <a:bodyPr wrap="square" lIns="0" rIns="0" tIns="0" bIns="0" anchor="t">
-            <a:spAutoFit/>
-          </a:bodyPr>
-          <a:lstStyle/>
-          <a:p>
-            <a:pPr algn="l">
-              <a:spcAft>
-                <a:spcPts val="600"/>
-              </a:spcAft>
-            </a:pPr>
-            <a:r>
-              <a:rPr sz="2000" b="0" i="0">
-                <a:solidFill>
-                  <a:srgbClr val="5B6475"/>
-                </a:solidFill>
-                <a:latin typeface="Calibri"/>
-              </a:rPr>
-              <a:t>Short answers, with the evidence behind them</a:t>
-            </a:r>
-          </a:p>
-        </p:txBody>
-      </p:sp>
-      <p:sp>
-        <p:nvSpPr>
-          <p:cNvPr id="5" name="TextBox 4"/>
-          <p:cNvSpPr txBox="1"/>
-          <p:nvPr/>
-        </p:nvSpPr>
-        <p:spPr>
-          <a:xfrm>
-            <a:off x="2423160" y="3520440"/>
-            <a:ext cx="8686800" cy="365760"/>
-          </a:xfrm>
-          <a:prstGeom prst="rect">
-            <a:avLst/>
-          </a:prstGeom>
-          <a:noFill/>
-        </p:spPr>
-        <p:txBody>
-          <a:bodyPr wrap="square" lIns="0" rIns="0" tIns="0" bIns="0" anchor="t">
-            <a:spAutoFit/>
-          </a:bodyPr>
-          <a:lstStyle/>
-          <a:p>
-            <a:pPr algn="l">
-              <a:spcAft>
-                <a:spcPts val="600"/>
-              </a:spcAft>
-            </a:pPr>
-            <a:r>
-              <a:rPr sz="1600" b="1" i="0">
-                <a:solidFill>
-                  <a:srgbClr val="D29B08"/>
-                </a:solidFill>
-                <a:latin typeface="Calibri"/>
-              </a:rPr>
-              <a:t>For Q&amp;A</a:t>
-            </a:r>
-          </a:p>
-        </p:txBody>
-      </p:sp>
-      <p:sp>
-        <p:nvSpPr>
-          <p:cNvPr id="6" name="TextBox 5"/>
-          <p:cNvSpPr txBox="1"/>
-          <p:nvPr/>
-        </p:nvSpPr>
-        <p:spPr>
-          <a:xfrm>
-            <a:off x="11155680" y="6446520"/>
-            <a:ext cx="548640" cy="274320"/>
-          </a:xfrm>
-          <a:prstGeom prst="rect">
-            <a:avLst/>
-          </a:prstGeom>
-          <a:noFill/>
-        </p:spPr>
-        <p:txBody>
-          <a:bodyPr wrap="square" lIns="0" rIns="0" tIns="0" bIns="0" anchor="t">
-            <a:spAutoFit/>
-          </a:bodyPr>
-          <a:lstStyle/>
-          <a:p>
-            <a:pPr algn="r">
-              <a:spcAft>
-                <a:spcPts val="600"/>
-              </a:spcAft>
-            </a:pPr>
-            <a:r>
-              <a:rPr sz="1000" b="0" i="0">
-                <a:solidFill>
-                  <a:srgbClr val="5B6475"/>
-                </a:solidFill>
-                <a:latin typeface="Calibri"/>
-              </a:rPr>
-              <a:t>30</a:t>
+              <a:t>LLM for sentiment</a:t>
+            </a:r>
+          </a:p>
+        </p:txBody>
+      </p:sp>
+      <p:sp>
+        <p:nvSpPr>
+          <p:cNvPr id="6" name="Chevron 5"/>
+          <p:cNvSpPr/>
+          <p:nvPr/>
+        </p:nvSpPr>
+        <p:spPr>
+          <a:xfrm>
+            <a:off x="4443984" y="4023360"/>
+            <a:ext cx="3547872" cy="1005840"/>
+          </a:xfrm>
+          <a:prstGeom prst="chevron">
+            <a:avLst>
+              <a:gd name="adj" fmla="val 28000"/>
+            </a:avLst>
+          </a:prstGeom>
+          <a:solidFill>
+            <a:srgbClr val="1C2E6E"/>
+          </a:solidFill>
+          <a:ln>
+            <a:noFill/>
+          </a:ln>
+          <a:effectLst/>
+        </p:spPr>
+        <p:style>
+          <a:lnRef idx="1">
+            <a:schemeClr val="accent1"/>
+          </a:lnRef>
+          <a:fillRef idx="3">
+            <a:schemeClr val="accent1"/>
+          </a:fillRef>
+          <a:effectRef idx="2">
+            <a:schemeClr val="accent1"/>
+          </a:effectRef>
+          <a:fontRef idx="minor">
+            <a:schemeClr val="lt1"/>
+          </a:fontRef>
+        </p:style>
+        <p:txBody>
+          <a:bodyPr rtlCol="0" anchor="ctr" wrap="square" lIns="73152" rIns="73152" tIns="36576" bIns="36576"/>
+          <a:lstStyle/>
+          <a:p>
+            <a:pPr algn="ctr"/>
+            <a:r>
+              <a:rPr sz="1800" b="1">
+                <a:solidFill>
+                  <a:srgbClr val="FFFFFF"/>
+                </a:solidFill>
+                <a:latin typeface="Calibri"/>
+              </a:rPr>
+              <a:t>Rules + targeted GPT-4o for issues</a:t>
+            </a:r>
+          </a:p>
+        </p:txBody>
+      </p:sp>
+      <p:sp>
+        <p:nvSpPr>
+          <p:cNvPr id="7" name="Chevron 6"/>
+          <p:cNvSpPr/>
+          <p:nvPr/>
+        </p:nvSpPr>
+        <p:spPr>
+          <a:xfrm>
+            <a:off x="8065008" y="4023360"/>
+            <a:ext cx="3547872" cy="1005840"/>
+          </a:xfrm>
+          <a:prstGeom prst="chevron">
+            <a:avLst>
+              <a:gd name="adj" fmla="val 28000"/>
+            </a:avLst>
+          </a:prstGeom>
+          <a:solidFill>
+            <a:srgbClr val="1C2E6E"/>
+          </a:solidFill>
+          <a:ln>
+            <a:noFill/>
+          </a:ln>
+          <a:effectLst/>
+        </p:spPr>
+        <p:style>
+          <a:lnRef idx="1">
+            <a:schemeClr val="accent1"/>
+          </a:lnRef>
+          <a:fillRef idx="3">
+            <a:schemeClr val="accent1"/>
+          </a:fillRef>
+          <a:effectRef idx="2">
+            <a:schemeClr val="accent1"/>
+          </a:effectRef>
+          <a:fontRef idx="minor">
+            <a:schemeClr val="lt1"/>
+          </a:fontRef>
+        </p:style>
+        <p:txBody>
+          <a:bodyPr rtlCol="0" anchor="ctr" wrap="square" lIns="73152" rIns="73152" tIns="36576" bIns="36576"/>
+          <a:lstStyle/>
+          <a:p>
+            <a:pPr algn="ctr"/>
+            <a:r>
+              <a:rPr sz="1800" b="1">
+                <a:solidFill>
+                  <a:srgbClr val="FFFFFF"/>
+                </a:solidFill>
+                <a:latin typeface="Calibri"/>
+              </a:rPr>
+              <a:t>People decide</a:t>
             </a:r>
           </a:p>
         </p:txBody>
@@ -21305,100 +21986,22 @@
       <p:grpSpPr/>
       <p:sp>
         <p:nvSpPr>
-          <p:cNvPr id="2" name="TextBox 1"/>
-          <p:cNvSpPr txBox="1"/>
-          <p:nvPr/>
-        </p:nvSpPr>
-        <p:spPr>
-          <a:xfrm>
-            <a:off x="2788920" y="128016"/>
-            <a:ext cx="9052560" cy="1097280"/>
-          </a:xfrm>
-          <a:prstGeom prst="rect">
-            <a:avLst/>
-          </a:prstGeom>
-          <a:noFill/>
-        </p:spPr>
-        <p:txBody>
-          <a:bodyPr wrap="square" lIns="0" rIns="0" tIns="0" bIns="0" anchor="ctr">
-            <a:spAutoFit/>
-          </a:bodyPr>
-          <a:lstStyle/>
-          <a:p>
-            <a:pPr algn="l">
-              <a:spcAft>
-                <a:spcPts val="600"/>
-              </a:spcAft>
-            </a:pPr>
-            <a:r>
-              <a:rPr sz="2600" b="1" i="0">
-                <a:solidFill>
-                  <a:srgbClr val="1C2E6E"/>
-                </a:solidFill>
-                <a:latin typeface="Calibri"/>
-              </a:rPr>
-              <a:t>Anticipated questions (1 of 3)</a:t>
-            </a:r>
-          </a:p>
-        </p:txBody>
-      </p:sp>
-      <p:sp>
-        <p:nvSpPr>
-          <p:cNvPr id="3" name="TextBox 2"/>
-          <p:cNvSpPr txBox="1"/>
-          <p:nvPr/>
-        </p:nvSpPr>
-        <p:spPr>
-          <a:xfrm>
-            <a:off x="11155680" y="6446520"/>
-            <a:ext cx="548640" cy="274320"/>
-          </a:xfrm>
-          <a:prstGeom prst="rect">
-            <a:avLst/>
-          </a:prstGeom>
-          <a:noFill/>
-        </p:spPr>
-        <p:txBody>
-          <a:bodyPr wrap="square" lIns="0" rIns="0" tIns="0" bIns="0" anchor="t">
-            <a:spAutoFit/>
-          </a:bodyPr>
-          <a:lstStyle/>
-          <a:p>
-            <a:pPr algn="r">
-              <a:spcAft>
-                <a:spcPts val="600"/>
-              </a:spcAft>
-            </a:pPr>
-            <a:r>
-              <a:rPr sz="1000" b="0" i="0">
-                <a:solidFill>
-                  <a:srgbClr val="5B6475"/>
-                </a:solidFill>
-                <a:latin typeface="Calibri"/>
-              </a:rPr>
-              <a:t>31</a:t>
-            </a:r>
-          </a:p>
-        </p:txBody>
-      </p:sp>
-      <p:sp>
-        <p:nvSpPr>
-          <p:cNvPr id="4" name="Rounded Rectangle 3"/>
+          <p:cNvPr id="2" name="Rounded Rectangle 1"/>
           <p:cNvSpPr/>
           <p:nvPr/>
         </p:nvSpPr>
         <p:spPr>
           <a:xfrm>
-            <a:off x="548640" y="1645920"/>
-            <a:ext cx="11091672" cy="1417320"/>
+            <a:off x="822959" y="2148840"/>
+            <a:ext cx="1234440" cy="1234440"/>
           </a:xfrm>
           <a:prstGeom prst="roundRect">
             <a:avLst>
-              <a:gd name="adj" fmla="val 6000"/>
+              <a:gd name="adj" fmla="val 12000"/>
             </a:avLst>
           </a:prstGeom>
           <a:solidFill>
-            <a:srgbClr val="F2F4F9"/>
+            <a:srgbClr val="D29B08"/>
           </a:solidFill>
           <a:ln>
             <a:noFill/>
@@ -21420,23 +22023,32 @@
           </a:fontRef>
         </p:style>
         <p:txBody>
-          <a:bodyPr rtlCol="0" anchor="ctr"/>
+          <a:bodyPr rtlCol="0" anchor="ctr" wrap="square" lIns="73152" rIns="73152" tIns="36576" bIns="36576"/>
           <a:lstStyle/>
           <a:p>
             <a:pPr algn="ctr"/>
-          </a:p>
-        </p:txBody>
-      </p:sp>
-      <p:sp>
-        <p:nvSpPr>
-          <p:cNvPr id="5" name="TextBox 4"/>
+            <a:r>
+              <a:rPr sz="4800" b="1">
+                <a:solidFill>
+                  <a:srgbClr val="FFFFFF"/>
+                </a:solidFill>
+                <a:latin typeface="Calibri"/>
+              </a:rPr>
+              <a:t>Q</a:t>
+            </a:r>
+          </a:p>
+        </p:txBody>
+      </p:sp>
+      <p:sp>
+        <p:nvSpPr>
+          <p:cNvPr id="3" name="TextBox 2"/>
           <p:cNvSpPr txBox="1"/>
           <p:nvPr/>
         </p:nvSpPr>
         <p:spPr>
           <a:xfrm>
-            <a:off x="822959" y="1783080"/>
-            <a:ext cx="3474720" cy="1143000"/>
+            <a:off x="2423160" y="2011680"/>
+            <a:ext cx="8686800" cy="822960"/>
           </a:xfrm>
           <a:prstGeom prst="rect">
             <a:avLst/>
@@ -21444,7 +22056,7 @@
           <a:noFill/>
         </p:spPr>
         <p:txBody>
-          <a:bodyPr wrap="square" lIns="0" rIns="0" tIns="0" bIns="0" anchor="ctr">
+          <a:bodyPr wrap="square" lIns="0" rIns="0" tIns="0" bIns="0" anchor="t">
             <a:spAutoFit/>
           </a:bodyPr>
           <a:lstStyle/>
@@ -21455,27 +22067,27 @@
               </a:spcAft>
             </a:pPr>
             <a:r>
-              <a:rPr sz="1700" b="1" i="0">
+              <a:rPr sz="4000" b="1" i="0">
                 <a:solidFill>
                   <a:srgbClr val="1C2E6E"/>
                 </a:solidFill>
                 <a:latin typeface="Calibri"/>
               </a:rPr>
-              <a:t>Why not use GPT-4o for everything?</a:t>
-            </a:r>
-          </a:p>
-        </p:txBody>
-      </p:sp>
-      <p:sp>
-        <p:nvSpPr>
-          <p:cNvPr id="6" name="TextBox 5"/>
+              <a:t>Backup: anticipated questions</a:t>
+            </a:r>
+          </a:p>
+        </p:txBody>
+      </p:sp>
+      <p:sp>
+        <p:nvSpPr>
+          <p:cNvPr id="4" name="TextBox 3"/>
           <p:cNvSpPr txBox="1"/>
           <p:nvPr/>
         </p:nvSpPr>
         <p:spPr>
           <a:xfrm>
-            <a:off x="4572000" y="1783080"/>
-            <a:ext cx="6858000" cy="1143000"/>
+            <a:off x="2423160" y="2834640"/>
+            <a:ext cx="8686800" cy="548640"/>
           </a:xfrm>
           <a:prstGeom prst="rect">
             <a:avLst/>
@@ -21483,7 +22095,7 @@
           <a:noFill/>
         </p:spPr>
         <p:txBody>
-          <a:bodyPr wrap="square" lIns="0" rIns="0" tIns="0" bIns="0" anchor="ctr">
+          <a:bodyPr wrap="square" lIns="0" rIns="0" tIns="0" bIns="0" anchor="t">
             <a:spAutoFit/>
           </a:bodyPr>
           <a:lstStyle/>
@@ -21494,75 +22106,27 @@
               </a:spcAft>
             </a:pPr>
             <a:r>
-              <a:rPr sz="1500" b="0" i="0">
-                <a:solidFill>
-                  <a:srgbClr val="1E293B"/>
-                </a:solidFill>
-                <a:latin typeface="Calibri"/>
-              </a:rPr>
-              <a:t>On typical posts GPT-4o on every post ties rules (0.600 vs 0.639) and costs ~17× mini. On hard posts it wins (0.596 vs 0.499). At ~$0.0005 a post it’s affordable on a deduplicated feed; I’d settle it on fresh held-out data.</a:t>
-            </a:r>
-          </a:p>
-        </p:txBody>
-      </p:sp>
-      <p:sp>
-        <p:nvSpPr>
-          <p:cNvPr id="7" name="Rounded Rectangle 6"/>
-          <p:cNvSpPr/>
-          <p:nvPr/>
-        </p:nvSpPr>
-        <p:spPr>
-          <a:xfrm>
-            <a:off x="548640" y="3200400"/>
-            <a:ext cx="11091672" cy="1417320"/>
-          </a:xfrm>
-          <a:prstGeom prst="roundRect">
-            <a:avLst>
-              <a:gd name="adj" fmla="val 6000"/>
-            </a:avLst>
-          </a:prstGeom>
-          <a:solidFill>
-            <a:srgbClr val="FFFFFF"/>
-          </a:solidFill>
-          <a:ln w="12700">
-            <a:solidFill>
-              <a:srgbClr val="D5DAE5"/>
-            </a:solidFill>
-          </a:ln>
-          <a:effectLst/>
-        </p:spPr>
-        <p:style>
-          <a:lnRef idx="1">
-            <a:schemeClr val="accent1"/>
-          </a:lnRef>
-          <a:fillRef idx="3">
-            <a:schemeClr val="accent1"/>
-          </a:fillRef>
-          <a:effectRef idx="2">
-            <a:schemeClr val="accent1"/>
-          </a:effectRef>
-          <a:fontRef idx="minor">
-            <a:schemeClr val="lt1"/>
-          </a:fontRef>
-        </p:style>
-        <p:txBody>
-          <a:bodyPr rtlCol="0" anchor="ctr"/>
-          <a:lstStyle/>
-          <a:p>
-            <a:pPr algn="ctr"/>
-          </a:p>
-        </p:txBody>
-      </p:sp>
-      <p:sp>
-        <p:nvSpPr>
-          <p:cNvPr id="8" name="TextBox 7"/>
+              <a:rPr sz="2000" b="0" i="0">
+                <a:solidFill>
+                  <a:srgbClr val="5B6475"/>
+                </a:solidFill>
+                <a:latin typeface="Calibri"/>
+              </a:rPr>
+              <a:t>Short answers, with the evidence behind them</a:t>
+            </a:r>
+          </a:p>
+        </p:txBody>
+      </p:sp>
+      <p:sp>
+        <p:nvSpPr>
+          <p:cNvPr id="5" name="TextBox 4"/>
           <p:cNvSpPr txBox="1"/>
           <p:nvPr/>
         </p:nvSpPr>
         <p:spPr>
           <a:xfrm>
-            <a:off x="822959" y="3337560"/>
-            <a:ext cx="3474720" cy="1143000"/>
+            <a:off x="2423160" y="3520440"/>
+            <a:ext cx="8686800" cy="365760"/>
           </a:xfrm>
           <a:prstGeom prst="rect">
             <a:avLst/>
@@ -21570,7 +22134,7 @@
           <a:noFill/>
         </p:spPr>
         <p:txBody>
-          <a:bodyPr wrap="square" lIns="0" rIns="0" tIns="0" bIns="0" anchor="ctr">
+          <a:bodyPr wrap="square" lIns="0" rIns="0" tIns="0" bIns="0" anchor="t">
             <a:spAutoFit/>
           </a:bodyPr>
           <a:lstStyle/>
@@ -21581,27 +22145,27 @@
               </a:spcAft>
             </a:pPr>
             <a:r>
-              <a:rPr sz="1700" b="1" i="0">
-                <a:solidFill>
-                  <a:srgbClr val="1C2E6E"/>
-                </a:solidFill>
-                <a:latin typeface="Calibri"/>
-              </a:rPr>
-              <a:t>Is the hybrid’s gain real?</a:t>
-            </a:r>
-          </a:p>
-        </p:txBody>
-      </p:sp>
-      <p:sp>
-        <p:nvSpPr>
-          <p:cNvPr id="9" name="TextBox 8"/>
+              <a:rPr sz="1600" b="1" i="0">
+                <a:solidFill>
+                  <a:srgbClr val="D29B08"/>
+                </a:solidFill>
+                <a:latin typeface="Calibri"/>
+              </a:rPr>
+              <a:t>For Q&amp;A</a:t>
+            </a:r>
+          </a:p>
+        </p:txBody>
+      </p:sp>
+      <p:sp>
+        <p:nvSpPr>
+          <p:cNvPr id="6" name="TextBox 5"/>
           <p:cNvSpPr txBox="1"/>
           <p:nvPr/>
         </p:nvSpPr>
         <p:spPr>
           <a:xfrm>
-            <a:off x="4572000" y="3337560"/>
-            <a:ext cx="6858000" cy="1143000"/>
+            <a:off x="11155680" y="6446520"/>
+            <a:ext cx="548640" cy="274320"/>
           </a:xfrm>
           <a:prstGeom prst="rect">
             <a:avLst/>
@@ -21609,148 +22173,24 @@
           <a:noFill/>
         </p:spPr>
         <p:txBody>
-          <a:bodyPr wrap="square" lIns="0" rIns="0" tIns="0" bIns="0" anchor="ctr">
+          <a:bodyPr wrap="square" lIns="0" rIns="0" tIns="0" bIns="0" anchor="t">
             <a:spAutoFit/>
           </a:bodyPr>
           <a:lstStyle/>
           <a:p>
-            <a:pPr algn="l">
+            <a:pPr algn="r">
               <a:spcAft>
                 <a:spcPts val="600"/>
               </a:spcAft>
             </a:pPr>
             <a:r>
-              <a:rPr sz="1500" b="0" i="0">
-                <a:solidFill>
-                  <a:srgbClr val="1E293B"/>
-                </a:solidFill>
-                <a:latin typeface="Calibri"/>
-              </a:rPr>
-              <a:t>On the set I tuned it on, yes: +0.041, 95% CI +0.011 to +0.072. On the held-out challenge set, no: +0.010, CI −0.04 to +0.07. So I report 0.680 as optimistic.</a:t>
-            </a:r>
-          </a:p>
-        </p:txBody>
-      </p:sp>
-      <p:sp>
-        <p:nvSpPr>
-          <p:cNvPr id="10" name="Rounded Rectangle 9"/>
-          <p:cNvSpPr/>
-          <p:nvPr/>
-        </p:nvSpPr>
-        <p:spPr>
-          <a:xfrm>
-            <a:off x="548640" y="4754880"/>
-            <a:ext cx="11091672" cy="1417320"/>
-          </a:xfrm>
-          <a:prstGeom prst="roundRect">
-            <a:avLst>
-              <a:gd name="adj" fmla="val 6000"/>
-            </a:avLst>
-          </a:prstGeom>
-          <a:solidFill>
-            <a:srgbClr val="F2F4F9"/>
-          </a:solidFill>
-          <a:ln>
-            <a:noFill/>
-          </a:ln>
-          <a:effectLst/>
-        </p:spPr>
-        <p:style>
-          <a:lnRef idx="1">
-            <a:schemeClr val="accent1"/>
-          </a:lnRef>
-          <a:fillRef idx="3">
-            <a:schemeClr val="accent1"/>
-          </a:fillRef>
-          <a:effectRef idx="2">
-            <a:schemeClr val="accent1"/>
-          </a:effectRef>
-          <a:fontRef idx="minor">
-            <a:schemeClr val="lt1"/>
-          </a:fontRef>
-        </p:style>
-        <p:txBody>
-          <a:bodyPr rtlCol="0" anchor="ctr"/>
-          <a:lstStyle/>
-          <a:p>
-            <a:pPr algn="ctr"/>
-          </a:p>
-        </p:txBody>
-      </p:sp>
-      <p:sp>
-        <p:nvSpPr>
-          <p:cNvPr id="11" name="TextBox 10"/>
-          <p:cNvSpPr txBox="1"/>
-          <p:nvPr/>
-        </p:nvSpPr>
-        <p:spPr>
-          <a:xfrm>
-            <a:off x="822959" y="4892040"/>
-            <a:ext cx="3474720" cy="1143000"/>
-          </a:xfrm>
-          <a:prstGeom prst="rect">
-            <a:avLst/>
-          </a:prstGeom>
-          <a:noFill/>
-        </p:spPr>
-        <p:txBody>
-          <a:bodyPr wrap="square" lIns="0" rIns="0" tIns="0" bIns="0" anchor="ctr">
-            <a:spAutoFit/>
-          </a:bodyPr>
-          <a:lstStyle/>
-          <a:p>
-            <a:pPr algn="l">
-              <a:spcAft>
-                <a:spcPts val="600"/>
-              </a:spcAft>
-            </a:pPr>
-            <a:r>
-              <a:rPr sz="1700" b="1" i="0">
-                <a:solidFill>
-                  <a:srgbClr val="1C2E6E"/>
-                </a:solidFill>
-                <a:latin typeface="Calibri"/>
-              </a:rPr>
-              <a:t>How reliable are your labels?</a:t>
-            </a:r>
-          </a:p>
-        </p:txBody>
-      </p:sp>
-      <p:sp>
-        <p:nvSpPr>
-          <p:cNvPr id="12" name="TextBox 11"/>
-          <p:cNvSpPr txBox="1"/>
-          <p:nvPr/>
-        </p:nvSpPr>
-        <p:spPr>
-          <a:xfrm>
-            <a:off x="4572000" y="4892040"/>
-            <a:ext cx="6858000" cy="1143000"/>
-          </a:xfrm>
-          <a:prstGeom prst="rect">
-            <a:avLst/>
-          </a:prstGeom>
-          <a:noFill/>
-        </p:spPr>
-        <p:txBody>
-          <a:bodyPr wrap="square" lIns="0" rIns="0" tIns="0" bIns="0" anchor="ctr">
-            <a:spAutoFit/>
-          </a:bodyPr>
-          <a:lstStyle/>
-          <a:p>
-            <a:pPr algn="l">
-              <a:spcAft>
-                <a:spcPts val="600"/>
-              </a:spcAft>
-            </a:pPr>
-            <a:r>
-              <a:rPr sz="1500" b="0" i="0">
-                <a:solidFill>
-                  <a:srgbClr val="1E293B"/>
-                </a:solidFill>
-                <a:latin typeface="Calibri"/>
-              </a:rPr>
-              <a:t>Headline metrics use one annotator. Two annotators agree at κ 0.38 on typical posts, mostly on whether “Singtel is down” is a complaint or a fact. I’ve added that rule to the guide.</a:t>
+              <a:rPr sz="1000" b="0" i="0">
+                <a:solidFill>
+                  <a:srgbClr val="5B6475"/>
+                </a:solidFill>
+                <a:latin typeface="Calibri"/>
+              </a:rPr>
+              <a:t>31</a:t>
             </a:r>
           </a:p>
         </p:txBody>
@@ -21807,7 +22247,7 @@
                 </a:solidFill>
                 <a:latin typeface="Calibri"/>
               </a:rPr>
-              <a:t>Anticipated questions (2 of 3)</a:t>
+              <a:t>Anticipated questions (1 of 3)</a:t>
             </a:r>
           </a:p>
         </p:txBody>
@@ -21931,7 +22371,7 @@
                 </a:solidFill>
                 <a:latin typeface="Calibri"/>
               </a:rPr>
-              <a:t>How good is GPT-4o-mini on the corpus?</a:t>
+              <a:t>Why not use GPT-4o for everything?</a:t>
             </a:r>
           </a:p>
         </p:txBody>
@@ -21970,7 +22410,7 @@
                 </a:solidFill>
                 <a:latin typeface="Calibri"/>
               </a:rPr>
-              <a:t>It matches humans on ~2/3 of gold posts (F1 0.631), its corpus shares (18/55/27) sit near the gold shares (18/50/32), and a rerun reproduced 292 of 295 labels.</a:t>
+              <a:t>On typical posts GPT-4o on every post ties rules (0.600 vs 0.639) and costs ~17× mini. On hard posts it wins (0.596 vs 0.499). At ~$0.0005 a post it’s affordable on a deduplicated feed; I’d settle it on fresh held-out data.</a:t>
             </a:r>
           </a:p>
         </p:txBody>
@@ -22057,7 +22497,7 @@
                 </a:solidFill>
                 <a:latin typeface="Calibri"/>
               </a:rPr>
-              <a:t>How do you handle sarcasm and Singlish?</a:t>
+              <a:t>Is the hybrid’s gain real?</a:t>
             </a:r>
           </a:p>
         </p:txBody>
@@ -22096,7 +22536,7 @@
                 </a:solidFill>
                 <a:latin typeface="Calibri"/>
               </a:rPr>
-              <a:t>VADER can’t; the challenge set targets these cases. There GPT-4o-mini reaches 0.773 macro F1 vs VADER 0.491 and GPT-4o 0.712.</a:t>
+              <a:t>On the set I tuned it on, yes: +0.041, 95% CI +0.011 to +0.072. On the held-out challenge set, no: +0.010, CI −0.04 to +0.07. So I report 0.680 as optimistic.</a:t>
             </a:r>
           </a:p>
         </p:txBody>
@@ -22181,7 +22621,7 @@
                 </a:solidFill>
                 <a:latin typeface="Calibri"/>
               </a:rPr>
-              <a:t>Why keep VADER at all?</a:t>
+              <a:t>How reliable are your labels?</a:t>
             </a:r>
           </a:p>
         </p:txBody>
@@ -22220,7 +22660,7 @@
                 </a:solidFill>
                 <a:latin typeface="Calibri"/>
               </a:rPr>
-              <a:t>It’s free, local and deterministic: a baseline to beat. I no longer use it for any headline share.</a:t>
+              <a:t>Two annotators agree at κ 0.39 on typical posts and 0.59 on hard ones, mostly split on complaint vs neutral. The guide now has an explicit rule for failure reports.</a:t>
             </a:r>
           </a:p>
         </p:txBody>
@@ -22277,7 +22717,7 @@
                 </a:solidFill>
                 <a:latin typeface="Calibri"/>
               </a:rPr>
-              <a:t>Anticipated questions (3 of 3)</a:t>
+              <a:t>Anticipated questions (2 of 3)</a:t>
             </a:r>
           </a:p>
         </p:txBody>
@@ -22401,7 +22841,7 @@
                 </a:solidFill>
                 <a:latin typeface="Calibri"/>
               </a:rPr>
-              <a:t>Is Reddit more negative than HWZ? Is Singtel worst?</a:t>
+              <a:t>How good is GPT-4o-mini on the corpus?</a:t>
             </a:r>
           </a:p>
         </p:txBody>
@@ -22440,7 +22880,7 @@
                 </a:solidFill>
                 <a:latin typeface="Calibri"/>
               </a:rPr>
-              <a:t>Outside outage threads, Reddit 42% vs HWZ 37%, mostly topic mix; brands sit within 3 points (Singtel 42%, StarHub 40%), with Eight lowest at 35%.</a:t>
+              <a:t>F1 0.631 on wave-1 gold and 0.637 on a separate wave-2 gold sample; a rerun reproduced 292 of 295 labels. On wave 2 it under-calls complaints, so not-happy is likely understated.</a:t>
             </a:r>
           </a:p>
         </p:txBody>
@@ -22527,7 +22967,7 @@
                 </a:solidFill>
                 <a:latin typeface="Calibri"/>
               </a:rPr>
-              <a:t>What about privacy and ethics?</a:t>
+              <a:t>How do you handle sarcasm and Singlish?</a:t>
             </a:r>
           </a:p>
         </p:txBody>
@@ -22566,7 +23006,7 @@
                 </a:solidFill>
                 <a:latin typeface="Calibri"/>
               </a:rPr>
-              <a:t>Public posts only, no usernames in outputs, no identifiers sent to the API, and API keys kept in environment variables, never in code.</a:t>
+              <a:t>VADER can’t; the challenge set targets these cases. There GPT-4o-mini reaches 0.773 macro F1 vs VADER 0.491 and GPT-4o 0.712.</a:t>
             </a:r>
           </a:p>
         </p:txBody>
@@ -22651,7 +23091,7 @@
                 </a:solidFill>
                 <a:latin typeface="Calibri"/>
               </a:rPr>
-              <a:t>Can this estimate NPS or market share?</a:t>
+              <a:t>Why keep VADER at all?</a:t>
             </a:r>
           </a:p>
         </p:txBody>
@@ -22690,7 +23130,7 @@
                 </a:solidFill>
                 <a:latin typeface="Calibri"/>
               </a:rPr>
-              <a:t>No. Posters self-select, replies cluster by thread, and 95% of posts are from 2026. It’s a triage queue, not a population measure.</a:t>
+              <a:t>It’s free, local and deterministic: a baseline to beat. I no longer use it for any headline share.</a:t>
             </a:r>
           </a:p>
         </p:txBody>
@@ -22747,7 +23187,7 @@
                 </a:solidFill>
                 <a:latin typeface="Calibri"/>
               </a:rPr>
-              <a:t>Backup: two humans disagree on outage reports</a:t>
+              <a:t>Anticipated questions (3 of 3)</a:t>
             </a:r>
           </a:p>
         </p:txBody>
@@ -22787,6 +23227,476 @@
                 <a:latin typeface="Calibri"/>
               </a:rPr>
               <a:t>34</a:t>
+            </a:r>
+          </a:p>
+        </p:txBody>
+      </p:sp>
+      <p:sp>
+        <p:nvSpPr>
+          <p:cNvPr id="4" name="Rounded Rectangle 3"/>
+          <p:cNvSpPr/>
+          <p:nvPr/>
+        </p:nvSpPr>
+        <p:spPr>
+          <a:xfrm>
+            <a:off x="548640" y="1645920"/>
+            <a:ext cx="11091672" cy="1417320"/>
+          </a:xfrm>
+          <a:prstGeom prst="roundRect">
+            <a:avLst>
+              <a:gd name="adj" fmla="val 6000"/>
+            </a:avLst>
+          </a:prstGeom>
+          <a:solidFill>
+            <a:srgbClr val="F2F4F9"/>
+          </a:solidFill>
+          <a:ln>
+            <a:noFill/>
+          </a:ln>
+          <a:effectLst/>
+        </p:spPr>
+        <p:style>
+          <a:lnRef idx="1">
+            <a:schemeClr val="accent1"/>
+          </a:lnRef>
+          <a:fillRef idx="3">
+            <a:schemeClr val="accent1"/>
+          </a:fillRef>
+          <a:effectRef idx="2">
+            <a:schemeClr val="accent1"/>
+          </a:effectRef>
+          <a:fontRef idx="minor">
+            <a:schemeClr val="lt1"/>
+          </a:fontRef>
+        </p:style>
+        <p:txBody>
+          <a:bodyPr rtlCol="0" anchor="ctr"/>
+          <a:lstStyle/>
+          <a:p>
+            <a:pPr algn="ctr"/>
+          </a:p>
+        </p:txBody>
+      </p:sp>
+      <p:sp>
+        <p:nvSpPr>
+          <p:cNvPr id="5" name="TextBox 4"/>
+          <p:cNvSpPr txBox="1"/>
+          <p:nvPr/>
+        </p:nvSpPr>
+        <p:spPr>
+          <a:xfrm>
+            <a:off x="822959" y="1783080"/>
+            <a:ext cx="3474720" cy="1143000"/>
+          </a:xfrm>
+          <a:prstGeom prst="rect">
+            <a:avLst/>
+          </a:prstGeom>
+          <a:noFill/>
+        </p:spPr>
+        <p:txBody>
+          <a:bodyPr wrap="square" lIns="0" rIns="0" tIns="0" bIns="0" anchor="ctr">
+            <a:spAutoFit/>
+          </a:bodyPr>
+          <a:lstStyle/>
+          <a:p>
+            <a:pPr algn="l">
+              <a:spcAft>
+                <a:spcPts val="600"/>
+              </a:spcAft>
+            </a:pPr>
+            <a:r>
+              <a:rPr sz="1700" b="1" i="0">
+                <a:solidFill>
+                  <a:srgbClr val="1C2E6E"/>
+                </a:solidFill>
+                <a:latin typeface="Calibri"/>
+              </a:rPr>
+              <a:t>Is Reddit more negative than HWZ? Is Singtel worst?</a:t>
+            </a:r>
+          </a:p>
+        </p:txBody>
+      </p:sp>
+      <p:sp>
+        <p:nvSpPr>
+          <p:cNvPr id="6" name="TextBox 5"/>
+          <p:cNvSpPr txBox="1"/>
+          <p:nvPr/>
+        </p:nvSpPr>
+        <p:spPr>
+          <a:xfrm>
+            <a:off x="4572000" y="1783080"/>
+            <a:ext cx="6858000" cy="1143000"/>
+          </a:xfrm>
+          <a:prstGeom prst="rect">
+            <a:avLst/>
+          </a:prstGeom>
+          <a:noFill/>
+        </p:spPr>
+        <p:txBody>
+          <a:bodyPr wrap="square" lIns="0" rIns="0" tIns="0" bIns="0" anchor="ctr">
+            <a:spAutoFit/>
+          </a:bodyPr>
+          <a:lstStyle/>
+          <a:p>
+            <a:pPr algn="l">
+              <a:spcAft>
+                <a:spcPts val="600"/>
+              </a:spcAft>
+            </a:pPr>
+            <a:r>
+              <a:rPr sz="1500" b="0" i="0">
+                <a:solidFill>
+                  <a:srgbClr val="1E293B"/>
+                </a:solidFill>
+                <a:latin typeface="Calibri"/>
+              </a:rPr>
+              <a:t>Outside outage threads, Reddit 42% vs HWZ 37%, mostly topic mix; brands sit within 3 points (Singtel 42%, StarHub 40%), with Eight lowest at 35%.</a:t>
+            </a:r>
+          </a:p>
+        </p:txBody>
+      </p:sp>
+      <p:sp>
+        <p:nvSpPr>
+          <p:cNvPr id="7" name="Rounded Rectangle 6"/>
+          <p:cNvSpPr/>
+          <p:nvPr/>
+        </p:nvSpPr>
+        <p:spPr>
+          <a:xfrm>
+            <a:off x="548640" y="3200400"/>
+            <a:ext cx="11091672" cy="1417320"/>
+          </a:xfrm>
+          <a:prstGeom prst="roundRect">
+            <a:avLst>
+              <a:gd name="adj" fmla="val 6000"/>
+            </a:avLst>
+          </a:prstGeom>
+          <a:solidFill>
+            <a:srgbClr val="FFFFFF"/>
+          </a:solidFill>
+          <a:ln w="12700">
+            <a:solidFill>
+              <a:srgbClr val="D5DAE5"/>
+            </a:solidFill>
+          </a:ln>
+          <a:effectLst/>
+        </p:spPr>
+        <p:style>
+          <a:lnRef idx="1">
+            <a:schemeClr val="accent1"/>
+          </a:lnRef>
+          <a:fillRef idx="3">
+            <a:schemeClr val="accent1"/>
+          </a:fillRef>
+          <a:effectRef idx="2">
+            <a:schemeClr val="accent1"/>
+          </a:effectRef>
+          <a:fontRef idx="minor">
+            <a:schemeClr val="lt1"/>
+          </a:fontRef>
+        </p:style>
+        <p:txBody>
+          <a:bodyPr rtlCol="0" anchor="ctr"/>
+          <a:lstStyle/>
+          <a:p>
+            <a:pPr algn="ctr"/>
+          </a:p>
+        </p:txBody>
+      </p:sp>
+      <p:sp>
+        <p:nvSpPr>
+          <p:cNvPr id="8" name="TextBox 7"/>
+          <p:cNvSpPr txBox="1"/>
+          <p:nvPr/>
+        </p:nvSpPr>
+        <p:spPr>
+          <a:xfrm>
+            <a:off x="822959" y="3337560"/>
+            <a:ext cx="3474720" cy="1143000"/>
+          </a:xfrm>
+          <a:prstGeom prst="rect">
+            <a:avLst/>
+          </a:prstGeom>
+          <a:noFill/>
+        </p:spPr>
+        <p:txBody>
+          <a:bodyPr wrap="square" lIns="0" rIns="0" tIns="0" bIns="0" anchor="ctr">
+            <a:spAutoFit/>
+          </a:bodyPr>
+          <a:lstStyle/>
+          <a:p>
+            <a:pPr algn="l">
+              <a:spcAft>
+                <a:spcPts val="600"/>
+              </a:spcAft>
+            </a:pPr>
+            <a:r>
+              <a:rPr sz="1700" b="1" i="0">
+                <a:solidFill>
+                  <a:srgbClr val="1C2E6E"/>
+                </a:solidFill>
+                <a:latin typeface="Calibri"/>
+              </a:rPr>
+              <a:t>What about privacy and ethics?</a:t>
+            </a:r>
+          </a:p>
+        </p:txBody>
+      </p:sp>
+      <p:sp>
+        <p:nvSpPr>
+          <p:cNvPr id="9" name="TextBox 8"/>
+          <p:cNvSpPr txBox="1"/>
+          <p:nvPr/>
+        </p:nvSpPr>
+        <p:spPr>
+          <a:xfrm>
+            <a:off x="4572000" y="3337560"/>
+            <a:ext cx="6858000" cy="1143000"/>
+          </a:xfrm>
+          <a:prstGeom prst="rect">
+            <a:avLst/>
+          </a:prstGeom>
+          <a:noFill/>
+        </p:spPr>
+        <p:txBody>
+          <a:bodyPr wrap="square" lIns="0" rIns="0" tIns="0" bIns="0" anchor="ctr">
+            <a:spAutoFit/>
+          </a:bodyPr>
+          <a:lstStyle/>
+          <a:p>
+            <a:pPr algn="l">
+              <a:spcAft>
+                <a:spcPts val="600"/>
+              </a:spcAft>
+            </a:pPr>
+            <a:r>
+              <a:rPr sz="1500" b="0" i="0">
+                <a:solidFill>
+                  <a:srgbClr val="1E293B"/>
+                </a:solidFill>
+                <a:latin typeface="Calibri"/>
+              </a:rPr>
+              <a:t>Public posts only, no usernames in outputs, no identifiers sent to the API, and API keys kept in environment variables, never in code.</a:t>
+            </a:r>
+          </a:p>
+        </p:txBody>
+      </p:sp>
+      <p:sp>
+        <p:nvSpPr>
+          <p:cNvPr id="10" name="Rounded Rectangle 9"/>
+          <p:cNvSpPr/>
+          <p:nvPr/>
+        </p:nvSpPr>
+        <p:spPr>
+          <a:xfrm>
+            <a:off x="548640" y="4754880"/>
+            <a:ext cx="11091672" cy="1417320"/>
+          </a:xfrm>
+          <a:prstGeom prst="roundRect">
+            <a:avLst>
+              <a:gd name="adj" fmla="val 6000"/>
+            </a:avLst>
+          </a:prstGeom>
+          <a:solidFill>
+            <a:srgbClr val="F2F4F9"/>
+          </a:solidFill>
+          <a:ln>
+            <a:noFill/>
+          </a:ln>
+          <a:effectLst/>
+        </p:spPr>
+        <p:style>
+          <a:lnRef idx="1">
+            <a:schemeClr val="accent1"/>
+          </a:lnRef>
+          <a:fillRef idx="3">
+            <a:schemeClr val="accent1"/>
+          </a:fillRef>
+          <a:effectRef idx="2">
+            <a:schemeClr val="accent1"/>
+          </a:effectRef>
+          <a:fontRef idx="minor">
+            <a:schemeClr val="lt1"/>
+          </a:fontRef>
+        </p:style>
+        <p:txBody>
+          <a:bodyPr rtlCol="0" anchor="ctr"/>
+          <a:lstStyle/>
+          <a:p>
+            <a:pPr algn="ctr"/>
+          </a:p>
+        </p:txBody>
+      </p:sp>
+      <p:sp>
+        <p:nvSpPr>
+          <p:cNvPr id="11" name="TextBox 10"/>
+          <p:cNvSpPr txBox="1"/>
+          <p:nvPr/>
+        </p:nvSpPr>
+        <p:spPr>
+          <a:xfrm>
+            <a:off x="822959" y="4892040"/>
+            <a:ext cx="3474720" cy="1143000"/>
+          </a:xfrm>
+          <a:prstGeom prst="rect">
+            <a:avLst/>
+          </a:prstGeom>
+          <a:noFill/>
+        </p:spPr>
+        <p:txBody>
+          <a:bodyPr wrap="square" lIns="0" rIns="0" tIns="0" bIns="0" anchor="ctr">
+            <a:spAutoFit/>
+          </a:bodyPr>
+          <a:lstStyle/>
+          <a:p>
+            <a:pPr algn="l">
+              <a:spcAft>
+                <a:spcPts val="600"/>
+              </a:spcAft>
+            </a:pPr>
+            <a:r>
+              <a:rPr sz="1700" b="1" i="0">
+                <a:solidFill>
+                  <a:srgbClr val="1C2E6E"/>
+                </a:solidFill>
+                <a:latin typeface="Calibri"/>
+              </a:rPr>
+              <a:t>Can this estimate NPS or market share?</a:t>
+            </a:r>
+          </a:p>
+        </p:txBody>
+      </p:sp>
+      <p:sp>
+        <p:nvSpPr>
+          <p:cNvPr id="12" name="TextBox 11"/>
+          <p:cNvSpPr txBox="1"/>
+          <p:nvPr/>
+        </p:nvSpPr>
+        <p:spPr>
+          <a:xfrm>
+            <a:off x="4572000" y="4892040"/>
+            <a:ext cx="6858000" cy="1143000"/>
+          </a:xfrm>
+          <a:prstGeom prst="rect">
+            <a:avLst/>
+          </a:prstGeom>
+          <a:noFill/>
+        </p:spPr>
+        <p:txBody>
+          <a:bodyPr wrap="square" lIns="0" rIns="0" tIns="0" bIns="0" anchor="ctr">
+            <a:spAutoFit/>
+          </a:bodyPr>
+          <a:lstStyle/>
+          <a:p>
+            <a:pPr algn="l">
+              <a:spcAft>
+                <a:spcPts val="600"/>
+              </a:spcAft>
+            </a:pPr>
+            <a:r>
+              <a:rPr sz="1500" b="0" i="0">
+                <a:solidFill>
+                  <a:srgbClr val="1E293B"/>
+                </a:solidFill>
+                <a:latin typeface="Calibri"/>
+              </a:rPr>
+              <a:t>No. Posters self-select, replies cluster by thread, and 95% of posts are from 2026. It’s a triage queue, not a population measure.</a:t>
+            </a:r>
+          </a:p>
+        </p:txBody>
+      </p:sp>
+    </p:spTree>
+  </p:cSld>
+  <p:clrMapOvr>
+    <a:masterClrMapping/>
+  </p:clrMapOvr>
+</p:sld>
+</file>
+
+<file path=ppt/slides/slide35.xml><?xml version="1.0" encoding="utf-8"?>
+<p:sld xmlns:a="http://schemas.openxmlformats.org/drawingml/2006/main" xmlns:p="http://schemas.openxmlformats.org/presentationml/2006/main" xmlns:r="http://schemas.openxmlformats.org/officeDocument/2006/relationships">
+  <p:cSld>
+    <p:spTree>
+      <p:nvGrpSpPr>
+        <p:cNvPr id="1" name=""/>
+        <p:cNvGrpSpPr/>
+        <p:nvPr/>
+      </p:nvGrpSpPr>
+      <p:grpSpPr/>
+      <p:sp>
+        <p:nvSpPr>
+          <p:cNvPr id="2" name="TextBox 1"/>
+          <p:cNvSpPr txBox="1"/>
+          <p:nvPr/>
+        </p:nvSpPr>
+        <p:spPr>
+          <a:xfrm>
+            <a:off x="2788920" y="128016"/>
+            <a:ext cx="9052560" cy="1097280"/>
+          </a:xfrm>
+          <a:prstGeom prst="rect">
+            <a:avLst/>
+          </a:prstGeom>
+          <a:noFill/>
+        </p:spPr>
+        <p:txBody>
+          <a:bodyPr wrap="square" lIns="0" rIns="0" tIns="0" bIns="0" anchor="ctr">
+            <a:spAutoFit/>
+          </a:bodyPr>
+          <a:lstStyle/>
+          <a:p>
+            <a:pPr algn="l">
+              <a:spcAft>
+                <a:spcPts val="600"/>
+              </a:spcAft>
+            </a:pPr>
+            <a:r>
+              <a:rPr sz="2600" b="1" i="0">
+                <a:solidFill>
+                  <a:srgbClr val="1C2E6E"/>
+                </a:solidFill>
+                <a:latin typeface="Calibri"/>
+              </a:rPr>
+              <a:t>Backup: two humans split on complaint vs neutral</a:t>
+            </a:r>
+          </a:p>
+        </p:txBody>
+      </p:sp>
+      <p:sp>
+        <p:nvSpPr>
+          <p:cNvPr id="3" name="TextBox 2"/>
+          <p:cNvSpPr txBox="1"/>
+          <p:nvPr/>
+        </p:nvSpPr>
+        <p:spPr>
+          <a:xfrm>
+            <a:off x="11155680" y="6446520"/>
+            <a:ext cx="548640" cy="274320"/>
+          </a:xfrm>
+          <a:prstGeom prst="rect">
+            <a:avLst/>
+          </a:prstGeom>
+          <a:noFill/>
+        </p:spPr>
+        <p:txBody>
+          <a:bodyPr wrap="square" lIns="0" rIns="0" tIns="0" bIns="0" anchor="t">
+            <a:spAutoFit/>
+          </a:bodyPr>
+          <a:lstStyle/>
+          <a:p>
+            <a:pPr algn="r">
+              <a:spcAft>
+                <a:spcPts val="600"/>
+              </a:spcAft>
+            </a:pPr>
+            <a:r>
+              <a:rPr sz="1000" b="0" i="0">
+                <a:solidFill>
+                  <a:srgbClr val="5B6475"/>
+                </a:solidFill>
+                <a:latin typeface="Calibri"/>
+              </a:rPr>
+              <a:t>35</a:t>
             </a:r>
           </a:p>
         </p:txBody>
@@ -22993,7 +23903,7 @@
                           </a:solidFill>
                           <a:latin typeface="Calibri"/>
                         </a:rPr>
-                        <a:t>60%</a:t>
+                        <a:t>62%</a:t>
                       </a:r>
                     </a:p>
                   </a:txBody>
@@ -23016,7 +23926,7 @@
                           </a:solidFill>
                           <a:latin typeface="Calibri"/>
                         </a:rPr>
-                        <a:t>0.38</a:t>
+                        <a:t>0.39</a:t>
                       </a:r>
                     </a:p>
                   </a:txBody>
@@ -23039,7 +23949,7 @@
                           </a:solidFill>
                           <a:latin typeface="Calibri"/>
                         </a:rPr>
-                        <a:t>0.57</a:t>
+                        <a:t>0.56</a:t>
                       </a:r>
                     </a:p>
                   </a:txBody>
@@ -23110,7 +24020,7 @@
                           </a:solidFill>
                           <a:latin typeface="Calibri"/>
                         </a:rPr>
-                        <a:t>75%</a:t>
+                        <a:t>73%</a:t>
                       </a:r>
                     </a:p>
                   </a:txBody>
@@ -23133,7 +24043,7 @@
                           </a:solidFill>
                           <a:latin typeface="Calibri"/>
                         </a:rPr>
-                        <a:t>0.63</a:t>
+                        <a:t>0.59</a:t>
                       </a:r>
                     </a:p>
                   </a:txBody>
@@ -23156,7 +24066,7 @@
                           </a:solidFill>
                           <a:latin typeface="Calibri"/>
                         </a:rPr>
-                        <a:t>0.93</a:t>
+                        <a:t>0.77</a:t>
                       </a:r>
                     </a:p>
                   </a:txBody>
@@ -23251,7 +24161,7 @@
                 </a:solidFill>
                 <a:latin typeface="Calibri"/>
               </a:rPr>
-              <a:t>One rule explains most of it</a:t>
+              <a:t>One pattern explains most of it</a:t>
             </a:r>
           </a:p>
         </p:txBody>
@@ -23290,7 +24200,7 @@
                 </a:solidFill>
                 <a:latin typeface="Calibri"/>
               </a:rPr>
-              <a:t>12 of 23 representative disagreements (8 of 10 on challenge): I said not happy, B said neutral, on bare outage reports and questions.</a:t>
+              <a:t>9 of 22 representative disagreements (8 of 11 on challenge): I said not happy, B said neutral.</a:t>
             </a:r>
           </a:p>
         </p:txBody>
@@ -23375,7 +24285,7 @@
                 </a:solidFill>
                 <a:latin typeface="Calibri"/>
               </a:rPr>
-              <a:t>Fixed, then check</a:t>
+              <a:t>Low human ceiling on small themes</a:t>
             </a:r>
           </a:p>
         </p:txBody>
@@ -23414,7 +24324,7 @@
                 </a:solidFill>
                 <a:latin typeface="Calibri"/>
               </a:rPr>
-              <a:t>Guide now says a first-hand failure report is not happy. Next: relabel the overlap and confirm B's independence (18/40 identical).</a:t>
+              <a:t>Issue κ: Network 0.79, but Devices 0.16, App 0.17, Customer Service 0.28.</a:t>
             </a:r>
           </a:p>
         </p:txBody>
@@ -23427,7 +24337,7 @@
 </p:sld>
 </file>
 
-<file path=ppt/slides/slide35.xml><?xml version="1.0" encoding="utf-8"?>
+<file path=ppt/slides/slide36.xml><?xml version="1.0" encoding="utf-8"?>
 <p:sld xmlns:a="http://schemas.openxmlformats.org/drawingml/2006/main" xmlns:p="http://schemas.openxmlformats.org/presentationml/2006/main" xmlns:r="http://schemas.openxmlformats.org/officeDocument/2006/relationships">
   <p:cSld>
     <p:spTree>
@@ -23510,7 +24420,7 @@
                 </a:solidFill>
                 <a:latin typeface="Calibri"/>
               </a:rPr>
-              <a:t>35</a:t>
+              <a:t>36</a:t>
             </a:r>
           </a:p>
         </p:txBody>

--- a/presentation/capstone_walkthrough.pptx
+++ b/presentation/capstone_walkthrough.pptx
@@ -5,7 +5,7 @@
     <p:sldMasterId id="2147483648" r:id="rId1"/>
   </p:sldMasterIdLst>
   <p:notesMasterIdLst>
-    <p:notesMasterId r:id="rId41"/>
+    <p:notesMasterId r:id="rId42"/>
   </p:notesMasterIdLst>
   <p:sldIdLst>
     <p:sldId id="256" r:id="rId2"/>
@@ -47,6 +47,8 @@
     <p:sldId id="291" r:id="rId38"/>
     <p:sldId id="292" r:id="rId39"/>
     <p:sldId id="295" r:id="rId40"/>
+    <p:sldId id="297" r:id="rId41"/>
+    <p:sldId id="298" r:id="rId48"/>
   </p:sldIdLst>
   <p:sldSz cx="12192000" cy="6858000"/>
   <p:notesSz cx="6858000" cy="9144000"/>
@@ -209,6 +211,7 @@
             <p14:sldId id="291"/>
             <p14:sldId id="292"/>
             <p14:sldId id="295"/>
+            <p14:sldId id="297"/>
           </p14:sldIdLst>
         </p14:section>
       </p14:sectionLst>
@@ -2721,7 +2724,7 @@
           <a:p>
             <a:fld id="{7B7B7642-B353-2B4B-B2B1-5200A78C1ED7}" type="datetimeFigureOut">
               <a:rPr lang="en-US" smtClean="0"/>
-              <a:t>10/4/26</a:t>
+              <a:t>10/6/26</a:t>
             </a:fld>
             <a:endParaRPr lang="en-US"/>
           </a:p>
@@ -6411,6 +6414,76 @@
 </p:notes>
 </file>
 
+<file path=ppt/notesSlides/notesSlide39.xml><?xml version="1.0" encoding="utf-8"?>
+<p:notes xmlns:a="http://schemas.openxmlformats.org/drawingml/2006/main" xmlns:p="http://schemas.openxmlformats.org/presentationml/2006/main" xmlns:r="http://schemas.openxmlformats.org/officeDocument/2006/relationships">
+  <p:cSld>
+    <p:spTree>
+      <p:nvGrpSpPr>
+        <p:cNvPr id="1" name=""/>
+        <p:cNvGrpSpPr/>
+        <p:nvPr/>
+      </p:nvGrpSpPr>
+      <p:grpSpPr>
+        <a:xfrm>
+          <a:off x="0" y="0"/>
+          <a:ext cx="0" cy="0"/>
+          <a:chOff x="0" y="0"/>
+          <a:chExt cx="0" cy="0"/>
+        </a:xfrm>
+      </p:grpSpPr>
+      <p:sp>
+        <p:nvSpPr>
+          <p:cNvPr id="2" name="Slide Image Placeholder 1"/>
+          <p:cNvSpPr>
+            <a:spLocks noGrp="1"/>
+          </p:cNvSpPr>
+          <p:nvPr>
+            <p:ph type="sldImg" idx="2"/>
+          </p:nvPr>
+        </p:nvSpPr>
+        <p:spPr/>
+      </p:sp>
+      <p:sp>
+        <p:nvSpPr>
+          <p:cNvPr id="3" name="Notes Placeholder 2"/>
+          <p:cNvSpPr>
+            <a:spLocks noGrp="1"/>
+          </p:cNvSpPr>
+          <p:nvPr>
+            <p:ph type="body" idx="3" sz="quarter"/>
+          </p:nvPr>
+        </p:nvSpPr>
+        <p:spPr/>
+        <p:txBody>
+          <a:bodyPr/>
+          <a:lstStyle/>
+          <a:p>
+            <a:r>
+              <a:t>This is the evaluation in one slide. Every share in my findings comes from machine labels nobody read, so I first checked them against my own blind labels. I labelled three sets without seeing any model output: 300 representative posts for the headline scores, 100 hard posts from separate threads as a held-out test, and 100 posts from April to September because the first two only cover posts up to early April. A second annotator relabelled 100 overlap posts so I can say how much two humans agree. I compared VADER and the two GPT models for sentiment, and rules, the LLMs and the hybrid for issues. Scores are macro F1, and every difference gets a bootstrap interval: if it excludes zero, the gap is real.</a:t>
+            </a:r>
+          </a:p>
+        </p:txBody>
+      </p:sp>
+      <p:sp>
+        <p:nvSpPr>
+          <p:cNvPr id="4" name="Slide Number Placeholder 3"/>
+          <p:cNvSpPr>
+            <a:spLocks noGrp="1"/>
+          </p:cNvSpPr>
+          <p:nvPr>
+            <p:ph type="sldNum" idx="5" sz="quarter"/>
+          </p:nvPr>
+        </p:nvSpPr>
+        <p:spPr/>
+      </p:sp>
+    </p:spTree>
+  </p:cSld>
+  <p:clrMapOvr>
+    <a:masterClrMapping/>
+  </p:clrMapOvr>
+</p:notes>
+</file>
+
 <file path=ppt/notesSlides/notesSlide4.xml><?xml version="1.0" encoding="utf-8"?>
 <p:notes xmlns:a="http://schemas.openxmlformats.org/drawingml/2006/main" xmlns:r="http://schemas.openxmlformats.org/officeDocument/2006/relationships" xmlns:p="http://schemas.openxmlformats.org/presentationml/2006/main">
   <p:cSld>
@@ -6477,6 +6550,76 @@
           </p:cNvSpPr>
           <p:nvPr>
             <p:ph type="sldNum" sz="quarter" idx="5"/>
+          </p:nvPr>
+        </p:nvSpPr>
+        <p:spPr/>
+      </p:sp>
+    </p:spTree>
+  </p:cSld>
+  <p:clrMapOvr>
+    <a:masterClrMapping/>
+  </p:clrMapOvr>
+</p:notes>
+</file>
+
+<file path=ppt/notesSlides/notesSlide40.xml><?xml version="1.0" encoding="utf-8"?>
+<p:notes xmlns:a="http://schemas.openxmlformats.org/drawingml/2006/main" xmlns:p="http://schemas.openxmlformats.org/presentationml/2006/main" xmlns:r="http://schemas.openxmlformats.org/officeDocument/2006/relationships">
+  <p:cSld>
+    <p:spTree>
+      <p:nvGrpSpPr>
+        <p:cNvPr id="1" name=""/>
+        <p:cNvGrpSpPr/>
+        <p:nvPr/>
+      </p:nvGrpSpPr>
+      <p:grpSpPr>
+        <a:xfrm>
+          <a:off x="0" y="0"/>
+          <a:ext cx="0" cy="0"/>
+          <a:chOff x="0" y="0"/>
+          <a:chExt cx="0" cy="0"/>
+        </a:xfrm>
+      </p:grpSpPr>
+      <p:sp>
+        <p:nvSpPr>
+          <p:cNvPr id="2" name="Slide Image Placeholder 1"/>
+          <p:cNvSpPr>
+            <a:spLocks noGrp="1"/>
+          </p:cNvSpPr>
+          <p:nvPr>
+            <p:ph type="sldImg" idx="2"/>
+          </p:nvPr>
+        </p:nvSpPr>
+        <p:spPr/>
+      </p:sp>
+      <p:sp>
+        <p:nvSpPr>
+          <p:cNvPr id="3" name="Notes Placeholder 2"/>
+          <p:cNvSpPr>
+            <a:spLocks noGrp="1"/>
+          </p:cNvSpPr>
+          <p:nvPr>
+            <p:ph type="body" idx="3" sz="quarter"/>
+          </p:nvPr>
+        </p:nvSpPr>
+        <p:spPr/>
+        <p:txBody>
+          <a:bodyPr/>
+          <a:lstStyle/>
+          <a:p>
+            <a:r>
+              <a:t>Here's what the evaluation found. For sentiment, GPT-4o-mini beats VADER clearly on all three sets, GPT-4o ties it at about 17 times the cost, and a rerun reproduced 292 of 295 labels. For issues, the hybrid is best on the representative set, but I designed it on that set, so 0.680 is optimistic: on the held-out hard posts its lead over rules disappears and GPT-4o on every post wins. Two humans only agree at kappa 0.39 on typical posts, so the labels themselves are debatable. That decided the production setup: mini for sentiment, the hybrid for issues, with two caveats on the findings. The 44% not happy is a floor, because mini misses some complaints, and issue shares are a ranking rather than exact percentages.</a:t>
+            </a:r>
+          </a:p>
+        </p:txBody>
+      </p:sp>
+      <p:sp>
+        <p:nvSpPr>
+          <p:cNvPr id="4" name="Slide Number Placeholder 3"/>
+          <p:cNvSpPr>
+            <a:spLocks noGrp="1"/>
+          </p:cNvSpPr>
+          <p:nvPr>
+            <p:ph type="sldNum" idx="5" sz="quarter"/>
           </p:nvPr>
         </p:nvSpPr>
         <p:spPr/>
@@ -6792,7 +6935,20 @@
           <a:lstStyle/>
           <a:p>
             <a:r>
-              <a:t>One problem that looks trivial but wasn't: Eight is a telco brand and an ordinary word. A naive match turned 'I took eight buses' into an Eight Telecom mention. So is_eight_telco_reference() first blocks number phrases like 'eight buses' or 'eight people', then accepts strong patterns like 'Eight Telecom', and otherwise needs telco context within 60 characters. Posts that fail are marked not telco-relevant, and get no sentiment or issue label, instead of polluting the brand chart.</a:t>
+              <a:rPr lang="en-US" dirty="0"/>
+              <a:t>A highlights in data cleansing: </a:t>
+            </a:r>
+            <a:r>
+              <a:rPr dirty="0"/>
+              <a:t>One problem that looks trivial but wasn't: Eight is a telco brand and an ordinary word. A naive match turned 'I took eight buses' into an Eight Telecom mention. So </a:t>
+            </a:r>
+            <a:r>
+              <a:rPr dirty="0" err="1"/>
+              <a:t>is_eight_telco_reference</a:t>
+            </a:r>
+            <a:r>
+              <a:rPr dirty="0"/>
+              <a:t>() first blocks number phrases like 'eight buses' or 'eight people', then accepts strong patterns like 'Eight Telecom', and otherwise needs telco context within 60 characters. Posts that fail are marked not telco-relevant, and get no sentiment or issue label, instead of polluting the brand chart.</a:t>
             </a:r>
           </a:p>
         </p:txBody>
@@ -7087,7 +7243,7 @@
           <a:p>
             <a:fld id="{E19AD244-9817-3047-A477-01BB4324E821}" type="datetimeFigureOut">
               <a:rPr lang="en-US" smtClean="0"/>
-              <a:t>10/4/26</a:t>
+              <a:t>10/6/26</a:t>
             </a:fld>
             <a:endParaRPr lang="en-US"/>
           </a:p>
@@ -7287,7 +7443,7 @@
           <a:p>
             <a:fld id="{E19AD244-9817-3047-A477-01BB4324E821}" type="datetimeFigureOut">
               <a:rPr lang="en-US" smtClean="0"/>
-              <a:t>10/4/26</a:t>
+              <a:t>10/6/26</a:t>
             </a:fld>
             <a:endParaRPr lang="en-US"/>
           </a:p>
@@ -7497,7 +7653,7 @@
           <a:p>
             <a:fld id="{E19AD244-9817-3047-A477-01BB4324E821}" type="datetimeFigureOut">
               <a:rPr lang="en-US" smtClean="0"/>
-              <a:t>10/4/26</a:t>
+              <a:t>10/6/26</a:t>
             </a:fld>
             <a:endParaRPr lang="en-US"/>
           </a:p>
@@ -7837,7 +7993,7 @@
           <a:p>
             <a:fld id="{E19AD244-9817-3047-A477-01BB4324E821}" type="datetimeFigureOut">
               <a:rPr lang="en-US" smtClean="0"/>
-              <a:t>10/4/26</a:t>
+              <a:t>10/6/26</a:t>
             </a:fld>
             <a:endParaRPr lang="en-US"/>
           </a:p>
@@ -8113,7 +8269,7 @@
           <a:p>
             <a:fld id="{E19AD244-9817-3047-A477-01BB4324E821}" type="datetimeFigureOut">
               <a:rPr lang="en-US" smtClean="0"/>
-              <a:t>10/4/26</a:t>
+              <a:t>10/6/26</a:t>
             </a:fld>
             <a:endParaRPr lang="en-US"/>
           </a:p>
@@ -8381,7 +8537,7 @@
           <a:p>
             <a:fld id="{E19AD244-9817-3047-A477-01BB4324E821}" type="datetimeFigureOut">
               <a:rPr lang="en-US" smtClean="0"/>
-              <a:t>10/4/26</a:t>
+              <a:t>10/6/26</a:t>
             </a:fld>
             <a:endParaRPr lang="en-US"/>
           </a:p>
@@ -8796,7 +8952,7 @@
           <a:p>
             <a:fld id="{E19AD244-9817-3047-A477-01BB4324E821}" type="datetimeFigureOut">
               <a:rPr lang="en-US" smtClean="0"/>
-              <a:t>10/4/26</a:t>
+              <a:t>10/6/26</a:t>
             </a:fld>
             <a:endParaRPr lang="en-US"/>
           </a:p>
@@ -8938,7 +9094,7 @@
           <a:p>
             <a:fld id="{E19AD244-9817-3047-A477-01BB4324E821}" type="datetimeFigureOut">
               <a:rPr lang="en-US" smtClean="0"/>
-              <a:t>10/4/26</a:t>
+              <a:t>10/6/26</a:t>
             </a:fld>
             <a:endParaRPr lang="en-US"/>
           </a:p>
@@ -9051,7 +9207,7 @@
           <a:p>
             <a:fld id="{E19AD244-9817-3047-A477-01BB4324E821}" type="datetimeFigureOut">
               <a:rPr lang="en-US" smtClean="0"/>
-              <a:t>10/4/26</a:t>
+              <a:t>10/6/26</a:t>
             </a:fld>
             <a:endParaRPr lang="en-US"/>
           </a:p>
@@ -9364,7 +9520,7 @@
           <a:p>
             <a:fld id="{E19AD244-9817-3047-A477-01BB4324E821}" type="datetimeFigureOut">
               <a:rPr lang="en-US" smtClean="0"/>
-              <a:t>10/4/26</a:t>
+              <a:t>10/6/26</a:t>
             </a:fld>
             <a:endParaRPr lang="en-US"/>
           </a:p>
@@ -9653,7 +9809,7 @@
           <a:p>
             <a:fld id="{E19AD244-9817-3047-A477-01BB4324E821}" type="datetimeFigureOut">
               <a:rPr lang="en-US" smtClean="0"/>
-              <a:t>10/4/26</a:t>
+              <a:t>10/6/26</a:t>
             </a:fld>
             <a:endParaRPr lang="en-US"/>
           </a:p>
@@ -9896,7 +10052,7 @@
           <a:p>
             <a:fld id="{E19AD244-9817-3047-A477-01BB4324E821}" type="datetimeFigureOut">
               <a:rPr lang="en-US" smtClean="0"/>
-              <a:t>10/4/26</a:t>
+              <a:t>10/6/26</a:t>
             </a:fld>
             <a:endParaRPr lang="en-US"/>
           </a:p>
@@ -32817,6 +32973,1798 @@
 </p:sld>
 </file>
 
+<file path=ppt/slides/slide40.xml><?xml version="1.0" encoding="utf-8"?>
+<p:sld xmlns:a="http://schemas.openxmlformats.org/drawingml/2006/main" xmlns:r="http://schemas.openxmlformats.org/officeDocument/2006/relationships" xmlns:p="http://schemas.openxmlformats.org/presentationml/2006/main">
+  <p:cSld>
+    <p:spTree>
+      <p:nvGrpSpPr>
+        <p:cNvPr id="1" name=""/>
+        <p:cNvGrpSpPr/>
+        <p:nvPr/>
+      </p:nvGrpSpPr>
+      <p:grpSpPr>
+        <a:xfrm>
+          <a:off x="0" y="0"/>
+          <a:ext cx="0" cy="0"/>
+          <a:chOff x="0" y="0"/>
+          <a:chExt cx="0" cy="0"/>
+        </a:xfrm>
+      </p:grpSpPr>
+      <p:sp>
+        <p:nvSpPr>
+          <p:cNvPr id="2" name="TextBox 1"/>
+          <p:cNvSpPr txBox="1"/>
+          <p:nvPr/>
+        </p:nvSpPr>
+        <p:spPr>
+          <a:xfrm>
+            <a:off x="5112000" y="475199"/>
+            <a:ext cx="6840000" cy="828000"/>
+          </a:xfrm>
+          <a:prstGeom prst="rect">
+            <a:avLst/>
+          </a:prstGeom>
+          <a:noFill/>
+        </p:spPr>
+        <p:txBody>
+          <a:bodyPr wrap="square" lIns="0" rIns="0" tIns="0" bIns="0" anchor="ctr">
+            <a:spAutoFit/>
+          </a:bodyPr>
+          <a:lstStyle/>
+          <a:p>
+            <a:pPr algn="l">
+              <a:lnSpc>
+                <a:spcPct val="95000"/>
+              </a:lnSpc>
+              <a:spcAft>
+                <a:spcPts val="0"/>
+              </a:spcAft>
+            </a:pPr>
+            <a:r>
+              <a:rPr sz="2400" b="1" i="0">
+                <a:solidFill>
+                  <a:srgbClr val="1C2E6E"/>
+                </a:solidFill>
+                <a:latin typeface="Calibri"/>
+              </a:rPr>
+              <a:t>Evaluation summary: how it works</a:t>
+            </a:r>
+          </a:p>
+        </p:txBody>
+      </p:sp>
+      <p:sp>
+        <p:nvSpPr>
+          <p:cNvPr id="3" name="TextBox 2"/>
+          <p:cNvSpPr txBox="1"/>
+          <p:nvPr/>
+        </p:nvSpPr>
+        <p:spPr>
+          <a:xfrm>
+            <a:off x="548640" y="1691640"/>
+            <a:ext cx="6766560" cy="365760"/>
+          </a:xfrm>
+          <a:prstGeom prst="rect">
+            <a:avLst/>
+          </a:prstGeom>
+          <a:noFill/>
+        </p:spPr>
+        <p:txBody>
+          <a:bodyPr wrap="square" lIns="0" rIns="0" tIns="0" bIns="0" anchor="t">
+            <a:spAutoFit/>
+          </a:bodyPr>
+          <a:lstStyle/>
+          <a:p>
+            <a:pPr algn="l">
+              <a:spcAft>
+                <a:spcPts val="600"/>
+              </a:spcAft>
+            </a:pPr>
+            <a:r>
+              <a:rPr sz="1800" b="1" i="0">
+                <a:solidFill>
+                  <a:srgbClr val="1C2E6E"/>
+                </a:solidFill>
+                <a:latin typeface="Calibri"/>
+              </a:rPr>
+              <a:t>Three blind gold sets, labelled by me</a:t>
+            </a:r>
+          </a:p>
+        </p:txBody>
+      </p:sp>
+      <p:graphicFrame>
+        <p:nvGraphicFramePr>
+          <p:cNvPr id="4" name="Table 3"/>
+          <p:cNvGraphicFramePr>
+            <a:graphicFrameLocks noGrp="1"/>
+          </p:cNvGraphicFramePr>
+          <p:nvPr/>
+        </p:nvGraphicFramePr>
+        <p:xfrm>
+          <a:off x="548640" y="2148840"/>
+          <a:ext cx="6766560" cy="2011680"/>
+        </p:xfrm>
+        <a:graphic>
+          <a:graphicData uri="http://schemas.openxmlformats.org/drawingml/2006/table">
+            <a:tbl>
+              <a:tblPr firstRow="1" bandRow="1">
+                <a:tableStyleId>{5C22544A-7EE6-4342-B048-85BDC9FD1C3A}</a:tableStyleId>
+              </a:tblPr>
+              <a:tblGrid>
+                <a:gridCol w="1645920"/>
+                <a:gridCol w="2743200"/>
+                <a:gridCol w="2377440"/>
+              </a:tblGrid>
+              <a:tr h="502920">
+                <a:tc>
+                  <a:txBody>
+                    <a:bodyPr wrap="square"/>
+                    <a:lstStyle/>
+                    <a:p>
+                      <a:pPr algn="l"/>
+                      <a:r>
+                        <a:rPr sz="1400" b="1">
+                          <a:solidFill>
+                            <a:srgbClr val="FFFFFF"/>
+                          </a:solidFill>
+                          <a:latin typeface="Calibri"/>
+                        </a:rPr>
+                        <a:t>Set</a:t>
+                      </a:r>
+                    </a:p>
+                  </a:txBody>
+                  <a:tcPr marL="91440" marR="91440" marT="36576" marB="36576" anchor="ctr">
+                    <a:solidFill>
+                      <a:srgbClr val="1C2E6E"/>
+                    </a:solidFill>
+                  </a:tcPr>
+                </a:tc>
+                <a:tc>
+                  <a:txBody>
+                    <a:bodyPr wrap="square"/>
+                    <a:lstStyle/>
+                    <a:p>
+                      <a:pPr algn="l"/>
+                      <a:r>
+                        <a:rPr sz="1400" b="1">
+                          <a:solidFill>
+                            <a:srgbClr val="FFFFFF"/>
+                          </a:solidFill>
+                          <a:latin typeface="Calibri"/>
+                        </a:rPr>
+                        <a:t>Posts</a:t>
+                      </a:r>
+                    </a:p>
+                  </a:txBody>
+                  <a:tcPr marL="91440" marR="91440" marT="36576" marB="36576" anchor="ctr">
+                    <a:solidFill>
+                      <a:srgbClr val="1C2E6E"/>
+                    </a:solidFill>
+                  </a:tcPr>
+                </a:tc>
+                <a:tc>
+                  <a:txBody>
+                    <a:bodyPr wrap="square"/>
+                    <a:lstStyle/>
+                    <a:p>
+                      <a:pPr algn="l"/>
+                      <a:r>
+                        <a:rPr sz="1400" b="1">
+                          <a:solidFill>
+                            <a:srgbClr val="FFFFFF"/>
+                          </a:solidFill>
+                          <a:latin typeface="Calibri"/>
+                        </a:rPr>
+                        <a:t>Used for</a:t>
+                      </a:r>
+                    </a:p>
+                  </a:txBody>
+                  <a:tcPr marL="91440" marR="91440" marT="36576" marB="36576" anchor="ctr">
+                    <a:solidFill>
+                      <a:srgbClr val="1C2E6E"/>
+                    </a:solidFill>
+                  </a:tcPr>
+                </a:tc>
+              </a:tr>
+              <a:tr h="502920">
+                <a:tc>
+                  <a:txBody>
+                    <a:bodyPr wrap="square"/>
+                    <a:lstStyle/>
+                    <a:p>
+                      <a:pPr algn="l"/>
+                      <a:r>
+                        <a:rPr sz="1400" b="0">
+                          <a:solidFill>
+                            <a:srgbClr val="1E293B"/>
+                          </a:solidFill>
+                          <a:latin typeface="Calibri"/>
+                        </a:rPr>
+                        <a:t>Representative</a:t>
+                      </a:r>
+                    </a:p>
+                  </a:txBody>
+                  <a:tcPr marL="91440" marR="91440" marT="36576" marB="36576" anchor="ctr">
+                    <a:solidFill>
+                      <a:srgbClr val="FFFFFF"/>
+                    </a:solidFill>
+                  </a:tcPr>
+                </a:tc>
+                <a:tc>
+                  <a:txBody>
+                    <a:bodyPr wrap="square"/>
+                    <a:lstStyle/>
+                    <a:p>
+                      <a:pPr algn="l"/>
+                      <a:r>
+                        <a:rPr sz="1400" b="0">
+                          <a:solidFill>
+                            <a:srgbClr val="1E293B"/>
+                          </a:solidFill>
+                          <a:latin typeface="Calibri"/>
+                        </a:rPr>
+                        <a:t>300 random (295 relevant)</a:t>
+                      </a:r>
+                    </a:p>
+                  </a:txBody>
+                  <a:tcPr marL="91440" marR="91440" marT="36576" marB="36576" anchor="ctr">
+                    <a:solidFill>
+                      <a:srgbClr val="FFFFFF"/>
+                    </a:solidFill>
+                  </a:tcPr>
+                </a:tc>
+                <a:tc>
+                  <a:txBody>
+                    <a:bodyPr wrap="square"/>
+                    <a:lstStyle/>
+                    <a:p>
+                      <a:pPr algn="l"/>
+                      <a:r>
+                        <a:rPr sz="1400" b="0">
+                          <a:solidFill>
+                            <a:srgbClr val="1E293B"/>
+                          </a:solidFill>
+                          <a:latin typeface="Calibri"/>
+                        </a:rPr>
+                        <a:t>Headline scores</a:t>
+                      </a:r>
+                    </a:p>
+                  </a:txBody>
+                  <a:tcPr marL="91440" marR="91440" marT="36576" marB="36576" anchor="ctr">
+                    <a:solidFill>
+                      <a:srgbClr val="FFFFFF"/>
+                    </a:solidFill>
+                  </a:tcPr>
+                </a:tc>
+              </a:tr>
+              <a:tr h="502920">
+                <a:tc>
+                  <a:txBody>
+                    <a:bodyPr wrap="square"/>
+                    <a:lstStyle/>
+                    <a:p>
+                      <a:pPr algn="l"/>
+                      <a:r>
+                        <a:rPr sz="1400" b="0">
+                          <a:solidFill>
+                            <a:srgbClr val="1E293B"/>
+                          </a:solidFill>
+                          <a:latin typeface="Calibri"/>
+                        </a:rPr>
+                        <a:t>Challenge</a:t>
+                      </a:r>
+                    </a:p>
+                  </a:txBody>
+                  <a:tcPr marL="91440" marR="91440" marT="36576" marB="36576" anchor="ctr">
+                    <a:solidFill>
+                      <a:srgbClr val="F2F4F9"/>
+                    </a:solidFill>
+                  </a:tcPr>
+                </a:tc>
+                <a:tc>
+                  <a:txBody>
+                    <a:bodyPr wrap="square"/>
+                    <a:lstStyle/>
+                    <a:p>
+                      <a:pPr algn="l"/>
+                      <a:r>
+                        <a:rPr sz="1400" b="0">
+                          <a:solidFill>
+                            <a:srgbClr val="1E293B"/>
+                          </a:solidFill>
+                          <a:latin typeface="Calibri"/>
+                        </a:rPr>
+                        <a:t>100 hard, separate threads</a:t>
+                      </a:r>
+                    </a:p>
+                  </a:txBody>
+                  <a:tcPr marL="91440" marR="91440" marT="36576" marB="36576" anchor="ctr">
+                    <a:solidFill>
+                      <a:srgbClr val="F2F4F9"/>
+                    </a:solidFill>
+                  </a:tcPr>
+                </a:tc>
+                <a:tc>
+                  <a:txBody>
+                    <a:bodyPr wrap="square"/>
+                    <a:lstStyle/>
+                    <a:p>
+                      <a:pPr algn="l"/>
+                      <a:r>
+                        <a:rPr sz="1400" b="0">
+                          <a:solidFill>
+                            <a:srgbClr val="1E293B"/>
+                          </a:solidFill>
+                          <a:latin typeface="Calibri"/>
+                        </a:rPr>
+                        <a:t>Held-out test</a:t>
+                      </a:r>
+                    </a:p>
+                  </a:txBody>
+                  <a:tcPr marL="91440" marR="91440" marT="36576" marB="36576" anchor="ctr">
+                    <a:solidFill>
+                      <a:srgbClr val="F2F4F9"/>
+                    </a:solidFill>
+                  </a:tcPr>
+                </a:tc>
+              </a:tr>
+              <a:tr h="502920">
+                <a:tc>
+                  <a:txBody>
+                    <a:bodyPr wrap="square"/>
+                    <a:lstStyle/>
+                    <a:p>
+                      <a:pPr algn="l"/>
+                      <a:r>
+                        <a:rPr sz="1400" b="0">
+                          <a:solidFill>
+                            <a:srgbClr val="1E293B"/>
+                          </a:solidFill>
+                          <a:latin typeface="Calibri"/>
+                        </a:rPr>
+                        <a:t>Recent</a:t>
+                      </a:r>
+                    </a:p>
+                  </a:txBody>
+                  <a:tcPr marL="91440" marR="91440" marT="36576" marB="36576" anchor="ctr">
+                    <a:solidFill>
+                      <a:srgbClr val="FFFFFF"/>
+                    </a:solidFill>
+                  </a:tcPr>
+                </a:tc>
+                <a:tc>
+                  <a:txBody>
+                    <a:bodyPr wrap="square"/>
+                    <a:lstStyle/>
+                    <a:p>
+                      <a:pPr algn="l"/>
+                      <a:r>
+                        <a:rPr sz="1400" b="0">
+                          <a:solidFill>
+                            <a:srgbClr val="1E293B"/>
+                          </a:solidFill>
+                          <a:latin typeface="Calibri"/>
+                        </a:rPr>
+                        <a:t>100 from Apr–Sep 2026 (97)</a:t>
+                      </a:r>
+                    </a:p>
+                  </a:txBody>
+                  <a:tcPr marL="91440" marR="91440" marT="36576" marB="36576" anchor="ctr">
+                    <a:solidFill>
+                      <a:srgbClr val="FFFFFF"/>
+                    </a:solidFill>
+                  </a:tcPr>
+                </a:tc>
+                <a:tc>
+                  <a:txBody>
+                    <a:bodyPr wrap="square"/>
+                    <a:lstStyle/>
+                    <a:p>
+                      <a:pPr algn="l"/>
+                      <a:r>
+                        <a:rPr sz="1400" b="0">
+                          <a:solidFill>
+                            <a:srgbClr val="1E293B"/>
+                          </a:solidFill>
+                          <a:latin typeface="Calibri"/>
+                        </a:rPr>
+                        <a:t>Newer 80% of corpus</a:t>
+                      </a:r>
+                    </a:p>
+                  </a:txBody>
+                  <a:tcPr marL="91440" marR="91440" marT="36576" marB="36576" anchor="ctr">
+                    <a:solidFill>
+                      <a:srgbClr val="FFFFFF"/>
+                    </a:solidFill>
+                  </a:tcPr>
+                </a:tc>
+              </a:tr>
+            </a:tbl>
+          </a:graphicData>
+        </a:graphic>
+      </p:graphicFrame>
+      <p:sp>
+        <p:nvSpPr>
+          <p:cNvPr id="5" name="TextBox 4"/>
+          <p:cNvSpPr txBox="1"/>
+          <p:nvPr/>
+        </p:nvSpPr>
+        <p:spPr>
+          <a:xfrm>
+            <a:off x="548640" y="4389120"/>
+            <a:ext cx="6766560" cy="1463040"/>
+          </a:xfrm>
+          <a:prstGeom prst="rect">
+            <a:avLst/>
+          </a:prstGeom>
+          <a:noFill/>
+        </p:spPr>
+        <p:txBody>
+          <a:bodyPr wrap="square" lIns="0" rIns="0" tIns="0" bIns="0" anchor="t">
+            <a:spAutoFit/>
+          </a:bodyPr>
+          <a:lstStyle/>
+          <a:p>
+            <a:pPr algn="l" marL="256032" indent="-256032">
+              <a:spcAft>
+                <a:spcPts val="600"/>
+              </a:spcAft>
+              <a:buClr>
+                <a:srgbClr val="D29B08"/>
+              </a:buClr>
+              <a:buFont typeface="Arial"/>
+              <a:buChar char="•"/>
+            </a:pPr>
+            <a:r>
+              <a:rPr sz="1500" b="0" i="0">
+                <a:solidFill>
+                  <a:srgbClr val="1E293B"/>
+                </a:solidFill>
+                <a:latin typeface="Calibri"/>
+              </a:rPr>
+              <a:t>No model output was visible while labelling.</a:t>
+            </a:r>
+          </a:p>
+          <a:p>
+            <a:pPr algn="l" marL="256032" indent="-256032">
+              <a:spcAft>
+                <a:spcPts val="600"/>
+              </a:spcAft>
+              <a:buClr>
+                <a:srgbClr val="D29B08"/>
+              </a:buClr>
+              <a:buFont typeface="Arial"/>
+              <a:buChar char="•"/>
+            </a:pPr>
+            <a:r>
+              <a:rPr sz="1500" b="0" i="0">
+                <a:solidFill>
+                  <a:srgbClr val="1E293B"/>
+                </a:solidFill>
+                <a:latin typeface="Calibri"/>
+              </a:rPr>
+              <a:t>Annotator B relabelled 100 overlap posts to measure human agreement.</a:t>
+            </a:r>
+          </a:p>
+          <a:p>
+            <a:pPr algn="l" marL="256032" indent="-256032">
+              <a:spcAft>
+                <a:spcPts val="600"/>
+              </a:spcAft>
+              <a:buClr>
+                <a:srgbClr val="D29B08"/>
+              </a:buClr>
+              <a:buFont typeface="Arial"/>
+              <a:buChar char="•"/>
+            </a:pPr>
+            <a:r>
+              <a:rPr sz="1500" b="0" i="0">
+                <a:solidFill>
+                  <a:srgbClr val="1E293B"/>
+                </a:solidFill>
+                <a:latin typeface="Calibri"/>
+              </a:rPr>
+              <a:t>Each set is scored on its own, never pooled.</a:t>
+            </a:r>
+          </a:p>
+        </p:txBody>
+      </p:sp>
+      <p:sp>
+        <p:nvSpPr>
+          <p:cNvPr id="6" name="Rounded Rectangle 5"/>
+          <p:cNvSpPr/>
+          <p:nvPr/>
+        </p:nvSpPr>
+        <p:spPr>
+          <a:xfrm>
+            <a:off x="7680960" y="1691640"/>
+            <a:ext cx="3959352" cy="2057400"/>
+          </a:xfrm>
+          <a:prstGeom prst="roundRect">
+            <a:avLst>
+              <a:gd name="adj" fmla="val 6000"/>
+            </a:avLst>
+          </a:prstGeom>
+          <a:solidFill>
+            <a:srgbClr val="FBF3DF"/>
+          </a:solidFill>
+          <a:ln>
+            <a:noFill/>
+          </a:ln>
+          <a:effectLst/>
+        </p:spPr>
+        <p:style>
+          <a:lnRef idx="1">
+            <a:schemeClr val="accent1"/>
+          </a:lnRef>
+          <a:fillRef idx="3">
+            <a:schemeClr val="accent1"/>
+          </a:fillRef>
+          <a:effectRef idx="2">
+            <a:schemeClr val="accent1"/>
+          </a:effectRef>
+          <a:fontRef idx="minor">
+            <a:schemeClr val="lt1"/>
+          </a:fontRef>
+        </p:style>
+        <p:txBody>
+          <a:bodyPr rtlCol="0" anchor="ctr"/>
+          <a:lstStyle/>
+          <a:p>
+            <a:pPr algn="ctr"/>
+          </a:p>
+        </p:txBody>
+      </p:sp>
+      <p:sp>
+        <p:nvSpPr>
+          <p:cNvPr id="7" name="TextBox 6"/>
+          <p:cNvSpPr txBox="1"/>
+          <p:nvPr/>
+        </p:nvSpPr>
+        <p:spPr>
+          <a:xfrm>
+            <a:off x="7909560" y="1874520"/>
+            <a:ext cx="3502152" cy="365760"/>
+          </a:xfrm>
+          <a:prstGeom prst="rect">
+            <a:avLst/>
+          </a:prstGeom>
+          <a:noFill/>
+        </p:spPr>
+        <p:txBody>
+          <a:bodyPr wrap="square" lIns="0" rIns="0" tIns="0" bIns="0" anchor="t">
+            <a:spAutoFit/>
+          </a:bodyPr>
+          <a:lstStyle/>
+          <a:p>
+            <a:pPr algn="l">
+              <a:spcAft>
+                <a:spcPts val="600"/>
+              </a:spcAft>
+            </a:pPr>
+            <a:r>
+              <a:rPr sz="1600" b="1" i="0">
+                <a:solidFill>
+                  <a:srgbClr val="1C2E6E"/>
+                </a:solidFill>
+                <a:latin typeface="Calibri"/>
+              </a:rPr>
+              <a:t>What was compared</a:t>
+            </a:r>
+          </a:p>
+        </p:txBody>
+      </p:sp>
+      <p:sp>
+        <p:nvSpPr>
+          <p:cNvPr id="8" name="TextBox 7"/>
+          <p:cNvSpPr txBox="1"/>
+          <p:nvPr/>
+        </p:nvSpPr>
+        <p:spPr>
+          <a:xfrm>
+            <a:off x="7909560" y="2258568"/>
+            <a:ext cx="3502152" cy="1325880"/>
+          </a:xfrm>
+          <a:prstGeom prst="rect">
+            <a:avLst/>
+          </a:prstGeom>
+          <a:noFill/>
+        </p:spPr>
+        <p:txBody>
+          <a:bodyPr wrap="square" lIns="0" rIns="0" tIns="0" bIns="0" anchor="t">
+            <a:spAutoFit/>
+          </a:bodyPr>
+          <a:lstStyle/>
+          <a:p>
+            <a:pPr algn="l">
+              <a:spcAft>
+                <a:spcPts val="600"/>
+              </a:spcAft>
+            </a:pPr>
+            <a:r>
+              <a:rPr sz="1400" b="0" i="0">
+                <a:solidFill>
+                  <a:srgbClr val="1E293B"/>
+                </a:solidFill>
+                <a:latin typeface="Calibri"/>
+              </a:rPr>
+              <a:t>Sentiment: VADER vs GPT-4o-mini vs GPT-4o</a:t>
+            </a:r>
+          </a:p>
+          <a:p>
+            <a:pPr algn="l">
+              <a:spcAft>
+                <a:spcPts val="600"/>
+              </a:spcAft>
+            </a:pPr>
+            <a:r>
+              <a:rPr sz="1400" b="0" i="0">
+                <a:solidFill>
+                  <a:srgbClr val="1E293B"/>
+                </a:solidFill>
+                <a:latin typeface="Calibri"/>
+              </a:rPr>
+              <a:t>Issues: keyword rules, GPT-4o-mini and GPT-4o on every post, and the hybrid</a:t>
+            </a:r>
+          </a:p>
+        </p:txBody>
+      </p:sp>
+      <p:sp>
+        <p:nvSpPr>
+          <p:cNvPr id="9" name="Rounded Rectangle 8"/>
+          <p:cNvSpPr/>
+          <p:nvPr/>
+        </p:nvSpPr>
+        <p:spPr>
+          <a:xfrm>
+            <a:off x="7680960" y="3886200"/>
+            <a:ext cx="3959352" cy="2103120"/>
+          </a:xfrm>
+          <a:prstGeom prst="roundRect">
+            <a:avLst>
+              <a:gd name="adj" fmla="val 6000"/>
+            </a:avLst>
+          </a:prstGeom>
+          <a:solidFill>
+            <a:srgbClr val="FBF3DF"/>
+          </a:solidFill>
+          <a:ln>
+            <a:noFill/>
+          </a:ln>
+          <a:effectLst/>
+        </p:spPr>
+        <p:style>
+          <a:lnRef idx="1">
+            <a:schemeClr val="accent1"/>
+          </a:lnRef>
+          <a:fillRef idx="3">
+            <a:schemeClr val="accent1"/>
+          </a:fillRef>
+          <a:effectRef idx="2">
+            <a:schemeClr val="accent1"/>
+          </a:effectRef>
+          <a:fontRef idx="minor">
+            <a:schemeClr val="lt1"/>
+          </a:fontRef>
+        </p:style>
+        <p:txBody>
+          <a:bodyPr rtlCol="0" anchor="ctr"/>
+          <a:lstStyle/>
+          <a:p>
+            <a:pPr algn="ctr"/>
+          </a:p>
+        </p:txBody>
+      </p:sp>
+      <p:sp>
+        <p:nvSpPr>
+          <p:cNvPr id="10" name="TextBox 9"/>
+          <p:cNvSpPr txBox="1"/>
+          <p:nvPr/>
+        </p:nvSpPr>
+        <p:spPr>
+          <a:xfrm>
+            <a:off x="7909560" y="4069080"/>
+            <a:ext cx="3502152" cy="365760"/>
+          </a:xfrm>
+          <a:prstGeom prst="rect">
+            <a:avLst/>
+          </a:prstGeom>
+          <a:noFill/>
+        </p:spPr>
+        <p:txBody>
+          <a:bodyPr wrap="square" lIns="0" rIns="0" tIns="0" bIns="0" anchor="t">
+            <a:spAutoFit/>
+          </a:bodyPr>
+          <a:lstStyle/>
+          <a:p>
+            <a:pPr algn="l">
+              <a:spcAft>
+                <a:spcPts val="600"/>
+              </a:spcAft>
+            </a:pPr>
+            <a:r>
+              <a:rPr sz="1600" b="1" i="0">
+                <a:solidFill>
+                  <a:srgbClr val="1C2E6E"/>
+                </a:solidFill>
+                <a:latin typeface="Calibri"/>
+              </a:rPr>
+              <a:t>How it was scored</a:t>
+            </a:r>
+          </a:p>
+        </p:txBody>
+      </p:sp>
+      <p:sp>
+        <p:nvSpPr>
+          <p:cNvPr id="11" name="TextBox 10"/>
+          <p:cNvSpPr txBox="1"/>
+          <p:nvPr/>
+        </p:nvSpPr>
+        <p:spPr>
+          <a:xfrm>
+            <a:off x="7909560" y="4453128"/>
+            <a:ext cx="3502152" cy="1371599"/>
+          </a:xfrm>
+          <a:prstGeom prst="rect">
+            <a:avLst/>
+          </a:prstGeom>
+          <a:noFill/>
+        </p:spPr>
+        <p:txBody>
+          <a:bodyPr wrap="square" lIns="0" rIns="0" tIns="0" bIns="0" anchor="t">
+            <a:spAutoFit/>
+          </a:bodyPr>
+          <a:lstStyle/>
+          <a:p>
+            <a:pPr algn="l">
+              <a:spcAft>
+                <a:spcPts val="600"/>
+              </a:spcAft>
+            </a:pPr>
+            <a:r>
+              <a:rPr sz="1400" b="0" i="0">
+                <a:solidFill>
+                  <a:srgbClr val="1E293B"/>
+                </a:solidFill>
+                <a:latin typeface="Calibri"/>
+              </a:rPr>
+              <a:t>Macro F1, per-class recall, confusion matrices</a:t>
+            </a:r>
+          </a:p>
+          <a:p>
+            <a:pPr algn="l">
+              <a:spcAft>
+                <a:spcPts val="600"/>
+              </a:spcAft>
+            </a:pPr>
+            <a:r>
+              <a:rPr sz="1400" b="0" i="0">
+                <a:solidFill>
+                  <a:srgbClr val="1E293B"/>
+                </a:solidFill>
+                <a:latin typeface="Calibri"/>
+              </a:rPr>
+              <a:t>Paired bootstrap 95% CIs: a range that excludes 0 is a real gap</a:t>
+            </a:r>
+          </a:p>
+          <a:p>
+            <a:pPr algn="l">
+              <a:spcAft>
+                <a:spcPts val="600"/>
+              </a:spcAft>
+            </a:pPr>
+            <a:r>
+              <a:rPr sz="1400" b="0" i="0">
+                <a:solidFill>
+                  <a:srgbClr val="1E293B"/>
+                </a:solidFill>
+                <a:latin typeface="Calibri"/>
+              </a:rPr>
+              <a:t>Cohen's κ between humans; a rerun for stability</a:t>
+            </a:r>
+          </a:p>
+        </p:txBody>
+      </p:sp>
+      <p:sp>
+        <p:nvSpPr>
+          <p:cNvPr id="12" name="TextBox 11"/>
+          <p:cNvSpPr txBox="1"/>
+          <p:nvPr/>
+        </p:nvSpPr>
+        <p:spPr>
+          <a:xfrm>
+            <a:off x="11155680" y="6446520"/>
+            <a:ext cx="548640" cy="274320"/>
+          </a:xfrm>
+          <a:prstGeom prst="rect">
+            <a:avLst/>
+          </a:prstGeom>
+          <a:noFill/>
+        </p:spPr>
+        <p:txBody>
+          <a:bodyPr wrap="square" lIns="0" rIns="0" tIns="0" bIns="0" anchor="t">
+            <a:spAutoFit/>
+          </a:bodyPr>
+          <a:lstStyle/>
+          <a:p>
+            <a:pPr algn="r">
+              <a:spcAft>
+                <a:spcPts val="600"/>
+              </a:spcAft>
+            </a:pPr>
+            <a:r>
+              <a:rPr sz="1000" b="0" i="0">
+                <a:solidFill>
+                  <a:srgbClr val="5B6475"/>
+                </a:solidFill>
+                <a:latin typeface="Calibri"/>
+              </a:rPr>
+              <a:t>40</a:t>
+            </a:r>
+          </a:p>
+        </p:txBody>
+      </p:sp>
+    </p:spTree>
+    <p:extLst>
+      <p:ext uri="{BB962C8B-B14F-4D97-AF65-F5344CB8AC3E}">
+        <p14:creationId xmlns:p14="http://schemas.microsoft.com/office/powerpoint/2010/main" val="2477460431"/>
+      </p:ext>
+    </p:extLst>
+  </p:cSld>
+  <p:clrMapOvr>
+    <a:masterClrMapping/>
+  </p:clrMapOvr>
+</p:sld>
+</file>
+
+<file path=ppt/slides/slide41.xml><?xml version="1.0" encoding="utf-8"?>
+<p:sld xmlns:a="http://schemas.openxmlformats.org/drawingml/2006/main" xmlns:p="http://schemas.openxmlformats.org/presentationml/2006/main" xmlns:r="http://schemas.openxmlformats.org/officeDocument/2006/relationships">
+  <p:cSld>
+    <p:spTree>
+      <p:nvGrpSpPr>
+        <p:cNvPr id="1" name=""/>
+        <p:cNvGrpSpPr/>
+        <p:nvPr/>
+      </p:nvGrpSpPr>
+      <p:grpSpPr/>
+      <p:sp>
+        <p:nvSpPr>
+          <p:cNvPr id="2" name="TextBox 1"/>
+          <p:cNvSpPr txBox="1"/>
+          <p:nvPr/>
+        </p:nvSpPr>
+        <p:spPr>
+          <a:xfrm>
+            <a:off x="5112000" y="475199"/>
+            <a:ext cx="6840000" cy="828000"/>
+          </a:xfrm>
+          <a:prstGeom prst="rect">
+            <a:avLst/>
+          </a:prstGeom>
+          <a:noFill/>
+        </p:spPr>
+        <p:txBody>
+          <a:bodyPr wrap="square" lIns="0" rIns="0" tIns="0" bIns="0" anchor="ctr">
+            <a:spAutoFit/>
+          </a:bodyPr>
+          <a:lstStyle/>
+          <a:p>
+            <a:pPr algn="l">
+              <a:lnSpc>
+                <a:spcPct val="95000"/>
+              </a:lnSpc>
+              <a:spcAft>
+                <a:spcPts val="0"/>
+              </a:spcAft>
+            </a:pPr>
+            <a:r>
+              <a:rPr sz="2400" b="1" i="0">
+                <a:solidFill>
+                  <a:srgbClr val="1C2E6E"/>
+                </a:solidFill>
+                <a:latin typeface="Calibri"/>
+              </a:rPr>
+              <a:t>Evaluation summary: what it found</a:t>
+            </a:r>
+          </a:p>
+        </p:txBody>
+      </p:sp>
+      <p:graphicFrame>
+        <p:nvGraphicFramePr>
+          <p:cNvPr id="3" name="Table 2"/>
+          <p:cNvGraphicFramePr>
+            <a:graphicFrameLocks noGrp="1"/>
+          </p:cNvGraphicFramePr>
+          <p:nvPr/>
+        </p:nvGraphicFramePr>
+        <p:xfrm>
+          <a:off x="548640" y="1691640"/>
+          <a:ext cx="6949440" cy="3017520"/>
+        </p:xfrm>
+        <a:graphic>
+          <a:graphicData uri="http://schemas.openxmlformats.org/drawingml/2006/table">
+            <a:tbl>
+              <a:tblPr firstRow="1" bandRow="1">
+                <a:tableStyleId>{5C22544A-7EE6-4342-B048-85BDC9FD1C3A}</a:tableStyleId>
+              </a:tblPr>
+              <a:tblGrid>
+                <a:gridCol w="2651760"/>
+                <a:gridCol w="1645920"/>
+                <a:gridCol w="1280160"/>
+                <a:gridCol w="1371600"/>
+              </a:tblGrid>
+              <a:tr h="502920">
+                <a:tc>
+                  <a:txBody>
+                    <a:bodyPr wrap="square"/>
+                    <a:lstStyle/>
+                    <a:p>
+                      <a:pPr algn="l"/>
+                      <a:r>
+                        <a:rPr sz="1400" b="1">
+                          <a:solidFill>
+                            <a:srgbClr val="FFFFFF"/>
+                          </a:solidFill>
+                          <a:latin typeface="Calibri"/>
+                        </a:rPr>
+                        <a:t>Macro F1</a:t>
+                      </a:r>
+                    </a:p>
+                  </a:txBody>
+                  <a:tcPr marL="91440" marR="91440" marT="36576" marB="36576" anchor="ctr">
+                    <a:solidFill>
+                      <a:srgbClr val="1C2E6E"/>
+                    </a:solidFill>
+                  </a:tcPr>
+                </a:tc>
+                <a:tc>
+                  <a:txBody>
+                    <a:bodyPr wrap="square"/>
+                    <a:lstStyle/>
+                    <a:p>
+                      <a:pPr algn="l"/>
+                      <a:r>
+                        <a:rPr sz="1400" b="1">
+                          <a:solidFill>
+                            <a:srgbClr val="FFFFFF"/>
+                          </a:solidFill>
+                          <a:latin typeface="Calibri"/>
+                        </a:rPr>
+                        <a:t>Representative</a:t>
+                      </a:r>
+                    </a:p>
+                  </a:txBody>
+                  <a:tcPr marL="91440" marR="91440" marT="36576" marB="36576" anchor="ctr">
+                    <a:solidFill>
+                      <a:srgbClr val="1C2E6E"/>
+                    </a:solidFill>
+                  </a:tcPr>
+                </a:tc>
+                <a:tc>
+                  <a:txBody>
+                    <a:bodyPr wrap="square"/>
+                    <a:lstStyle/>
+                    <a:p>
+                      <a:pPr algn="l"/>
+                      <a:r>
+                        <a:rPr sz="1400" b="1">
+                          <a:solidFill>
+                            <a:srgbClr val="FFFFFF"/>
+                          </a:solidFill>
+                          <a:latin typeface="Calibri"/>
+                        </a:rPr>
+                        <a:t>Challenge</a:t>
+                      </a:r>
+                    </a:p>
+                  </a:txBody>
+                  <a:tcPr marL="91440" marR="91440" marT="36576" marB="36576" anchor="ctr">
+                    <a:solidFill>
+                      <a:srgbClr val="1C2E6E"/>
+                    </a:solidFill>
+                  </a:tcPr>
+                </a:tc>
+                <a:tc>
+                  <a:txBody>
+                    <a:bodyPr wrap="square"/>
+                    <a:lstStyle/>
+                    <a:p>
+                      <a:pPr algn="l"/>
+                      <a:r>
+                        <a:rPr sz="1400" b="1">
+                          <a:solidFill>
+                            <a:srgbClr val="FFFFFF"/>
+                          </a:solidFill>
+                          <a:latin typeface="Calibri"/>
+                        </a:rPr>
+                        <a:t>Recent</a:t>
+                      </a:r>
+                    </a:p>
+                  </a:txBody>
+                  <a:tcPr marL="91440" marR="91440" marT="36576" marB="36576" anchor="ctr">
+                    <a:solidFill>
+                      <a:srgbClr val="1C2E6E"/>
+                    </a:solidFill>
+                  </a:tcPr>
+                </a:tc>
+              </a:tr>
+              <a:tr h="502920">
+                <a:tc>
+                  <a:txBody>
+                    <a:bodyPr wrap="square"/>
+                    <a:lstStyle/>
+                    <a:p>
+                      <a:pPr algn="l"/>
+                      <a:r>
+                        <a:rPr sz="1400" b="1">
+                          <a:solidFill>
+                            <a:srgbClr val="1E293B"/>
+                          </a:solidFill>
+                          <a:latin typeface="Calibri"/>
+                        </a:rPr>
+                        <a:t>Sentiment: GPT-4o-mini</a:t>
+                      </a:r>
+                    </a:p>
+                  </a:txBody>
+                  <a:tcPr marL="91440" marR="91440" marT="36576" marB="36576" anchor="ctr">
+                    <a:solidFill>
+                      <a:srgbClr val="FBF3DF"/>
+                    </a:solidFill>
+                  </a:tcPr>
+                </a:tc>
+                <a:tc>
+                  <a:txBody>
+                    <a:bodyPr wrap="square"/>
+                    <a:lstStyle/>
+                    <a:p>
+                      <a:pPr algn="l"/>
+                      <a:r>
+                        <a:rPr sz="1400" b="0">
+                          <a:solidFill>
+                            <a:srgbClr val="1E293B"/>
+                          </a:solidFill>
+                          <a:latin typeface="Calibri"/>
+                        </a:rPr>
+                        <a:t>0.631</a:t>
+                      </a:r>
+                    </a:p>
+                  </a:txBody>
+                  <a:tcPr marL="91440" marR="91440" marT="36576" marB="36576" anchor="ctr">
+                    <a:solidFill>
+                      <a:srgbClr val="FBF3DF"/>
+                    </a:solidFill>
+                  </a:tcPr>
+                </a:tc>
+                <a:tc>
+                  <a:txBody>
+                    <a:bodyPr wrap="square"/>
+                    <a:lstStyle/>
+                    <a:p>
+                      <a:pPr algn="l"/>
+                      <a:r>
+                        <a:rPr sz="1400" b="0">
+                          <a:solidFill>
+                            <a:srgbClr val="1E293B"/>
+                          </a:solidFill>
+                          <a:latin typeface="Calibri"/>
+                        </a:rPr>
+                        <a:t>0.773</a:t>
+                      </a:r>
+                    </a:p>
+                  </a:txBody>
+                  <a:tcPr marL="91440" marR="91440" marT="36576" marB="36576" anchor="ctr">
+                    <a:solidFill>
+                      <a:srgbClr val="FBF3DF"/>
+                    </a:solidFill>
+                  </a:tcPr>
+                </a:tc>
+                <a:tc>
+                  <a:txBody>
+                    <a:bodyPr wrap="square"/>
+                    <a:lstStyle/>
+                    <a:p>
+                      <a:pPr algn="l"/>
+                      <a:r>
+                        <a:rPr sz="1400" b="0">
+                          <a:solidFill>
+                            <a:srgbClr val="1E293B"/>
+                          </a:solidFill>
+                          <a:latin typeface="Calibri"/>
+                        </a:rPr>
+                        <a:t>0.637</a:t>
+                      </a:r>
+                    </a:p>
+                  </a:txBody>
+                  <a:tcPr marL="91440" marR="91440" marT="36576" marB="36576" anchor="ctr">
+                    <a:solidFill>
+                      <a:srgbClr val="FBF3DF"/>
+                    </a:solidFill>
+                  </a:tcPr>
+                </a:tc>
+              </a:tr>
+              <a:tr h="502920">
+                <a:tc>
+                  <a:txBody>
+                    <a:bodyPr wrap="square"/>
+                    <a:lstStyle/>
+                    <a:p>
+                      <a:pPr algn="l"/>
+                      <a:r>
+                        <a:rPr sz="1400" b="0">
+                          <a:solidFill>
+                            <a:srgbClr val="1E293B"/>
+                          </a:solidFill>
+                          <a:latin typeface="Calibri"/>
+                        </a:rPr>
+                        <a:t>Sentiment: VADER</a:t>
+                      </a:r>
+                    </a:p>
+                  </a:txBody>
+                  <a:tcPr marL="91440" marR="91440" marT="36576" marB="36576" anchor="ctr">
+                    <a:solidFill>
+                      <a:srgbClr val="F2F4F9"/>
+                    </a:solidFill>
+                  </a:tcPr>
+                </a:tc>
+                <a:tc>
+                  <a:txBody>
+                    <a:bodyPr wrap="square"/>
+                    <a:lstStyle/>
+                    <a:p>
+                      <a:pPr algn="l"/>
+                      <a:r>
+                        <a:rPr sz="1400" b="0">
+                          <a:solidFill>
+                            <a:srgbClr val="1E293B"/>
+                          </a:solidFill>
+                          <a:latin typeface="Calibri"/>
+                        </a:rPr>
+                        <a:t>0.360</a:t>
+                      </a:r>
+                    </a:p>
+                  </a:txBody>
+                  <a:tcPr marL="91440" marR="91440" marT="36576" marB="36576" anchor="ctr">
+                    <a:solidFill>
+                      <a:srgbClr val="F2F4F9"/>
+                    </a:solidFill>
+                  </a:tcPr>
+                </a:tc>
+                <a:tc>
+                  <a:txBody>
+                    <a:bodyPr wrap="square"/>
+                    <a:lstStyle/>
+                    <a:p>
+                      <a:pPr algn="l"/>
+                      <a:r>
+                        <a:rPr sz="1400" b="0">
+                          <a:solidFill>
+                            <a:srgbClr val="1E293B"/>
+                          </a:solidFill>
+                          <a:latin typeface="Calibri"/>
+                        </a:rPr>
+                        <a:t>0.491</a:t>
+                      </a:r>
+                    </a:p>
+                  </a:txBody>
+                  <a:tcPr marL="91440" marR="91440" marT="36576" marB="36576" anchor="ctr">
+                    <a:solidFill>
+                      <a:srgbClr val="F2F4F9"/>
+                    </a:solidFill>
+                  </a:tcPr>
+                </a:tc>
+                <a:tc>
+                  <a:txBody>
+                    <a:bodyPr wrap="square"/>
+                    <a:lstStyle/>
+                    <a:p>
+                      <a:pPr algn="l"/>
+                      <a:r>
+                        <a:rPr sz="1400" b="0">
+                          <a:solidFill>
+                            <a:srgbClr val="1E293B"/>
+                          </a:solidFill>
+                          <a:latin typeface="Calibri"/>
+                        </a:rPr>
+                        <a:t>0.428</a:t>
+                      </a:r>
+                    </a:p>
+                  </a:txBody>
+                  <a:tcPr marL="91440" marR="91440" marT="36576" marB="36576" anchor="ctr">
+                    <a:solidFill>
+                      <a:srgbClr val="F2F4F9"/>
+                    </a:solidFill>
+                  </a:tcPr>
+                </a:tc>
+              </a:tr>
+              <a:tr h="502920">
+                <a:tc>
+                  <a:txBody>
+                    <a:bodyPr wrap="square"/>
+                    <a:lstStyle/>
+                    <a:p>
+                      <a:pPr algn="l"/>
+                      <a:r>
+                        <a:rPr sz="1400" b="1">
+                          <a:solidFill>
+                            <a:srgbClr val="1E293B"/>
+                          </a:solidFill>
+                          <a:latin typeface="Calibri"/>
+                        </a:rPr>
+                        <a:t>Issues: hybrid</a:t>
+                      </a:r>
+                    </a:p>
+                  </a:txBody>
+                  <a:tcPr marL="91440" marR="91440" marT="36576" marB="36576" anchor="ctr">
+                    <a:solidFill>
+                      <a:srgbClr val="FBF3DF"/>
+                    </a:solidFill>
+                  </a:tcPr>
+                </a:tc>
+                <a:tc>
+                  <a:txBody>
+                    <a:bodyPr wrap="square"/>
+                    <a:lstStyle/>
+                    <a:p>
+                      <a:pPr algn="l"/>
+                      <a:r>
+                        <a:rPr sz="1400" b="0">
+                          <a:solidFill>
+                            <a:srgbClr val="1E293B"/>
+                          </a:solidFill>
+                          <a:latin typeface="Calibri"/>
+                        </a:rPr>
+                        <a:t>0.680</a:t>
+                      </a:r>
+                    </a:p>
+                  </a:txBody>
+                  <a:tcPr marL="91440" marR="91440" marT="36576" marB="36576" anchor="ctr">
+                    <a:solidFill>
+                      <a:srgbClr val="FBF3DF"/>
+                    </a:solidFill>
+                  </a:tcPr>
+                </a:tc>
+                <a:tc>
+                  <a:txBody>
+                    <a:bodyPr wrap="square"/>
+                    <a:lstStyle/>
+                    <a:p>
+                      <a:pPr algn="l"/>
+                      <a:r>
+                        <a:rPr sz="1400" b="0">
+                          <a:solidFill>
+                            <a:srgbClr val="1E293B"/>
+                          </a:solidFill>
+                          <a:latin typeface="Calibri"/>
+                        </a:rPr>
+                        <a:t>0.509</a:t>
+                      </a:r>
+                    </a:p>
+                  </a:txBody>
+                  <a:tcPr marL="91440" marR="91440" marT="36576" marB="36576" anchor="ctr">
+                    <a:solidFill>
+                      <a:srgbClr val="FBF3DF"/>
+                    </a:solidFill>
+                  </a:tcPr>
+                </a:tc>
+                <a:tc>
+                  <a:txBody>
+                    <a:bodyPr wrap="square"/>
+                    <a:lstStyle/>
+                    <a:p>
+                      <a:pPr algn="l"/>
+                      <a:r>
+                        <a:rPr sz="1400" b="0">
+                          <a:solidFill>
+                            <a:srgbClr val="1E293B"/>
+                          </a:solidFill>
+                          <a:latin typeface="Calibri"/>
+                        </a:rPr>
+                        <a:t>0.477</a:t>
+                      </a:r>
+                    </a:p>
+                  </a:txBody>
+                  <a:tcPr marL="91440" marR="91440" marT="36576" marB="36576" anchor="ctr">
+                    <a:solidFill>
+                      <a:srgbClr val="FBF3DF"/>
+                    </a:solidFill>
+                  </a:tcPr>
+                </a:tc>
+              </a:tr>
+              <a:tr h="502920">
+                <a:tc>
+                  <a:txBody>
+                    <a:bodyPr wrap="square"/>
+                    <a:lstStyle/>
+                    <a:p>
+                      <a:pPr algn="l"/>
+                      <a:r>
+                        <a:rPr sz="1400" b="0">
+                          <a:solidFill>
+                            <a:srgbClr val="1E293B"/>
+                          </a:solidFill>
+                          <a:latin typeface="Calibri"/>
+                        </a:rPr>
+                        <a:t>Issues: rules</a:t>
+                      </a:r>
+                    </a:p>
+                  </a:txBody>
+                  <a:tcPr marL="91440" marR="91440" marT="36576" marB="36576" anchor="ctr">
+                    <a:solidFill>
+                      <a:srgbClr val="F2F4F9"/>
+                    </a:solidFill>
+                  </a:tcPr>
+                </a:tc>
+                <a:tc>
+                  <a:txBody>
+                    <a:bodyPr wrap="square"/>
+                    <a:lstStyle/>
+                    <a:p>
+                      <a:pPr algn="l"/>
+                      <a:r>
+                        <a:rPr sz="1400" b="0">
+                          <a:solidFill>
+                            <a:srgbClr val="1E293B"/>
+                          </a:solidFill>
+                          <a:latin typeface="Calibri"/>
+                        </a:rPr>
+                        <a:t>0.639</a:t>
+                      </a:r>
+                    </a:p>
+                  </a:txBody>
+                  <a:tcPr marL="91440" marR="91440" marT="36576" marB="36576" anchor="ctr">
+                    <a:solidFill>
+                      <a:srgbClr val="F2F4F9"/>
+                    </a:solidFill>
+                  </a:tcPr>
+                </a:tc>
+                <a:tc>
+                  <a:txBody>
+                    <a:bodyPr wrap="square"/>
+                    <a:lstStyle/>
+                    <a:p>
+                      <a:pPr algn="l"/>
+                      <a:r>
+                        <a:rPr sz="1400" b="0">
+                          <a:solidFill>
+                            <a:srgbClr val="1E293B"/>
+                          </a:solidFill>
+                          <a:latin typeface="Calibri"/>
+                        </a:rPr>
+                        <a:t>0.499</a:t>
+                      </a:r>
+                    </a:p>
+                  </a:txBody>
+                  <a:tcPr marL="91440" marR="91440" marT="36576" marB="36576" anchor="ctr">
+                    <a:solidFill>
+                      <a:srgbClr val="F2F4F9"/>
+                    </a:solidFill>
+                  </a:tcPr>
+                </a:tc>
+                <a:tc>
+                  <a:txBody>
+                    <a:bodyPr wrap="square"/>
+                    <a:lstStyle/>
+                    <a:p>
+                      <a:pPr algn="l"/>
+                      <a:r>
+                        <a:rPr sz="1400" b="0">
+                          <a:solidFill>
+                            <a:srgbClr val="1E293B"/>
+                          </a:solidFill>
+                          <a:latin typeface="Calibri"/>
+                        </a:rPr>
+                        <a:t>0.413</a:t>
+                      </a:r>
+                    </a:p>
+                  </a:txBody>
+                  <a:tcPr marL="91440" marR="91440" marT="36576" marB="36576" anchor="ctr">
+                    <a:solidFill>
+                      <a:srgbClr val="F2F4F9"/>
+                    </a:solidFill>
+                  </a:tcPr>
+                </a:tc>
+              </a:tr>
+              <a:tr h="502920">
+                <a:tc>
+                  <a:txBody>
+                    <a:bodyPr wrap="square"/>
+                    <a:lstStyle/>
+                    <a:p>
+                      <a:pPr algn="l"/>
+                      <a:r>
+                        <a:rPr sz="1400" b="0">
+                          <a:solidFill>
+                            <a:srgbClr val="1E293B"/>
+                          </a:solidFill>
+                          <a:latin typeface="Calibri"/>
+                        </a:rPr>
+                        <a:t>Issues: GPT-4o every post</a:t>
+                      </a:r>
+                    </a:p>
+                  </a:txBody>
+                  <a:tcPr marL="91440" marR="91440" marT="36576" marB="36576" anchor="ctr">
+                    <a:solidFill>
+                      <a:srgbClr val="FFFFFF"/>
+                    </a:solidFill>
+                  </a:tcPr>
+                </a:tc>
+                <a:tc>
+                  <a:txBody>
+                    <a:bodyPr wrap="square"/>
+                    <a:lstStyle/>
+                    <a:p>
+                      <a:pPr algn="l"/>
+                      <a:r>
+                        <a:rPr sz="1400" b="0">
+                          <a:solidFill>
+                            <a:srgbClr val="1E293B"/>
+                          </a:solidFill>
+                          <a:latin typeface="Calibri"/>
+                        </a:rPr>
+                        <a:t>0.600</a:t>
+                      </a:r>
+                    </a:p>
+                  </a:txBody>
+                  <a:tcPr marL="91440" marR="91440" marT="36576" marB="36576" anchor="ctr">
+                    <a:solidFill>
+                      <a:srgbClr val="FFFFFF"/>
+                    </a:solidFill>
+                  </a:tcPr>
+                </a:tc>
+                <a:tc>
+                  <a:txBody>
+                    <a:bodyPr wrap="square"/>
+                    <a:lstStyle/>
+                    <a:p>
+                      <a:pPr algn="l"/>
+                      <a:r>
+                        <a:rPr sz="1400" b="0">
+                          <a:solidFill>
+                            <a:srgbClr val="1E293B"/>
+                          </a:solidFill>
+                          <a:latin typeface="Calibri"/>
+                        </a:rPr>
+                        <a:t>0.596</a:t>
+                      </a:r>
+                    </a:p>
+                  </a:txBody>
+                  <a:tcPr marL="91440" marR="91440" marT="36576" marB="36576" anchor="ctr">
+                    <a:solidFill>
+                      <a:srgbClr val="FFFFFF"/>
+                    </a:solidFill>
+                  </a:tcPr>
+                </a:tc>
+                <a:tc>
+                  <a:txBody>
+                    <a:bodyPr wrap="square"/>
+                    <a:lstStyle/>
+                    <a:p>
+                      <a:pPr algn="l"/>
+                      <a:r>
+                        <a:rPr sz="1400" b="0">
+                          <a:solidFill>
+                            <a:srgbClr val="1E293B"/>
+                          </a:solidFill>
+                          <a:latin typeface="Calibri"/>
+                        </a:rPr>
+                        <a:t>—</a:t>
+                      </a:r>
+                    </a:p>
+                  </a:txBody>
+                  <a:tcPr marL="91440" marR="91440" marT="36576" marB="36576" anchor="ctr">
+                    <a:solidFill>
+                      <a:srgbClr val="FFFFFF"/>
+                    </a:solidFill>
+                  </a:tcPr>
+                </a:tc>
+              </a:tr>
+            </a:tbl>
+          </a:graphicData>
+        </a:graphic>
+      </p:graphicFrame>
+      <p:sp>
+        <p:nvSpPr>
+          <p:cNvPr id="4" name="TextBox 3"/>
+          <p:cNvSpPr txBox="1"/>
+          <p:nvPr/>
+        </p:nvSpPr>
+        <p:spPr>
+          <a:xfrm>
+            <a:off x="548640" y="4800600"/>
+            <a:ext cx="6949440" cy="1188720"/>
+          </a:xfrm>
+          <a:prstGeom prst="rect">
+            <a:avLst/>
+          </a:prstGeom>
+          <a:noFill/>
+        </p:spPr>
+        <p:txBody>
+          <a:bodyPr wrap="square" lIns="0" rIns="0" tIns="0" bIns="0" anchor="t">
+            <a:spAutoFit/>
+          </a:bodyPr>
+          <a:lstStyle/>
+          <a:p>
+            <a:pPr algn="l" marL="256032" indent="-256032">
+              <a:spcAft>
+                <a:spcPts val="400"/>
+              </a:spcAft>
+              <a:buClr>
+                <a:srgbClr val="D29B08"/>
+              </a:buClr>
+              <a:buFont typeface="Arial"/>
+              <a:buChar char="•"/>
+            </a:pPr>
+            <a:r>
+              <a:rPr sz="1300" b="0" i="0">
+                <a:solidFill>
+                  <a:srgbClr val="1E293B"/>
+                </a:solidFill>
+                <a:latin typeface="Calibri"/>
+              </a:rPr>
+              <a:t>Sentiment: mini wins on all three sets; GPT-4o ties it at ~17× the cost; a rerun matched 292/295.</a:t>
+            </a:r>
+          </a:p>
+          <a:p>
+            <a:pPr algn="l" marL="256032" indent="-256032">
+              <a:spcAft>
+                <a:spcPts val="400"/>
+              </a:spcAft>
+              <a:buClr>
+                <a:srgbClr val="D29B08"/>
+              </a:buClr>
+              <a:buFont typeface="Arial"/>
+              <a:buChar char="•"/>
+            </a:pPr>
+            <a:r>
+              <a:rPr sz="1300" b="0" i="0">
+                <a:solidFill>
+                  <a:srgbClr val="1E293B"/>
+                </a:solidFill>
+                <a:latin typeface="Calibri"/>
+              </a:rPr>
+              <a:t>Issues: the hybrid's 0.680 is optimistic; held out, its lead over rules disappears.</a:t>
+            </a:r>
+          </a:p>
+          <a:p>
+            <a:pPr algn="l" marL="256032" indent="-256032">
+              <a:spcAft>
+                <a:spcPts val="400"/>
+              </a:spcAft>
+              <a:buClr>
+                <a:srgbClr val="D29B08"/>
+              </a:buClr>
+              <a:buFont typeface="Arial"/>
+              <a:buChar char="•"/>
+            </a:pPr>
+            <a:r>
+              <a:rPr sz="1300" b="0" i="0">
+                <a:solidFill>
+                  <a:srgbClr val="1E293B"/>
+                </a:solidFill>
+                <a:latin typeface="Calibri"/>
+              </a:rPr>
+              <a:t>Humans agree at κ 0.39 (typical) and 0.59 (hard), so no model can score near 1.0.</a:t>
+            </a:r>
+          </a:p>
+        </p:txBody>
+      </p:sp>
+      <p:sp>
+        <p:nvSpPr>
+          <p:cNvPr id="5" name="Rounded Rectangle 4"/>
+          <p:cNvSpPr/>
+          <p:nvPr/>
+        </p:nvSpPr>
+        <p:spPr>
+          <a:xfrm>
+            <a:off x="7863840" y="1691640"/>
+            <a:ext cx="3776472" cy="4343400"/>
+          </a:xfrm>
+          <a:prstGeom prst="roundRect">
+            <a:avLst>
+              <a:gd name="adj" fmla="val 6000"/>
+            </a:avLst>
+          </a:prstGeom>
+          <a:solidFill>
+            <a:srgbClr val="FBF3DF"/>
+          </a:solidFill>
+          <a:ln>
+            <a:noFill/>
+          </a:ln>
+          <a:effectLst/>
+        </p:spPr>
+        <p:style>
+          <a:lnRef idx="1">
+            <a:schemeClr val="accent1"/>
+          </a:lnRef>
+          <a:fillRef idx="3">
+            <a:schemeClr val="accent1"/>
+          </a:fillRef>
+          <a:effectRef idx="2">
+            <a:schemeClr val="accent1"/>
+          </a:effectRef>
+          <a:fontRef idx="minor">
+            <a:schemeClr val="lt1"/>
+          </a:fontRef>
+        </p:style>
+        <p:txBody>
+          <a:bodyPr rtlCol="0" anchor="ctr"/>
+          <a:lstStyle/>
+          <a:p>
+            <a:pPr algn="ctr"/>
+          </a:p>
+        </p:txBody>
+      </p:sp>
+      <p:sp>
+        <p:nvSpPr>
+          <p:cNvPr id="6" name="TextBox 5"/>
+          <p:cNvSpPr txBox="1"/>
+          <p:nvPr/>
+        </p:nvSpPr>
+        <p:spPr>
+          <a:xfrm>
+            <a:off x="8092440" y="1874520"/>
+            <a:ext cx="3319272" cy="365760"/>
+          </a:xfrm>
+          <a:prstGeom prst="rect">
+            <a:avLst/>
+          </a:prstGeom>
+          <a:noFill/>
+        </p:spPr>
+        <p:txBody>
+          <a:bodyPr wrap="square" lIns="0" rIns="0" tIns="0" bIns="0" anchor="t">
+            <a:spAutoFit/>
+          </a:bodyPr>
+          <a:lstStyle/>
+          <a:p>
+            <a:pPr algn="l">
+              <a:spcAft>
+                <a:spcPts val="600"/>
+              </a:spcAft>
+            </a:pPr>
+            <a:r>
+              <a:rPr sz="1700" b="1" i="0">
+                <a:solidFill>
+                  <a:srgbClr val="1C2E6E"/>
+                </a:solidFill>
+                <a:latin typeface="Calibri"/>
+              </a:rPr>
+              <a:t>What it decided</a:t>
+            </a:r>
+          </a:p>
+        </p:txBody>
+      </p:sp>
+      <p:sp>
+        <p:nvSpPr>
+          <p:cNvPr id="7" name="TextBox 6"/>
+          <p:cNvSpPr txBox="1"/>
+          <p:nvPr/>
+        </p:nvSpPr>
+        <p:spPr>
+          <a:xfrm>
+            <a:off x="8092440" y="2258568"/>
+            <a:ext cx="3319272" cy="3611880"/>
+          </a:xfrm>
+          <a:prstGeom prst="rect">
+            <a:avLst/>
+          </a:prstGeom>
+          <a:noFill/>
+        </p:spPr>
+        <p:txBody>
+          <a:bodyPr wrap="square" lIns="0" rIns="0" tIns="0" bIns="0" anchor="t">
+            <a:spAutoFit/>
+          </a:bodyPr>
+          <a:lstStyle/>
+          <a:p>
+            <a:pPr algn="l">
+              <a:spcAft>
+                <a:spcPts val="600"/>
+              </a:spcAft>
+            </a:pPr>
+            <a:r>
+              <a:rPr sz="1500" b="0" i="0">
+                <a:solidFill>
+                  <a:srgbClr val="1E293B"/>
+                </a:solidFill>
+                <a:latin typeface="Calibri"/>
+              </a:rPr>
+              <a:t>GPT-4o-mini labels sentiment for all 9,162 posts.</a:t>
+            </a:r>
+          </a:p>
+          <a:p>
+            <a:pPr algn="l">
+              <a:spcAft>
+                <a:spcPts val="600"/>
+              </a:spcAft>
+            </a:pPr>
+            <a:r>
+              <a:rPr sz="1500" b="0" i="0">
+                <a:solidFill>
+                  <a:srgbClr val="1E293B"/>
+                </a:solidFill>
+                <a:latin typeface="Calibri"/>
+              </a:rPr>
+              <a:t>The hybrid labels issues: rules first, GPT-4o on the leftovers.</a:t>
+            </a:r>
+          </a:p>
+          <a:p>
+            <a:pPr algn="l">
+              <a:spcAft>
+                <a:spcPts val="600"/>
+              </a:spcAft>
+            </a:pPr>
+            <a:r>
+              <a:rPr sz="1500" b="0" i="0">
+                <a:solidFill>
+                  <a:srgbClr val="1E293B"/>
+                </a:solidFill>
+                <a:latin typeface="Calibri"/>
+              </a:rPr>
+              <a:t>Not happy (44%) is a floor: mini misses some complaints.</a:t>
+            </a:r>
+          </a:p>
+          <a:p>
+            <a:pPr algn="l">
+              <a:spcAft>
+                <a:spcPts val="600"/>
+              </a:spcAft>
+            </a:pPr>
+            <a:r>
+              <a:rPr sz="1500" b="0" i="0">
+                <a:solidFill>
+                  <a:srgbClr val="1E293B"/>
+                </a:solidFill>
+                <a:latin typeface="Calibri"/>
+              </a:rPr>
+              <a:t>Issue shares are a ranking, not exact percentages.</a:t>
+            </a:r>
+          </a:p>
+        </p:txBody>
+      </p:sp>
+      <p:sp>
+        <p:nvSpPr>
+          <p:cNvPr id="8" name="TextBox 7"/>
+          <p:cNvSpPr txBox="1"/>
+          <p:nvPr/>
+        </p:nvSpPr>
+        <p:spPr>
+          <a:xfrm>
+            <a:off x="11155680" y="6446520"/>
+            <a:ext cx="548640" cy="274320"/>
+          </a:xfrm>
+          <a:prstGeom prst="rect">
+            <a:avLst/>
+          </a:prstGeom>
+          <a:noFill/>
+        </p:spPr>
+        <p:txBody>
+          <a:bodyPr wrap="square" lIns="0" rIns="0" tIns="0" bIns="0" anchor="t">
+            <a:spAutoFit/>
+          </a:bodyPr>
+          <a:lstStyle/>
+          <a:p>
+            <a:pPr algn="r">
+              <a:spcAft>
+                <a:spcPts val="600"/>
+              </a:spcAft>
+            </a:pPr>
+            <a:r>
+              <a:rPr sz="1000" b="0" i="0">
+                <a:solidFill>
+                  <a:srgbClr val="5B6475"/>
+                </a:solidFill>
+                <a:latin typeface="Calibri"/>
+              </a:rPr>
+              <a:t>41</a:t>
+            </a:r>
+          </a:p>
+        </p:txBody>
+      </p:sp>
+    </p:spTree>
+  </p:cSld>
+  <p:clrMapOvr>
+    <a:masterClrMapping/>
+  </p:clrMapOvr>
+</p:sld>
+</file>
+
 <file path=ppt/slides/slide5.xml><?xml version="1.0" encoding="utf-8"?>
 <p:sld xmlns:a="http://schemas.openxmlformats.org/drawingml/2006/main" xmlns:r="http://schemas.openxmlformats.org/officeDocument/2006/relationships" xmlns:p="http://schemas.openxmlformats.org/presentationml/2006/main">
   <p:cSld>
@@ -35476,7 +37424,7 @@
             </a:avLst>
           </a:prstGeom>
           <a:solidFill>
-            <a:srgbClr val="F2F4F9"/>
+            <a:srgbClr val="FBF3DF"/>
           </a:solidFill>
           <a:ln>
             <a:noFill/>
@@ -35888,7 +37836,7 @@
             </a:avLst>
           </a:prstGeom>
           <a:solidFill>
-            <a:srgbClr val="F2F4F9"/>
+            <a:srgbClr val="FBF3DF"/>
           </a:solidFill>
           <a:ln>
             <a:noFill/>
